--- a/docs/edge-language-coach.pptx
+++ b/docs/edge-language-coach.pptx
@@ -4,6 +4,9 @@
   <p:sldMasterIdLst>
     <p:sldMasterId id="2147483648" r:id="rId1"/>
   </p:sldMasterIdLst>
+  <p:notesMasterIdLst>
+    <p:notesMasterId r:id="rId15"/>
+  </p:notesMasterIdLst>
   <p:sldIdLst>
     <p:sldId id="256" r:id="rId2"/>
     <p:sldId id="257" r:id="rId3"/>
@@ -19,10 +22,7 @@
     <p:sldId id="267" r:id="rId13"/>
     <p:sldId id="268" r:id="rId14"/>
   </p:sldIdLst>
-  <p:notesMasterIdLst>
-    <p:notesMasterId r:id="rId15"/>
-  </p:notesMasterIdLst>
-  <p:sldSz cx="9144000" cy="5143500"/>
+  <p:sldSz cx="9144000" cy="5143500" type="screen16x9"/>
   <p:notesSz cx="5143500" cy="9144000"/>
   <p:defaultTextStyle>
     <a:lvl1pPr marL="0" algn="l" defTabSz="914400" rtl="0" eaLnBrk="1" latinLnBrk="0" hangingPunct="1">
@@ -116,13 +116,20 @@
       </a:defRPr>
     </a:lvl9pPr>
   </p:defaultTextStyle>
+  <p:extLst>
+    <p:ext uri="{EFAFB233-063F-42B5-8137-9DF3F51BA10A}">
+      <p15:sldGuideLst xmlns:p15="http://schemas.microsoft.com/office/powerpoint/2012/main"/>
+    </p:ext>
+  </p:extLst>
 </p:presentation>
 </file>
 
 <file path=ppt/charts/chart1.xml><?xml version="1.0" encoding="utf-8"?>
-<c:chartSpace xmlns:c="http://schemas.openxmlformats.org/drawingml/2006/chart" xmlns:a="http://schemas.openxmlformats.org/drawingml/2006/main" xmlns:r="http://schemas.openxmlformats.org/officeDocument/2006/relationships">
+<c:chartSpace xmlns:c="http://schemas.openxmlformats.org/drawingml/2006/chart" xmlns:a="http://schemas.openxmlformats.org/drawingml/2006/main" xmlns:r="http://schemas.openxmlformats.org/officeDocument/2006/relationships" xmlns:c16r2="http://schemas.microsoft.com/office/drawing/2015/06/chart">
   <c:date1904 val="0"/>
+  <c:lang val="en-US"/>
   <c:roundedCorners val="1"/>
+  <c:style val="2"/>
   <c:chart>
     <c:title>
       <c:tx>
@@ -139,7 +146,7 @@
               </a:defRPr>
             </a:pPr>
             <a:r>
-              <a:rPr sz="1100" b="0" i="0" u="none" strike="noStrike">
+              <a:rPr lang="en-US" sz="1100" b="0" i="0" u="none" strike="noStrike">
                 <a:solidFill>
                   <a:srgbClr val="1A1A1A"/>
                 </a:solidFill>
@@ -150,7 +157,6 @@
           </a:p>
         </c:rich>
       </c:tx>
-      <c:layout/>
       <c:overlay val="0"/>
     </c:title>
     <c:autoTitleDeleted val="0"/>
@@ -181,84 +187,58 @@
             <a:effectLst/>
           </c:spPr>
           <c:invertIfNegative val="0"/>
-          <c:dLbls>
-            <c:numFmt formatCode="#,##0" sourceLinked="0"/>
-            <c:txPr>
-              <a:bodyPr/>
-              <a:lstStyle/>
-              <a:p>
-                <a:pPr>
-                  <a:defRPr b="0" i="0" strike="noStrike" sz="1200" u="none">
-                    <a:solidFill>
-                      <a:srgbClr val="000000"/>
-                    </a:solidFill>
-                    <a:latin typeface="Arial"/>
-                  </a:defRPr>
-                </a:pPr>
-              </a:p>
-            </c:txPr>
-            <c:showLegendKey val="0"/>
-            <c:showVal val="0"/>
-            <c:showCatName val="0"/>
-            <c:showSerName val="0"/>
-            <c:showPercent val="0"/>
-            <c:showBubbleSize val="0"/>
-            <c:showLeaderLines val="0"/>
-          </c:dLbls>
           <c:cat>
-            <c:multiLvlStrRef>
+            <c:strRef>
               <c:f>Sheet1!$A$2:$A$16</c:f>
-              <c:multiLvlStrCache>
+              <c:strCache>
                 <c:ptCount val="15"/>
-                <c:lvl>
-                  <c:pt idx="0">
-                    <c:v>1</c:v>
-                  </c:pt>
-                  <c:pt idx="1">
-                    <c:v>2</c:v>
-                  </c:pt>
-                  <c:pt idx="2">
-                    <c:v>3</c:v>
-                  </c:pt>
-                  <c:pt idx="3">
-                    <c:v>4</c:v>
-                  </c:pt>
-                  <c:pt idx="4">
-                    <c:v>5</c:v>
-                  </c:pt>
-                  <c:pt idx="5">
-                    <c:v>6</c:v>
-                  </c:pt>
-                  <c:pt idx="6">
-                    <c:v>7</c:v>
-                  </c:pt>
-                  <c:pt idx="7">
-                    <c:v>8</c:v>
-                  </c:pt>
-                  <c:pt idx="8">
-                    <c:v>9</c:v>
-                  </c:pt>
-                  <c:pt idx="9">
-                    <c:v>10</c:v>
-                  </c:pt>
-                  <c:pt idx="10">
-                    <c:v>20</c:v>
-                  </c:pt>
-                  <c:pt idx="11">
-                    <c:v>30</c:v>
-                  </c:pt>
-                  <c:pt idx="12">
-                    <c:v>40</c:v>
-                  </c:pt>
-                  <c:pt idx="13">
-                    <c:v>50</c:v>
-                  </c:pt>
-                  <c:pt idx="14">
-                    <c:v>60</c:v>
-                  </c:pt>
-                </c:lvl>
-              </c:multiLvlStrCache>
-            </c:multiLvlStrRef>
+                <c:pt idx="0">
+                  <c:v>1</c:v>
+                </c:pt>
+                <c:pt idx="1">
+                  <c:v>2</c:v>
+                </c:pt>
+                <c:pt idx="2">
+                  <c:v>3</c:v>
+                </c:pt>
+                <c:pt idx="3">
+                  <c:v>4</c:v>
+                </c:pt>
+                <c:pt idx="4">
+                  <c:v>5</c:v>
+                </c:pt>
+                <c:pt idx="5">
+                  <c:v>6</c:v>
+                </c:pt>
+                <c:pt idx="6">
+                  <c:v>7</c:v>
+                </c:pt>
+                <c:pt idx="7">
+                  <c:v>8</c:v>
+                </c:pt>
+                <c:pt idx="8">
+                  <c:v>9</c:v>
+                </c:pt>
+                <c:pt idx="9">
+                  <c:v>10</c:v>
+                </c:pt>
+                <c:pt idx="10">
+                  <c:v>20</c:v>
+                </c:pt>
+                <c:pt idx="11">
+                  <c:v>30</c:v>
+                </c:pt>
+                <c:pt idx="12">
+                  <c:v>40</c:v>
+                </c:pt>
+                <c:pt idx="13">
+                  <c:v>50</c:v>
+                </c:pt>
+                <c:pt idx="14">
+                  <c:v>60</c:v>
+                </c:pt>
+              </c:strCache>
+            </c:strRef>
           </c:cat>
           <c:val>
             <c:numRef>
@@ -314,36 +294,23 @@
               </c:numCache>
             </c:numRef>
           </c:val>
+          <c:extLst>
+            <c:ext xmlns:c16="http://schemas.microsoft.com/office/drawing/2014/chart" uri="{C3380CC4-5D6E-409C-BE32-E72D297353CC}">
+              <c16:uniqueId val="{00000000-ADC2-45C7-81F1-9E7C962DBFB3}"/>
+            </c:ext>
+          </c:extLst>
         </c:ser>
         <c:dLbls>
-          <c:numFmt formatCode="#,##0" sourceLinked="0"/>
-          <c:txPr>
-            <a:bodyPr/>
-            <a:lstStyle/>
-            <a:p>
-              <a:pPr>
-                <a:defRPr b="0" i="0" strike="noStrike" sz="1200" u="none">
-                  <a:solidFill>
-                    <a:srgbClr val="000000"/>
-                  </a:solidFill>
-                  <a:latin typeface="Arial"/>
-                </a:defRPr>
-              </a:pPr>
-            </a:p>
-          </c:txPr>
           <c:showLegendKey val="0"/>
           <c:showVal val="0"/>
           <c:showCatName val="0"/>
           <c:showSerName val="0"/>
           <c:showPercent val="0"/>
           <c:showBubbleSize val="0"/>
-          <c:showLeaderLines val="0"/>
         </c:dLbls>
         <c:gapWidth val="150"/>
-        <c:overlap val="0"/>
         <c:axId val="2094734554"/>
         <c:axId val="2094734552"/>
-        <c:axId val="2094734556"/>
       </c:barChart>
       <c:catAx>
         <c:axId val="2094734554"/>
@@ -384,6 +351,7 @@
         <c:crosses val="autoZero"/>
         <c:auto val="1"/>
         <c:lblAlgn val="ctr"/>
+        <c:lblOffset val="100"/>
         <c:noMultiLvlLbl val="1"/>
       </c:catAx>
       <c:valAx>
@@ -446,6 +414,7 @@
     </c:plotArea>
     <c:plotVisOnly val="1"/>
     <c:dispBlanksAs val="span"/>
+    <c:showDLblsOverMax val="1"/>
   </c:chart>
   <c:spPr>
     <a:solidFill>
@@ -463,9 +432,11 @@
 </file>
 
 <file path=ppt/charts/chart2.xml><?xml version="1.0" encoding="utf-8"?>
-<c:chartSpace xmlns:c="http://schemas.openxmlformats.org/drawingml/2006/chart" xmlns:a="http://schemas.openxmlformats.org/drawingml/2006/main" xmlns:r="http://schemas.openxmlformats.org/officeDocument/2006/relationships">
+<c:chartSpace xmlns:c="http://schemas.openxmlformats.org/drawingml/2006/chart" xmlns:a="http://schemas.openxmlformats.org/drawingml/2006/main" xmlns:r="http://schemas.openxmlformats.org/officeDocument/2006/relationships" xmlns:c16r2="http://schemas.microsoft.com/office/drawing/2015/06/chart">
   <c:date1904 val="0"/>
+  <c:lang val="en-US"/>
   <c:roundedCorners val="1"/>
+  <c:style val="2"/>
   <c:chart>
     <c:title>
       <c:tx>
@@ -482,7 +453,7 @@
               </a:defRPr>
             </a:pPr>
             <a:r>
-              <a:rPr sz="1100" b="0" i="0" u="none" strike="noStrike">
+              <a:rPr lang="en-US" sz="1100" b="0" i="0" u="none" strike="noStrike">
                 <a:solidFill>
                   <a:srgbClr val="1A1A1A"/>
                 </a:solidFill>
@@ -493,7 +464,6 @@
           </a:p>
         </c:rich>
       </c:tx>
-      <c:layout/>
       <c:overlay val="0"/>
     </c:title>
     <c:autoTitleDeleted val="0"/>
@@ -524,40 +494,15 @@
             <a:effectLst/>
           </c:spPr>
           <c:invertIfNegative val="0"/>
-          <c:dLbls>
-            <c:numFmt formatCode="0.00\%" sourceLinked="0"/>
-            <c:txPr>
-              <a:bodyPr/>
-              <a:lstStyle/>
-              <a:p>
-                <a:pPr>
-                  <a:defRPr b="1" i="0" strike="noStrike" sz="1300" u="none">
-                    <a:solidFill>
-                      <a:srgbClr val="1A1A1A"/>
-                    </a:solidFill>
-                    <a:latin typeface="Cambria"/>
-                  </a:defRPr>
-                </a:pPr>
-              </a:p>
-            </c:txPr>
-            <c:showLegendKey val="0"/>
-            <c:showVal val="1"/>
-            <c:showCatName val="0"/>
-            <c:showSerName val="0"/>
-            <c:showPercent val="0"/>
-            <c:showBubbleSize val="0"/>
-            <c:showLeaderLines val="0"/>
-          </c:dLbls>
           <c:dPt>
             <c:idx val="0"/>
             <c:invertIfNegative val="0"/>
             <c:bubble3D val="0"/>
-            <c:spPr>
-              <a:solidFill>
-                <a:srgbClr val="8B1F2F"/>
-              </a:solidFill>
-              <a:effectLst/>
-            </c:spPr>
+            <c:extLst>
+              <c:ext xmlns:c16="http://schemas.microsoft.com/office/drawing/2014/chart" uri="{C3380CC4-5D6E-409C-BE32-E72D297353CC}">
+                <c16:uniqueId val="{00000001-87EF-42F6-A3C7-FEA4BCE3A73D}"/>
+              </c:ext>
+            </c:extLst>
           </c:dPt>
           <c:dPt>
             <c:idx val="1"/>
@@ -569,22 +514,62 @@
               </a:solidFill>
               <a:effectLst/>
             </c:spPr>
+            <c:extLst>
+              <c:ext xmlns:c16="http://schemas.microsoft.com/office/drawing/2014/chart" uri="{C3380CC4-5D6E-409C-BE32-E72D297353CC}">
+                <c16:uniqueId val="{00000003-87EF-42F6-A3C7-FEA4BCE3A73D}"/>
+              </c:ext>
+            </c:extLst>
           </c:dPt>
+          <c:dLbls>
+            <c:numFmt formatCode="0.00\%" sourceLinked="0"/>
+            <c:spPr>
+              <a:noFill/>
+              <a:ln>
+                <a:noFill/>
+              </a:ln>
+              <a:effectLst/>
+            </c:spPr>
+            <c:txPr>
+              <a:bodyPr/>
+              <a:lstStyle/>
+              <a:p>
+                <a:pPr>
+                  <a:defRPr sz="1300" b="1" i="0" u="none" strike="noStrike">
+                    <a:solidFill>
+                      <a:srgbClr val="1A1A1A"/>
+                    </a:solidFill>
+                    <a:latin typeface="Cambria"/>
+                  </a:defRPr>
+                </a:pPr>
+                <a:endParaRPr lang="en-US"/>
+              </a:p>
+            </c:txPr>
+            <c:showLegendKey val="0"/>
+            <c:showVal val="1"/>
+            <c:showCatName val="0"/>
+            <c:showSerName val="0"/>
+            <c:showPercent val="0"/>
+            <c:showBubbleSize val="0"/>
+            <c:showLeaderLines val="0"/>
+            <c:extLst>
+              <c:ext xmlns:c15="http://schemas.microsoft.com/office/drawing/2012/chart" uri="{CE6537A1-D6FC-4f65-9D91-7224C49458BB}">
+                <c15:showLeaderLines val="0"/>
+              </c:ext>
+            </c:extLst>
+          </c:dLbls>
           <c:cat>
-            <c:multiLvlStrRef>
+            <c:strRef>
               <c:f>Sheet1!$A$2:$A$3</c:f>
-              <c:multiLvlStrCache>
+              <c:strCache>
                 <c:ptCount val="2"/>
-                <c:lvl>
-                  <c:pt idx="0">
-                    <c:v>1 replica</c:v>
-                  </c:pt>
-                  <c:pt idx="1">
-                    <c:v>3 replicas</c:v>
-                  </c:pt>
-                </c:lvl>
-              </c:multiLvlStrCache>
-            </c:multiLvlStrRef>
+                <c:pt idx="0">
+                  <c:v>1 replica</c:v>
+                </c:pt>
+                <c:pt idx="1">
+                  <c:v>3 replicas</c:v>
+                </c:pt>
+              </c:strCache>
+            </c:strRef>
           </c:cat>
           <c:val>
             <c:numRef>
@@ -601,36 +586,23 @@
               </c:numCache>
             </c:numRef>
           </c:val>
+          <c:extLst>
+            <c:ext xmlns:c16="http://schemas.microsoft.com/office/drawing/2014/chart" uri="{C3380CC4-5D6E-409C-BE32-E72D297353CC}">
+              <c16:uniqueId val="{00000004-87EF-42F6-A3C7-FEA4BCE3A73D}"/>
+            </c:ext>
+          </c:extLst>
         </c:ser>
         <c:dLbls>
-          <c:numFmt formatCode="0.00\%" sourceLinked="0"/>
-          <c:txPr>
-            <a:bodyPr/>
-            <a:lstStyle/>
-            <a:p>
-              <a:pPr>
-                <a:defRPr b="1" i="0" strike="noStrike" sz="1300" u="none">
-                  <a:solidFill>
-                    <a:srgbClr val="1A1A1A"/>
-                  </a:solidFill>
-                  <a:latin typeface="Cambria"/>
-                </a:defRPr>
-              </a:pPr>
-            </a:p>
-          </c:txPr>
           <c:showLegendKey val="0"/>
           <c:showVal val="1"/>
           <c:showCatName val="0"/>
           <c:showSerName val="0"/>
           <c:showPercent val="0"/>
           <c:showBubbleSize val="0"/>
-          <c:showLeaderLines val="0"/>
         </c:dLbls>
         <c:gapWidth val="150"/>
-        <c:overlap val="0"/>
         <c:axId val="2094734554"/>
         <c:axId val="2094734552"/>
-        <c:axId val="2094734556"/>
       </c:barChart>
       <c:catAx>
         <c:axId val="2094734554"/>
@@ -671,6 +643,7 @@
         <c:crosses val="autoZero"/>
         <c:auto val="1"/>
         <c:lblAlgn val="ctr"/>
+        <c:lblOffset val="100"/>
         <c:noMultiLvlLbl val="1"/>
       </c:catAx>
       <c:valAx>
@@ -733,6 +706,7 @@
     </c:plotArea>
     <c:plotVisOnly val="1"/>
     <c:dispBlanksAs val="span"/>
+    <c:showDLblsOverMax val="1"/>
   </c:chart>
   <c:spPr>
     <a:solidFill>
@@ -771,234 +745,10 @@
           <a:chExt cx="0" cy="0"/>
         </a:xfrm>
       </p:grpSpPr>
-      <p:sp>
-        <p:nvSpPr>
-          <p:cNvPr id="2" name="Header Placeholder 1"/>
-          <p:cNvSpPr>
-            <a:spLocks noGrp="1"/>
-          </p:cNvSpPr>
-          <p:nvPr>
-            <p:ph type="hdr" sz="quarter"/>
-          </p:nvPr>
-        </p:nvSpPr>
-        <p:spPr>
-          <a:xfrm>
-            <a:off x="0" y="0"/>
-            <a:ext cx="2971800" cy="458788"/>
-          </a:xfrm>
-          <a:prstGeom prst="rect">
-            <a:avLst/>
-          </a:prstGeom>
-        </p:spPr>
-        <p:txBody>
-          <a:bodyPr vert="horz" lIns="91440" tIns="45720" rIns="91440" bIns="45720" rtlCol="0"/>
-          <a:lstStyle>
-            <a:lvl1pPr algn="l">
-              <a:defRPr sz="1200"/>
-            </a:lvl1pPr>
-          </a:lstStyle>
-          <a:p>
-            <a:endParaRPr lang="en-US"/>
-          </a:p>
-        </p:txBody>
-      </p:sp>
-      <p:sp>
-        <p:nvSpPr>
-          <p:cNvPr id="3" name="Date Placeholder 2"/>
-          <p:cNvSpPr>
-            <a:spLocks noGrp="1"/>
-          </p:cNvSpPr>
-          <p:nvPr>
-            <p:ph type="dt" idx="1"/>
-          </p:nvPr>
-        </p:nvSpPr>
-        <p:spPr>
-          <a:xfrm>
-            <a:off x="3884613" y="0"/>
-            <a:ext cx="2971800" cy="458788"/>
-          </a:xfrm>
-          <a:prstGeom prst="rect">
-            <a:avLst/>
-          </a:prstGeom>
-        </p:spPr>
-        <p:txBody>
-          <a:bodyPr vert="horz" lIns="91440" tIns="45720" rIns="91440" bIns="45720" rtlCol="0"/>
-          <a:lstStyle>
-            <a:lvl1pPr algn="r">
-              <a:defRPr sz="1200"/>
-            </a:lvl1pPr>
-          </a:lstStyle>
-          <a:p>
-            <a:fld id="{5282F153-3F37-0F45-9E97-73ACFA13230C}" type="datetimeFigureOut">
-              <a:rPr lang="en-US"/>
-              <a:t>7/23/19</a:t>
-            </a:fld>
-            <a:endParaRPr lang="en-US"/>
-          </a:p>
-        </p:txBody>
-      </p:sp>
-      <p:sp>
-        <p:nvSpPr>
-          <p:cNvPr id="4" name="Slide Image Placeholder 3"/>
-          <p:cNvSpPr>
-            <a:spLocks noGrp="1" noRot="1" noChangeAspect="1"/>
-          </p:cNvSpPr>
-          <p:nvPr>
-            <p:ph type="sldImg" idx="2"/>
-          </p:nvPr>
-        </p:nvSpPr>
-        <p:spPr>
-          <a:xfrm>
-            <a:off x="685800" y="1143000"/>
-            <a:ext cx="5486400" cy="3086100"/>
-          </a:xfrm>
-          <a:prstGeom prst="rect">
-            <a:avLst/>
-          </a:prstGeom>
-          <a:noFill/>
-          <a:ln w="12700">
-            <a:solidFill>
-              <a:prstClr val="black"/>
-            </a:solidFill>
-          </a:ln>
-        </p:spPr>
-        <p:txBody>
-          <a:bodyPr vert="horz" lIns="91440" tIns="45720" rIns="91440" bIns="45720" rtlCol="0" anchor="ctr"/>
-          <a:lstStyle/>
-          <a:p>
-            <a:endParaRPr lang="en-US"/>
-          </a:p>
-        </p:txBody>
-      </p:sp>
-      <p:sp>
-        <p:nvSpPr>
-          <p:cNvPr id="5" name="Notes Placeholder 4"/>
-          <p:cNvSpPr>
-            <a:spLocks noGrp="1"/>
-          </p:cNvSpPr>
-          <p:nvPr>
-            <p:ph type="body" sz="quarter" idx="3"/>
-          </p:nvPr>
-        </p:nvSpPr>
-        <p:spPr>
-          <a:xfrm>
-            <a:off x="685800" y="4400550"/>
-            <a:ext cx="5486400" cy="3600450"/>
-          </a:xfrm>
-          <a:prstGeom prst="rect">
-            <a:avLst/>
-          </a:prstGeom>
-        </p:spPr>
-        <p:txBody>
-          <a:bodyPr vert="horz" lIns="91440" tIns="45720" rIns="91440" bIns="45720" rtlCol="0"/>
-          <a:lstStyle/>
-          <a:p>
-            <a:pPr lvl="0"/>
-            <a:r>
-              <a:rPr lang="en-US"/>
-              <a:t>Click to edit Master text styles</a:t>
-            </a:r>
-          </a:p>
-          <a:p>
-            <a:pPr lvl="1"/>
-            <a:r>
-              <a:rPr lang="en-US"/>
-              <a:t>Second level</a:t>
-            </a:r>
-          </a:p>
-          <a:p>
-            <a:pPr lvl="2"/>
-            <a:r>
-              <a:rPr lang="en-US"/>
-              <a:t>Third level</a:t>
-            </a:r>
-          </a:p>
-          <a:p>
-            <a:pPr lvl="3"/>
-            <a:r>
-              <a:rPr lang="en-US"/>
-              <a:t>Fourth level</a:t>
-            </a:r>
-          </a:p>
-          <a:p>
-            <a:pPr lvl="4"/>
-            <a:r>
-              <a:rPr lang="en-US"/>
-              <a:t>Fifth level</a:t>
-            </a:r>
-          </a:p>
-        </p:txBody>
-      </p:sp>
-      <p:sp>
-        <p:nvSpPr>
-          <p:cNvPr id="6" name="Footer Placeholder 5"/>
-          <p:cNvSpPr>
-            <a:spLocks noGrp="1"/>
-          </p:cNvSpPr>
-          <p:nvPr>
-            <p:ph type="ftr" sz="quarter" idx="4"/>
-          </p:nvPr>
-        </p:nvSpPr>
-        <p:spPr>
-          <a:xfrm>
-            <a:off x="0" y="8685213"/>
-            <a:ext cx="2971800" cy="458787"/>
-          </a:xfrm>
-          <a:prstGeom prst="rect">
-            <a:avLst/>
-          </a:prstGeom>
-        </p:spPr>
-        <p:txBody>
-          <a:bodyPr vert="horz" lIns="91440" tIns="45720" rIns="91440" bIns="45720" rtlCol="0" anchor="b"/>
-          <a:lstStyle>
-            <a:lvl1pPr algn="l">
-              <a:defRPr sz="1200"/>
-            </a:lvl1pPr>
-          </a:lstStyle>
-          <a:p>
-            <a:endParaRPr lang="en-US"/>
-          </a:p>
-        </p:txBody>
-      </p:sp>
-      <p:sp>
-        <p:nvSpPr>
-          <p:cNvPr id="7" name="Slide Number Placeholder 6"/>
-          <p:cNvSpPr>
-            <a:spLocks noGrp="1"/>
-          </p:cNvSpPr>
-          <p:nvPr>
-            <p:ph type="sldNum" sz="quarter" idx="5"/>
-          </p:nvPr>
-        </p:nvSpPr>
-        <p:spPr>
-          <a:xfrm>
-            <a:off x="3884613" y="8685213"/>
-            <a:ext cx="2971800" cy="458787"/>
-          </a:xfrm>
-          <a:prstGeom prst="rect">
-            <a:avLst/>
-          </a:prstGeom>
-        </p:spPr>
-        <p:txBody>
-          <a:bodyPr vert="horz" lIns="91440" tIns="45720" rIns="91440" bIns="45720" rtlCol="0" anchor="b"/>
-          <a:lstStyle>
-            <a:lvl1pPr algn="r">
-              <a:defRPr sz="1200"/>
-            </a:lvl1pPr>
-          </a:lstStyle>
-          <a:p>
-            <a:fld id="{CE5E9CC1-C706-0F49-92D6-E571CC5EEA8F}" type="slidenum">
-              <a:rPr lang="en-US"/>
-              <a:t>‹#›</a:t>
-            </a:fld>
-            <a:endParaRPr lang="en-US"/>
-          </a:p>
-        </p:txBody>
-      </p:sp>
     </p:spTree>
     <p:extLst>
       <p:ext uri="{BB962C8B-B14F-4D97-AF65-F5344CB8AC3E}">
-        <p14:creationId xmlns:p14="http://schemas.microsoft.com/office/powerpoint/2010/main" val="1024086991"/>
+        <p14:creationId xmlns:p14="http://schemas.microsoft.com/office/powerpoint/2010/main" val="202949025"/>
       </p:ext>
     </p:extLst>
   </p:cSld>
@@ -1142,10 +892,6 @@
           <a:bodyPr/>
           <a:lstStyle/>
           <a:p>
-            <a:r>
-              <a:rPr lang="en-US" dirty="0"/>
-              <a:t/>
-            </a:r>
             <a:endParaRPr lang="en-US" dirty="0"/>
           </a:p>
         </p:txBody>
@@ -1230,10 +976,6 @@
           <a:bodyPr/>
           <a:lstStyle/>
           <a:p>
-            <a:r>
-              <a:rPr lang="en-US" dirty="0"/>
-              <a:t/>
-            </a:r>
             <a:endParaRPr lang="en-US" dirty="0"/>
           </a:p>
         </p:txBody>
@@ -1318,10 +1060,6 @@
           <a:bodyPr/>
           <a:lstStyle/>
           <a:p>
-            <a:r>
-              <a:rPr lang="en-US" dirty="0"/>
-              <a:t/>
-            </a:r>
             <a:endParaRPr lang="en-US" dirty="0"/>
           </a:p>
         </p:txBody>
@@ -1406,10 +1144,6 @@
           <a:bodyPr/>
           <a:lstStyle/>
           <a:p>
-            <a:r>
-              <a:rPr lang="en-US" dirty="0"/>
-              <a:t/>
-            </a:r>
             <a:endParaRPr lang="en-US" dirty="0"/>
           </a:p>
         </p:txBody>
@@ -1494,10 +1228,6 @@
           <a:bodyPr/>
           <a:lstStyle/>
           <a:p>
-            <a:r>
-              <a:rPr lang="en-US" dirty="0"/>
-              <a:t/>
-            </a:r>
             <a:endParaRPr lang="en-US" dirty="0"/>
           </a:p>
         </p:txBody>
@@ -1582,10 +1312,6 @@
           <a:bodyPr/>
           <a:lstStyle/>
           <a:p>
-            <a:r>
-              <a:rPr lang="en-US" dirty="0"/>
-              <a:t/>
-            </a:r>
             <a:endParaRPr lang="en-US" dirty="0"/>
           </a:p>
         </p:txBody>
@@ -1670,10 +1396,6 @@
           <a:bodyPr/>
           <a:lstStyle/>
           <a:p>
-            <a:r>
-              <a:rPr lang="en-US" dirty="0"/>
-              <a:t/>
-            </a:r>
             <a:endParaRPr lang="en-US" dirty="0"/>
           </a:p>
         </p:txBody>
@@ -1758,10 +1480,6 @@
           <a:bodyPr/>
           <a:lstStyle/>
           <a:p>
-            <a:r>
-              <a:rPr lang="en-US" dirty="0"/>
-              <a:t/>
-            </a:r>
             <a:endParaRPr lang="en-US" dirty="0"/>
           </a:p>
         </p:txBody>
@@ -1846,10 +1564,6 @@
           <a:bodyPr/>
           <a:lstStyle/>
           <a:p>
-            <a:r>
-              <a:rPr lang="en-US" dirty="0"/>
-              <a:t/>
-            </a:r>
             <a:endParaRPr lang="en-US" dirty="0"/>
           </a:p>
         </p:txBody>
@@ -1934,10 +1648,6 @@
           <a:bodyPr/>
           <a:lstStyle/>
           <a:p>
-            <a:r>
-              <a:rPr lang="en-US" dirty="0"/>
-              <a:t/>
-            </a:r>
             <a:endParaRPr lang="en-US" dirty="0"/>
           </a:p>
         </p:txBody>
@@ -2022,10 +1732,6 @@
           <a:bodyPr/>
           <a:lstStyle/>
           <a:p>
-            <a:r>
-              <a:rPr lang="en-US" dirty="0"/>
-              <a:t/>
-            </a:r>
             <a:endParaRPr lang="en-US" dirty="0"/>
           </a:p>
         </p:txBody>
@@ -2110,10 +1816,6 @@
           <a:bodyPr/>
           <a:lstStyle/>
           <a:p>
-            <a:r>
-              <a:rPr lang="en-US" dirty="0"/>
-              <a:t/>
-            </a:r>
             <a:endParaRPr lang="en-US" dirty="0"/>
           </a:p>
         </p:txBody>
@@ -2198,10 +1900,6 @@
           <a:bodyPr/>
           <a:lstStyle/>
           <a:p>
-            <a:r>
-              <a:rPr lang="en-US" dirty="0"/>
-              <a:t/>
-            </a:r>
             <a:endParaRPr lang="en-US" dirty="0"/>
           </a:p>
         </p:txBody>
@@ -2275,6 +1973,11 @@
 <file path=ppt/slideMasters/slideMaster1.xml><?xml version="1.0" encoding="utf-8"?>
 <p:sldMaster xmlns:a="http://schemas.openxmlformats.org/drawingml/2006/main" xmlns:r="http://schemas.openxmlformats.org/officeDocument/2006/relationships" xmlns:p="http://schemas.openxmlformats.org/presentationml/2006/main">
   <p:cSld>
+    <p:bg>
+      <p:bgRef idx="1001">
+        <a:schemeClr val="bg1"/>
+      </p:bgRef>
+    </p:bg>
     <p:spTree>
       <p:nvGrpSpPr>
         <p:cNvPr id="1" name=""/>
@@ -2557,6 +2260,7 @@
         <a:solidFill>
           <a:srgbClr val="FFFFFF"/>
         </a:solidFill>
+        <a:effectLst/>
       </p:bgPr>
     </p:bg>
     <p:spTree>
@@ -2595,6 +2299,13 @@
             <a:prstDash val="solid"/>
           </a:ln>
         </p:spPr>
+        <p:txBody>
+          <a:bodyPr/>
+          <a:lstStyle/>
+          <a:p>
+            <a:endParaRPr lang="en-US"/>
+          </a:p>
+        </p:txBody>
       </p:sp>
       <p:sp>
         <p:nvSpPr>
@@ -2617,11 +2328,11 @@
           <a:bodyPr wrap="square" lIns="0" tIns="0" rIns="0" bIns="0" rtlCol="0" anchor="ctr"/>
           <a:lstStyle/>
           <a:p>
-            <a:pPr indent="0" marL="0">
-              <a:buNone/>
-            </a:pPr>
-            <a:r>
-              <a:rPr lang="en-US" sz="1100" b="1" spc="600" kern="0" dirty="0">
+            <a:pPr marL="0" indent="0">
+              <a:buNone/>
+            </a:pPr>
+            <a:r>
+              <a:rPr lang="en-US" sz="1100" b="1" kern="0" spc="600" dirty="0">
                 <a:solidFill>
                   <a:srgbClr val="8B1F2F"/>
                 </a:solidFill>
@@ -2629,7 +2340,7 @@
                 <a:ea typeface="Cambria" pitchFamily="34" charset="-122"/>
                 <a:cs typeface="Cambria" pitchFamily="34" charset="-120"/>
               </a:rPr>
-              <a:t>ARCHITECTURAL REPORT  ·  DISTRIBUTED SYSTEMS</a:t>
+              <a:t>SCALABLE &amp; RELIABLE SYSTEMS</a:t>
             </a:r>
             <a:endParaRPr lang="en-US" sz="1100" dirty="0"/>
           </a:p>
@@ -2656,7 +2367,7 @@
           <a:bodyPr wrap="square" lIns="0" tIns="0" rIns="0" bIns="0" rtlCol="0" anchor="ctr"/>
           <a:lstStyle/>
           <a:p>
-            <a:pPr indent="0" marL="0">
+            <a:pPr marL="0" indent="0">
               <a:buNone/>
             </a:pPr>
             <a:r>
@@ -2695,7 +2406,7 @@
           <a:bodyPr wrap="square" lIns="0" tIns="0" rIns="0" bIns="0" rtlCol="0" anchor="ctr"/>
           <a:lstStyle/>
           <a:p>
-            <a:pPr indent="0" marL="0">
+            <a:pPr marL="0" indent="0">
               <a:buNone/>
             </a:pPr>
             <a:r>
@@ -2735,6 +2446,13 @@
             <a:prstDash val="solid"/>
           </a:ln>
         </p:spPr>
+        <p:txBody>
+          <a:bodyPr/>
+          <a:lstStyle/>
+          <a:p>
+            <a:endParaRPr lang="en-US"/>
+          </a:p>
+        </p:txBody>
       </p:sp>
       <p:sp>
         <p:nvSpPr>
@@ -2760,6 +2478,13 @@
             <a:prstDash val="solid"/>
           </a:ln>
         </p:spPr>
+        <p:txBody>
+          <a:bodyPr/>
+          <a:lstStyle/>
+          <a:p>
+            <a:endParaRPr lang="en-US"/>
+          </a:p>
+        </p:txBody>
       </p:sp>
       <p:sp>
         <p:nvSpPr>
@@ -2782,7 +2507,7 @@
           <a:bodyPr wrap="square" lIns="0" tIns="0" rIns="0" bIns="0" rtlCol="0" anchor="ctr"/>
           <a:lstStyle/>
           <a:p>
-            <a:pPr indent="0" marL="0">
+            <a:pPr marL="0" indent="0">
               <a:buNone/>
             </a:pPr>
             <a:r>
@@ -2821,7 +2546,7 @@
           <a:bodyPr wrap="square" lIns="0" tIns="0" rIns="0" bIns="0" rtlCol="0" anchor="ctr"/>
           <a:lstStyle/>
           <a:p>
-            <a:pPr indent="0" marL="0">
+            <a:pPr marL="0" indent="0">
               <a:buNone/>
             </a:pPr>
             <a:r>
@@ -2863,6 +2588,13 @@
             <a:prstDash val="solid"/>
           </a:ln>
         </p:spPr>
+        <p:txBody>
+          <a:bodyPr/>
+          <a:lstStyle/>
+          <a:p>
+            <a:endParaRPr lang="en-US"/>
+          </a:p>
+        </p:txBody>
       </p:sp>
       <p:sp>
         <p:nvSpPr>
@@ -2885,7 +2617,7 @@
           <a:bodyPr wrap="square" lIns="0" tIns="0" rIns="0" bIns="0" rtlCol="0" anchor="ctr"/>
           <a:lstStyle/>
           <a:p>
-            <a:pPr indent="0" marL="0">
+            <a:pPr marL="0" indent="0">
               <a:buNone/>
             </a:pPr>
             <a:r>
@@ -2924,7 +2656,7 @@
           <a:bodyPr wrap="square" lIns="0" tIns="0" rIns="0" bIns="0" rtlCol="0" anchor="ctr"/>
           <a:lstStyle/>
           <a:p>
-            <a:pPr indent="0" marL="0">
+            <a:pPr marL="0" indent="0">
               <a:buNone/>
             </a:pPr>
             <a:r>
@@ -2966,6 +2698,13 @@
             <a:prstDash val="solid"/>
           </a:ln>
         </p:spPr>
+        <p:txBody>
+          <a:bodyPr/>
+          <a:lstStyle/>
+          <a:p>
+            <a:endParaRPr lang="en-US"/>
+          </a:p>
+        </p:txBody>
       </p:sp>
       <p:sp>
         <p:nvSpPr>
@@ -2988,7 +2727,7 @@
           <a:bodyPr wrap="square" lIns="0" tIns="0" rIns="0" bIns="0" rtlCol="0" anchor="ctr"/>
           <a:lstStyle/>
           <a:p>
-            <a:pPr indent="0" marL="0">
+            <a:pPr marL="0" indent="0">
               <a:buNone/>
             </a:pPr>
             <a:r>
@@ -3027,7 +2766,7 @@
           <a:bodyPr wrap="square" lIns="0" tIns="0" rIns="0" bIns="0" rtlCol="0" anchor="ctr"/>
           <a:lstStyle/>
           <a:p>
-            <a:pPr indent="0" marL="0">
+            <a:pPr marL="0" indent="0">
               <a:buNone/>
             </a:pPr>
             <a:r>
@@ -3066,20 +2805,9 @@
           <a:bodyPr wrap="square" lIns="0" tIns="0" rIns="0" bIns="0" rtlCol="0" anchor="ctr"/>
           <a:lstStyle/>
           <a:p>
-            <a:pPr indent="0" marL="0">
-              <a:buNone/>
-            </a:pPr>
-            <a:r>
-              <a:rPr lang="en-US" sz="1100" b="1" dirty="0">
-                <a:solidFill>
-                  <a:srgbClr val="1A1A1A"/>
-                </a:solidFill>
-                <a:latin typeface="Cambria" pitchFamily="34" charset="0"/>
-                <a:ea typeface="Cambria" pitchFamily="34" charset="-122"/>
-                <a:cs typeface="Cambria" pitchFamily="34" charset="-120"/>
-              </a:rPr>
-              <a:t>CJ Dev</a:t>
-            </a:r>
+            <a:pPr marL="0" indent="0">
+              <a:buNone/>
+            </a:pPr>
             <a:endParaRPr lang="en-US" sz="1100" dirty="0"/>
           </a:p>
         </p:txBody>
@@ -3105,7 +2833,7 @@
           <a:bodyPr wrap="square" lIns="0" tIns="0" rIns="0" bIns="0" rtlCol="0" anchor="ctr"/>
           <a:lstStyle/>
           <a:p>
-            <a:pPr algn="r" indent="0" marL="0">
+            <a:pPr marL="0" indent="0" algn="r">
               <a:buNone/>
             </a:pPr>
             <a:r>
@@ -3145,6 +2873,13 @@
             <a:prstDash val="solid"/>
           </a:ln>
         </p:spPr>
+        <p:txBody>
+          <a:bodyPr/>
+          <a:lstStyle/>
+          <a:p>
+            <a:endParaRPr lang="en-US"/>
+          </a:p>
+        </p:txBody>
       </p:sp>
     </p:spTree>
   </p:cSld>
@@ -3162,6 +2897,7 @@
         <a:solidFill>
           <a:srgbClr val="FFFFFF"/>
         </a:solidFill>
+        <a:effectLst/>
       </p:bgPr>
     </p:bg>
     <p:spTree>
@@ -3199,11 +2935,11 @@
           <a:bodyPr wrap="square" lIns="0" tIns="0" rIns="0" bIns="0" rtlCol="0" anchor="ctr"/>
           <a:lstStyle/>
           <a:p>
-            <a:pPr indent="0" marL="0">
-              <a:buNone/>
-            </a:pPr>
-            <a:r>
-              <a:rPr lang="en-US" sz="1100" b="1" spc="400" kern="0" dirty="0">
+            <a:pPr marL="0" indent="0">
+              <a:buNone/>
+            </a:pPr>
+            <a:r>
+              <a:rPr lang="en-US" sz="1100" b="1" kern="0" spc="400" dirty="0">
                 <a:solidFill>
                   <a:srgbClr val="8B1F2F"/>
                 </a:solidFill>
@@ -3238,7 +2974,7 @@
           <a:bodyPr wrap="square" lIns="0" tIns="0" rIns="0" bIns="0" rtlCol="0" anchor="ctr"/>
           <a:lstStyle/>
           <a:p>
-            <a:pPr indent="0" marL="0">
+            <a:pPr marL="0" indent="0">
               <a:buNone/>
             </a:pPr>
             <a:r>
@@ -3277,7 +3013,7 @@
           <a:bodyPr wrap="square" lIns="0" tIns="0" rIns="0" bIns="0" rtlCol="0" anchor="ctr"/>
           <a:lstStyle/>
           <a:p>
-            <a:pPr indent="0" marL="0">
+            <a:pPr marL="0" indent="0">
               <a:buNone/>
             </a:pPr>
             <a:r>
@@ -3319,6 +3055,13 @@
             <a:prstDash val="solid"/>
           </a:ln>
         </p:spPr>
+        <p:txBody>
+          <a:bodyPr/>
+          <a:lstStyle/>
+          <a:p>
+            <a:endParaRPr lang="en-US"/>
+          </a:p>
+        </p:txBody>
       </p:sp>
       <p:sp>
         <p:nvSpPr>
@@ -3341,7 +3084,7 @@
           <a:bodyPr wrap="square" lIns="0" tIns="0" rIns="0" bIns="0" rtlCol="0" anchor="ctr"/>
           <a:lstStyle/>
           <a:p>
-            <a:pPr indent="0" marL="0">
+            <a:pPr marL="0" indent="0">
               <a:buNone/>
             </a:pPr>
             <a:r>
@@ -3381,6 +3124,13 @@
             <a:prstDash val="solid"/>
           </a:ln>
         </p:spPr>
+        <p:txBody>
+          <a:bodyPr/>
+          <a:lstStyle/>
+          <a:p>
+            <a:endParaRPr lang="en-US"/>
+          </a:p>
+        </p:txBody>
       </p:sp>
       <p:sp>
         <p:nvSpPr>
@@ -3403,7 +3153,7 @@
           <a:bodyPr wrap="square" lIns="0" tIns="0" rIns="0" bIns="0" rtlCol="0" anchor="ctr"/>
           <a:lstStyle/>
           <a:p>
-            <a:pPr indent="0" marL="0">
+            <a:pPr marL="0" indent="0">
               <a:buNone/>
             </a:pPr>
             <a:r>
@@ -3442,7 +3192,7 @@
           <a:bodyPr wrap="square" lIns="0" tIns="0" rIns="0" bIns="0" rtlCol="0" anchor="ctr"/>
           <a:lstStyle/>
           <a:p>
-            <a:pPr indent="0" marL="0">
+            <a:pPr marL="0" indent="0">
               <a:buNone/>
             </a:pPr>
             <a:r>
@@ -3481,7 +3231,7 @@
           <a:bodyPr wrap="square" lIns="0" tIns="0" rIns="0" bIns="0" rtlCol="0" anchor="ctr"/>
           <a:lstStyle/>
           <a:p>
-            <a:pPr indent="0" marL="0">
+            <a:pPr marL="0" indent="0">
               <a:buNone/>
             </a:pPr>
             <a:r>
@@ -3523,6 +3273,13 @@
             <a:prstDash val="solid"/>
           </a:ln>
         </p:spPr>
+        <p:txBody>
+          <a:bodyPr/>
+          <a:lstStyle/>
+          <a:p>
+            <a:endParaRPr lang="en-US"/>
+          </a:p>
+        </p:txBody>
       </p:sp>
       <p:sp>
         <p:nvSpPr>
@@ -3545,7 +3302,7 @@
           <a:bodyPr wrap="square" lIns="0" tIns="0" rIns="0" bIns="0" rtlCol="0" anchor="ctr"/>
           <a:lstStyle/>
           <a:p>
-            <a:pPr indent="0" marL="0">
+            <a:pPr marL="0" indent="0">
               <a:buNone/>
             </a:pPr>
             <a:r>
@@ -3585,6 +3342,13 @@
             <a:prstDash val="solid"/>
           </a:ln>
         </p:spPr>
+        <p:txBody>
+          <a:bodyPr/>
+          <a:lstStyle/>
+          <a:p>
+            <a:endParaRPr lang="en-US"/>
+          </a:p>
+        </p:txBody>
       </p:sp>
       <p:sp>
         <p:nvSpPr>
@@ -3607,7 +3371,7 @@
           <a:bodyPr wrap="square" lIns="0" tIns="0" rIns="0" bIns="0" rtlCol="0" anchor="ctr"/>
           <a:lstStyle/>
           <a:p>
-            <a:pPr indent="0" marL="0">
+            <a:pPr marL="0" indent="0">
               <a:buNone/>
             </a:pPr>
             <a:r>
@@ -3646,7 +3410,7 @@
           <a:bodyPr wrap="square" lIns="0" tIns="0" rIns="0" bIns="0" rtlCol="0" anchor="ctr"/>
           <a:lstStyle/>
           <a:p>
-            <a:pPr indent="0" marL="0">
+            <a:pPr marL="0" indent="0">
               <a:buNone/>
             </a:pPr>
             <a:r>
@@ -3685,7 +3449,7 @@
           <a:bodyPr wrap="square" lIns="0" tIns="0" rIns="0" bIns="0" rtlCol="0" anchor="ctr"/>
           <a:lstStyle/>
           <a:p>
-            <a:pPr indent="0" marL="0">
+            <a:pPr marL="0" indent="0">
               <a:buNone/>
             </a:pPr>
             <a:r>
@@ -3722,6 +3486,13 @@
           </a:solidFill>
           <a:ln/>
         </p:spPr>
+        <p:txBody>
+          <a:bodyPr/>
+          <a:lstStyle/>
+          <a:p>
+            <a:endParaRPr lang="en-US"/>
+          </a:p>
+        </p:txBody>
       </p:sp>
       <p:sp>
         <p:nvSpPr>
@@ -3744,7 +3515,7 @@
           <a:bodyPr wrap="square" lIns="0" tIns="0" rIns="0" bIns="0" rtlCol="0" anchor="ctr"/>
           <a:lstStyle/>
           <a:p>
-            <a:pPr indent="0" marL="0">
+            <a:pPr marL="0" indent="0">
               <a:buNone/>
             </a:pPr>
             <a:r>
@@ -3783,7 +3554,7 @@
           <a:bodyPr wrap="square" lIns="0" tIns="0" rIns="0" bIns="0" rtlCol="0" anchor="ctr"/>
           <a:lstStyle/>
           <a:p>
-            <a:pPr indent="0" marL="0">
+            <a:pPr marL="0" indent="0">
               <a:buNone/>
             </a:pPr>
             <a:r>
@@ -3822,7 +3593,7 @@
           <a:bodyPr wrap="square" lIns="0" tIns="0" rIns="0" bIns="0" rtlCol="0" anchor="ctr"/>
           <a:lstStyle/>
           <a:p>
-            <a:pPr indent="0" marL="0">
+            <a:pPr marL="0" indent="0">
               <a:buNone/>
             </a:pPr>
             <a:r>
@@ -3861,7 +3632,7 @@
           <a:bodyPr wrap="square" lIns="0" tIns="0" rIns="0" bIns="0" rtlCol="0" anchor="ctr"/>
           <a:lstStyle/>
           <a:p>
-            <a:pPr indent="0" marL="0">
+            <a:pPr marL="0" indent="0">
               <a:buNone/>
             </a:pPr>
             <a:r>
@@ -3900,7 +3671,7 @@
           <a:bodyPr wrap="square" lIns="0" tIns="0" rIns="0" bIns="0" rtlCol="0" anchor="ctr"/>
           <a:lstStyle/>
           <a:p>
-            <a:pPr indent="0" marL="0">
+            <a:pPr marL="0" indent="0">
               <a:buNone/>
             </a:pPr>
             <a:r>
@@ -3939,7 +3710,7 @@
           <a:bodyPr wrap="square" lIns="0" tIns="0" rIns="0" bIns="0" rtlCol="0" anchor="ctr"/>
           <a:lstStyle/>
           <a:p>
-            <a:pPr indent="0" marL="0">
+            <a:pPr marL="0" indent="0">
               <a:buNone/>
             </a:pPr>
             <a:r>
@@ -3978,7 +3749,7 @@
           <a:bodyPr wrap="square" lIns="0" tIns="0" rIns="0" bIns="0" rtlCol="0" anchor="ctr"/>
           <a:lstStyle/>
           <a:p>
-            <a:pPr indent="0" marL="0">
+            <a:pPr marL="0" indent="0">
               <a:buNone/>
             </a:pPr>
             <a:r>
@@ -4017,7 +3788,7 @@
           <a:bodyPr wrap="square" lIns="0" tIns="0" rIns="0" bIns="0" rtlCol="0" anchor="ctr"/>
           <a:lstStyle/>
           <a:p>
-            <a:pPr indent="0" marL="0">
+            <a:pPr marL="0" indent="0">
               <a:buNone/>
             </a:pPr>
             <a:r>
@@ -4057,6 +3828,13 @@
             <a:prstDash val="solid"/>
           </a:ln>
         </p:spPr>
+        <p:txBody>
+          <a:bodyPr/>
+          <a:lstStyle/>
+          <a:p>
+            <a:endParaRPr lang="en-US"/>
+          </a:p>
+        </p:txBody>
       </p:sp>
       <p:sp>
         <p:nvSpPr>
@@ -4079,11 +3857,11 @@
           <a:bodyPr wrap="square" lIns="0" tIns="0" rIns="0" bIns="0" rtlCol="0" anchor="ctr"/>
           <a:lstStyle/>
           <a:p>
-            <a:pPr algn="l" indent="0" marL="0">
-              <a:buNone/>
-            </a:pPr>
-            <a:r>
-              <a:rPr lang="en-US" sz="900" i="1" spc="200" kern="0" dirty="0">
+            <a:pPr marL="0" indent="0" algn="l">
+              <a:buNone/>
+            </a:pPr>
+            <a:r>
+              <a:rPr lang="en-US" sz="900" i="1" kern="0" spc="200" dirty="0">
                 <a:solidFill>
                   <a:srgbClr val="6B6B6B"/>
                 </a:solidFill>
@@ -4118,7 +3896,7 @@
           <a:bodyPr wrap="square" lIns="0" tIns="0" rIns="0" bIns="0" rtlCol="0" anchor="ctr"/>
           <a:lstStyle/>
           <a:p>
-            <a:pPr algn="r" indent="0" marL="0">
+            <a:pPr marL="0" indent="0" algn="r">
               <a:buNone/>
             </a:pPr>
             <a:r>
@@ -4152,6 +3930,7 @@
         <a:solidFill>
           <a:srgbClr val="FFFFFF"/>
         </a:solidFill>
+        <a:effectLst/>
       </p:bgPr>
     </p:bg>
     <p:spTree>
@@ -4189,11 +3968,11 @@
           <a:bodyPr wrap="square" lIns="0" tIns="0" rIns="0" bIns="0" rtlCol="0" anchor="ctr"/>
           <a:lstStyle/>
           <a:p>
-            <a:pPr indent="0" marL="0">
-              <a:buNone/>
-            </a:pPr>
-            <a:r>
-              <a:rPr lang="en-US" sz="1100" b="1" spc="400" kern="0" dirty="0">
+            <a:pPr marL="0" indent="0">
+              <a:buNone/>
+            </a:pPr>
+            <a:r>
+              <a:rPr lang="en-US" sz="1100" b="1" kern="0" spc="400" dirty="0">
                 <a:solidFill>
                   <a:srgbClr val="8B1F2F"/>
                 </a:solidFill>
@@ -4201,7 +3980,7 @@
                 <a:ea typeface="Cambria" pitchFamily="34" charset="-122"/>
                 <a:cs typeface="Cambria" pitchFamily="34" charset="-120"/>
               </a:rPr>
-              <a:t>§ IX  ·  DESIGN DECISIONS</a:t>
+              <a:t>IX  ·  DESIGN DECISIONS</a:t>
             </a:r>
             <a:endParaRPr lang="en-US" sz="1100" dirty="0"/>
           </a:p>
@@ -4228,7 +4007,7 @@
           <a:bodyPr wrap="square" lIns="0" tIns="0" rIns="0" bIns="0" rtlCol="0" anchor="ctr"/>
           <a:lstStyle/>
           <a:p>
-            <a:pPr indent="0" marL="0">
+            <a:pPr marL="0" indent="0">
               <a:buNone/>
             </a:pPr>
             <a:r>
@@ -4267,7 +4046,7 @@
           <a:bodyPr wrap="square" lIns="0" tIns="0" rIns="0" bIns="0" rtlCol="0" anchor="ctr"/>
           <a:lstStyle/>
           <a:p>
-            <a:pPr indent="0" marL="0">
+            <a:pPr marL="0" indent="0">
               <a:buNone/>
             </a:pPr>
             <a:r>
@@ -4309,6 +4088,13 @@
             <a:prstDash val="solid"/>
           </a:ln>
         </p:spPr>
+        <p:txBody>
+          <a:bodyPr/>
+          <a:lstStyle/>
+          <a:p>
+            <a:endParaRPr lang="en-US"/>
+          </a:p>
+        </p:txBody>
       </p:sp>
       <p:sp>
         <p:nvSpPr>
@@ -4329,6 +4115,13 @@
           </a:solidFill>
           <a:ln/>
         </p:spPr>
+        <p:txBody>
+          <a:bodyPr/>
+          <a:lstStyle/>
+          <a:p>
+            <a:endParaRPr lang="en-US"/>
+          </a:p>
+        </p:txBody>
       </p:sp>
       <p:sp>
         <p:nvSpPr>
@@ -4351,7 +4144,7 @@
           <a:bodyPr wrap="square" lIns="0" tIns="0" rIns="0" bIns="0" rtlCol="0" anchor="ctr"/>
           <a:lstStyle/>
           <a:p>
-            <a:pPr algn="ctr" indent="0" marL="0">
+            <a:pPr marL="0" indent="0" algn="ctr">
               <a:buNone/>
             </a:pPr>
             <a:r>
@@ -4390,7 +4183,7 @@
           <a:bodyPr wrap="square" lIns="0" tIns="0" rIns="0" bIns="0" rtlCol="0" anchor="ctr"/>
           <a:lstStyle/>
           <a:p>
-            <a:pPr algn="ctr" indent="0" marL="0">
+            <a:pPr marL="0" indent="0" algn="ctr">
               <a:buNone/>
             </a:pPr>
             <a:r>
@@ -4429,7 +4222,7 @@
           <a:bodyPr wrap="square" lIns="0" tIns="0" rIns="0" bIns="0" rtlCol="0" anchor="ctr"/>
           <a:lstStyle/>
           <a:p>
-            <a:pPr indent="0" marL="0">
+            <a:pPr marL="0" indent="0">
               <a:buNone/>
             </a:pPr>
             <a:r>
@@ -4443,9 +4236,6 @@
               </a:rPr>
               <a:t>Node.js workers (BullMQ)</a:t>
             </a:r>
-            <a:pPr indent="0" marL="0">
-              <a:buNone/>
-            </a:pPr>
             <a:r>
               <a:rPr lang="en-US" sz="1100" i="1" dirty="0">
                 <a:solidFill>
@@ -4483,6 +4273,13 @@
             <a:prstDash val="solid"/>
           </a:ln>
         </p:spPr>
+        <p:txBody>
+          <a:bodyPr/>
+          <a:lstStyle/>
+          <a:p>
+            <a:endParaRPr lang="en-US"/>
+          </a:p>
+        </p:txBody>
       </p:sp>
       <p:sp>
         <p:nvSpPr>
@@ -4505,7 +4302,7 @@
           <a:bodyPr wrap="square" lIns="0" tIns="0" rIns="0" bIns="0" rtlCol="0" anchor="ctr"/>
           <a:lstStyle/>
           <a:p>
-            <a:pPr indent="0" marL="0">
+            <a:pPr marL="0" indent="0">
               <a:buNone/>
             </a:pPr>
             <a:r>
@@ -4519,9 +4316,6 @@
               </a:rPr>
               <a:t>+  </a:t>
             </a:r>
-            <a:pPr indent="0" marL="0">
-              <a:buNone/>
-            </a:pPr>
             <a:r>
               <a:rPr lang="en-US" sz="1050" dirty="0">
                 <a:solidFill>
@@ -4558,7 +4352,7 @@
           <a:bodyPr wrap="square" lIns="0" tIns="0" rIns="0" bIns="0" rtlCol="0" anchor="ctr"/>
           <a:lstStyle/>
           <a:p>
-            <a:pPr indent="0" marL="0">
+            <a:pPr marL="0" indent="0">
               <a:buNone/>
             </a:pPr>
             <a:r>
@@ -4572,9 +4366,6 @@
               </a:rPr>
               <a:t>−  </a:t>
             </a:r>
-            <a:pPr indent="0" marL="0">
-              <a:buNone/>
-            </a:pPr>
             <a:r>
               <a:rPr lang="en-US" sz="1050" dirty="0">
                 <a:solidFill>
@@ -4614,6 +4405,13 @@
             <a:prstDash val="solid"/>
           </a:ln>
         </p:spPr>
+        <p:txBody>
+          <a:bodyPr/>
+          <a:lstStyle/>
+          <a:p>
+            <a:endParaRPr lang="en-US"/>
+          </a:p>
+        </p:txBody>
       </p:sp>
       <p:sp>
         <p:nvSpPr>
@@ -4634,6 +4432,13 @@
           </a:solidFill>
           <a:ln/>
         </p:spPr>
+        <p:txBody>
+          <a:bodyPr/>
+          <a:lstStyle/>
+          <a:p>
+            <a:endParaRPr lang="en-US"/>
+          </a:p>
+        </p:txBody>
       </p:sp>
       <p:sp>
         <p:nvSpPr>
@@ -4656,7 +4461,7 @@
           <a:bodyPr wrap="square" lIns="0" tIns="0" rIns="0" bIns="0" rtlCol="0" anchor="ctr"/>
           <a:lstStyle/>
           <a:p>
-            <a:pPr algn="ctr" indent="0" marL="0">
+            <a:pPr marL="0" indent="0" algn="ctr">
               <a:buNone/>
             </a:pPr>
             <a:r>
@@ -4695,7 +4500,7 @@
           <a:bodyPr wrap="square" lIns="0" tIns="0" rIns="0" bIns="0" rtlCol="0" anchor="ctr"/>
           <a:lstStyle/>
           <a:p>
-            <a:pPr algn="ctr" indent="0" marL="0">
+            <a:pPr marL="0" indent="0" algn="ctr">
               <a:buNone/>
             </a:pPr>
             <a:r>
@@ -4734,7 +4539,7 @@
           <a:bodyPr wrap="square" lIns="0" tIns="0" rIns="0" bIns="0" rtlCol="0" anchor="ctr"/>
           <a:lstStyle/>
           <a:p>
-            <a:pPr indent="0" marL="0">
+            <a:pPr marL="0" indent="0">
               <a:buNone/>
             </a:pPr>
             <a:r>
@@ -4748,9 +4553,6 @@
               </a:rPr>
               <a:t>BullMQ + Redis</a:t>
             </a:r>
-            <a:pPr indent="0" marL="0">
-              <a:buNone/>
-            </a:pPr>
             <a:r>
               <a:rPr lang="en-US" sz="1100" i="1" dirty="0">
                 <a:solidFill>
@@ -4788,6 +4590,13 @@
             <a:prstDash val="solid"/>
           </a:ln>
         </p:spPr>
+        <p:txBody>
+          <a:bodyPr/>
+          <a:lstStyle/>
+          <a:p>
+            <a:endParaRPr lang="en-US"/>
+          </a:p>
+        </p:txBody>
       </p:sp>
       <p:sp>
         <p:nvSpPr>
@@ -4810,7 +4619,7 @@
           <a:bodyPr wrap="square" lIns="0" tIns="0" rIns="0" bIns="0" rtlCol="0" anchor="ctr"/>
           <a:lstStyle/>
           <a:p>
-            <a:pPr indent="0" marL="0">
+            <a:pPr marL="0" indent="0">
               <a:buNone/>
             </a:pPr>
             <a:r>
@@ -4824,9 +4633,6 @@
               </a:rPr>
               <a:t>+  </a:t>
             </a:r>
-            <a:pPr indent="0" marL="0">
-              <a:buNone/>
-            </a:pPr>
             <a:r>
               <a:rPr lang="en-US" sz="1050" dirty="0">
                 <a:solidFill>
@@ -4863,7 +4669,7 @@
           <a:bodyPr wrap="square" lIns="0" tIns="0" rIns="0" bIns="0" rtlCol="0" anchor="ctr"/>
           <a:lstStyle/>
           <a:p>
-            <a:pPr indent="0" marL="0">
+            <a:pPr marL="0" indent="0">
               <a:buNone/>
             </a:pPr>
             <a:r>
@@ -4877,9 +4683,6 @@
               </a:rPr>
               <a:t>−  </a:t>
             </a:r>
-            <a:pPr indent="0" marL="0">
-              <a:buNone/>
-            </a:pPr>
             <a:r>
               <a:rPr lang="en-US" sz="1050" dirty="0">
                 <a:solidFill>
@@ -4919,6 +4722,13 @@
             <a:prstDash val="solid"/>
           </a:ln>
         </p:spPr>
+        <p:txBody>
+          <a:bodyPr/>
+          <a:lstStyle/>
+          <a:p>
+            <a:endParaRPr lang="en-US"/>
+          </a:p>
+        </p:txBody>
       </p:sp>
       <p:sp>
         <p:nvSpPr>
@@ -4939,6 +4749,13 @@
           </a:solidFill>
           <a:ln/>
         </p:spPr>
+        <p:txBody>
+          <a:bodyPr/>
+          <a:lstStyle/>
+          <a:p>
+            <a:endParaRPr lang="en-US"/>
+          </a:p>
+        </p:txBody>
       </p:sp>
       <p:sp>
         <p:nvSpPr>
@@ -4961,7 +4778,7 @@
           <a:bodyPr wrap="square" lIns="0" tIns="0" rIns="0" bIns="0" rtlCol="0" anchor="ctr"/>
           <a:lstStyle/>
           <a:p>
-            <a:pPr algn="ctr" indent="0" marL="0">
+            <a:pPr marL="0" indent="0" algn="ctr">
               <a:buNone/>
             </a:pPr>
             <a:r>
@@ -5000,7 +4817,7 @@
           <a:bodyPr wrap="square" lIns="0" tIns="0" rIns="0" bIns="0" rtlCol="0" anchor="ctr"/>
           <a:lstStyle/>
           <a:p>
-            <a:pPr algn="ctr" indent="0" marL="0">
+            <a:pPr marL="0" indent="0" algn="ctr">
               <a:buNone/>
             </a:pPr>
             <a:r>
@@ -5039,7 +4856,7 @@
           <a:bodyPr wrap="square" lIns="0" tIns="0" rIns="0" bIns="0" rtlCol="0" anchor="ctr"/>
           <a:lstStyle/>
           <a:p>
-            <a:pPr indent="0" marL="0">
+            <a:pPr marL="0" indent="0">
               <a:buNone/>
             </a:pPr>
             <a:r>
@@ -5053,9 +4870,6 @@
               </a:rPr>
               <a:t>Supabase</a:t>
             </a:r>
-            <a:pPr indent="0" marL="0">
-              <a:buNone/>
-            </a:pPr>
             <a:r>
               <a:rPr lang="en-US" sz="1100" i="1" dirty="0">
                 <a:solidFill>
@@ -5093,6 +4907,13 @@
             <a:prstDash val="solid"/>
           </a:ln>
         </p:spPr>
+        <p:txBody>
+          <a:bodyPr/>
+          <a:lstStyle/>
+          <a:p>
+            <a:endParaRPr lang="en-US"/>
+          </a:p>
+        </p:txBody>
       </p:sp>
       <p:sp>
         <p:nvSpPr>
@@ -5115,7 +4936,7 @@
           <a:bodyPr wrap="square" lIns="0" tIns="0" rIns="0" bIns="0" rtlCol="0" anchor="ctr"/>
           <a:lstStyle/>
           <a:p>
-            <a:pPr indent="0" marL="0">
+            <a:pPr marL="0" indent="0">
               <a:buNone/>
             </a:pPr>
             <a:r>
@@ -5129,9 +4950,6 @@
               </a:rPr>
               <a:t>+  </a:t>
             </a:r>
-            <a:pPr indent="0" marL="0">
-              <a:buNone/>
-            </a:pPr>
             <a:r>
               <a:rPr lang="en-US" sz="1050" dirty="0">
                 <a:solidFill>
@@ -5168,7 +4986,7 @@
           <a:bodyPr wrap="square" lIns="0" tIns="0" rIns="0" bIns="0" rtlCol="0" anchor="ctr"/>
           <a:lstStyle/>
           <a:p>
-            <a:pPr indent="0" marL="0">
+            <a:pPr marL="0" indent="0">
               <a:buNone/>
             </a:pPr>
             <a:r>
@@ -5182,9 +5000,6 @@
               </a:rPr>
               <a:t>−  </a:t>
             </a:r>
-            <a:pPr indent="0" marL="0">
-              <a:buNone/>
-            </a:pPr>
             <a:r>
               <a:rPr lang="en-US" sz="1050" dirty="0">
                 <a:solidFill>
@@ -5224,6 +5039,13 @@
             <a:prstDash val="solid"/>
           </a:ln>
         </p:spPr>
+        <p:txBody>
+          <a:bodyPr/>
+          <a:lstStyle/>
+          <a:p>
+            <a:endParaRPr lang="en-US"/>
+          </a:p>
+        </p:txBody>
       </p:sp>
       <p:sp>
         <p:nvSpPr>
@@ -5244,6 +5066,13 @@
           </a:solidFill>
           <a:ln/>
         </p:spPr>
+        <p:txBody>
+          <a:bodyPr/>
+          <a:lstStyle/>
+          <a:p>
+            <a:endParaRPr lang="en-US"/>
+          </a:p>
+        </p:txBody>
       </p:sp>
       <p:sp>
         <p:nvSpPr>
@@ -5266,7 +5095,7 @@
           <a:bodyPr wrap="square" lIns="0" tIns="0" rIns="0" bIns="0" rtlCol="0" anchor="ctr"/>
           <a:lstStyle/>
           <a:p>
-            <a:pPr algn="ctr" indent="0" marL="0">
+            <a:pPr marL="0" indent="0" algn="ctr">
               <a:buNone/>
             </a:pPr>
             <a:r>
@@ -5305,7 +5134,7 @@
           <a:bodyPr wrap="square" lIns="0" tIns="0" rIns="0" bIns="0" rtlCol="0" anchor="ctr"/>
           <a:lstStyle/>
           <a:p>
-            <a:pPr algn="ctr" indent="0" marL="0">
+            <a:pPr marL="0" indent="0" algn="ctr">
               <a:buNone/>
             </a:pPr>
             <a:r>
@@ -5344,7 +5173,7 @@
           <a:bodyPr wrap="square" lIns="0" tIns="0" rIns="0" bIns="0" rtlCol="0" anchor="ctr"/>
           <a:lstStyle/>
           <a:p>
-            <a:pPr indent="0" marL="0">
+            <a:pPr marL="0" indent="0">
               <a:buNone/>
             </a:pPr>
             <a:r>
@@ -5358,9 +5187,6 @@
               </a:rPr>
               <a:t>prom-client + Prometheus</a:t>
             </a:r>
-            <a:pPr indent="0" marL="0">
-              <a:buNone/>
-            </a:pPr>
             <a:r>
               <a:rPr lang="en-US" sz="1100" i="1" dirty="0">
                 <a:solidFill>
@@ -5398,6 +5224,13 @@
             <a:prstDash val="solid"/>
           </a:ln>
         </p:spPr>
+        <p:txBody>
+          <a:bodyPr/>
+          <a:lstStyle/>
+          <a:p>
+            <a:endParaRPr lang="en-US"/>
+          </a:p>
+        </p:txBody>
       </p:sp>
       <p:sp>
         <p:nvSpPr>
@@ -5420,7 +5253,7 @@
           <a:bodyPr wrap="square" lIns="0" tIns="0" rIns="0" bIns="0" rtlCol="0" anchor="ctr"/>
           <a:lstStyle/>
           <a:p>
-            <a:pPr indent="0" marL="0">
+            <a:pPr marL="0" indent="0">
               <a:buNone/>
             </a:pPr>
             <a:r>
@@ -5434,9 +5267,6 @@
               </a:rPr>
               <a:t>+  </a:t>
             </a:r>
-            <a:pPr indent="0" marL="0">
-              <a:buNone/>
-            </a:pPr>
             <a:r>
               <a:rPr lang="en-US" sz="1050" dirty="0">
                 <a:solidFill>
@@ -5473,7 +5303,7 @@
           <a:bodyPr wrap="square" lIns="0" tIns="0" rIns="0" bIns="0" rtlCol="0" anchor="ctr"/>
           <a:lstStyle/>
           <a:p>
-            <a:pPr indent="0" marL="0">
+            <a:pPr marL="0" indent="0">
               <a:buNone/>
             </a:pPr>
             <a:r>
@@ -5487,9 +5317,6 @@
               </a:rPr>
               <a:t>−  </a:t>
             </a:r>
-            <a:pPr indent="0" marL="0">
-              <a:buNone/>
-            </a:pPr>
             <a:r>
               <a:rPr lang="en-US" sz="1050" dirty="0">
                 <a:solidFill>
@@ -5527,6 +5354,13 @@
             <a:prstDash val="solid"/>
           </a:ln>
         </p:spPr>
+        <p:txBody>
+          <a:bodyPr/>
+          <a:lstStyle/>
+          <a:p>
+            <a:endParaRPr lang="en-US"/>
+          </a:p>
+        </p:txBody>
       </p:sp>
       <p:sp>
         <p:nvSpPr>
@@ -5549,11 +5383,11 @@
           <a:bodyPr wrap="square" lIns="0" tIns="0" rIns="0" bIns="0" rtlCol="0" anchor="ctr"/>
           <a:lstStyle/>
           <a:p>
-            <a:pPr algn="l" indent="0" marL="0">
-              <a:buNone/>
-            </a:pPr>
-            <a:r>
-              <a:rPr lang="en-US" sz="900" i="1" spc="200" kern="0" dirty="0">
+            <a:pPr marL="0" indent="0" algn="l">
+              <a:buNone/>
+            </a:pPr>
+            <a:r>
+              <a:rPr lang="en-US" sz="900" i="1" kern="0" spc="200" dirty="0">
                 <a:solidFill>
                   <a:srgbClr val="6B6B6B"/>
                 </a:solidFill>
@@ -5588,7 +5422,7 @@
           <a:bodyPr wrap="square" lIns="0" tIns="0" rIns="0" bIns="0" rtlCol="0" anchor="ctr"/>
           <a:lstStyle/>
           <a:p>
-            <a:pPr algn="r" indent="0" marL="0">
+            <a:pPr marL="0" indent="0" algn="r">
               <a:buNone/>
             </a:pPr>
             <a:r>
@@ -5622,6 +5456,7 @@
         <a:solidFill>
           <a:srgbClr val="FFFFFF"/>
         </a:solidFill>
+        <a:effectLst/>
       </p:bgPr>
     </p:bg>
     <p:spTree>
@@ -5659,11 +5494,11 @@
           <a:bodyPr wrap="square" lIns="0" tIns="0" rIns="0" bIns="0" rtlCol="0" anchor="ctr"/>
           <a:lstStyle/>
           <a:p>
-            <a:pPr indent="0" marL="0">
-              <a:buNone/>
-            </a:pPr>
-            <a:r>
-              <a:rPr lang="en-US" sz="1100" b="1" spc="400" kern="0" dirty="0">
+            <a:pPr marL="0" indent="0">
+              <a:buNone/>
+            </a:pPr>
+            <a:r>
+              <a:rPr lang="en-US" sz="1100" b="1" kern="0" spc="400" dirty="0">
                 <a:solidFill>
                   <a:srgbClr val="8B1F2F"/>
                 </a:solidFill>
@@ -5671,7 +5506,7 @@
                 <a:ea typeface="Cambria" pitchFamily="34" charset="-122"/>
                 <a:cs typeface="Cambria" pitchFamily="34" charset="-120"/>
               </a:rPr>
-              <a:t>§ X  ·  FUTURE WORK</a:t>
+              <a:t>X  ·  FUTURE WORK</a:t>
             </a:r>
             <a:endParaRPr lang="en-US" sz="1100" dirty="0"/>
           </a:p>
@@ -5698,7 +5533,7 @@
           <a:bodyPr wrap="square" lIns="0" tIns="0" rIns="0" bIns="0" rtlCol="0" anchor="ctr"/>
           <a:lstStyle/>
           <a:p>
-            <a:pPr indent="0" marL="0">
+            <a:pPr marL="0" indent="0">
               <a:buNone/>
             </a:pPr>
             <a:r>
@@ -5737,7 +5572,7 @@
           <a:bodyPr wrap="square" lIns="0" tIns="0" rIns="0" bIns="0" rtlCol="0" anchor="ctr"/>
           <a:lstStyle/>
           <a:p>
-            <a:pPr indent="0" marL="0">
+            <a:pPr marL="0" indent="0">
               <a:buNone/>
             </a:pPr>
             <a:r>
@@ -5779,6 +5614,13 @@
             <a:prstDash val="solid"/>
           </a:ln>
         </p:spPr>
+        <p:txBody>
+          <a:bodyPr/>
+          <a:lstStyle/>
+          <a:p>
+            <a:endParaRPr lang="en-US"/>
+          </a:p>
+        </p:txBody>
       </p:sp>
       <p:sp>
         <p:nvSpPr>
@@ -5801,7 +5643,7 @@
           <a:bodyPr wrap="square" lIns="0" tIns="0" rIns="0" bIns="0" rtlCol="0" anchor="ctr"/>
           <a:lstStyle/>
           <a:p>
-            <a:pPr indent="0" marL="0">
+            <a:pPr marL="0" indent="0">
               <a:buNone/>
             </a:pPr>
             <a:r>
@@ -5821,14 +5663,14 @@
       </p:sp>
       <p:pic>
         <p:nvPicPr>
-          <p:cNvPr id="7" name="Image 0" descr="preencoded.png">    </p:cNvPr>
+          <p:cNvPr id="7" name="Image 0" descr="preencoded.png"/>
           <p:cNvPicPr>
             <a:picLocks noChangeAspect="1"/>
           </p:cNvPicPr>
           <p:nvPr/>
         </p:nvPicPr>
         <p:blipFill>
-          <a:blip r:embed="rId1"/>
+          <a:blip r:embed="rId3"/>
           <a:stretch>
             <a:fillRect/>
           </a:stretch>
@@ -5864,7 +5706,7 @@
           <a:bodyPr wrap="square" lIns="0" tIns="0" rIns="0" bIns="0" rtlCol="0" anchor="ctr"/>
           <a:lstStyle/>
           <a:p>
-            <a:pPr indent="0" marL="0">
+            <a:pPr marL="0" indent="0">
               <a:buNone/>
             </a:pPr>
             <a:r>
@@ -5903,7 +5745,7 @@
           <a:bodyPr wrap="square" lIns="0" tIns="0" rIns="0" bIns="0" rtlCol="0" anchor="ctr"/>
           <a:lstStyle/>
           <a:p>
-            <a:pPr indent="0" marL="0">
+            <a:pPr marL="0" indent="0">
               <a:buNone/>
             </a:pPr>
             <a:r>
@@ -5945,6 +5787,13 @@
             <a:prstDash val="solid"/>
           </a:ln>
         </p:spPr>
+        <p:txBody>
+          <a:bodyPr/>
+          <a:lstStyle/>
+          <a:p>
+            <a:endParaRPr lang="en-US"/>
+          </a:p>
+        </p:txBody>
       </p:sp>
       <p:sp>
         <p:nvSpPr>
@@ -5967,7 +5816,7 @@
           <a:bodyPr wrap="square" lIns="0" tIns="0" rIns="0" bIns="0" rtlCol="0" anchor="ctr"/>
           <a:lstStyle/>
           <a:p>
-            <a:pPr indent="0" marL="0">
+            <a:pPr marL="0" indent="0">
               <a:buNone/>
             </a:pPr>
             <a:r>
@@ -5987,14 +5836,14 @@
       </p:sp>
       <p:pic>
         <p:nvPicPr>
-          <p:cNvPr id="12" name="Image 1" descr="preencoded.png">    </p:cNvPr>
+          <p:cNvPr id="12" name="Image 1" descr="preencoded.png"/>
           <p:cNvPicPr>
             <a:picLocks noChangeAspect="1"/>
           </p:cNvPicPr>
           <p:nvPr/>
         </p:nvPicPr>
         <p:blipFill>
-          <a:blip r:embed="rId2"/>
+          <a:blip r:embed="rId4"/>
           <a:stretch>
             <a:fillRect/>
           </a:stretch>
@@ -6030,7 +5879,7 @@
           <a:bodyPr wrap="square" lIns="0" tIns="0" rIns="0" bIns="0" rtlCol="0" anchor="ctr"/>
           <a:lstStyle/>
           <a:p>
-            <a:pPr indent="0" marL="0">
+            <a:pPr marL="0" indent="0">
               <a:buNone/>
             </a:pPr>
             <a:r>
@@ -6069,7 +5918,7 @@
           <a:bodyPr wrap="square" lIns="0" tIns="0" rIns="0" bIns="0" rtlCol="0" anchor="ctr"/>
           <a:lstStyle/>
           <a:p>
-            <a:pPr indent="0" marL="0">
+            <a:pPr marL="0" indent="0">
               <a:buNone/>
             </a:pPr>
             <a:r>
@@ -6111,6 +5960,13 @@
             <a:prstDash val="solid"/>
           </a:ln>
         </p:spPr>
+        <p:txBody>
+          <a:bodyPr/>
+          <a:lstStyle/>
+          <a:p>
+            <a:endParaRPr lang="en-US"/>
+          </a:p>
+        </p:txBody>
       </p:sp>
       <p:sp>
         <p:nvSpPr>
@@ -6133,7 +5989,7 @@
           <a:bodyPr wrap="square" lIns="0" tIns="0" rIns="0" bIns="0" rtlCol="0" anchor="ctr"/>
           <a:lstStyle/>
           <a:p>
-            <a:pPr indent="0" marL="0">
+            <a:pPr marL="0" indent="0">
               <a:buNone/>
             </a:pPr>
             <a:r>
@@ -6153,14 +6009,14 @@
       </p:sp>
       <p:pic>
         <p:nvPicPr>
-          <p:cNvPr id="17" name="Image 2" descr="preencoded.png">    </p:cNvPr>
+          <p:cNvPr id="17" name="Image 2" descr="preencoded.png"/>
           <p:cNvPicPr>
             <a:picLocks noChangeAspect="1"/>
           </p:cNvPicPr>
           <p:nvPr/>
         </p:nvPicPr>
         <p:blipFill>
-          <a:blip r:embed="rId3"/>
+          <a:blip r:embed="rId5"/>
           <a:stretch>
             <a:fillRect/>
           </a:stretch>
@@ -6196,7 +6052,7 @@
           <a:bodyPr wrap="square" lIns="0" tIns="0" rIns="0" bIns="0" rtlCol="0" anchor="ctr"/>
           <a:lstStyle/>
           <a:p>
-            <a:pPr indent="0" marL="0">
+            <a:pPr marL="0" indent="0">
               <a:buNone/>
             </a:pPr>
             <a:r>
@@ -6235,7 +6091,7 @@
           <a:bodyPr wrap="square" lIns="0" tIns="0" rIns="0" bIns="0" rtlCol="0" anchor="ctr"/>
           <a:lstStyle/>
           <a:p>
-            <a:pPr indent="0" marL="0">
+            <a:pPr marL="0" indent="0">
               <a:buNone/>
             </a:pPr>
             <a:r>
@@ -6277,6 +6133,13 @@
             <a:prstDash val="solid"/>
           </a:ln>
         </p:spPr>
+        <p:txBody>
+          <a:bodyPr/>
+          <a:lstStyle/>
+          <a:p>
+            <a:endParaRPr lang="en-US"/>
+          </a:p>
+        </p:txBody>
       </p:sp>
       <p:sp>
         <p:nvSpPr>
@@ -6299,7 +6162,7 @@
           <a:bodyPr wrap="square" lIns="0" tIns="0" rIns="0" bIns="0" rtlCol="0" anchor="ctr"/>
           <a:lstStyle/>
           <a:p>
-            <a:pPr indent="0" marL="0">
+            <a:pPr marL="0" indent="0">
               <a:buNone/>
             </a:pPr>
             <a:r>
@@ -6319,14 +6182,14 @@
       </p:sp>
       <p:pic>
         <p:nvPicPr>
-          <p:cNvPr id="22" name="Image 3" descr="preencoded.png">    </p:cNvPr>
+          <p:cNvPr id="22" name="Image 3" descr="preencoded.png"/>
           <p:cNvPicPr>
             <a:picLocks noChangeAspect="1"/>
           </p:cNvPicPr>
           <p:nvPr/>
         </p:nvPicPr>
         <p:blipFill>
-          <a:blip r:embed="rId4"/>
+          <a:blip r:embed="rId6"/>
           <a:stretch>
             <a:fillRect/>
           </a:stretch>
@@ -6362,7 +6225,7 @@
           <a:bodyPr wrap="square" lIns="0" tIns="0" rIns="0" bIns="0" rtlCol="0" anchor="ctr"/>
           <a:lstStyle/>
           <a:p>
-            <a:pPr indent="0" marL="0">
+            <a:pPr marL="0" indent="0">
               <a:buNone/>
             </a:pPr>
             <a:r>
@@ -6401,7 +6264,7 @@
           <a:bodyPr wrap="square" lIns="0" tIns="0" rIns="0" bIns="0" rtlCol="0" anchor="ctr"/>
           <a:lstStyle/>
           <a:p>
-            <a:pPr indent="0" marL="0">
+            <a:pPr marL="0" indent="0">
               <a:buNone/>
             </a:pPr>
             <a:r>
@@ -6443,6 +6306,13 @@
             <a:prstDash val="solid"/>
           </a:ln>
         </p:spPr>
+        <p:txBody>
+          <a:bodyPr/>
+          <a:lstStyle/>
+          <a:p>
+            <a:endParaRPr lang="en-US"/>
+          </a:p>
+        </p:txBody>
       </p:sp>
       <p:sp>
         <p:nvSpPr>
@@ -6465,7 +6335,7 @@
           <a:bodyPr wrap="square" lIns="0" tIns="0" rIns="0" bIns="0" rtlCol="0" anchor="ctr"/>
           <a:lstStyle/>
           <a:p>
-            <a:pPr indent="0" marL="0">
+            <a:pPr marL="0" indent="0">
               <a:buNone/>
             </a:pPr>
             <a:r>
@@ -6485,14 +6355,14 @@
       </p:sp>
       <p:pic>
         <p:nvPicPr>
-          <p:cNvPr id="27" name="Image 4" descr="preencoded.png">    </p:cNvPr>
+          <p:cNvPr id="27" name="Image 4" descr="preencoded.png"/>
           <p:cNvPicPr>
             <a:picLocks noChangeAspect="1"/>
           </p:cNvPicPr>
           <p:nvPr/>
         </p:nvPicPr>
         <p:blipFill>
-          <a:blip r:embed="rId5"/>
+          <a:blip r:embed="rId7"/>
           <a:stretch>
             <a:fillRect/>
           </a:stretch>
@@ -6528,7 +6398,7 @@
           <a:bodyPr wrap="square" lIns="0" tIns="0" rIns="0" bIns="0" rtlCol="0" anchor="ctr"/>
           <a:lstStyle/>
           <a:p>
-            <a:pPr indent="0" marL="0">
+            <a:pPr marL="0" indent="0">
               <a:buNone/>
             </a:pPr>
             <a:r>
@@ -6567,7 +6437,7 @@
           <a:bodyPr wrap="square" lIns="0" tIns="0" rIns="0" bIns="0" rtlCol="0" anchor="ctr"/>
           <a:lstStyle/>
           <a:p>
-            <a:pPr indent="0" marL="0">
+            <a:pPr marL="0" indent="0">
               <a:buNone/>
             </a:pPr>
             <a:r>
@@ -6607,6 +6477,13 @@
             <a:prstDash val="solid"/>
           </a:ln>
         </p:spPr>
+        <p:txBody>
+          <a:bodyPr/>
+          <a:lstStyle/>
+          <a:p>
+            <a:endParaRPr lang="en-US"/>
+          </a:p>
+        </p:txBody>
       </p:sp>
       <p:sp>
         <p:nvSpPr>
@@ -6629,11 +6506,11 @@
           <a:bodyPr wrap="square" lIns="0" tIns="0" rIns="0" bIns="0" rtlCol="0" anchor="ctr"/>
           <a:lstStyle/>
           <a:p>
-            <a:pPr algn="l" indent="0" marL="0">
-              <a:buNone/>
-            </a:pPr>
-            <a:r>
-              <a:rPr lang="en-US" sz="900" i="1" spc="200" kern="0" dirty="0">
+            <a:pPr marL="0" indent="0" algn="l">
+              <a:buNone/>
+            </a:pPr>
+            <a:r>
+              <a:rPr lang="en-US" sz="900" i="1" kern="0" spc="200" dirty="0">
                 <a:solidFill>
                   <a:srgbClr val="6B6B6B"/>
                 </a:solidFill>
@@ -6668,7 +6545,7 @@
           <a:bodyPr wrap="square" lIns="0" tIns="0" rIns="0" bIns="0" rtlCol="0" anchor="ctr"/>
           <a:lstStyle/>
           <a:p>
-            <a:pPr algn="r" indent="0" marL="0">
+            <a:pPr marL="0" indent="0" algn="r">
               <a:buNone/>
             </a:pPr>
             <a:r>
@@ -6702,6 +6579,7 @@
         <a:solidFill>
           <a:srgbClr val="0F1B33"/>
         </a:solidFill>
+        <a:effectLst/>
       </p:bgPr>
     </p:bg>
     <p:spTree>
@@ -6740,6 +6618,13 @@
             <a:prstDash val="solid"/>
           </a:ln>
         </p:spPr>
+        <p:txBody>
+          <a:bodyPr/>
+          <a:lstStyle/>
+          <a:p>
+            <a:endParaRPr lang="en-US"/>
+          </a:p>
+        </p:txBody>
       </p:sp>
       <p:sp>
         <p:nvSpPr>
@@ -6762,11 +6647,11 @@
           <a:bodyPr wrap="square" lIns="0" tIns="0" rIns="0" bIns="0" rtlCol="0" anchor="ctr"/>
           <a:lstStyle/>
           <a:p>
-            <a:pPr indent="0" marL="0">
-              <a:buNone/>
-            </a:pPr>
-            <a:r>
-              <a:rPr lang="en-US" sz="1100" b="1" spc="600" kern="0" dirty="0">
+            <a:pPr marL="0" indent="0">
+              <a:buNone/>
+            </a:pPr>
+            <a:r>
+              <a:rPr lang="en-US" sz="1100" b="1" kern="0" spc="600" dirty="0">
                 <a:solidFill>
                   <a:srgbClr val="C9A86B"/>
                 </a:solidFill>
@@ -6774,7 +6659,7 @@
                 <a:ea typeface="Cambria" pitchFamily="34" charset="-122"/>
                 <a:cs typeface="Cambria" pitchFamily="34" charset="-120"/>
               </a:rPr>
-              <a:t>§ XI  ·  DISCUSSION</a:t>
+              <a:t>XI  ·  DISCUSSION</a:t>
             </a:r>
             <a:endParaRPr lang="en-US" sz="1100" dirty="0"/>
           </a:p>
@@ -6801,7 +6686,7 @@
           <a:bodyPr wrap="square" lIns="0" tIns="0" rIns="0" bIns="0" rtlCol="0" anchor="ctr"/>
           <a:lstStyle/>
           <a:p>
-            <a:pPr indent="0" marL="0">
+            <a:pPr marL="0" indent="0">
               <a:buNone/>
             </a:pPr>
             <a:r>
@@ -6840,7 +6725,7 @@
           <a:bodyPr wrap="square" lIns="0" tIns="0" rIns="0" bIns="0" rtlCol="0" anchor="ctr"/>
           <a:lstStyle/>
           <a:p>
-            <a:pPr indent="0" marL="0">
+            <a:pPr marL="0" indent="0">
               <a:buNone/>
             </a:pPr>
             <a:r>
@@ -6880,6 +6765,13 @@
             <a:prstDash val="solid"/>
           </a:ln>
         </p:spPr>
+        <p:txBody>
+          <a:bodyPr/>
+          <a:lstStyle/>
+          <a:p>
+            <a:endParaRPr lang="en-US"/>
+          </a:p>
+        </p:txBody>
       </p:sp>
       <p:sp>
         <p:nvSpPr>
@@ -6902,11 +6794,11 @@
           <a:bodyPr wrap="square" lIns="0" tIns="0" rIns="0" bIns="0" rtlCol="0" anchor="ctr"/>
           <a:lstStyle/>
           <a:p>
-            <a:pPr indent="0" marL="0">
-              <a:buNone/>
-            </a:pPr>
-            <a:r>
-              <a:rPr lang="en-US" sz="1050" b="1" spc="300" kern="0" dirty="0">
+            <a:pPr marL="0" indent="0">
+              <a:buNone/>
+            </a:pPr>
+            <a:r>
+              <a:rPr lang="en-US" sz="1050" b="1" kern="0" spc="300" dirty="0">
                 <a:solidFill>
                   <a:srgbClr val="C9A86B"/>
                 </a:solidFill>
@@ -6944,6 +6836,13 @@
             <a:prstDash val="solid"/>
           </a:ln>
         </p:spPr>
+        <p:txBody>
+          <a:bodyPr/>
+          <a:lstStyle/>
+          <a:p>
+            <a:endParaRPr lang="en-US"/>
+          </a:p>
+        </p:txBody>
       </p:sp>
       <p:sp>
         <p:nvSpPr>
@@ -6966,7 +6865,7 @@
           <a:bodyPr wrap="square" lIns="0" tIns="0" rIns="0" bIns="0" rtlCol="0" anchor="ctr"/>
           <a:lstStyle/>
           <a:p>
-            <a:pPr indent="0" marL="0">
+            <a:pPr marL="0" indent="0">
               <a:buNone/>
             </a:pPr>
             <a:r>
@@ -7005,7 +6904,7 @@
           <a:bodyPr wrap="square" lIns="0" tIns="0" rIns="0" bIns="0" rtlCol="0" anchor="ctr"/>
           <a:lstStyle/>
           <a:p>
-            <a:pPr indent="0" marL="0">
+            <a:pPr marL="0" indent="0">
               <a:buNone/>
             </a:pPr>
             <a:r>
@@ -7047,6 +6946,13 @@
             <a:prstDash val="solid"/>
           </a:ln>
         </p:spPr>
+        <p:txBody>
+          <a:bodyPr/>
+          <a:lstStyle/>
+          <a:p>
+            <a:endParaRPr lang="en-US"/>
+          </a:p>
+        </p:txBody>
       </p:sp>
       <p:sp>
         <p:nvSpPr>
@@ -7069,7 +6975,7 @@
           <a:bodyPr wrap="square" lIns="0" tIns="0" rIns="0" bIns="0" rtlCol="0" anchor="ctr"/>
           <a:lstStyle/>
           <a:p>
-            <a:pPr indent="0" marL="0">
+            <a:pPr marL="0" indent="0">
               <a:buNone/>
             </a:pPr>
             <a:r>
@@ -7108,7 +7014,7 @@
           <a:bodyPr wrap="square" lIns="0" tIns="0" rIns="0" bIns="0" rtlCol="0" anchor="ctr"/>
           <a:lstStyle/>
           <a:p>
-            <a:pPr indent="0" marL="0">
+            <a:pPr marL="0" indent="0">
               <a:buNone/>
             </a:pPr>
             <a:r>
@@ -7150,6 +7056,13 @@
             <a:prstDash val="solid"/>
           </a:ln>
         </p:spPr>
+        <p:txBody>
+          <a:bodyPr/>
+          <a:lstStyle/>
+          <a:p>
+            <a:endParaRPr lang="en-US"/>
+          </a:p>
+        </p:txBody>
       </p:sp>
       <p:sp>
         <p:nvSpPr>
@@ -7172,7 +7085,7 @@
           <a:bodyPr wrap="square" lIns="0" tIns="0" rIns="0" bIns="0" rtlCol="0" anchor="ctr"/>
           <a:lstStyle/>
           <a:p>
-            <a:pPr indent="0" marL="0">
+            <a:pPr marL="0" indent="0">
               <a:buNone/>
             </a:pPr>
             <a:r>
@@ -7211,7 +7124,7 @@
           <a:bodyPr wrap="square" lIns="0" tIns="0" rIns="0" bIns="0" rtlCol="0" anchor="ctr"/>
           <a:lstStyle/>
           <a:p>
-            <a:pPr indent="0" marL="0">
+            <a:pPr marL="0" indent="0">
               <a:buNone/>
             </a:pPr>
             <a:r>
@@ -7251,6 +7164,13 @@
             <a:prstDash val="solid"/>
           </a:ln>
         </p:spPr>
+        <p:txBody>
+          <a:bodyPr/>
+          <a:lstStyle/>
+          <a:p>
+            <a:endParaRPr lang="en-US"/>
+          </a:p>
+        </p:txBody>
       </p:sp>
     </p:spTree>
   </p:cSld>
@@ -7268,6 +7188,7 @@
         <a:solidFill>
           <a:srgbClr val="FFFFFF"/>
         </a:solidFill>
+        <a:effectLst/>
       </p:bgPr>
     </p:bg>
     <p:spTree>
@@ -7305,11 +7226,11 @@
           <a:bodyPr wrap="square" lIns="0" tIns="0" rIns="0" bIns="0" rtlCol="0" anchor="ctr"/>
           <a:lstStyle/>
           <a:p>
-            <a:pPr indent="0" marL="0">
-              <a:buNone/>
-            </a:pPr>
-            <a:r>
-              <a:rPr lang="en-US" sz="1100" b="1" spc="400" kern="0" dirty="0">
+            <a:pPr marL="0" indent="0">
+              <a:buNone/>
+            </a:pPr>
+            <a:r>
+              <a:rPr lang="en-US" sz="1100" b="1" kern="0" spc="400" dirty="0">
                 <a:solidFill>
                   <a:srgbClr val="8B1F2F"/>
                 </a:solidFill>
@@ -7317,7 +7238,7 @@
                 <a:ea typeface="Cambria" pitchFamily="34" charset="-122"/>
                 <a:cs typeface="Cambria" pitchFamily="34" charset="-120"/>
               </a:rPr>
-              <a:t>§ I  ·  INTRODUCTION</a:t>
+              <a:t>I  ·  INTRODUCTION</a:t>
             </a:r>
             <a:endParaRPr lang="en-US" sz="1100" dirty="0"/>
           </a:p>
@@ -7344,7 +7265,7 @@
           <a:bodyPr wrap="square" lIns="0" tIns="0" rIns="0" bIns="0" rtlCol="0" anchor="ctr"/>
           <a:lstStyle/>
           <a:p>
-            <a:pPr indent="0" marL="0">
+            <a:pPr marL="0" indent="0">
               <a:buNone/>
             </a:pPr>
             <a:r>
@@ -7383,7 +7304,7 @@
           <a:bodyPr wrap="square" lIns="0" tIns="0" rIns="0" bIns="0" rtlCol="0" anchor="ctr"/>
           <a:lstStyle/>
           <a:p>
-            <a:pPr indent="0" marL="0">
+            <a:pPr marL="0" indent="0">
               <a:buNone/>
             </a:pPr>
             <a:r>
@@ -7425,6 +7346,13 @@
             <a:prstDash val="solid"/>
           </a:ln>
         </p:spPr>
+        <p:txBody>
+          <a:bodyPr/>
+          <a:lstStyle/>
+          <a:p>
+            <a:endParaRPr lang="en-US"/>
+          </a:p>
+        </p:txBody>
       </p:sp>
       <p:sp>
         <p:nvSpPr>
@@ -7447,7 +7375,7 @@
           <a:bodyPr wrap="square" lIns="0" tIns="0" rIns="0" bIns="0" rtlCol="0" anchor="ctr"/>
           <a:lstStyle/>
           <a:p>
-            <a:pPr indent="0" marL="0">
+            <a:pPr marL="0" indent="0">
               <a:buNone/>
             </a:pPr>
             <a:r>
@@ -7467,14 +7395,14 @@
       </p:sp>
       <p:pic>
         <p:nvPicPr>
-          <p:cNvPr id="7" name="Image 0" descr="preencoded.png">    </p:cNvPr>
+          <p:cNvPr id="7" name="Image 0" descr="preencoded.png"/>
           <p:cNvPicPr>
             <a:picLocks noChangeAspect="1"/>
           </p:cNvPicPr>
           <p:nvPr/>
         </p:nvPicPr>
         <p:blipFill>
-          <a:blip r:embed="rId1"/>
+          <a:blip r:embed="rId3"/>
           <a:stretch>
             <a:fillRect/>
           </a:stretch>
@@ -7511,6 +7439,13 @@
             <a:prstDash val="solid"/>
           </a:ln>
         </p:spPr>
+        <p:txBody>
+          <a:bodyPr/>
+          <a:lstStyle/>
+          <a:p>
+            <a:endParaRPr lang="en-US"/>
+          </a:p>
+        </p:txBody>
       </p:sp>
       <p:sp>
         <p:nvSpPr>
@@ -7533,7 +7468,7 @@
           <a:bodyPr wrap="square" lIns="0" tIns="0" rIns="0" bIns="0" rtlCol="0" anchor="ctr"/>
           <a:lstStyle/>
           <a:p>
-            <a:pPr indent="0" marL="0">
+            <a:pPr marL="0" indent="0">
               <a:buNone/>
             </a:pPr>
             <a:r>
@@ -7572,7 +7507,7 @@
           <a:bodyPr wrap="square" lIns="0" tIns="0" rIns="0" bIns="0" rtlCol="0" anchor="ctr"/>
           <a:lstStyle/>
           <a:p>
-            <a:pPr indent="0" marL="0">
+            <a:pPr marL="0" indent="0">
               <a:buNone/>
             </a:pPr>
             <a:r>
@@ -7614,6 +7549,13 @@
             <a:prstDash val="solid"/>
           </a:ln>
         </p:spPr>
+        <p:txBody>
+          <a:bodyPr/>
+          <a:lstStyle/>
+          <a:p>
+            <a:endParaRPr lang="en-US"/>
+          </a:p>
+        </p:txBody>
       </p:sp>
       <p:sp>
         <p:nvSpPr>
@@ -7636,7 +7578,7 @@
           <a:bodyPr wrap="square" lIns="0" tIns="0" rIns="0" bIns="0" rtlCol="0" anchor="ctr"/>
           <a:lstStyle/>
           <a:p>
-            <a:pPr indent="0" marL="0">
+            <a:pPr marL="0" indent="0">
               <a:buNone/>
             </a:pPr>
             <a:r>
@@ -7656,14 +7598,14 @@
       </p:sp>
       <p:pic>
         <p:nvPicPr>
-          <p:cNvPr id="13" name="Image 1" descr="preencoded.png">    </p:cNvPr>
+          <p:cNvPr id="13" name="Image 1" descr="preencoded.png"/>
           <p:cNvPicPr>
             <a:picLocks noChangeAspect="1"/>
           </p:cNvPicPr>
           <p:nvPr/>
         </p:nvPicPr>
         <p:blipFill>
-          <a:blip r:embed="rId2"/>
+          <a:blip r:embed="rId4"/>
           <a:stretch>
             <a:fillRect/>
           </a:stretch>
@@ -7700,6 +7642,13 @@
             <a:prstDash val="solid"/>
           </a:ln>
         </p:spPr>
+        <p:txBody>
+          <a:bodyPr/>
+          <a:lstStyle/>
+          <a:p>
+            <a:endParaRPr lang="en-US"/>
+          </a:p>
+        </p:txBody>
       </p:sp>
       <p:sp>
         <p:nvSpPr>
@@ -7722,7 +7671,7 @@
           <a:bodyPr wrap="square" lIns="0" tIns="0" rIns="0" bIns="0" rtlCol="0" anchor="ctr"/>
           <a:lstStyle/>
           <a:p>
-            <a:pPr indent="0" marL="0">
+            <a:pPr marL="0" indent="0">
               <a:buNone/>
             </a:pPr>
             <a:r>
@@ -7761,7 +7710,7 @@
           <a:bodyPr wrap="square" lIns="0" tIns="0" rIns="0" bIns="0" rtlCol="0" anchor="ctr"/>
           <a:lstStyle/>
           <a:p>
-            <a:pPr indent="0" marL="0">
+            <a:pPr marL="0" indent="0">
               <a:buNone/>
             </a:pPr>
             <a:r>
@@ -7803,6 +7752,13 @@
             <a:prstDash val="solid"/>
           </a:ln>
         </p:spPr>
+        <p:txBody>
+          <a:bodyPr/>
+          <a:lstStyle/>
+          <a:p>
+            <a:endParaRPr lang="en-US"/>
+          </a:p>
+        </p:txBody>
       </p:sp>
       <p:sp>
         <p:nvSpPr>
@@ -7825,7 +7781,7 @@
           <a:bodyPr wrap="square" lIns="0" tIns="0" rIns="0" bIns="0" rtlCol="0" anchor="ctr"/>
           <a:lstStyle/>
           <a:p>
-            <a:pPr indent="0" marL="0">
+            <a:pPr marL="0" indent="0">
               <a:buNone/>
             </a:pPr>
             <a:r>
@@ -7845,14 +7801,14 @@
       </p:sp>
       <p:pic>
         <p:nvPicPr>
-          <p:cNvPr id="19" name="Image 2" descr="preencoded.png">    </p:cNvPr>
+          <p:cNvPr id="19" name="Image 2" descr="preencoded.png"/>
           <p:cNvPicPr>
             <a:picLocks noChangeAspect="1"/>
           </p:cNvPicPr>
           <p:nvPr/>
         </p:nvPicPr>
         <p:blipFill>
-          <a:blip r:embed="rId3"/>
+          <a:blip r:embed="rId5"/>
           <a:stretch>
             <a:fillRect/>
           </a:stretch>
@@ -7889,6 +7845,13 @@
             <a:prstDash val="solid"/>
           </a:ln>
         </p:spPr>
+        <p:txBody>
+          <a:bodyPr/>
+          <a:lstStyle/>
+          <a:p>
+            <a:endParaRPr lang="en-US"/>
+          </a:p>
+        </p:txBody>
       </p:sp>
       <p:sp>
         <p:nvSpPr>
@@ -7911,7 +7874,7 @@
           <a:bodyPr wrap="square" lIns="0" tIns="0" rIns="0" bIns="0" rtlCol="0" anchor="ctr"/>
           <a:lstStyle/>
           <a:p>
-            <a:pPr indent="0" marL="0">
+            <a:pPr marL="0" indent="0">
               <a:buNone/>
             </a:pPr>
             <a:r>
@@ -7950,7 +7913,7 @@
           <a:bodyPr wrap="square" lIns="0" tIns="0" rIns="0" bIns="0" rtlCol="0" anchor="ctr"/>
           <a:lstStyle/>
           <a:p>
-            <a:pPr indent="0" marL="0">
+            <a:pPr marL="0" indent="0">
               <a:buNone/>
             </a:pPr>
             <a:r>
@@ -7989,7 +7952,7 @@
           <a:bodyPr wrap="square" lIns="0" tIns="0" rIns="0" bIns="0" rtlCol="0" anchor="ctr"/>
           <a:lstStyle/>
           <a:p>
-            <a:pPr algn="ctr" indent="0" marL="0">
+            <a:pPr marL="0" indent="0" algn="ctr">
               <a:buNone/>
             </a:pPr>
             <a:r>
@@ -8029,6 +7992,13 @@
             <a:prstDash val="solid"/>
           </a:ln>
         </p:spPr>
+        <p:txBody>
+          <a:bodyPr/>
+          <a:lstStyle/>
+          <a:p>
+            <a:endParaRPr lang="en-US"/>
+          </a:p>
+        </p:txBody>
       </p:sp>
       <p:sp>
         <p:nvSpPr>
@@ -8051,11 +8021,11 @@
           <a:bodyPr wrap="square" lIns="0" tIns="0" rIns="0" bIns="0" rtlCol="0" anchor="ctr"/>
           <a:lstStyle/>
           <a:p>
-            <a:pPr algn="l" indent="0" marL="0">
-              <a:buNone/>
-            </a:pPr>
-            <a:r>
-              <a:rPr lang="en-US" sz="900" i="1" spc="200" kern="0" dirty="0">
+            <a:pPr marL="0" indent="0" algn="l">
+              <a:buNone/>
+            </a:pPr>
+            <a:r>
+              <a:rPr lang="en-US" sz="900" i="1" kern="0" spc="200" dirty="0">
                 <a:solidFill>
                   <a:srgbClr val="6B6B6B"/>
                 </a:solidFill>
@@ -8090,7 +8060,7 @@
           <a:bodyPr wrap="square" lIns="0" tIns="0" rIns="0" bIns="0" rtlCol="0" anchor="ctr"/>
           <a:lstStyle/>
           <a:p>
-            <a:pPr algn="r" indent="0" marL="0">
+            <a:pPr marL="0" indent="0" algn="r">
               <a:buNone/>
             </a:pPr>
             <a:r>
@@ -8124,6 +8094,7 @@
         <a:solidFill>
           <a:srgbClr val="FFFFFF"/>
         </a:solidFill>
+        <a:effectLst/>
       </p:bgPr>
     </p:bg>
     <p:spTree>
@@ -8161,11 +8132,11 @@
           <a:bodyPr wrap="square" lIns="0" tIns="0" rIns="0" bIns="0" rtlCol="0" anchor="ctr"/>
           <a:lstStyle/>
           <a:p>
-            <a:pPr indent="0" marL="0">
-              <a:buNone/>
-            </a:pPr>
-            <a:r>
-              <a:rPr lang="en-US" sz="1100" b="1" spc="400" kern="0" dirty="0">
+            <a:pPr marL="0" indent="0">
+              <a:buNone/>
+            </a:pPr>
+            <a:r>
+              <a:rPr lang="en-US" sz="1100" b="1" kern="0" spc="400" dirty="0">
                 <a:solidFill>
                   <a:srgbClr val="8B1F2F"/>
                 </a:solidFill>
@@ -8173,7 +8144,7 @@
                 <a:ea typeface="Cambria" pitchFamily="34" charset="-122"/>
                 <a:cs typeface="Cambria" pitchFamily="34" charset="-120"/>
               </a:rPr>
-              <a:t>§ II  ·  SYSTEM DESIGN</a:t>
+              <a:t>II  ·  SYSTEM DESIGN</a:t>
             </a:r>
             <a:endParaRPr lang="en-US" sz="1100" dirty="0"/>
           </a:p>
@@ -8200,7 +8171,7 @@
           <a:bodyPr wrap="square" lIns="0" tIns="0" rIns="0" bIns="0" rtlCol="0" anchor="ctr"/>
           <a:lstStyle/>
           <a:p>
-            <a:pPr indent="0" marL="0">
+            <a:pPr marL="0" indent="0">
               <a:buNone/>
             </a:pPr>
             <a:r>
@@ -8239,7 +8210,7 @@
           <a:bodyPr wrap="square" lIns="0" tIns="0" rIns="0" bIns="0" rtlCol="0" anchor="ctr"/>
           <a:lstStyle/>
           <a:p>
-            <a:pPr indent="0" marL="0">
+            <a:pPr marL="0" indent="0">
               <a:buNone/>
             </a:pPr>
             <a:r>
@@ -8281,6 +8252,13 @@
             <a:prstDash val="solid"/>
           </a:ln>
         </p:spPr>
+        <p:txBody>
+          <a:bodyPr/>
+          <a:lstStyle/>
+          <a:p>
+            <a:endParaRPr lang="en-US"/>
+          </a:p>
+        </p:txBody>
       </p:sp>
       <p:sp>
         <p:nvSpPr>
@@ -8303,7 +8281,7 @@
           <a:bodyPr wrap="square" lIns="0" tIns="0" rIns="0" bIns="0" rtlCol="0" anchor="ctr"/>
           <a:lstStyle/>
           <a:p>
-            <a:pPr algn="ctr" indent="0" marL="0">
+            <a:pPr marL="0" indent="0" algn="ctr">
               <a:buNone/>
             </a:pPr>
             <a:r>
@@ -8342,7 +8320,7 @@
           <a:bodyPr wrap="square" lIns="0" tIns="0" rIns="0" bIns="0" rtlCol="0" anchor="ctr"/>
           <a:lstStyle/>
           <a:p>
-            <a:pPr algn="ctr" indent="0" marL="0">
+            <a:pPr marL="0" indent="0" algn="ctr">
               <a:buNone/>
             </a:pPr>
             <a:r>
@@ -8384,6 +8362,13 @@
             <a:prstDash val="solid"/>
           </a:ln>
         </p:spPr>
+        <p:txBody>
+          <a:bodyPr/>
+          <a:lstStyle/>
+          <a:p>
+            <a:endParaRPr lang="en-US"/>
+          </a:p>
+        </p:txBody>
       </p:sp>
       <p:sp>
         <p:nvSpPr>
@@ -8406,7 +8391,7 @@
           <a:bodyPr wrap="square" lIns="0" tIns="0" rIns="0" bIns="0" rtlCol="0" anchor="ctr"/>
           <a:lstStyle/>
           <a:p>
-            <a:pPr algn="ctr" indent="0" marL="0">
+            <a:pPr marL="0" indent="0" algn="ctr">
               <a:buNone/>
             </a:pPr>
             <a:r>
@@ -8445,7 +8430,7 @@
           <a:bodyPr wrap="square" lIns="0" tIns="0" rIns="0" bIns="0" rtlCol="0" anchor="ctr"/>
           <a:lstStyle/>
           <a:p>
-            <a:pPr algn="ctr" indent="0" marL="0">
+            <a:pPr marL="0" indent="0" algn="ctr">
               <a:buNone/>
             </a:pPr>
             <a:r>
@@ -8487,6 +8472,13 @@
             <a:prstDash val="solid"/>
           </a:ln>
         </p:spPr>
+        <p:txBody>
+          <a:bodyPr/>
+          <a:lstStyle/>
+          <a:p>
+            <a:endParaRPr lang="en-US"/>
+          </a:p>
+        </p:txBody>
       </p:sp>
       <p:sp>
         <p:nvSpPr>
@@ -8509,7 +8501,7 @@
           <a:bodyPr wrap="square" lIns="0" tIns="0" rIns="0" bIns="0" rtlCol="0" anchor="ctr"/>
           <a:lstStyle/>
           <a:p>
-            <a:pPr algn="ctr" indent="0" marL="0">
+            <a:pPr marL="0" indent="0" algn="ctr">
               <a:buNone/>
             </a:pPr>
             <a:r>
@@ -8548,7 +8540,7 @@
           <a:bodyPr wrap="square" lIns="0" tIns="0" rIns="0" bIns="0" rtlCol="0" anchor="ctr"/>
           <a:lstStyle/>
           <a:p>
-            <a:pPr algn="ctr" indent="0" marL="0">
+            <a:pPr marL="0" indent="0" algn="ctr">
               <a:buNone/>
             </a:pPr>
             <a:r>
@@ -8590,6 +8582,13 @@
             <a:prstDash val="solid"/>
           </a:ln>
         </p:spPr>
+        <p:txBody>
+          <a:bodyPr/>
+          <a:lstStyle/>
+          <a:p>
+            <a:endParaRPr lang="en-US"/>
+          </a:p>
+        </p:txBody>
       </p:sp>
       <p:sp>
         <p:nvSpPr>
@@ -8612,7 +8611,7 @@
           <a:bodyPr wrap="square" lIns="0" tIns="0" rIns="0" bIns="0" rtlCol="0" anchor="ctr"/>
           <a:lstStyle/>
           <a:p>
-            <a:pPr algn="ctr" indent="0" marL="0">
+            <a:pPr marL="0" indent="0" algn="ctr">
               <a:buNone/>
             </a:pPr>
             <a:r>
@@ -8651,7 +8650,7 @@
           <a:bodyPr wrap="square" lIns="0" tIns="0" rIns="0" bIns="0" rtlCol="0" anchor="ctr"/>
           <a:lstStyle/>
           <a:p>
-            <a:pPr algn="ctr" indent="0" marL="0">
+            <a:pPr marL="0" indent="0" algn="ctr">
               <a:buNone/>
             </a:pPr>
             <a:r>
@@ -8692,6 +8691,13 @@
             <a:tailEnd type="triangle"/>
           </a:ln>
         </p:spPr>
+        <p:txBody>
+          <a:bodyPr/>
+          <a:lstStyle/>
+          <a:p>
+            <a:endParaRPr lang="en-US"/>
+          </a:p>
+        </p:txBody>
       </p:sp>
       <p:sp>
         <p:nvSpPr>
@@ -8716,6 +8722,13 @@
             <a:tailEnd type="triangle"/>
           </a:ln>
         </p:spPr>
+        <p:txBody>
+          <a:bodyPr/>
+          <a:lstStyle/>
+          <a:p>
+            <a:endParaRPr lang="en-US"/>
+          </a:p>
+        </p:txBody>
       </p:sp>
       <p:sp>
         <p:nvSpPr>
@@ -8740,6 +8753,13 @@
             <a:tailEnd type="triangle"/>
           </a:ln>
         </p:spPr>
+        <p:txBody>
+          <a:bodyPr/>
+          <a:lstStyle/>
+          <a:p>
+            <a:endParaRPr lang="en-US"/>
+          </a:p>
+        </p:txBody>
       </p:sp>
       <p:sp>
         <p:nvSpPr>
@@ -8765,17 +8785,24 @@
             <a:prstDash val="solid"/>
           </a:ln>
         </p:spPr>
+        <p:txBody>
+          <a:bodyPr/>
+          <a:lstStyle/>
+          <a:p>
+            <a:endParaRPr lang="en-US"/>
+          </a:p>
+        </p:txBody>
       </p:sp>
       <p:pic>
         <p:nvPicPr>
-          <p:cNvPr id="21" name="Image 0" descr="preencoded.png">    </p:cNvPr>
+          <p:cNvPr id="21" name="Image 0" descr="preencoded.png"/>
           <p:cNvPicPr>
             <a:picLocks noChangeAspect="1"/>
           </p:cNvPicPr>
           <p:nvPr/>
         </p:nvPicPr>
         <p:blipFill>
-          <a:blip r:embed="rId1"/>
+          <a:blip r:embed="rId3"/>
           <a:stretch>
             <a:fillRect/>
           </a:stretch>
@@ -8811,7 +8838,7 @@
           <a:bodyPr wrap="square" lIns="0" tIns="0" rIns="0" bIns="0" rtlCol="0" anchor="ctr"/>
           <a:lstStyle/>
           <a:p>
-            <a:pPr indent="0" marL="0">
+            <a:pPr marL="0" indent="0">
               <a:buNone/>
             </a:pPr>
             <a:r>
@@ -8850,7 +8877,7 @@
           <a:bodyPr wrap="square" lIns="0" tIns="0" rIns="0" bIns="0" rtlCol="0" anchor="ctr"/>
           <a:lstStyle/>
           <a:p>
-            <a:pPr indent="0" marL="0">
+            <a:pPr marL="0" indent="0">
               <a:buNone/>
             </a:pPr>
             <a:r>
@@ -8892,17 +8919,24 @@
             <a:prstDash val="solid"/>
           </a:ln>
         </p:spPr>
+        <p:txBody>
+          <a:bodyPr/>
+          <a:lstStyle/>
+          <a:p>
+            <a:endParaRPr lang="en-US"/>
+          </a:p>
+        </p:txBody>
       </p:sp>
       <p:pic>
         <p:nvPicPr>
-          <p:cNvPr id="25" name="Image 1" descr="preencoded.png">    </p:cNvPr>
+          <p:cNvPr id="25" name="Image 1" descr="preencoded.png"/>
           <p:cNvPicPr>
             <a:picLocks noChangeAspect="1"/>
           </p:cNvPicPr>
           <p:nvPr/>
         </p:nvPicPr>
         <p:blipFill>
-          <a:blip r:embed="rId2"/>
+          <a:blip r:embed="rId4"/>
           <a:stretch>
             <a:fillRect/>
           </a:stretch>
@@ -8938,7 +8972,7 @@
           <a:bodyPr wrap="square" lIns="0" tIns="0" rIns="0" bIns="0" rtlCol="0" anchor="ctr"/>
           <a:lstStyle/>
           <a:p>
-            <a:pPr indent="0" marL="0">
+            <a:pPr marL="0" indent="0">
               <a:buNone/>
             </a:pPr>
             <a:r>
@@ -8977,7 +9011,7 @@
           <a:bodyPr wrap="square" lIns="0" tIns="0" rIns="0" bIns="0" rtlCol="0" anchor="ctr"/>
           <a:lstStyle/>
           <a:p>
-            <a:pPr indent="0" marL="0">
+            <a:pPr marL="0" indent="0">
               <a:buNone/>
             </a:pPr>
             <a:r>
@@ -9019,17 +9053,24 @@
             <a:prstDash val="solid"/>
           </a:ln>
         </p:spPr>
+        <p:txBody>
+          <a:bodyPr/>
+          <a:lstStyle/>
+          <a:p>
+            <a:endParaRPr lang="en-US"/>
+          </a:p>
+        </p:txBody>
       </p:sp>
       <p:pic>
         <p:nvPicPr>
-          <p:cNvPr id="29" name="Image 2" descr="preencoded.png">    </p:cNvPr>
+          <p:cNvPr id="29" name="Image 2" descr="preencoded.png"/>
           <p:cNvPicPr>
             <a:picLocks noChangeAspect="1"/>
           </p:cNvPicPr>
           <p:nvPr/>
         </p:nvPicPr>
         <p:blipFill>
-          <a:blip r:embed="rId3"/>
+          <a:blip r:embed="rId5"/>
           <a:stretch>
             <a:fillRect/>
           </a:stretch>
@@ -9065,7 +9106,7 @@
           <a:bodyPr wrap="square" lIns="0" tIns="0" rIns="0" bIns="0" rtlCol="0" anchor="ctr"/>
           <a:lstStyle/>
           <a:p>
-            <a:pPr indent="0" marL="0">
+            <a:pPr marL="0" indent="0">
               <a:buNone/>
             </a:pPr>
             <a:r>
@@ -9104,7 +9145,7 @@
           <a:bodyPr wrap="square" lIns="0" tIns="0" rIns="0" bIns="0" rtlCol="0" anchor="ctr"/>
           <a:lstStyle/>
           <a:p>
-            <a:pPr indent="0" marL="0">
+            <a:pPr marL="0" indent="0">
               <a:buNone/>
             </a:pPr>
             <a:r>
@@ -9143,7 +9184,7 @@
           <a:bodyPr wrap="square" lIns="0" tIns="0" rIns="0" bIns="0" rtlCol="0" anchor="ctr"/>
           <a:lstStyle/>
           <a:p>
-            <a:pPr algn="ctr" indent="0" marL="0">
+            <a:pPr marL="0" indent="0" algn="ctr">
               <a:buNone/>
             </a:pPr>
             <a:r>
@@ -9183,6 +9224,13 @@
             <a:prstDash val="solid"/>
           </a:ln>
         </p:spPr>
+        <p:txBody>
+          <a:bodyPr/>
+          <a:lstStyle/>
+          <a:p>
+            <a:endParaRPr lang="en-US"/>
+          </a:p>
+        </p:txBody>
       </p:sp>
       <p:sp>
         <p:nvSpPr>
@@ -9205,11 +9253,11 @@
           <a:bodyPr wrap="square" lIns="0" tIns="0" rIns="0" bIns="0" rtlCol="0" anchor="ctr"/>
           <a:lstStyle/>
           <a:p>
-            <a:pPr algn="l" indent="0" marL="0">
-              <a:buNone/>
-            </a:pPr>
-            <a:r>
-              <a:rPr lang="en-US" sz="900" i="1" spc="200" kern="0" dirty="0">
+            <a:pPr marL="0" indent="0" algn="l">
+              <a:buNone/>
+            </a:pPr>
+            <a:r>
+              <a:rPr lang="en-US" sz="900" i="1" kern="0" spc="200" dirty="0">
                 <a:solidFill>
                   <a:srgbClr val="6B6B6B"/>
                 </a:solidFill>
@@ -9244,7 +9292,7 @@
           <a:bodyPr wrap="square" lIns="0" tIns="0" rIns="0" bIns="0" rtlCol="0" anchor="ctr"/>
           <a:lstStyle/>
           <a:p>
-            <a:pPr algn="r" indent="0" marL="0">
+            <a:pPr marL="0" indent="0" algn="r">
               <a:buNone/>
             </a:pPr>
             <a:r>
@@ -9278,6 +9326,7 @@
         <a:solidFill>
           <a:srgbClr val="FFFFFF"/>
         </a:solidFill>
+        <a:effectLst/>
       </p:bgPr>
     </p:bg>
     <p:spTree>
@@ -9315,11 +9364,11 @@
           <a:bodyPr wrap="square" lIns="0" tIns="0" rIns="0" bIns="0" rtlCol="0" anchor="ctr"/>
           <a:lstStyle/>
           <a:p>
-            <a:pPr indent="0" marL="0">
-              <a:buNone/>
-            </a:pPr>
-            <a:r>
-              <a:rPr lang="en-US" sz="1100" b="1" spc="400" kern="0" dirty="0">
+            <a:pPr marL="0" indent="0">
+              <a:buNone/>
+            </a:pPr>
+            <a:r>
+              <a:rPr lang="en-US" sz="1100" b="1" kern="0" spc="400" dirty="0">
                 <a:solidFill>
                   <a:srgbClr val="8B1F2F"/>
                 </a:solidFill>
@@ -9327,7 +9376,7 @@
                 <a:ea typeface="Cambria" pitchFamily="34" charset="-122"/>
                 <a:cs typeface="Cambria" pitchFamily="34" charset="-120"/>
               </a:rPr>
-              <a:t>§ III  ·  RELIABILITY</a:t>
+              <a:t>III  ·  RELIABILITY</a:t>
             </a:r>
             <a:endParaRPr lang="en-US" sz="1100" dirty="0"/>
           </a:p>
@@ -9354,7 +9403,7 @@
           <a:bodyPr wrap="square" lIns="0" tIns="0" rIns="0" bIns="0" rtlCol="0" anchor="ctr"/>
           <a:lstStyle/>
           <a:p>
-            <a:pPr indent="0" marL="0">
+            <a:pPr marL="0" indent="0">
               <a:buNone/>
             </a:pPr>
             <a:r>
@@ -9393,7 +9442,7 @@
           <a:bodyPr wrap="square" lIns="0" tIns="0" rIns="0" bIns="0" rtlCol="0" anchor="ctr"/>
           <a:lstStyle/>
           <a:p>
-            <a:pPr indent="0" marL="0">
+            <a:pPr marL="0" indent="0">
               <a:buNone/>
             </a:pPr>
             <a:r>
@@ -9435,17 +9484,24 @@
             <a:prstDash val="solid"/>
           </a:ln>
         </p:spPr>
+        <p:txBody>
+          <a:bodyPr/>
+          <a:lstStyle/>
+          <a:p>
+            <a:endParaRPr lang="en-US"/>
+          </a:p>
+        </p:txBody>
       </p:sp>
       <p:pic>
         <p:nvPicPr>
-          <p:cNvPr id="6" name="Image 0" descr="preencoded.png">    </p:cNvPr>
+          <p:cNvPr id="6" name="Image 0" descr="preencoded.png"/>
           <p:cNvPicPr>
             <a:picLocks noChangeAspect="1"/>
           </p:cNvPicPr>
           <p:nvPr/>
         </p:nvPicPr>
         <p:blipFill>
-          <a:blip r:embed="rId1"/>
+          <a:blip r:embed="rId3"/>
           <a:stretch>
             <a:fillRect/>
           </a:stretch>
@@ -9481,7 +9537,7 @@
           <a:bodyPr wrap="square" lIns="0" tIns="0" rIns="0" bIns="0" rtlCol="0" anchor="ctr"/>
           <a:lstStyle/>
           <a:p>
-            <a:pPr indent="0" marL="0">
+            <a:pPr marL="0" indent="0">
               <a:buNone/>
             </a:pPr>
             <a:r>
@@ -9521,6 +9577,13 @@
             <a:prstDash val="solid"/>
           </a:ln>
         </p:spPr>
+        <p:txBody>
+          <a:bodyPr/>
+          <a:lstStyle/>
+          <a:p>
+            <a:endParaRPr lang="en-US"/>
+          </a:p>
+        </p:txBody>
       </p:sp>
       <p:sp>
         <p:nvSpPr>
@@ -9543,7 +9606,7 @@
           <a:bodyPr wrap="square" lIns="0" tIns="0" rIns="0" bIns="0" rtlCol="0" anchor="ctr"/>
           <a:lstStyle/>
           <a:p>
-            <a:pPr indent="0" marL="0">
+            <a:pPr marL="0" indent="0">
               <a:buNone/>
             </a:pPr>
             <a:r>
@@ -9585,17 +9648,24 @@
             <a:prstDash val="solid"/>
           </a:ln>
         </p:spPr>
+        <p:txBody>
+          <a:bodyPr/>
+          <a:lstStyle/>
+          <a:p>
+            <a:endParaRPr lang="en-US"/>
+          </a:p>
+        </p:txBody>
       </p:sp>
       <p:pic>
         <p:nvPicPr>
-          <p:cNvPr id="11" name="Image 1" descr="preencoded.png">    </p:cNvPr>
+          <p:cNvPr id="11" name="Image 1" descr="preencoded.png"/>
           <p:cNvPicPr>
             <a:picLocks noChangeAspect="1"/>
           </p:cNvPicPr>
           <p:nvPr/>
         </p:nvPicPr>
         <p:blipFill>
-          <a:blip r:embed="rId2"/>
+          <a:blip r:embed="rId4"/>
           <a:stretch>
             <a:fillRect/>
           </a:stretch>
@@ -9631,7 +9701,7 @@
           <a:bodyPr wrap="square" lIns="0" tIns="0" rIns="0" bIns="0" rtlCol="0" anchor="ctr"/>
           <a:lstStyle/>
           <a:p>
-            <a:pPr indent="0" marL="0">
+            <a:pPr marL="0" indent="0">
               <a:buNone/>
             </a:pPr>
             <a:r>
@@ -9671,6 +9741,13 @@
             <a:prstDash val="solid"/>
           </a:ln>
         </p:spPr>
+        <p:txBody>
+          <a:bodyPr/>
+          <a:lstStyle/>
+          <a:p>
+            <a:endParaRPr lang="en-US"/>
+          </a:p>
+        </p:txBody>
       </p:sp>
       <p:sp>
         <p:nvSpPr>
@@ -9693,7 +9770,7 @@
           <a:bodyPr wrap="square" lIns="0" tIns="0" rIns="0" bIns="0" rtlCol="0" anchor="ctr"/>
           <a:lstStyle/>
           <a:p>
-            <a:pPr indent="0" marL="0">
+            <a:pPr marL="0" indent="0">
               <a:buNone/>
             </a:pPr>
             <a:r>
@@ -9735,17 +9812,24 @@
             <a:prstDash val="solid"/>
           </a:ln>
         </p:spPr>
+        <p:txBody>
+          <a:bodyPr/>
+          <a:lstStyle/>
+          <a:p>
+            <a:endParaRPr lang="en-US"/>
+          </a:p>
+        </p:txBody>
       </p:sp>
       <p:pic>
         <p:nvPicPr>
-          <p:cNvPr id="16" name="Image 2" descr="preencoded.png">    </p:cNvPr>
+          <p:cNvPr id="16" name="Image 2" descr="preencoded.png"/>
           <p:cNvPicPr>
             <a:picLocks noChangeAspect="1"/>
           </p:cNvPicPr>
           <p:nvPr/>
         </p:nvPicPr>
         <p:blipFill>
-          <a:blip r:embed="rId3"/>
+          <a:blip r:embed="rId5"/>
           <a:stretch>
             <a:fillRect/>
           </a:stretch>
@@ -9781,7 +9865,7 @@
           <a:bodyPr wrap="square" lIns="0" tIns="0" rIns="0" bIns="0" rtlCol="0" anchor="ctr"/>
           <a:lstStyle/>
           <a:p>
-            <a:pPr indent="0" marL="0">
+            <a:pPr marL="0" indent="0">
               <a:buNone/>
             </a:pPr>
             <a:r>
@@ -9821,6 +9905,13 @@
             <a:prstDash val="solid"/>
           </a:ln>
         </p:spPr>
+        <p:txBody>
+          <a:bodyPr/>
+          <a:lstStyle/>
+          <a:p>
+            <a:endParaRPr lang="en-US"/>
+          </a:p>
+        </p:txBody>
       </p:sp>
       <p:sp>
         <p:nvSpPr>
@@ -9843,7 +9934,7 @@
           <a:bodyPr wrap="square" lIns="0" tIns="0" rIns="0" bIns="0" rtlCol="0" anchor="ctr"/>
           <a:lstStyle/>
           <a:p>
-            <a:pPr indent="0" marL="0">
+            <a:pPr marL="0" indent="0">
               <a:buNone/>
             </a:pPr>
             <a:r>
@@ -9885,17 +9976,24 @@
             <a:prstDash val="solid"/>
           </a:ln>
         </p:spPr>
+        <p:txBody>
+          <a:bodyPr/>
+          <a:lstStyle/>
+          <a:p>
+            <a:endParaRPr lang="en-US"/>
+          </a:p>
+        </p:txBody>
       </p:sp>
       <p:pic>
         <p:nvPicPr>
-          <p:cNvPr id="21" name="Image 3" descr="preencoded.png">    </p:cNvPr>
+          <p:cNvPr id="21" name="Image 3" descr="preencoded.png"/>
           <p:cNvPicPr>
             <a:picLocks noChangeAspect="1"/>
           </p:cNvPicPr>
           <p:nvPr/>
         </p:nvPicPr>
         <p:blipFill>
-          <a:blip r:embed="rId4"/>
+          <a:blip r:embed="rId6"/>
           <a:stretch>
             <a:fillRect/>
           </a:stretch>
@@ -9931,7 +10029,7 @@
           <a:bodyPr wrap="square" lIns="0" tIns="0" rIns="0" bIns="0" rtlCol="0" anchor="ctr"/>
           <a:lstStyle/>
           <a:p>
-            <a:pPr indent="0" marL="0">
+            <a:pPr marL="0" indent="0">
               <a:buNone/>
             </a:pPr>
             <a:r>
@@ -9971,6 +10069,13 @@
             <a:prstDash val="solid"/>
           </a:ln>
         </p:spPr>
+        <p:txBody>
+          <a:bodyPr/>
+          <a:lstStyle/>
+          <a:p>
+            <a:endParaRPr lang="en-US"/>
+          </a:p>
+        </p:txBody>
       </p:sp>
       <p:sp>
         <p:nvSpPr>
@@ -9993,7 +10098,7 @@
           <a:bodyPr wrap="square" lIns="0" tIns="0" rIns="0" bIns="0" rtlCol="0" anchor="ctr"/>
           <a:lstStyle/>
           <a:p>
-            <a:pPr indent="0" marL="0">
+            <a:pPr marL="0" indent="0">
               <a:buNone/>
             </a:pPr>
             <a:r>
@@ -10032,7 +10137,7 @@
           <a:bodyPr wrap="square" lIns="0" tIns="0" rIns="0" bIns="0" rtlCol="0" anchor="ctr"/>
           <a:lstStyle/>
           <a:p>
-            <a:pPr algn="ctr" indent="0" marL="0">
+            <a:pPr marL="0" indent="0" algn="ctr">
               <a:buNone/>
             </a:pPr>
             <a:r>
@@ -10072,6 +10177,13 @@
             <a:prstDash val="solid"/>
           </a:ln>
         </p:spPr>
+        <p:txBody>
+          <a:bodyPr/>
+          <a:lstStyle/>
+          <a:p>
+            <a:endParaRPr lang="en-US"/>
+          </a:p>
+        </p:txBody>
       </p:sp>
       <p:sp>
         <p:nvSpPr>
@@ -10094,11 +10206,11 @@
           <a:bodyPr wrap="square" lIns="0" tIns="0" rIns="0" bIns="0" rtlCol="0" anchor="ctr"/>
           <a:lstStyle/>
           <a:p>
-            <a:pPr algn="l" indent="0" marL="0">
-              <a:buNone/>
-            </a:pPr>
-            <a:r>
-              <a:rPr lang="en-US" sz="900" i="1" spc="200" kern="0" dirty="0">
+            <a:pPr marL="0" indent="0" algn="l">
+              <a:buNone/>
+            </a:pPr>
+            <a:r>
+              <a:rPr lang="en-US" sz="900" i="1" kern="0" spc="200" dirty="0">
                 <a:solidFill>
                   <a:srgbClr val="6B6B6B"/>
                 </a:solidFill>
@@ -10133,7 +10245,7 @@
           <a:bodyPr wrap="square" lIns="0" tIns="0" rIns="0" bIns="0" rtlCol="0" anchor="ctr"/>
           <a:lstStyle/>
           <a:p>
-            <a:pPr algn="r" indent="0" marL="0">
+            <a:pPr marL="0" indent="0" algn="r">
               <a:buNone/>
             </a:pPr>
             <a:r>
@@ -10167,6 +10279,7 @@
         <a:solidFill>
           <a:srgbClr val="FFFFFF"/>
         </a:solidFill>
+        <a:effectLst/>
       </p:bgPr>
     </p:bg>
     <p:spTree>
@@ -10204,11 +10317,11 @@
           <a:bodyPr wrap="square" lIns="0" tIns="0" rIns="0" bIns="0" rtlCol="0" anchor="ctr"/>
           <a:lstStyle/>
           <a:p>
-            <a:pPr indent="0" marL="0">
-              <a:buNone/>
-            </a:pPr>
-            <a:r>
-              <a:rPr lang="en-US" sz="1100" b="1" spc="400" kern="0" dirty="0">
+            <a:pPr marL="0" indent="0">
+              <a:buNone/>
+            </a:pPr>
+            <a:r>
+              <a:rPr lang="en-US" sz="1100" b="1" kern="0" spc="400" dirty="0">
                 <a:solidFill>
                   <a:srgbClr val="8B1F2F"/>
                 </a:solidFill>
@@ -10216,7 +10329,7 @@
                 <a:ea typeface="Cambria" pitchFamily="34" charset="-122"/>
                 <a:cs typeface="Cambria" pitchFamily="34" charset="-120"/>
               </a:rPr>
-              <a:t>§ III.1  ·  EMPIRICAL EVALUATION</a:t>
+              <a:t>III.1  ·  EMPIRICAL EVALUATION</a:t>
             </a:r>
             <a:endParaRPr lang="en-US" sz="1100" dirty="0"/>
           </a:p>
@@ -10243,7 +10356,7 @@
           <a:bodyPr wrap="square" lIns="0" tIns="0" rIns="0" bIns="0" rtlCol="0" anchor="ctr"/>
           <a:lstStyle/>
           <a:p>
-            <a:pPr indent="0" marL="0">
+            <a:pPr marL="0" indent="0">
               <a:buNone/>
             </a:pPr>
             <a:r>
@@ -10282,7 +10395,7 @@
           <a:bodyPr wrap="square" lIns="0" tIns="0" rIns="0" bIns="0" rtlCol="0" anchor="ctr"/>
           <a:lstStyle/>
           <a:p>
-            <a:pPr indent="0" marL="0">
+            <a:pPr marL="0" indent="0">
               <a:buNone/>
             </a:pPr>
             <a:r>
@@ -10302,7 +10415,7 @@
       </p:sp>
       <p:graphicFrame>
         <p:nvGraphicFramePr>
-          <p:cNvPr id="5" name="Chart 0" descr=""/>
+          <p:cNvPr id="5" name="Chart 0"/>
           <p:cNvGraphicFramePr/>
           <p:nvPr/>
         </p:nvGraphicFramePr>
@@ -10310,9 +10423,9 @@
           <a:off x="457200" y="1783080"/>
           <a:ext cx="5120640" cy="2606040"/>
         </p:xfrm>
-        <a:graphic xmlns:a="http://schemas.openxmlformats.org/drawingml/2006/main">
+        <a:graphic>
           <a:graphicData uri="http://schemas.openxmlformats.org/drawingml/2006/chart">
-            <c:chart xmlns:c="http://schemas.openxmlformats.org/drawingml/2006/chart" r:id="rId1"/>
+            <c:chart xmlns:c="http://schemas.openxmlformats.org/drawingml/2006/chart" xmlns:r="http://schemas.openxmlformats.org/officeDocument/2006/relationships" r:id="rId3"/>
           </a:graphicData>
         </a:graphic>
       </p:graphicFrame>
@@ -10340,6 +10453,13 @@
             <a:prstDash val="solid"/>
           </a:ln>
         </p:spPr>
+        <p:txBody>
+          <a:bodyPr/>
+          <a:lstStyle/>
+          <a:p>
+            <a:endParaRPr lang="en-US"/>
+          </a:p>
+        </p:txBody>
       </p:sp>
       <p:sp>
         <p:nvSpPr>
@@ -10362,7 +10482,7 @@
           <a:bodyPr wrap="square" lIns="0" tIns="0" rIns="0" bIns="0" rtlCol="0" anchor="ctr"/>
           <a:lstStyle/>
           <a:p>
-            <a:pPr indent="0" marL="0">
+            <a:pPr marL="0" indent="0">
               <a:buNone/>
             </a:pPr>
             <a:r>
@@ -10402,6 +10522,13 @@
             <a:prstDash val="solid"/>
           </a:ln>
         </p:spPr>
+        <p:txBody>
+          <a:bodyPr/>
+          <a:lstStyle/>
+          <a:p>
+            <a:endParaRPr lang="en-US"/>
+          </a:p>
+        </p:txBody>
       </p:sp>
       <p:sp>
         <p:nvSpPr>
@@ -10424,7 +10551,7 @@
           <a:bodyPr wrap="square" lIns="0" tIns="0" rIns="0" bIns="0" rtlCol="0" anchor="ctr"/>
           <a:lstStyle/>
           <a:p>
-            <a:pPr indent="0" marL="0">
+            <a:pPr marL="0" indent="0">
               <a:buNone/>
             </a:pPr>
             <a:r>
@@ -10463,7 +10590,7 @@
           <a:bodyPr wrap="square" lIns="0" tIns="0" rIns="0" bIns="0" rtlCol="0" anchor="ctr"/>
           <a:lstStyle/>
           <a:p>
-            <a:pPr indent="0" marL="0">
+            <a:pPr marL="0" indent="0">
               <a:buNone/>
             </a:pPr>
             <a:r>
@@ -10502,7 +10629,7 @@
           <a:bodyPr wrap="square" lIns="0" tIns="0" rIns="0" bIns="0" rtlCol="0" anchor="ctr"/>
           <a:lstStyle/>
           <a:p>
-            <a:pPr indent="0" marL="0">
+            <a:pPr marL="0" indent="0">
               <a:buNone/>
             </a:pPr>
             <a:r>
@@ -10541,7 +10668,7 @@
           <a:bodyPr wrap="square" lIns="0" tIns="0" rIns="0" bIns="0" rtlCol="0" anchor="ctr"/>
           <a:lstStyle/>
           <a:p>
-            <a:pPr indent="0" marL="0">
+            <a:pPr marL="0" indent="0">
               <a:buNone/>
             </a:pPr>
             <a:r>
@@ -10580,7 +10707,7 @@
           <a:bodyPr wrap="square" lIns="0" tIns="0" rIns="0" bIns="0" rtlCol="0" anchor="ctr"/>
           <a:lstStyle/>
           <a:p>
-            <a:pPr indent="0" marL="0">
+            <a:pPr marL="0" indent="0">
               <a:buNone/>
             </a:pPr>
             <a:r>
@@ -10619,7 +10746,7 @@
           <a:bodyPr wrap="square" lIns="0" tIns="0" rIns="0" bIns="0" rtlCol="0" anchor="ctr"/>
           <a:lstStyle/>
           <a:p>
-            <a:pPr algn="ctr" indent="0" marL="0">
+            <a:pPr marL="0" indent="0" algn="ctr">
               <a:buNone/>
             </a:pPr>
             <a:r>
@@ -10659,6 +10786,13 @@
             <a:prstDash val="solid"/>
           </a:ln>
         </p:spPr>
+        <p:txBody>
+          <a:bodyPr/>
+          <a:lstStyle/>
+          <a:p>
+            <a:endParaRPr lang="en-US"/>
+          </a:p>
+        </p:txBody>
       </p:sp>
       <p:sp>
         <p:nvSpPr>
@@ -10681,11 +10815,11 @@
           <a:bodyPr wrap="square" lIns="0" tIns="0" rIns="0" bIns="0" rtlCol="0" anchor="ctr"/>
           <a:lstStyle/>
           <a:p>
-            <a:pPr algn="l" indent="0" marL="0">
-              <a:buNone/>
-            </a:pPr>
-            <a:r>
-              <a:rPr lang="en-US" sz="900" i="1" spc="200" kern="0" dirty="0">
+            <a:pPr marL="0" indent="0" algn="l">
+              <a:buNone/>
+            </a:pPr>
+            <a:r>
+              <a:rPr lang="en-US" sz="900" i="1" kern="0" spc="200" dirty="0">
                 <a:solidFill>
                   <a:srgbClr val="6B6B6B"/>
                 </a:solidFill>
@@ -10720,7 +10854,7 @@
           <a:bodyPr wrap="square" lIns="0" tIns="0" rIns="0" bIns="0" rtlCol="0" anchor="ctr"/>
           <a:lstStyle/>
           <a:p>
-            <a:pPr algn="r" indent="0" marL="0">
+            <a:pPr marL="0" indent="0" algn="r">
               <a:buNone/>
             </a:pPr>
             <a:r>
@@ -10754,6 +10888,7 @@
         <a:solidFill>
           <a:srgbClr val="FFFFFF"/>
         </a:solidFill>
+        <a:effectLst/>
       </p:bgPr>
     </p:bg>
     <p:spTree>
@@ -10791,11 +10926,11 @@
           <a:bodyPr wrap="square" lIns="0" tIns="0" rIns="0" bIns="0" rtlCol="0" anchor="ctr"/>
           <a:lstStyle/>
           <a:p>
-            <a:pPr indent="0" marL="0">
-              <a:buNone/>
-            </a:pPr>
-            <a:r>
-              <a:rPr lang="en-US" sz="1100" b="1" spc="400" kern="0" dirty="0">
+            <a:pPr marL="0" indent="0">
+              <a:buNone/>
+            </a:pPr>
+            <a:r>
+              <a:rPr lang="en-US" sz="1100" b="1" kern="0" spc="400" dirty="0">
                 <a:solidFill>
                   <a:srgbClr val="8B1F2F"/>
                 </a:solidFill>
@@ -10803,7 +10938,7 @@
                 <a:ea typeface="Cambria" pitchFamily="34" charset="-122"/>
                 <a:cs typeface="Cambria" pitchFamily="34" charset="-120"/>
               </a:rPr>
-              <a:t>§ IV  ·  SCALABILITY</a:t>
+              <a:t>IV  ·  SCALABILITY</a:t>
             </a:r>
             <a:endParaRPr lang="en-US" sz="1100" dirty="0"/>
           </a:p>
@@ -10830,7 +10965,7 @@
           <a:bodyPr wrap="square" lIns="0" tIns="0" rIns="0" bIns="0" rtlCol="0" anchor="ctr"/>
           <a:lstStyle/>
           <a:p>
-            <a:pPr indent="0" marL="0">
+            <a:pPr marL="0" indent="0">
               <a:buNone/>
             </a:pPr>
             <a:r>
@@ -10869,7 +11004,7 @@
           <a:bodyPr wrap="square" lIns="0" tIns="0" rIns="0" bIns="0" rtlCol="0" anchor="ctr"/>
           <a:lstStyle/>
           <a:p>
-            <a:pPr indent="0" marL="0">
+            <a:pPr marL="0" indent="0">
               <a:buNone/>
             </a:pPr>
             <a:r>
@@ -10889,7 +11024,7 @@
       </p:sp>
       <p:graphicFrame>
         <p:nvGraphicFramePr>
-          <p:cNvPr id="5" name="Chart 0" descr=""/>
+          <p:cNvPr id="5" name="Chart 0"/>
           <p:cNvGraphicFramePr/>
           <p:nvPr/>
         </p:nvGraphicFramePr>
@@ -10897,9 +11032,9 @@
           <a:off x="457200" y="1783080"/>
           <a:ext cx="4937760" cy="2606040"/>
         </p:xfrm>
-        <a:graphic xmlns:a="http://schemas.openxmlformats.org/drawingml/2006/main">
+        <a:graphic>
           <a:graphicData uri="http://schemas.openxmlformats.org/drawingml/2006/chart">
-            <c:chart xmlns:c="http://schemas.openxmlformats.org/drawingml/2006/chart" r:id="rId1"/>
+            <c:chart xmlns:c="http://schemas.openxmlformats.org/drawingml/2006/chart" xmlns:r="http://schemas.openxmlformats.org/officeDocument/2006/relationships" r:id="rId3"/>
           </a:graphicData>
         </a:graphic>
       </p:graphicFrame>
@@ -10927,6 +11062,13 @@
             <a:prstDash val="solid"/>
           </a:ln>
         </p:spPr>
+        <p:txBody>
+          <a:bodyPr/>
+          <a:lstStyle/>
+          <a:p>
+            <a:endParaRPr lang="en-US"/>
+          </a:p>
+        </p:txBody>
       </p:sp>
       <p:sp>
         <p:nvSpPr>
@@ -10949,7 +11091,7 @@
           <a:bodyPr wrap="square" lIns="0" tIns="0" rIns="0" bIns="0" rtlCol="0" anchor="ctr"/>
           <a:lstStyle/>
           <a:p>
-            <a:pPr indent="0" marL="0">
+            <a:pPr marL="0" indent="0">
               <a:buNone/>
             </a:pPr>
             <a:r>
@@ -10989,6 +11131,13 @@
             <a:prstDash val="solid"/>
           </a:ln>
         </p:spPr>
+        <p:txBody>
+          <a:bodyPr/>
+          <a:lstStyle/>
+          <a:p>
+            <a:endParaRPr lang="en-US"/>
+          </a:p>
+        </p:txBody>
       </p:sp>
       <p:sp>
         <p:nvSpPr>
@@ -11011,7 +11160,7 @@
           <a:bodyPr wrap="square" lIns="0" tIns="0" rIns="0" bIns="0" rtlCol="0" anchor="ctr"/>
           <a:lstStyle/>
           <a:p>
-            <a:pPr indent="0" marL="0">
+            <a:pPr marL="0" indent="0">
               <a:buNone/>
             </a:pPr>
             <a:r>
@@ -11053,6 +11202,13 @@
             <a:prstDash val="solid"/>
           </a:ln>
         </p:spPr>
+        <p:txBody>
+          <a:bodyPr/>
+          <a:lstStyle/>
+          <a:p>
+            <a:endParaRPr lang="en-US"/>
+          </a:p>
+        </p:txBody>
       </p:sp>
       <p:sp>
         <p:nvSpPr>
@@ -11075,7 +11231,7 @@
           <a:bodyPr wrap="square" lIns="0" tIns="0" rIns="0" bIns="0" rtlCol="0" anchor="ctr"/>
           <a:lstStyle/>
           <a:p>
-            <a:pPr indent="0" marL="0">
+            <a:pPr marL="0" indent="0">
               <a:buNone/>
             </a:pPr>
             <a:r>
@@ -11114,7 +11270,7 @@
           <a:bodyPr wrap="square" lIns="0" tIns="0" rIns="0" bIns="0" rtlCol="0" anchor="ctr"/>
           <a:lstStyle/>
           <a:p>
-            <a:pPr indent="0" marL="0">
+            <a:pPr marL="0" indent="0">
               <a:buNone/>
             </a:pPr>
             <a:r>
@@ -11156,6 +11312,13 @@
             <a:prstDash val="solid"/>
           </a:ln>
         </p:spPr>
+        <p:txBody>
+          <a:bodyPr/>
+          <a:lstStyle/>
+          <a:p>
+            <a:endParaRPr lang="en-US"/>
+          </a:p>
+        </p:txBody>
       </p:sp>
       <p:sp>
         <p:nvSpPr>
@@ -11178,7 +11341,7 @@
           <a:bodyPr wrap="square" lIns="0" tIns="0" rIns="0" bIns="0" rtlCol="0" anchor="ctr"/>
           <a:lstStyle/>
           <a:p>
-            <a:pPr indent="0" marL="0">
+            <a:pPr marL="0" indent="0">
               <a:buNone/>
             </a:pPr>
             <a:r>
@@ -11217,7 +11380,7 @@
           <a:bodyPr wrap="square" lIns="0" tIns="0" rIns="0" bIns="0" rtlCol="0" anchor="ctr"/>
           <a:lstStyle/>
           <a:p>
-            <a:pPr indent="0" marL="0">
+            <a:pPr marL="0" indent="0">
               <a:buNone/>
             </a:pPr>
             <a:r>
@@ -11259,6 +11422,13 @@
             <a:prstDash val="solid"/>
           </a:ln>
         </p:spPr>
+        <p:txBody>
+          <a:bodyPr/>
+          <a:lstStyle/>
+          <a:p>
+            <a:endParaRPr lang="en-US"/>
+          </a:p>
+        </p:txBody>
       </p:sp>
       <p:sp>
         <p:nvSpPr>
@@ -11281,7 +11451,7 @@
           <a:bodyPr wrap="square" lIns="0" tIns="0" rIns="0" bIns="0" rtlCol="0" anchor="ctr"/>
           <a:lstStyle/>
           <a:p>
-            <a:pPr indent="0" marL="0">
+            <a:pPr marL="0" indent="0">
               <a:buNone/>
             </a:pPr>
             <a:r>
@@ -11320,7 +11490,7 @@
           <a:bodyPr wrap="square" lIns="0" tIns="0" rIns="0" bIns="0" rtlCol="0" anchor="ctr"/>
           <a:lstStyle/>
           <a:p>
-            <a:pPr indent="0" marL="0">
+            <a:pPr marL="0" indent="0">
               <a:buNone/>
             </a:pPr>
             <a:r>
@@ -11359,7 +11529,7 @@
           <a:bodyPr wrap="square" lIns="0" tIns="0" rIns="0" bIns="0" rtlCol="0" anchor="ctr"/>
           <a:lstStyle/>
           <a:p>
-            <a:pPr algn="ctr" indent="0" marL="0">
+            <a:pPr marL="0" indent="0" algn="ctr">
               <a:buNone/>
             </a:pPr>
             <a:r>
@@ -11399,6 +11569,13 @@
             <a:prstDash val="solid"/>
           </a:ln>
         </p:spPr>
+        <p:txBody>
+          <a:bodyPr/>
+          <a:lstStyle/>
+          <a:p>
+            <a:endParaRPr lang="en-US"/>
+          </a:p>
+        </p:txBody>
       </p:sp>
       <p:sp>
         <p:nvSpPr>
@@ -11421,11 +11598,11 @@
           <a:bodyPr wrap="square" lIns="0" tIns="0" rIns="0" bIns="0" rtlCol="0" anchor="ctr"/>
           <a:lstStyle/>
           <a:p>
-            <a:pPr algn="l" indent="0" marL="0">
-              <a:buNone/>
-            </a:pPr>
-            <a:r>
-              <a:rPr lang="en-US" sz="900" i="1" spc="200" kern="0" dirty="0">
+            <a:pPr marL="0" indent="0" algn="l">
+              <a:buNone/>
+            </a:pPr>
+            <a:r>
+              <a:rPr lang="en-US" sz="900" i="1" kern="0" spc="200" dirty="0">
                 <a:solidFill>
                   <a:srgbClr val="6B6B6B"/>
                 </a:solidFill>
@@ -11460,7 +11637,7 @@
           <a:bodyPr wrap="square" lIns="0" tIns="0" rIns="0" bIns="0" rtlCol="0" anchor="ctr"/>
           <a:lstStyle/>
           <a:p>
-            <a:pPr algn="r" indent="0" marL="0">
+            <a:pPr marL="0" indent="0" algn="r">
               <a:buNone/>
             </a:pPr>
             <a:r>
@@ -11494,6 +11671,7 @@
         <a:solidFill>
           <a:srgbClr val="FFFFFF"/>
         </a:solidFill>
+        <a:effectLst/>
       </p:bgPr>
     </p:bg>
     <p:spTree>
@@ -11531,11 +11709,11 @@
           <a:bodyPr wrap="square" lIns="0" tIns="0" rIns="0" bIns="0" rtlCol="0" anchor="ctr"/>
           <a:lstStyle/>
           <a:p>
-            <a:pPr indent="0" marL="0">
-              <a:buNone/>
-            </a:pPr>
-            <a:r>
-              <a:rPr lang="en-US" sz="1100" b="1" spc="400" kern="0" dirty="0">
+            <a:pPr marL="0" indent="0">
+              <a:buNone/>
+            </a:pPr>
+            <a:r>
+              <a:rPr lang="en-US" sz="1100" b="1" kern="0" spc="400" dirty="0">
                 <a:solidFill>
                   <a:srgbClr val="8B1F2F"/>
                 </a:solidFill>
@@ -11543,7 +11721,7 @@
                 <a:ea typeface="Cambria" pitchFamily="34" charset="-122"/>
                 <a:cs typeface="Cambria" pitchFamily="34" charset="-120"/>
               </a:rPr>
-              <a:t>§ V  ·  OBSERVABILITY</a:t>
+              <a:t>V  ·  OBSERVABILITY</a:t>
             </a:r>
             <a:endParaRPr lang="en-US" sz="1100" dirty="0"/>
           </a:p>
@@ -11570,7 +11748,7 @@
           <a:bodyPr wrap="square" lIns="0" tIns="0" rIns="0" bIns="0" rtlCol="0" anchor="ctr"/>
           <a:lstStyle/>
           <a:p>
-            <a:pPr indent="0" marL="0">
+            <a:pPr marL="0" indent="0">
               <a:buNone/>
             </a:pPr>
             <a:r>
@@ -11609,7 +11787,7 @@
           <a:bodyPr wrap="square" lIns="0" tIns="0" rIns="0" bIns="0" rtlCol="0" anchor="ctr"/>
           <a:lstStyle/>
           <a:p>
-            <a:pPr indent="0" marL="0">
+            <a:pPr marL="0" indent="0">
               <a:buNone/>
             </a:pPr>
             <a:r>
@@ -11651,6 +11829,13 @@
             <a:prstDash val="solid"/>
           </a:ln>
         </p:spPr>
+        <p:txBody>
+          <a:bodyPr/>
+          <a:lstStyle/>
+          <a:p>
+            <a:endParaRPr lang="en-US"/>
+          </a:p>
+        </p:txBody>
       </p:sp>
       <p:sp>
         <p:nvSpPr>
@@ -11673,7 +11858,7 @@
           <a:bodyPr wrap="square" lIns="0" tIns="0" rIns="0" bIns="0" rtlCol="0" anchor="ctr"/>
           <a:lstStyle/>
           <a:p>
-            <a:pPr indent="0" marL="0">
+            <a:pPr marL="0" indent="0">
               <a:buNone/>
             </a:pPr>
             <a:r>
@@ -11713,6 +11898,13 @@
             <a:prstDash val="solid"/>
           </a:ln>
         </p:spPr>
+        <p:txBody>
+          <a:bodyPr/>
+          <a:lstStyle/>
+          <a:p>
+            <a:endParaRPr lang="en-US"/>
+          </a:p>
+        </p:txBody>
       </p:sp>
       <p:sp>
         <p:nvSpPr>
@@ -11735,7 +11927,7 @@
           <a:bodyPr wrap="square" lIns="0" tIns="0" rIns="0" bIns="0" rtlCol="0" anchor="ctr"/>
           <a:lstStyle/>
           <a:p>
-            <a:pPr indent="0" marL="0">
+            <a:pPr marL="0" indent="0">
               <a:buNone/>
             </a:pPr>
             <a:r>
@@ -11774,7 +11966,7 @@
           <a:bodyPr wrap="square" lIns="0" tIns="0" rIns="0" bIns="0" rtlCol="0" anchor="ctr"/>
           <a:lstStyle/>
           <a:p>
-            <a:pPr algn="r" indent="0" marL="0">
+            <a:pPr marL="0" indent="0" algn="r">
               <a:buNone/>
             </a:pPr>
             <a:r>
@@ -11813,7 +12005,7 @@
           <a:bodyPr wrap="square" lIns="0" tIns="0" rIns="0" bIns="0" rtlCol="0" anchor="ctr"/>
           <a:lstStyle/>
           <a:p>
-            <a:pPr indent="0" marL="0">
+            <a:pPr marL="0" indent="0">
               <a:buNone/>
             </a:pPr>
             <a:r>
@@ -11852,7 +12044,7 @@
           <a:bodyPr wrap="square" lIns="0" tIns="0" rIns="0" bIns="0" rtlCol="0" anchor="ctr"/>
           <a:lstStyle/>
           <a:p>
-            <a:pPr algn="r" indent="0" marL="0">
+            <a:pPr marL="0" indent="0" algn="r">
               <a:buNone/>
             </a:pPr>
             <a:r>
@@ -11891,7 +12083,7 @@
           <a:bodyPr wrap="square" lIns="0" tIns="0" rIns="0" bIns="0" rtlCol="0" anchor="ctr"/>
           <a:lstStyle/>
           <a:p>
-            <a:pPr indent="0" marL="0">
+            <a:pPr marL="0" indent="0">
               <a:buNone/>
             </a:pPr>
             <a:r>
@@ -11930,7 +12122,7 @@
           <a:bodyPr wrap="square" lIns="0" tIns="0" rIns="0" bIns="0" rtlCol="0" anchor="ctr"/>
           <a:lstStyle/>
           <a:p>
-            <a:pPr algn="r" indent="0" marL="0">
+            <a:pPr marL="0" indent="0" algn="r">
               <a:buNone/>
             </a:pPr>
             <a:r>
@@ -11969,7 +12161,7 @@
           <a:bodyPr wrap="square" lIns="0" tIns="0" rIns="0" bIns="0" rtlCol="0" anchor="ctr"/>
           <a:lstStyle/>
           <a:p>
-            <a:pPr indent="0" marL="0">
+            <a:pPr marL="0" indent="0">
               <a:buNone/>
             </a:pPr>
             <a:r>
@@ -12008,7 +12200,7 @@
           <a:bodyPr wrap="square" lIns="0" tIns="0" rIns="0" bIns="0" rtlCol="0" anchor="ctr"/>
           <a:lstStyle/>
           <a:p>
-            <a:pPr algn="r" indent="0" marL="0">
+            <a:pPr marL="0" indent="0" algn="r">
               <a:buNone/>
             </a:pPr>
             <a:r>
@@ -12047,7 +12239,7 @@
           <a:bodyPr wrap="square" lIns="0" tIns="0" rIns="0" bIns="0" rtlCol="0" anchor="ctr"/>
           <a:lstStyle/>
           <a:p>
-            <a:pPr indent="0" marL="0">
+            <a:pPr marL="0" indent="0">
               <a:buNone/>
             </a:pPr>
             <a:r>
@@ -12086,7 +12278,7 @@
           <a:bodyPr wrap="square" lIns="0" tIns="0" rIns="0" bIns="0" rtlCol="0" anchor="ctr"/>
           <a:lstStyle/>
           <a:p>
-            <a:pPr algn="r" indent="0" marL="0">
+            <a:pPr marL="0" indent="0" algn="r">
               <a:buNone/>
             </a:pPr>
             <a:r>
@@ -12125,7 +12317,7 @@
           <a:bodyPr wrap="square" lIns="0" tIns="0" rIns="0" bIns="0" rtlCol="0" anchor="ctr"/>
           <a:lstStyle/>
           <a:p>
-            <a:pPr indent="0" marL="0">
+            <a:pPr marL="0" indent="0">
               <a:buNone/>
             </a:pPr>
             <a:r>
@@ -12164,7 +12356,7 @@
           <a:bodyPr wrap="square" lIns="0" tIns="0" rIns="0" bIns="0" rtlCol="0" anchor="ctr"/>
           <a:lstStyle/>
           <a:p>
-            <a:pPr algn="r" indent="0" marL="0">
+            <a:pPr marL="0" indent="0" algn="r">
               <a:buNone/>
             </a:pPr>
             <a:r>
@@ -12203,7 +12395,7 @@
           <a:bodyPr wrap="square" lIns="0" tIns="0" rIns="0" bIns="0" rtlCol="0" anchor="ctr"/>
           <a:lstStyle/>
           <a:p>
-            <a:pPr indent="0" marL="0">
+            <a:pPr marL="0" indent="0">
               <a:buNone/>
             </a:pPr>
             <a:r>
@@ -12242,7 +12434,7 @@
           <a:bodyPr wrap="square" lIns="0" tIns="0" rIns="0" bIns="0" rtlCol="0" anchor="ctr"/>
           <a:lstStyle/>
           <a:p>
-            <a:pPr algn="r" indent="0" marL="0">
+            <a:pPr marL="0" indent="0" algn="r">
               <a:buNone/>
             </a:pPr>
             <a:r>
@@ -12284,6 +12476,13 @@
             <a:prstDash val="solid"/>
           </a:ln>
         </p:spPr>
+        <p:txBody>
+          <a:bodyPr/>
+          <a:lstStyle/>
+          <a:p>
+            <a:endParaRPr lang="en-US"/>
+          </a:p>
+        </p:txBody>
       </p:sp>
       <p:sp>
         <p:nvSpPr>
@@ -12306,7 +12505,7 @@
           <a:bodyPr wrap="square" lIns="0" tIns="0" rIns="0" bIns="0" rtlCol="0" anchor="ctr"/>
           <a:lstStyle/>
           <a:p>
-            <a:pPr indent="0" marL="0">
+            <a:pPr marL="0" indent="0">
               <a:buNone/>
             </a:pPr>
             <a:r>
@@ -12346,6 +12545,13 @@
             <a:prstDash val="solid"/>
           </a:ln>
         </p:spPr>
+        <p:txBody>
+          <a:bodyPr/>
+          <a:lstStyle/>
+          <a:p>
+            <a:endParaRPr lang="en-US"/>
+          </a:p>
+        </p:txBody>
       </p:sp>
       <p:sp>
         <p:nvSpPr>
@@ -12368,7 +12574,7 @@
           <a:bodyPr wrap="square" lIns="0" tIns="0" rIns="0" bIns="0" rtlCol="0" anchor="ctr"/>
           <a:lstStyle/>
           <a:p>
-            <a:pPr indent="0" marL="0">
+            <a:pPr marL="0" indent="0">
               <a:buNone/>
             </a:pPr>
             <a:r>
@@ -12407,7 +12613,7 @@
           <a:bodyPr wrap="square" lIns="0" tIns="0" rIns="0" bIns="0" rtlCol="0" anchor="ctr"/>
           <a:lstStyle/>
           <a:p>
-            <a:pPr indent="0" marL="0">
+            <a:pPr marL="0" indent="0">
               <a:buNone/>
             </a:pPr>
             <a:r>
@@ -12446,7 +12652,7 @@
           <a:bodyPr wrap="square" lIns="0" tIns="0" rIns="0" bIns="0" rtlCol="0" anchor="ctr"/>
           <a:lstStyle/>
           <a:p>
-            <a:pPr indent="0" marL="0">
+            <a:pPr marL="0" indent="0">
               <a:buNone/>
             </a:pPr>
             <a:r>
@@ -12485,7 +12691,7 @@
           <a:bodyPr wrap="square" lIns="0" tIns="0" rIns="0" bIns="0" rtlCol="0" anchor="ctr"/>
           <a:lstStyle/>
           <a:p>
-            <a:pPr indent="0" marL="0">
+            <a:pPr marL="0" indent="0">
               <a:buNone/>
             </a:pPr>
             <a:r>
@@ -12527,6 +12733,13 @@
             <a:prstDash val="solid"/>
           </a:ln>
         </p:spPr>
+        <p:txBody>
+          <a:bodyPr/>
+          <a:lstStyle/>
+          <a:p>
+            <a:endParaRPr lang="en-US"/>
+          </a:p>
+        </p:txBody>
       </p:sp>
       <p:sp>
         <p:nvSpPr>
@@ -12549,7 +12762,7 @@
           <a:bodyPr wrap="square" lIns="0" tIns="0" rIns="0" bIns="0" rtlCol="0" anchor="ctr"/>
           <a:lstStyle/>
           <a:p>
-            <a:pPr indent="0" marL="0">
+            <a:pPr marL="0" indent="0">
               <a:buNone/>
             </a:pPr>
             <a:r>
@@ -12588,7 +12801,7 @@
           <a:bodyPr wrap="square" lIns="0" tIns="0" rIns="0" bIns="0" rtlCol="0" anchor="ctr"/>
           <a:lstStyle/>
           <a:p>
-            <a:pPr indent="0" marL="0">
+            <a:pPr marL="0" indent="0">
               <a:buNone/>
             </a:pPr>
             <a:r>
@@ -12627,7 +12840,7 @@
           <a:bodyPr wrap="square" lIns="0" tIns="0" rIns="0" bIns="0" rtlCol="0" anchor="ctr"/>
           <a:lstStyle/>
           <a:p>
-            <a:pPr algn="ctr" indent="0" marL="0">
+            <a:pPr marL="0" indent="0" algn="ctr">
               <a:buNone/>
             </a:pPr>
             <a:r>
@@ -12667,6 +12880,13 @@
             <a:prstDash val="solid"/>
           </a:ln>
         </p:spPr>
+        <p:txBody>
+          <a:bodyPr/>
+          <a:lstStyle/>
+          <a:p>
+            <a:endParaRPr lang="en-US"/>
+          </a:p>
+        </p:txBody>
       </p:sp>
       <p:sp>
         <p:nvSpPr>
@@ -12689,11 +12909,11 @@
           <a:bodyPr wrap="square" lIns="0" tIns="0" rIns="0" bIns="0" rtlCol="0" anchor="ctr"/>
           <a:lstStyle/>
           <a:p>
-            <a:pPr algn="l" indent="0" marL="0">
-              <a:buNone/>
-            </a:pPr>
-            <a:r>
-              <a:rPr lang="en-US" sz="900" i="1" spc="200" kern="0" dirty="0">
+            <a:pPr marL="0" indent="0" algn="l">
+              <a:buNone/>
+            </a:pPr>
+            <a:r>
+              <a:rPr lang="en-US" sz="900" i="1" kern="0" spc="200" dirty="0">
                 <a:solidFill>
                   <a:srgbClr val="6B6B6B"/>
                 </a:solidFill>
@@ -12728,7 +12948,7 @@
           <a:bodyPr wrap="square" lIns="0" tIns="0" rIns="0" bIns="0" rtlCol="0" anchor="ctr"/>
           <a:lstStyle/>
           <a:p>
-            <a:pPr algn="r" indent="0" marL="0">
+            <a:pPr marL="0" indent="0" algn="r">
               <a:buNone/>
             </a:pPr>
             <a:r>
@@ -12762,6 +12982,7 @@
         <a:solidFill>
           <a:srgbClr val="0F1B33"/>
         </a:solidFill>
+        <a:effectLst/>
       </p:bgPr>
     </p:bg>
     <p:spTree>
@@ -12799,11 +13020,11 @@
           <a:bodyPr wrap="square" lIns="0" tIns="0" rIns="0" bIns="0" rtlCol="0" anchor="ctr"/>
           <a:lstStyle/>
           <a:p>
-            <a:pPr indent="0" marL="0">
-              <a:buNone/>
-            </a:pPr>
-            <a:r>
-              <a:rPr lang="en-US" sz="1100" b="1" spc="400" kern="0" dirty="0">
+            <a:pPr marL="0" indent="0">
+              <a:buNone/>
+            </a:pPr>
+            <a:r>
+              <a:rPr lang="en-US" sz="1100" b="1" kern="0" spc="400" dirty="0">
                 <a:solidFill>
                   <a:srgbClr val="C9A86B"/>
                 </a:solidFill>
@@ -12811,7 +13032,7 @@
                 <a:ea typeface="Cambria" pitchFamily="34" charset="-122"/>
                 <a:cs typeface="Cambria" pitchFamily="34" charset="-120"/>
               </a:rPr>
-              <a:t>§ VI  ·  OPERATOR SURFACE</a:t>
+              <a:t>VI  ·  OPERATOR SURFACE</a:t>
             </a:r>
             <a:endParaRPr lang="en-US" sz="1100" dirty="0"/>
           </a:p>
@@ -12838,7 +13059,7 @@
           <a:bodyPr wrap="square" lIns="0" tIns="0" rIns="0" bIns="0" rtlCol="0" anchor="ctr"/>
           <a:lstStyle/>
           <a:p>
-            <a:pPr indent="0" marL="0">
+            <a:pPr marL="0" indent="0">
               <a:buNone/>
             </a:pPr>
             <a:r>
@@ -12877,7 +13098,7 @@
           <a:bodyPr wrap="square" lIns="0" tIns="0" rIns="0" bIns="0" rtlCol="0" anchor="ctr"/>
           <a:lstStyle/>
           <a:p>
-            <a:pPr indent="0" marL="0">
+            <a:pPr marL="0" indent="0">
               <a:buNone/>
             </a:pPr>
             <a:r>
@@ -12919,17 +13140,24 @@
             <a:prstDash val="solid"/>
           </a:ln>
         </p:spPr>
+        <p:txBody>
+          <a:bodyPr/>
+          <a:lstStyle/>
+          <a:p>
+            <a:endParaRPr lang="en-US"/>
+          </a:p>
+        </p:txBody>
       </p:sp>
       <p:pic>
         <p:nvPicPr>
-          <p:cNvPr id="6" name="Image 0" descr="preencoded.png">    </p:cNvPr>
+          <p:cNvPr id="6" name="Image 0" descr="preencoded.png"/>
           <p:cNvPicPr>
             <a:picLocks noChangeAspect="1"/>
           </p:cNvPicPr>
           <p:nvPr/>
         </p:nvPicPr>
         <p:blipFill>
-          <a:blip r:embed="rId1"/>
+          <a:blip r:embed="rId3"/>
           <a:stretch>
             <a:fillRect/>
           </a:stretch>
@@ -12965,7 +13193,7 @@
           <a:bodyPr wrap="square" lIns="0" tIns="0" rIns="0" bIns="0" rtlCol="0" anchor="ctr"/>
           <a:lstStyle/>
           <a:p>
-            <a:pPr indent="0" marL="0">
+            <a:pPr marL="0" indent="0">
               <a:buNone/>
             </a:pPr>
             <a:r>
@@ -13004,11 +13232,11 @@
           <a:bodyPr wrap="square" lIns="0" tIns="0" rIns="0" bIns="0" rtlCol="0" anchor="ctr"/>
           <a:lstStyle/>
           <a:p>
-            <a:pPr indent="0" marL="0">
-              <a:buNone/>
-            </a:pPr>
-            <a:r>
-              <a:rPr lang="en-US" sz="900" b="1" spc="300" kern="0" dirty="0">
+            <a:pPr marL="0" indent="0">
+              <a:buNone/>
+            </a:pPr>
+            <a:r>
+              <a:rPr lang="en-US" sz="900" b="1" kern="0" spc="300" dirty="0">
                 <a:solidFill>
                   <a:srgbClr val="C9A86B"/>
                 </a:solidFill>
@@ -13044,6 +13272,13 @@
             <a:prstDash val="solid"/>
           </a:ln>
         </p:spPr>
+        <p:txBody>
+          <a:bodyPr/>
+          <a:lstStyle/>
+          <a:p>
+            <a:endParaRPr lang="en-US"/>
+          </a:p>
+        </p:txBody>
       </p:sp>
       <p:sp>
         <p:nvSpPr>
@@ -13066,7 +13301,7 @@
           <a:bodyPr wrap="square" lIns="0" tIns="0" rIns="0" bIns="0" rtlCol="0" anchor="ctr"/>
           <a:lstStyle/>
           <a:p>
-            <a:pPr indent="0" marL="0">
+            <a:pPr marL="0" indent="0">
               <a:buNone/>
             </a:pPr>
             <a:r>
@@ -13105,7 +13340,7 @@
           <a:bodyPr wrap="square" lIns="0" tIns="0" rIns="0" bIns="0" rtlCol="0" anchor="ctr"/>
           <a:lstStyle/>
           <a:p>
-            <a:pPr indent="0" marL="0">
+            <a:pPr marL="0" indent="0">
               <a:buNone/>
             </a:pPr>
             <a:r>
@@ -13144,7 +13379,7 @@
           <a:bodyPr wrap="square" lIns="0" tIns="0" rIns="0" bIns="0" rtlCol="0" anchor="ctr"/>
           <a:lstStyle/>
           <a:p>
-            <a:pPr indent="0" marL="0">
+            <a:pPr marL="0" indent="0">
               <a:buNone/>
             </a:pPr>
             <a:r>
@@ -13183,7 +13418,7 @@
           <a:bodyPr wrap="square" lIns="0" tIns="0" rIns="0" bIns="0" rtlCol="0" anchor="ctr"/>
           <a:lstStyle/>
           <a:p>
-            <a:pPr indent="0" marL="0">
+            <a:pPr marL="0" indent="0">
               <a:buNone/>
             </a:pPr>
             <a:r>
@@ -13222,7 +13457,7 @@
           <a:bodyPr wrap="square" lIns="0" tIns="0" rIns="0" bIns="0" rtlCol="0" anchor="ctr"/>
           <a:lstStyle/>
           <a:p>
-            <a:pPr indent="0" marL="0">
+            <a:pPr marL="0" indent="0">
               <a:buNone/>
             </a:pPr>
             <a:r>
@@ -13261,7 +13496,7 @@
           <a:bodyPr wrap="square" lIns="0" tIns="0" rIns="0" bIns="0" rtlCol="0" anchor="ctr"/>
           <a:lstStyle/>
           <a:p>
-            <a:pPr indent="0" marL="0">
+            <a:pPr marL="0" indent="0">
               <a:buNone/>
             </a:pPr>
             <a:r>
@@ -13303,17 +13538,24 @@
             <a:prstDash val="solid"/>
           </a:ln>
         </p:spPr>
+        <p:txBody>
+          <a:bodyPr/>
+          <a:lstStyle/>
+          <a:p>
+            <a:endParaRPr lang="en-US"/>
+          </a:p>
+        </p:txBody>
       </p:sp>
       <p:pic>
         <p:nvPicPr>
-          <p:cNvPr id="17" name="Image 1" descr="preencoded.png">    </p:cNvPr>
+          <p:cNvPr id="17" name="Image 1" descr="preencoded.png"/>
           <p:cNvPicPr>
             <a:picLocks noChangeAspect="1"/>
           </p:cNvPicPr>
           <p:nvPr/>
         </p:nvPicPr>
         <p:blipFill>
-          <a:blip r:embed="rId2"/>
+          <a:blip r:embed="rId4"/>
           <a:stretch>
             <a:fillRect/>
           </a:stretch>
@@ -13349,7 +13591,7 @@
           <a:bodyPr wrap="square" lIns="0" tIns="0" rIns="0" bIns="0" rtlCol="0" anchor="ctr"/>
           <a:lstStyle/>
           <a:p>
-            <a:pPr indent="0" marL="0">
+            <a:pPr marL="0" indent="0">
               <a:buNone/>
             </a:pPr>
             <a:r>
@@ -13388,11 +13630,11 @@
           <a:bodyPr wrap="square" lIns="0" tIns="0" rIns="0" bIns="0" rtlCol="0" anchor="ctr"/>
           <a:lstStyle/>
           <a:p>
-            <a:pPr indent="0" marL="0">
-              <a:buNone/>
-            </a:pPr>
-            <a:r>
-              <a:rPr lang="en-US" sz="900" b="1" spc="300" kern="0" dirty="0">
+            <a:pPr marL="0" indent="0">
+              <a:buNone/>
+            </a:pPr>
+            <a:r>
+              <a:rPr lang="en-US" sz="900" b="1" kern="0" spc="300" dirty="0">
                 <a:solidFill>
                   <a:srgbClr val="E89BAC"/>
                 </a:solidFill>
@@ -13428,6 +13670,13 @@
             <a:prstDash val="solid"/>
           </a:ln>
         </p:spPr>
+        <p:txBody>
+          <a:bodyPr/>
+          <a:lstStyle/>
+          <a:p>
+            <a:endParaRPr lang="en-US"/>
+          </a:p>
+        </p:txBody>
       </p:sp>
       <p:sp>
         <p:nvSpPr>
@@ -13450,7 +13699,7 @@
           <a:bodyPr wrap="square" lIns="0" tIns="0" rIns="0" bIns="0" rtlCol="0" anchor="ctr"/>
           <a:lstStyle/>
           <a:p>
-            <a:pPr indent="0" marL="0">
+            <a:pPr marL="0" indent="0">
               <a:buNone/>
             </a:pPr>
             <a:r>
@@ -13489,7 +13738,7 @@
           <a:bodyPr wrap="square" lIns="0" tIns="0" rIns="0" bIns="0" rtlCol="0" anchor="ctr"/>
           <a:lstStyle/>
           <a:p>
-            <a:pPr indent="0" marL="0">
+            <a:pPr marL="0" indent="0">
               <a:buNone/>
             </a:pPr>
             <a:r>
@@ -13528,7 +13777,7 @@
           <a:bodyPr wrap="square" lIns="0" tIns="0" rIns="0" bIns="0" rtlCol="0" anchor="ctr"/>
           <a:lstStyle/>
           <a:p>
-            <a:pPr indent="0" marL="0">
+            <a:pPr marL="0" indent="0">
               <a:buNone/>
             </a:pPr>
             <a:r>
@@ -13567,7 +13816,7 @@
           <a:bodyPr wrap="square" lIns="0" tIns="0" rIns="0" bIns="0" rtlCol="0" anchor="ctr"/>
           <a:lstStyle/>
           <a:p>
-            <a:pPr indent="0" marL="0">
+            <a:pPr marL="0" indent="0">
               <a:buNone/>
             </a:pPr>
             <a:r>
@@ -13606,7 +13855,7 @@
           <a:bodyPr wrap="square" lIns="0" tIns="0" rIns="0" bIns="0" rtlCol="0" anchor="ctr"/>
           <a:lstStyle/>
           <a:p>
-            <a:pPr indent="0" marL="0">
+            <a:pPr marL="0" indent="0">
               <a:buNone/>
             </a:pPr>
             <a:r>
@@ -13645,7 +13894,7 @@
           <a:bodyPr wrap="square" lIns="0" tIns="0" rIns="0" bIns="0" rtlCol="0" anchor="ctr"/>
           <a:lstStyle/>
           <a:p>
-            <a:pPr indent="0" marL="0">
+            <a:pPr marL="0" indent="0">
               <a:buNone/>
             </a:pPr>
             <a:r>
@@ -13684,7 +13933,7 @@
           <a:bodyPr wrap="square" lIns="0" tIns="0" rIns="0" bIns="0" rtlCol="0" anchor="ctr"/>
           <a:lstStyle/>
           <a:p>
-            <a:pPr algn="ctr" indent="0" marL="0">
+            <a:pPr marL="0" indent="0" algn="ctr">
               <a:buNone/>
             </a:pPr>
             <a:r>
@@ -13724,6 +13973,13 @@
             <a:prstDash val="solid"/>
           </a:ln>
         </p:spPr>
+        <p:txBody>
+          <a:bodyPr/>
+          <a:lstStyle/>
+          <a:p>
+            <a:endParaRPr lang="en-US"/>
+          </a:p>
+        </p:txBody>
       </p:sp>
       <p:sp>
         <p:nvSpPr>
@@ -13746,11 +14002,11 @@
           <a:bodyPr wrap="square" lIns="0" tIns="0" rIns="0" bIns="0" rtlCol="0" anchor="ctr"/>
           <a:lstStyle/>
           <a:p>
-            <a:pPr algn="l" indent="0" marL="0">
-              <a:buNone/>
-            </a:pPr>
-            <a:r>
-              <a:rPr lang="en-US" sz="900" i="1" spc="200" kern="0" dirty="0">
+            <a:pPr marL="0" indent="0" algn="l">
+              <a:buNone/>
+            </a:pPr>
+            <a:r>
+              <a:rPr lang="en-US" sz="900" i="1" kern="0" spc="200" dirty="0">
                 <a:solidFill>
                   <a:srgbClr val="A8A192"/>
                 </a:solidFill>
@@ -13785,7 +14041,7 @@
           <a:bodyPr wrap="square" lIns="0" tIns="0" rIns="0" bIns="0" rtlCol="0" anchor="ctr"/>
           <a:lstStyle/>
           <a:p>
-            <a:pPr algn="r" indent="0" marL="0">
+            <a:pPr marL="0" indent="0" algn="r">
               <a:buNone/>
             </a:pPr>
             <a:r>
@@ -13819,6 +14075,7 @@
         <a:solidFill>
           <a:srgbClr val="FFFFFF"/>
         </a:solidFill>
+        <a:effectLst/>
       </p:bgPr>
     </p:bg>
     <p:spTree>
@@ -13856,11 +14113,11 @@
           <a:bodyPr wrap="square" lIns="0" tIns="0" rIns="0" bIns="0" rtlCol="0" anchor="ctr"/>
           <a:lstStyle/>
           <a:p>
-            <a:pPr indent="0" marL="0">
-              <a:buNone/>
-            </a:pPr>
-            <a:r>
-              <a:rPr lang="en-US" sz="1100" b="1" spc="400" kern="0" dirty="0">
+            <a:pPr marL="0" indent="0">
+              <a:buNone/>
+            </a:pPr>
+            <a:r>
+              <a:rPr lang="en-US" sz="1100" b="1" kern="0" spc="400" dirty="0">
                 <a:solidFill>
                   <a:srgbClr val="8B1F2F"/>
                 </a:solidFill>
@@ -13868,7 +14125,7 @@
                 <a:ea typeface="Cambria" pitchFamily="34" charset="-122"/>
                 <a:cs typeface="Cambria" pitchFamily="34" charset="-120"/>
               </a:rPr>
-              <a:t>§ VII  ·  OPERATIONAL SAFETY</a:t>
+              <a:t>VII  ·  OPERATIONAL SAFETY</a:t>
             </a:r>
             <a:endParaRPr lang="en-US" sz="1100" dirty="0"/>
           </a:p>
@@ -13895,7 +14152,7 @@
           <a:bodyPr wrap="square" lIns="0" tIns="0" rIns="0" bIns="0" rtlCol="0" anchor="ctr"/>
           <a:lstStyle/>
           <a:p>
-            <a:pPr indent="0" marL="0">
+            <a:pPr marL="0" indent="0">
               <a:buNone/>
             </a:pPr>
             <a:r>
@@ -13934,7 +14191,7 @@
           <a:bodyPr wrap="square" lIns="0" tIns="0" rIns="0" bIns="0" rtlCol="0" anchor="ctr"/>
           <a:lstStyle/>
           <a:p>
-            <a:pPr indent="0" marL="0">
+            <a:pPr marL="0" indent="0">
               <a:buNone/>
             </a:pPr>
             <a:r>
@@ -13971,6 +14228,13 @@
           </a:solidFill>
           <a:ln/>
         </p:spPr>
+        <p:txBody>
+          <a:bodyPr/>
+          <a:lstStyle/>
+          <a:p>
+            <a:endParaRPr lang="en-US"/>
+          </a:p>
+        </p:txBody>
       </p:sp>
       <p:sp>
         <p:nvSpPr>
@@ -13993,7 +14257,7 @@
           <a:bodyPr wrap="square" lIns="0" tIns="0" rIns="0" bIns="0" rtlCol="0" anchor="ctr"/>
           <a:lstStyle/>
           <a:p>
-            <a:pPr algn="ctr" indent="0" marL="0">
+            <a:pPr marL="0" indent="0" algn="ctr">
               <a:buNone/>
             </a:pPr>
             <a:r>
@@ -14035,6 +14299,13 @@
             <a:prstDash val="solid"/>
           </a:ln>
         </p:spPr>
+        <p:txBody>
+          <a:bodyPr/>
+          <a:lstStyle/>
+          <a:p>
+            <a:endParaRPr lang="en-US"/>
+          </a:p>
+        </p:txBody>
       </p:sp>
       <p:sp>
         <p:nvSpPr>
@@ -14057,7 +14328,7 @@
           <a:bodyPr wrap="square" lIns="0" tIns="0" rIns="0" bIns="0" rtlCol="0" anchor="ctr"/>
           <a:lstStyle/>
           <a:p>
-            <a:pPr indent="0" marL="0">
+            <a:pPr marL="0" indent="0">
               <a:buNone/>
             </a:pPr>
             <a:r>
@@ -14097,6 +14368,13 @@
             <a:prstDash val="solid"/>
           </a:ln>
         </p:spPr>
+        <p:txBody>
+          <a:bodyPr/>
+          <a:lstStyle/>
+          <a:p>
+            <a:endParaRPr lang="en-US"/>
+          </a:p>
+        </p:txBody>
       </p:sp>
       <p:sp>
         <p:nvSpPr>
@@ -14119,7 +14397,7 @@
           <a:bodyPr wrap="square" lIns="0" tIns="0" rIns="0" bIns="0" rtlCol="0" anchor="ctr"/>
           <a:lstStyle/>
           <a:p>
-            <a:pPr indent="0" marL="0">
+            <a:pPr marL="0" indent="0">
               <a:buNone/>
             </a:pPr>
             <a:r>
@@ -14158,7 +14436,7 @@
           <a:bodyPr wrap="square" lIns="0" tIns="0" rIns="0" bIns="0" rtlCol="0" anchor="ctr"/>
           <a:lstStyle/>
           <a:p>
-            <a:pPr indent="0" marL="0">
+            <a:pPr marL="0" indent="0">
               <a:buNone/>
             </a:pPr>
             <a:r>
@@ -14197,7 +14475,7 @@
           <a:bodyPr wrap="square" lIns="0" tIns="0" rIns="0" bIns="0" rtlCol="0" anchor="ctr"/>
           <a:lstStyle/>
           <a:p>
-            <a:pPr indent="0" marL="0">
+            <a:pPr marL="0" indent="0">
               <a:buNone/>
             </a:pPr>
             <a:r>
@@ -14236,7 +14514,7 @@
           <a:bodyPr wrap="square" lIns="0" tIns="0" rIns="0" bIns="0" rtlCol="0" anchor="ctr"/>
           <a:lstStyle/>
           <a:p>
-            <a:pPr indent="0" marL="0">
+            <a:pPr marL="0" indent="0">
               <a:buNone/>
             </a:pPr>
             <a:r>
@@ -14273,6 +14551,13 @@
           </a:solidFill>
           <a:ln/>
         </p:spPr>
+        <p:txBody>
+          <a:bodyPr/>
+          <a:lstStyle/>
+          <a:p>
+            <a:endParaRPr lang="en-US"/>
+          </a:p>
+        </p:txBody>
       </p:sp>
       <p:sp>
         <p:nvSpPr>
@@ -14295,7 +14580,7 @@
           <a:bodyPr wrap="square" lIns="0" tIns="0" rIns="0" bIns="0" rtlCol="0" anchor="ctr"/>
           <a:lstStyle/>
           <a:p>
-            <a:pPr algn="ctr" indent="0" marL="0">
+            <a:pPr marL="0" indent="0" algn="ctr">
               <a:buNone/>
             </a:pPr>
             <a:r>
@@ -14337,6 +14622,13 @@
             <a:prstDash val="solid"/>
           </a:ln>
         </p:spPr>
+        <p:txBody>
+          <a:bodyPr/>
+          <a:lstStyle/>
+          <a:p>
+            <a:endParaRPr lang="en-US"/>
+          </a:p>
+        </p:txBody>
       </p:sp>
       <p:sp>
         <p:nvSpPr>
@@ -14359,7 +14651,7 @@
           <a:bodyPr wrap="square" lIns="0" tIns="0" rIns="0" bIns="0" rtlCol="0" anchor="ctr"/>
           <a:lstStyle/>
           <a:p>
-            <a:pPr indent="0" marL="0">
+            <a:pPr marL="0" indent="0">
               <a:buNone/>
             </a:pPr>
             <a:r>
@@ -14399,6 +14691,13 @@
             <a:prstDash val="solid"/>
           </a:ln>
         </p:spPr>
+        <p:txBody>
+          <a:bodyPr/>
+          <a:lstStyle/>
+          <a:p>
+            <a:endParaRPr lang="en-US"/>
+          </a:p>
+        </p:txBody>
       </p:sp>
       <p:sp>
         <p:nvSpPr>
@@ -14421,7 +14720,7 @@
           <a:bodyPr wrap="square" lIns="0" tIns="0" rIns="0" bIns="0" rtlCol="0" anchor="ctr"/>
           <a:lstStyle/>
           <a:p>
-            <a:pPr indent="0" marL="0">
+            <a:pPr marL="0" indent="0">
               <a:buNone/>
             </a:pPr>
             <a:r>
@@ -14460,7 +14759,7 @@
           <a:bodyPr wrap="square" lIns="0" tIns="0" rIns="0" bIns="0" rtlCol="0" anchor="ctr"/>
           <a:lstStyle/>
           <a:p>
-            <a:pPr indent="0" marL="0">
+            <a:pPr marL="0" indent="0">
               <a:buNone/>
             </a:pPr>
             <a:r>
@@ -14499,7 +14798,7 @@
           <a:bodyPr wrap="square" lIns="0" tIns="0" rIns="0" bIns="0" rtlCol="0" anchor="ctr"/>
           <a:lstStyle/>
           <a:p>
-            <a:pPr indent="0" marL="0">
+            <a:pPr marL="0" indent="0">
               <a:buNone/>
             </a:pPr>
             <a:r>
@@ -14536,6 +14835,13 @@
           </a:solidFill>
           <a:ln/>
         </p:spPr>
+        <p:txBody>
+          <a:bodyPr/>
+          <a:lstStyle/>
+          <a:p>
+            <a:endParaRPr lang="en-US"/>
+          </a:p>
+        </p:txBody>
       </p:sp>
       <p:sp>
         <p:nvSpPr>
@@ -14558,7 +14864,7 @@
           <a:bodyPr wrap="square" lIns="0" tIns="0" rIns="0" bIns="0" rtlCol="0" anchor="ctr"/>
           <a:lstStyle/>
           <a:p>
-            <a:pPr algn="ctr" indent="0" marL="0">
+            <a:pPr marL="0" indent="0" algn="ctr">
               <a:buNone/>
             </a:pPr>
             <a:r>
@@ -14600,6 +14906,13 @@
             <a:prstDash val="solid"/>
           </a:ln>
         </p:spPr>
+        <p:txBody>
+          <a:bodyPr/>
+          <a:lstStyle/>
+          <a:p>
+            <a:endParaRPr lang="en-US"/>
+          </a:p>
+        </p:txBody>
       </p:sp>
       <p:sp>
         <p:nvSpPr>
@@ -14622,7 +14935,7 @@
           <a:bodyPr wrap="square" lIns="0" tIns="0" rIns="0" bIns="0" rtlCol="0" anchor="ctr"/>
           <a:lstStyle/>
           <a:p>
-            <a:pPr indent="0" marL="0">
+            <a:pPr marL="0" indent="0">
               <a:buNone/>
             </a:pPr>
             <a:r>
@@ -14662,6 +14975,13 @@
             <a:prstDash val="solid"/>
           </a:ln>
         </p:spPr>
+        <p:txBody>
+          <a:bodyPr/>
+          <a:lstStyle/>
+          <a:p>
+            <a:endParaRPr lang="en-US"/>
+          </a:p>
+        </p:txBody>
       </p:sp>
       <p:sp>
         <p:nvSpPr>
@@ -14684,7 +15004,7 @@
           <a:bodyPr wrap="square" lIns="0" tIns="0" rIns="0" bIns="0" rtlCol="0" anchor="ctr"/>
           <a:lstStyle/>
           <a:p>
-            <a:pPr indent="0" marL="0">
+            <a:pPr marL="0" indent="0">
               <a:buNone/>
             </a:pPr>
             <a:r>
@@ -14723,7 +15043,7 @@
           <a:bodyPr wrap="square" lIns="0" tIns="0" rIns="0" bIns="0" rtlCol="0" anchor="ctr"/>
           <a:lstStyle/>
           <a:p>
-            <a:pPr indent="0" marL="0">
+            <a:pPr marL="0" indent="0">
               <a:buNone/>
             </a:pPr>
             <a:r>
@@ -14762,7 +15082,7 @@
           <a:bodyPr wrap="square" lIns="0" tIns="0" rIns="0" bIns="0" rtlCol="0" anchor="ctr"/>
           <a:lstStyle/>
           <a:p>
-            <a:pPr algn="ctr" indent="0" marL="0">
+            <a:pPr marL="0" indent="0" algn="ctr">
               <a:buNone/>
             </a:pPr>
             <a:r>
@@ -14802,6 +15122,13 @@
             <a:prstDash val="solid"/>
           </a:ln>
         </p:spPr>
+        <p:txBody>
+          <a:bodyPr/>
+          <a:lstStyle/>
+          <a:p>
+            <a:endParaRPr lang="en-US"/>
+          </a:p>
+        </p:txBody>
       </p:sp>
       <p:sp>
         <p:nvSpPr>
@@ -14824,11 +15151,11 @@
           <a:bodyPr wrap="square" lIns="0" tIns="0" rIns="0" bIns="0" rtlCol="0" anchor="ctr"/>
           <a:lstStyle/>
           <a:p>
-            <a:pPr algn="l" indent="0" marL="0">
-              <a:buNone/>
-            </a:pPr>
-            <a:r>
-              <a:rPr lang="en-US" sz="900" i="1" spc="200" kern="0" dirty="0">
+            <a:pPr marL="0" indent="0" algn="l">
+              <a:buNone/>
+            </a:pPr>
+            <a:r>
+              <a:rPr lang="en-US" sz="900" i="1" kern="0" spc="200" dirty="0">
                 <a:solidFill>
                   <a:srgbClr val="6B6B6B"/>
                 </a:solidFill>
@@ -14863,7 +15190,7 @@
           <a:bodyPr wrap="square" lIns="0" tIns="0" rIns="0" bIns="0" rtlCol="0" anchor="ctr"/>
           <a:lstStyle/>
           <a:p>
-            <a:pPr algn="r" indent="0" marL="0">
+            <a:pPr marL="0" indent="0" algn="r">
               <a:buNone/>
             </a:pPr>
             <a:r>
@@ -15182,4 +15509,319 @@
     </a:ext>
   </a:extLst>
 </a:theme>
+</file>
+
+<file path=ppt/theme/theme2.xml><?xml version="1.0" encoding="utf-8"?>
+<a:theme xmlns:a="http://schemas.openxmlformats.org/drawingml/2006/main" name="Office Theme">
+  <a:themeElements>
+    <a:clrScheme name="Office">
+      <a:dk1>
+        <a:sysClr val="windowText" lastClr="000000"/>
+      </a:dk1>
+      <a:lt1>
+        <a:sysClr val="window" lastClr="FFFFFF"/>
+      </a:lt1>
+      <a:dk2>
+        <a:srgbClr val="0E2841"/>
+      </a:dk2>
+      <a:lt2>
+        <a:srgbClr val="E8E8E8"/>
+      </a:lt2>
+      <a:accent1>
+        <a:srgbClr val="156082"/>
+      </a:accent1>
+      <a:accent2>
+        <a:srgbClr val="E97132"/>
+      </a:accent2>
+      <a:accent3>
+        <a:srgbClr val="196B24"/>
+      </a:accent3>
+      <a:accent4>
+        <a:srgbClr val="0F9ED5"/>
+      </a:accent4>
+      <a:accent5>
+        <a:srgbClr val="A02B93"/>
+      </a:accent5>
+      <a:accent6>
+        <a:srgbClr val="4EA72E"/>
+      </a:accent6>
+      <a:hlink>
+        <a:srgbClr val="467886"/>
+      </a:hlink>
+      <a:folHlink>
+        <a:srgbClr val="96607D"/>
+      </a:folHlink>
+    </a:clrScheme>
+    <a:fontScheme name="Office">
+      <a:majorFont>
+        <a:latin typeface="Aptos Display" panose="02110004020202020204"/>
+        <a:ea typeface=""/>
+        <a:cs typeface=""/>
+        <a:font script="Jpan" typeface="游ゴシック Light"/>
+        <a:font script="Hang" typeface="맑은 고딕"/>
+        <a:font script="Hans" typeface="等线 Light"/>
+        <a:font script="Hant" typeface="新細明體"/>
+        <a:font script="Arab" typeface="Times New Roman"/>
+        <a:font script="Hebr" typeface="Times New Roman"/>
+        <a:font script="Thai" typeface="Angsana New"/>
+        <a:font script="Ethi" typeface="Nyala"/>
+        <a:font script="Beng" typeface="Vrinda"/>
+        <a:font script="Gujr" typeface="Shruti"/>
+        <a:font script="Khmr" typeface="MoolBoran"/>
+        <a:font script="Knda" typeface="Tunga"/>
+        <a:font script="Guru" typeface="Raavi"/>
+        <a:font script="Cans" typeface="Euphemia"/>
+        <a:font script="Cher" typeface="Plantagenet Cherokee"/>
+        <a:font script="Yiii" typeface="Microsoft Yi Baiti"/>
+        <a:font script="Tibt" typeface="Microsoft Himalaya"/>
+        <a:font script="Thaa" typeface="MV Boli"/>
+        <a:font script="Deva" typeface="Mangal"/>
+        <a:font script="Telu" typeface="Gautami"/>
+        <a:font script="Taml" typeface="Latha"/>
+        <a:font script="Syrc" typeface="Estrangelo Edessa"/>
+        <a:font script="Orya" typeface="Kalinga"/>
+        <a:font script="Mlym" typeface="Kartika"/>
+        <a:font script="Laoo" typeface="DokChampa"/>
+        <a:font script="Sinh" typeface="Iskoola Pota"/>
+        <a:font script="Mong" typeface="Mongolian Baiti"/>
+        <a:font script="Viet" typeface="Times New Roman"/>
+        <a:font script="Uigh" typeface="Microsoft Uighur"/>
+        <a:font script="Geor" typeface="Sylfaen"/>
+        <a:font script="Armn" typeface="Arial"/>
+        <a:font script="Bugi" typeface="Leelawadee UI"/>
+        <a:font script="Bopo" typeface="Microsoft JhengHei"/>
+        <a:font script="Java" typeface="Javanese Text"/>
+        <a:font script="Lisu" typeface="Segoe UI"/>
+        <a:font script="Mymr" typeface="Myanmar Text"/>
+        <a:font script="Nkoo" typeface="Ebrima"/>
+        <a:font script="Olck" typeface="Nirmala UI"/>
+        <a:font script="Osma" typeface="Ebrima"/>
+        <a:font script="Phag" typeface="Phagspa"/>
+        <a:font script="Syrn" typeface="Estrangelo Edessa"/>
+        <a:font script="Syrj" typeface="Estrangelo Edessa"/>
+        <a:font script="Syre" typeface="Estrangelo Edessa"/>
+        <a:font script="Sora" typeface="Nirmala UI"/>
+        <a:font script="Tale" typeface="Microsoft Tai Le"/>
+        <a:font script="Talu" typeface="Microsoft New Tai Lue"/>
+        <a:font script="Tfng" typeface="Ebrima"/>
+      </a:majorFont>
+      <a:minorFont>
+        <a:latin typeface="Aptos" panose="02110004020202020204"/>
+        <a:ea typeface=""/>
+        <a:cs typeface=""/>
+        <a:font script="Jpan" typeface="游ゴシック"/>
+        <a:font script="Hang" typeface="맑은 고딕"/>
+        <a:font script="Hans" typeface="等线"/>
+        <a:font script="Hant" typeface="新細明體"/>
+        <a:font script="Arab" typeface="Arial"/>
+        <a:font script="Hebr" typeface="Arial"/>
+        <a:font script="Thai" typeface="Cordia New"/>
+        <a:font script="Ethi" typeface="Nyala"/>
+        <a:font script="Beng" typeface="Vrinda"/>
+        <a:font script="Gujr" typeface="Shruti"/>
+        <a:font script="Khmr" typeface="DaunPenh"/>
+        <a:font script="Knda" typeface="Tunga"/>
+        <a:font script="Guru" typeface="Raavi"/>
+        <a:font script="Cans" typeface="Euphemia"/>
+        <a:font script="Cher" typeface="Plantagenet Cherokee"/>
+        <a:font script="Yiii" typeface="Microsoft Yi Baiti"/>
+        <a:font script="Tibt" typeface="Microsoft Himalaya"/>
+        <a:font script="Thaa" typeface="MV Boli"/>
+        <a:font script="Deva" typeface="Mangal"/>
+        <a:font script="Telu" typeface="Gautami"/>
+        <a:font script="Taml" typeface="Latha"/>
+        <a:font script="Syrc" typeface="Estrangelo Edessa"/>
+        <a:font script="Orya" typeface="Kalinga"/>
+        <a:font script="Mlym" typeface="Kartika"/>
+        <a:font script="Laoo" typeface="DokChampa"/>
+        <a:font script="Sinh" typeface="Iskoola Pota"/>
+        <a:font script="Mong" typeface="Mongolian Baiti"/>
+        <a:font script="Viet" typeface="Arial"/>
+        <a:font script="Uigh" typeface="Microsoft Uighur"/>
+        <a:font script="Geor" typeface="Sylfaen"/>
+        <a:font script="Armn" typeface="Arial"/>
+        <a:font script="Bugi" typeface="Leelawadee UI"/>
+        <a:font script="Bopo" typeface="Microsoft JhengHei"/>
+        <a:font script="Java" typeface="Javanese Text"/>
+        <a:font script="Lisu" typeface="Segoe UI"/>
+        <a:font script="Mymr" typeface="Myanmar Text"/>
+        <a:font script="Nkoo" typeface="Ebrima"/>
+        <a:font script="Olck" typeface="Nirmala UI"/>
+        <a:font script="Osma" typeface="Ebrima"/>
+        <a:font script="Phag" typeface="Phagspa"/>
+        <a:font script="Syrn" typeface="Estrangelo Edessa"/>
+        <a:font script="Syrj" typeface="Estrangelo Edessa"/>
+        <a:font script="Syre" typeface="Estrangelo Edessa"/>
+        <a:font script="Sora" typeface="Nirmala UI"/>
+        <a:font script="Tale" typeface="Microsoft Tai Le"/>
+        <a:font script="Talu" typeface="Microsoft New Tai Lue"/>
+        <a:font script="Tfng" typeface="Ebrima"/>
+      </a:minorFont>
+    </a:fontScheme>
+    <a:fmtScheme name="Office">
+      <a:fillStyleLst>
+        <a:solidFill>
+          <a:schemeClr val="phClr"/>
+        </a:solidFill>
+        <a:gradFill rotWithShape="1">
+          <a:gsLst>
+            <a:gs pos="0">
+              <a:schemeClr val="phClr">
+                <a:lumMod val="110000"/>
+                <a:satMod val="105000"/>
+                <a:tint val="67000"/>
+              </a:schemeClr>
+            </a:gs>
+            <a:gs pos="50000">
+              <a:schemeClr val="phClr">
+                <a:lumMod val="105000"/>
+                <a:satMod val="103000"/>
+                <a:tint val="73000"/>
+              </a:schemeClr>
+            </a:gs>
+            <a:gs pos="100000">
+              <a:schemeClr val="phClr">
+                <a:lumMod val="105000"/>
+                <a:satMod val="109000"/>
+                <a:tint val="81000"/>
+              </a:schemeClr>
+            </a:gs>
+          </a:gsLst>
+          <a:lin ang="5400000" scaled="0"/>
+        </a:gradFill>
+        <a:gradFill rotWithShape="1">
+          <a:gsLst>
+            <a:gs pos="0">
+              <a:schemeClr val="phClr">
+                <a:satMod val="103000"/>
+                <a:lumMod val="102000"/>
+                <a:tint val="94000"/>
+              </a:schemeClr>
+            </a:gs>
+            <a:gs pos="50000">
+              <a:schemeClr val="phClr">
+                <a:satMod val="110000"/>
+                <a:lumMod val="100000"/>
+                <a:shade val="100000"/>
+              </a:schemeClr>
+            </a:gs>
+            <a:gs pos="100000">
+              <a:schemeClr val="phClr">
+                <a:lumMod val="99000"/>
+                <a:satMod val="120000"/>
+                <a:shade val="78000"/>
+              </a:schemeClr>
+            </a:gs>
+          </a:gsLst>
+          <a:lin ang="5400000" scaled="0"/>
+        </a:gradFill>
+      </a:fillStyleLst>
+      <a:lnStyleLst>
+        <a:ln w="12700" cap="flat" cmpd="sng" algn="ctr">
+          <a:solidFill>
+            <a:schemeClr val="phClr"/>
+          </a:solidFill>
+          <a:prstDash val="solid"/>
+          <a:miter lim="800000"/>
+        </a:ln>
+        <a:ln w="19050" cap="flat" cmpd="sng" algn="ctr">
+          <a:solidFill>
+            <a:schemeClr val="phClr"/>
+          </a:solidFill>
+          <a:prstDash val="solid"/>
+          <a:miter lim="800000"/>
+        </a:ln>
+        <a:ln w="25400" cap="flat" cmpd="sng" algn="ctr">
+          <a:solidFill>
+            <a:schemeClr val="phClr"/>
+          </a:solidFill>
+          <a:prstDash val="solid"/>
+          <a:miter lim="800000"/>
+        </a:ln>
+      </a:lnStyleLst>
+      <a:effectStyleLst>
+        <a:effectStyle>
+          <a:effectLst/>
+        </a:effectStyle>
+        <a:effectStyle>
+          <a:effectLst/>
+        </a:effectStyle>
+        <a:effectStyle>
+          <a:effectLst>
+            <a:outerShdw blurRad="57150" dist="19050" dir="5400000" algn="ctr" rotWithShape="0">
+              <a:srgbClr val="000000">
+                <a:alpha val="63000"/>
+              </a:srgbClr>
+            </a:outerShdw>
+          </a:effectLst>
+        </a:effectStyle>
+      </a:effectStyleLst>
+      <a:bgFillStyleLst>
+        <a:solidFill>
+          <a:schemeClr val="phClr"/>
+        </a:solidFill>
+        <a:solidFill>
+          <a:schemeClr val="phClr">
+            <a:tint val="95000"/>
+            <a:satMod val="170000"/>
+          </a:schemeClr>
+        </a:solidFill>
+        <a:gradFill rotWithShape="1">
+          <a:gsLst>
+            <a:gs pos="0">
+              <a:schemeClr val="phClr">
+                <a:tint val="93000"/>
+                <a:satMod val="150000"/>
+                <a:shade val="98000"/>
+                <a:lumMod val="102000"/>
+              </a:schemeClr>
+            </a:gs>
+            <a:gs pos="50000">
+              <a:schemeClr val="phClr">
+                <a:tint val="98000"/>
+                <a:satMod val="130000"/>
+                <a:shade val="90000"/>
+                <a:lumMod val="103000"/>
+              </a:schemeClr>
+            </a:gs>
+            <a:gs pos="100000">
+              <a:schemeClr val="phClr">
+                <a:shade val="63000"/>
+                <a:satMod val="120000"/>
+              </a:schemeClr>
+            </a:gs>
+          </a:gsLst>
+          <a:lin ang="5400000" scaled="0"/>
+        </a:gradFill>
+      </a:bgFillStyleLst>
+    </a:fmtScheme>
+  </a:themeElements>
+  <a:objectDefaults>
+    <a:lnDef>
+      <a:spPr/>
+      <a:bodyPr/>
+      <a:lstStyle/>
+      <a:style>
+        <a:lnRef idx="2">
+          <a:schemeClr val="accent1"/>
+        </a:lnRef>
+        <a:fillRef idx="0">
+          <a:schemeClr val="accent1"/>
+        </a:fillRef>
+        <a:effectRef idx="1">
+          <a:schemeClr val="accent1"/>
+        </a:effectRef>
+        <a:fontRef idx="minor">
+          <a:schemeClr val="tx1"/>
+        </a:fontRef>
+      </a:style>
+    </a:lnDef>
+  </a:objectDefaults>
+  <a:extraClrSchemeLst/>
+  <a:extLst>
+    <a:ext uri="{05A4C25C-085E-4340-85A3-A5531E510DB2}">
+      <thm15:themeFamily xmlns:thm15="http://schemas.microsoft.com/office/thememl/2012/main" name="Office Theme" id="{2E142A2C-CD16-42D6-873A-C26D2A0506FA}" vid="{1BDDFF52-6CD6-40A5-AB3C-68EB2F1E4D0A}"/>
+    </a:ext>
+  </a:extLst>
+</a:theme>
 </file>
--- a/docs/edge-language-coach.pptx
+++ b/docs/edge-language-coach.pptx
@@ -5,24 +5,25 @@
     <p:sldMasterId id="2147483648" r:id="rId1"/>
   </p:sldMasterIdLst>
   <p:notesMasterIdLst>
-    <p:notesMasterId r:id="rId17"/>
+    <p:notesMasterId r:id="rId18"/>
   </p:notesMasterIdLst>
   <p:sldIdLst>
     <p:sldId id="256" r:id="rId2"/>
     <p:sldId id="257" r:id="rId3"/>
-    <p:sldId id="258" r:id="rId4"/>
-    <p:sldId id="259" r:id="rId5"/>
-    <p:sldId id="260" r:id="rId6"/>
-    <p:sldId id="261" r:id="rId7"/>
-    <p:sldId id="262" r:id="rId8"/>
-    <p:sldId id="263" r:id="rId9"/>
-    <p:sldId id="264" r:id="rId10"/>
-    <p:sldId id="265" r:id="rId11"/>
-    <p:sldId id="266" r:id="rId12"/>
-    <p:sldId id="267" r:id="rId13"/>
-    <p:sldId id="268" r:id="rId14"/>
-    <p:sldId id="269" r:id="rId15"/>
-    <p:sldId id="270" r:id="rId16"/>
+    <p:sldId id="271" r:id="rId4"/>
+    <p:sldId id="258" r:id="rId5"/>
+    <p:sldId id="259" r:id="rId6"/>
+    <p:sldId id="260" r:id="rId7"/>
+    <p:sldId id="261" r:id="rId8"/>
+    <p:sldId id="262" r:id="rId9"/>
+    <p:sldId id="263" r:id="rId10"/>
+    <p:sldId id="264" r:id="rId11"/>
+    <p:sldId id="265" r:id="rId12"/>
+    <p:sldId id="266" r:id="rId13"/>
+    <p:sldId id="267" r:id="rId14"/>
+    <p:sldId id="268" r:id="rId15"/>
+    <p:sldId id="269" r:id="rId16"/>
+    <p:sldId id="270" r:id="rId17"/>
   </p:sldIdLst>
   <p:sldSz cx="12192000" cy="6858000"/>
   <p:notesSz cx="6858000" cy="12192000"/>
@@ -948,7 +949,7 @@
           <a:p>
             <a:fld id="{F7021451-1387-4CA6-816F-3879F97B5CBC}" type="slidenum">
               <a:rPr lang="en-US"/>
-              <a:t>10</a:t>
+              <a:t>11</a:t>
             </a:fld>
             <a:endParaRPr lang="en-US"/>
           </a:p>
@@ -1032,7 +1033,7 @@
           <a:p>
             <a:fld id="{F7021451-1387-4CA6-816F-3879F97B5CBC}" type="slidenum">
               <a:rPr lang="en-US"/>
-              <a:t>11</a:t>
+              <a:t>12</a:t>
             </a:fld>
             <a:endParaRPr lang="en-US"/>
           </a:p>
@@ -1116,7 +1117,7 @@
           <a:p>
             <a:fld id="{F7021451-1387-4CA6-816F-3879F97B5CBC}" type="slidenum">
               <a:rPr lang="en-US"/>
-              <a:t>12</a:t>
+              <a:t>13</a:t>
             </a:fld>
             <a:endParaRPr lang="en-US"/>
           </a:p>
@@ -1200,7 +1201,7 @@
           <a:p>
             <a:fld id="{F7021451-1387-4CA6-816F-3879F97B5CBC}" type="slidenum">
               <a:rPr lang="en-US"/>
-              <a:t>13</a:t>
+              <a:t>14</a:t>
             </a:fld>
             <a:endParaRPr lang="en-US"/>
           </a:p>
@@ -1284,7 +1285,7 @@
           <a:p>
             <a:fld id="{F7021451-1387-4CA6-816F-3879F97B5CBC}" type="slidenum">
               <a:rPr lang="en-US"/>
-              <a:t>14</a:t>
+              <a:t>15</a:t>
             </a:fld>
             <a:endParaRPr lang="en-US"/>
           </a:p>
@@ -1368,7 +1369,7 @@
           <a:p>
             <a:fld id="{F7021451-1387-4CA6-816F-3879F97B5CBC}" type="slidenum">
               <a:rPr lang="en-US"/>
-              <a:t>15</a:t>
+              <a:t>16</a:t>
             </a:fld>
             <a:endParaRPr lang="en-US"/>
           </a:p>
@@ -1536,7 +1537,7 @@
           <a:p>
             <a:fld id="{F7021451-1387-4CA6-816F-3879F97B5CBC}" type="slidenum">
               <a:rPr lang="en-US"/>
-              <a:t>3</a:t>
+              <a:t>4</a:t>
             </a:fld>
             <a:endParaRPr lang="en-US"/>
           </a:p>
@@ -1620,7 +1621,7 @@
           <a:p>
             <a:fld id="{F7021451-1387-4CA6-816F-3879F97B5CBC}" type="slidenum">
               <a:rPr lang="en-US"/>
-              <a:t>4</a:t>
+              <a:t>5</a:t>
             </a:fld>
             <a:endParaRPr lang="en-US"/>
           </a:p>
@@ -1704,7 +1705,7 @@
           <a:p>
             <a:fld id="{F7021451-1387-4CA6-816F-3879F97B5CBC}" type="slidenum">
               <a:rPr lang="en-US"/>
-              <a:t>5</a:t>
+              <a:t>6</a:t>
             </a:fld>
             <a:endParaRPr lang="en-US"/>
           </a:p>
@@ -1788,7 +1789,7 @@
           <a:p>
             <a:fld id="{F7021451-1387-4CA6-816F-3879F97B5CBC}" type="slidenum">
               <a:rPr lang="en-US"/>
-              <a:t>6</a:t>
+              <a:t>7</a:t>
             </a:fld>
             <a:endParaRPr lang="en-US"/>
           </a:p>
@@ -1872,7 +1873,7 @@
           <a:p>
             <a:fld id="{F7021451-1387-4CA6-816F-3879F97B5CBC}" type="slidenum">
               <a:rPr lang="en-US"/>
-              <a:t>7</a:t>
+              <a:t>8</a:t>
             </a:fld>
             <a:endParaRPr lang="en-US"/>
           </a:p>
@@ -1956,7 +1957,7 @@
           <a:p>
             <a:fld id="{F7021451-1387-4CA6-816F-3879F97B5CBC}" type="slidenum">
               <a:rPr lang="en-US"/>
-              <a:t>8</a:t>
+              <a:t>9</a:t>
             </a:fld>
             <a:endParaRPr lang="en-US"/>
           </a:p>
@@ -2040,7 +2041,7 @@
           <a:p>
             <a:fld id="{F7021451-1387-4CA6-816F-3879F97B5CBC}" type="slidenum">
               <a:rPr lang="en-US"/>
-              <a:t>9</a:t>
+              <a:t>10</a:t>
             </a:fld>
             <a:endParaRPr lang="en-US"/>
           </a:p>
@@ -2748,6 +2749,1452 @@
 
 <file path=ppt/slides/slide10.xml><?xml version="1.0" encoding="utf-8"?>
 <p:sld xmlns:a="http://schemas.openxmlformats.org/drawingml/2006/main" xmlns:r="http://schemas.openxmlformats.org/officeDocument/2006/relationships" xmlns:p="http://schemas.openxmlformats.org/presentationml/2006/main">
+  <p:cSld name="Slide 9">
+    <p:bg>
+      <p:bgPr>
+        <a:solidFill>
+          <a:srgbClr val="FFFFFF"/>
+        </a:solidFill>
+        <a:effectLst/>
+      </p:bgPr>
+    </p:bg>
+    <p:spTree>
+      <p:nvGrpSpPr>
+        <p:cNvPr id="1" name=""/>
+        <p:cNvGrpSpPr/>
+        <p:nvPr/>
+      </p:nvGrpSpPr>
+      <p:grpSpPr>
+        <a:xfrm>
+          <a:off x="0" y="0"/>
+          <a:ext cx="0" cy="0"/>
+          <a:chOff x="0" y="0"/>
+          <a:chExt cx="0" cy="0"/>
+        </a:xfrm>
+      </p:grpSpPr>
+      <p:sp>
+        <p:nvSpPr>
+          <p:cNvPr id="2" name="Text 0"/>
+          <p:cNvSpPr/>
+          <p:nvPr/>
+        </p:nvSpPr>
+        <p:spPr>
+          <a:xfrm>
+            <a:off x="502920" y="411480"/>
+            <a:ext cx="640080" cy="365760"/>
+          </a:xfrm>
+          <a:prstGeom prst="rect">
+            <a:avLst/>
+          </a:prstGeom>
+          <a:noFill/>
+          <a:ln/>
+        </p:spPr>
+        <p:txBody>
+          <a:bodyPr wrap="square" lIns="0" tIns="0" rIns="0" bIns="0" rtlCol="0" anchor="ctr"/>
+          <a:lstStyle/>
+          <a:p>
+            <a:pPr marL="0" indent="0">
+              <a:buNone/>
+            </a:pPr>
+            <a:r>
+              <a:rPr lang="en-US" sz="1400" i="1" dirty="0">
+                <a:solidFill>
+                  <a:srgbClr val="7A2E3B"/>
+                </a:solidFill>
+                <a:latin typeface="Cambria" pitchFamily="34" charset="0"/>
+                <a:ea typeface="Cambria" pitchFamily="34" charset="-122"/>
+                <a:cs typeface="Cambria" pitchFamily="34" charset="-120"/>
+              </a:rPr>
+              <a:t>IX.</a:t>
+            </a:r>
+            <a:endParaRPr lang="en-US" sz="1400" dirty="0"/>
+          </a:p>
+        </p:txBody>
+      </p:sp>
+      <p:sp>
+        <p:nvSpPr>
+          <p:cNvPr id="3" name="Text 1"/>
+          <p:cNvSpPr/>
+          <p:nvPr/>
+        </p:nvSpPr>
+        <p:spPr>
+          <a:xfrm>
+            <a:off x="1051560" y="411480"/>
+            <a:ext cx="5486400" cy="365760"/>
+          </a:xfrm>
+          <a:prstGeom prst="rect">
+            <a:avLst/>
+          </a:prstGeom>
+          <a:noFill/>
+          <a:ln/>
+        </p:spPr>
+        <p:txBody>
+          <a:bodyPr wrap="square" lIns="0" tIns="0" rIns="0" bIns="0" rtlCol="0" anchor="ctr"/>
+          <a:lstStyle/>
+          <a:p>
+            <a:pPr marL="0" indent="0">
+              <a:buNone/>
+            </a:pPr>
+            <a:r>
+              <a:rPr lang="en-US" sz="1000" kern="0" spc="400" dirty="0">
+                <a:solidFill>
+                  <a:srgbClr val="6B7280"/>
+                </a:solidFill>
+                <a:latin typeface="Calibri" pitchFamily="34" charset="0"/>
+                <a:ea typeface="Calibri" pitchFamily="34" charset="-122"/>
+                <a:cs typeface="Calibri" pitchFamily="34" charset="-120"/>
+              </a:rPr>
+              <a:t>OPERATOR SURFACE</a:t>
+            </a:r>
+            <a:endParaRPr lang="en-US" sz="1000" dirty="0"/>
+          </a:p>
+        </p:txBody>
+      </p:sp>
+      <p:sp>
+        <p:nvSpPr>
+          <p:cNvPr id="4" name="Text 2"/>
+          <p:cNvSpPr/>
+          <p:nvPr/>
+        </p:nvSpPr>
+        <p:spPr>
+          <a:xfrm>
+            <a:off x="10789920" y="411480"/>
+            <a:ext cx="914400" cy="365760"/>
+          </a:xfrm>
+          <a:prstGeom prst="rect">
+            <a:avLst/>
+          </a:prstGeom>
+          <a:noFill/>
+          <a:ln/>
+        </p:spPr>
+        <p:txBody>
+          <a:bodyPr wrap="square" lIns="0" tIns="0" rIns="0" bIns="0" rtlCol="0" anchor="ctr"/>
+          <a:lstStyle/>
+          <a:p>
+            <a:pPr marL="0" indent="0" algn="r">
+              <a:buNone/>
+            </a:pPr>
+            <a:r>
+              <a:rPr lang="en-US" sz="1000" i="1" dirty="0">
+                <a:solidFill>
+                  <a:srgbClr val="9CA3AF"/>
+                </a:solidFill>
+                <a:latin typeface="Calibri" pitchFamily="34" charset="0"/>
+                <a:ea typeface="Calibri" pitchFamily="34" charset="-122"/>
+                <a:cs typeface="Calibri" pitchFamily="34" charset="-120"/>
+              </a:rPr>
+              <a:t>10 / 16</a:t>
+            </a:r>
+            <a:endParaRPr lang="en-US" sz="1000" dirty="0"/>
+          </a:p>
+        </p:txBody>
+      </p:sp>
+      <p:sp>
+        <p:nvSpPr>
+          <p:cNvPr id="5" name="Shape 3"/>
+          <p:cNvSpPr/>
+          <p:nvPr/>
+        </p:nvSpPr>
+        <p:spPr>
+          <a:xfrm>
+            <a:off x="502920" y="6355080"/>
+            <a:ext cx="11155680" cy="0"/>
+          </a:xfrm>
+          <a:prstGeom prst="line">
+            <a:avLst/>
+          </a:prstGeom>
+          <a:noFill/>
+          <a:ln w="6350">
+            <a:solidFill>
+              <a:srgbClr val="E5E7EB"/>
+            </a:solidFill>
+            <a:prstDash val="solid"/>
+          </a:ln>
+        </p:spPr>
+        <p:txBody>
+          <a:bodyPr/>
+          <a:lstStyle/>
+          <a:p>
+            <a:endParaRPr lang="en-US"/>
+          </a:p>
+        </p:txBody>
+      </p:sp>
+      <p:sp>
+        <p:nvSpPr>
+          <p:cNvPr id="6" name="Text 4"/>
+          <p:cNvSpPr/>
+          <p:nvPr/>
+        </p:nvSpPr>
+        <p:spPr>
+          <a:xfrm>
+            <a:off x="502920" y="6446520"/>
+            <a:ext cx="5486400" cy="256032"/>
+          </a:xfrm>
+          <a:prstGeom prst="rect">
+            <a:avLst/>
+          </a:prstGeom>
+          <a:noFill/>
+          <a:ln/>
+        </p:spPr>
+        <p:txBody>
+          <a:bodyPr wrap="square" lIns="0" tIns="0" rIns="0" bIns="0" rtlCol="0" anchor="ctr"/>
+          <a:lstStyle/>
+          <a:p>
+            <a:pPr marL="0" indent="0">
+              <a:buNone/>
+            </a:pPr>
+            <a:r>
+              <a:rPr lang="en-US" sz="900" i="1" dirty="0">
+                <a:solidFill>
+                  <a:srgbClr val="9CA3AF"/>
+                </a:solidFill>
+                <a:latin typeface="Calibri" pitchFamily="34" charset="0"/>
+                <a:ea typeface="Calibri" pitchFamily="34" charset="-122"/>
+                <a:cs typeface="Calibri" pitchFamily="34" charset="-120"/>
+              </a:rPr>
+              <a:t>Edge Language Coach  ·  Course Project  ·  2026</a:t>
+            </a:r>
+            <a:endParaRPr lang="en-US" sz="900" dirty="0"/>
+          </a:p>
+        </p:txBody>
+      </p:sp>
+      <p:sp>
+        <p:nvSpPr>
+          <p:cNvPr id="7" name="Text 5"/>
+          <p:cNvSpPr/>
+          <p:nvPr/>
+        </p:nvSpPr>
+        <p:spPr>
+          <a:xfrm>
+            <a:off x="7086600" y="6446520"/>
+            <a:ext cx="4572000" cy="256032"/>
+          </a:xfrm>
+          <a:prstGeom prst="rect">
+            <a:avLst/>
+          </a:prstGeom>
+          <a:noFill/>
+          <a:ln/>
+        </p:spPr>
+        <p:txBody>
+          <a:bodyPr wrap="square" lIns="0" tIns="0" rIns="0" bIns="0" rtlCol="0" anchor="ctr"/>
+          <a:lstStyle/>
+          <a:p>
+            <a:pPr marL="0" indent="0" algn="r">
+              <a:buNone/>
+            </a:pPr>
+            <a:r>
+              <a:rPr lang="en-US" sz="900" i="1" dirty="0">
+                <a:solidFill>
+                  <a:srgbClr val="9CA3AF"/>
+                </a:solidFill>
+                <a:latin typeface="Calibri" pitchFamily="34" charset="0"/>
+                <a:ea typeface="Calibri" pitchFamily="34" charset="-122"/>
+                <a:cs typeface="Calibri" pitchFamily="34" charset="-120"/>
+              </a:rPr>
+              <a:t>Hassan</a:t>
+            </a:r>
+            <a:endParaRPr lang="en-US" sz="900" dirty="0"/>
+          </a:p>
+        </p:txBody>
+      </p:sp>
+      <p:sp>
+        <p:nvSpPr>
+          <p:cNvPr id="8" name="Text 6"/>
+          <p:cNvSpPr/>
+          <p:nvPr/>
+        </p:nvSpPr>
+        <p:spPr>
+          <a:xfrm>
+            <a:off x="502920" y="914400"/>
+            <a:ext cx="11155680" cy="777240"/>
+          </a:xfrm>
+          <a:prstGeom prst="rect">
+            <a:avLst/>
+          </a:prstGeom>
+          <a:noFill/>
+          <a:ln/>
+        </p:spPr>
+        <p:txBody>
+          <a:bodyPr wrap="square" lIns="0" tIns="0" rIns="0" bIns="0" rtlCol="0" anchor="ctr"/>
+          <a:lstStyle/>
+          <a:p>
+            <a:pPr marL="0" indent="0">
+              <a:buNone/>
+            </a:pPr>
+            <a:r>
+              <a:rPr lang="en-US" sz="3000" dirty="0">
+                <a:solidFill>
+                  <a:srgbClr val="1A2238"/>
+                </a:solidFill>
+                <a:latin typeface="Cambria" pitchFamily="34" charset="0"/>
+                <a:ea typeface="Cambria" pitchFamily="34" charset="-122"/>
+                <a:cs typeface="Cambria" pitchFamily="34" charset="-120"/>
+              </a:rPr>
+              <a:t>An agentic operator surface — two MCP servers</a:t>
+            </a:r>
+            <a:endParaRPr lang="en-US" sz="3000" dirty="0"/>
+          </a:p>
+        </p:txBody>
+      </p:sp>
+      <p:sp>
+        <p:nvSpPr>
+          <p:cNvPr id="9" name="Text 7"/>
+          <p:cNvSpPr/>
+          <p:nvPr/>
+        </p:nvSpPr>
+        <p:spPr>
+          <a:xfrm>
+            <a:off x="502920" y="1874520"/>
+            <a:ext cx="11155680" cy="594360"/>
+          </a:xfrm>
+          <a:prstGeom prst="rect">
+            <a:avLst/>
+          </a:prstGeom>
+          <a:noFill/>
+          <a:ln/>
+        </p:spPr>
+        <p:txBody>
+          <a:bodyPr wrap="square" lIns="0" tIns="0" rIns="0" bIns="0" rtlCol="0" anchor="ctr"/>
+          <a:lstStyle/>
+          <a:p>
+            <a:pPr marL="0" indent="0">
+              <a:lnSpc>
+                <a:spcPct val="130000"/>
+              </a:lnSpc>
+              <a:buNone/>
+            </a:pPr>
+            <a:r>
+              <a:rPr lang="en-US" sz="1200" i="1" dirty="0">
+                <a:solidFill>
+                  <a:srgbClr val="333333"/>
+                </a:solidFill>
+                <a:latin typeface="Calibri" pitchFamily="34" charset="0"/>
+                <a:ea typeface="Calibri" pitchFamily="34" charset="-122"/>
+                <a:cs typeface="Calibri" pitchFamily="34" charset="-120"/>
+              </a:rPr>
+              <a:t>Two Model Context Protocol servers expose the running system to agent-driven inspection and remediation, without SSH or redeploy. The servers are split by privilege.</a:t>
+            </a:r>
+            <a:endParaRPr lang="en-US" sz="1200" dirty="0"/>
+          </a:p>
+        </p:txBody>
+      </p:sp>
+      <p:sp>
+        <p:nvSpPr>
+          <p:cNvPr id="10" name="Shape 8"/>
+          <p:cNvSpPr/>
+          <p:nvPr/>
+        </p:nvSpPr>
+        <p:spPr>
+          <a:xfrm>
+            <a:off x="502920" y="2606040"/>
+            <a:ext cx="3611880" cy="822960"/>
+          </a:xfrm>
+          <a:prstGeom prst="rect">
+            <a:avLst/>
+          </a:prstGeom>
+          <a:solidFill>
+            <a:srgbClr val="FFFFFF"/>
+          </a:solidFill>
+          <a:ln w="9525">
+            <a:solidFill>
+              <a:srgbClr val="D1D5DB"/>
+            </a:solidFill>
+            <a:prstDash val="solid"/>
+          </a:ln>
+        </p:spPr>
+        <p:txBody>
+          <a:bodyPr/>
+          <a:lstStyle/>
+          <a:p>
+            <a:endParaRPr lang="en-US"/>
+          </a:p>
+        </p:txBody>
+      </p:sp>
+      <p:sp>
+        <p:nvSpPr>
+          <p:cNvPr id="11" name="Text 9"/>
+          <p:cNvSpPr/>
+          <p:nvPr/>
+        </p:nvSpPr>
+        <p:spPr>
+          <a:xfrm>
+            <a:off x="640080" y="2670048"/>
+            <a:ext cx="1371600" cy="274320"/>
+          </a:xfrm>
+          <a:prstGeom prst="rect">
+            <a:avLst/>
+          </a:prstGeom>
+          <a:noFill/>
+          <a:ln/>
+        </p:spPr>
+        <p:txBody>
+          <a:bodyPr wrap="square" lIns="0" tIns="0" rIns="0" bIns="0" rtlCol="0" anchor="ctr"/>
+          <a:lstStyle/>
+          <a:p>
+            <a:pPr marL="0" indent="0">
+              <a:buNone/>
+            </a:pPr>
+            <a:r>
+              <a:rPr lang="en-US" sz="1000" i="1" dirty="0">
+                <a:solidFill>
+                  <a:srgbClr val="7A2E3B"/>
+                </a:solidFill>
+                <a:latin typeface="Cambria" pitchFamily="34" charset="0"/>
+                <a:ea typeface="Cambria" pitchFamily="34" charset="-122"/>
+                <a:cs typeface="Cambria" pitchFamily="34" charset="-120"/>
+              </a:rPr>
+              <a:t>Step 1.</a:t>
+            </a:r>
+            <a:endParaRPr lang="en-US" sz="1000" dirty="0"/>
+          </a:p>
+        </p:txBody>
+      </p:sp>
+      <p:sp>
+        <p:nvSpPr>
+          <p:cNvPr id="12" name="Text 10"/>
+          <p:cNvSpPr/>
+          <p:nvPr/>
+        </p:nvSpPr>
+        <p:spPr>
+          <a:xfrm>
+            <a:off x="640080" y="2907792"/>
+            <a:ext cx="3337560" cy="320040"/>
+          </a:xfrm>
+          <a:prstGeom prst="rect">
+            <a:avLst/>
+          </a:prstGeom>
+          <a:noFill/>
+          <a:ln/>
+        </p:spPr>
+        <p:txBody>
+          <a:bodyPr wrap="square" lIns="0" tIns="0" rIns="0" bIns="0" rtlCol="0" anchor="ctr"/>
+          <a:lstStyle/>
+          <a:p>
+            <a:pPr marL="0" indent="0">
+              <a:buNone/>
+            </a:pPr>
+            <a:r>
+              <a:rPr lang="en-US" sz="1500" dirty="0">
+                <a:solidFill>
+                  <a:srgbClr val="1A2238"/>
+                </a:solidFill>
+                <a:latin typeface="Cambria" pitchFamily="34" charset="0"/>
+                <a:ea typeface="Cambria" pitchFamily="34" charset="-122"/>
+                <a:cs typeface="Cambria" pitchFamily="34" charset="-120"/>
+              </a:rPr>
+              <a:t>Detect</a:t>
+            </a:r>
+            <a:endParaRPr lang="en-US" sz="1500" dirty="0"/>
+          </a:p>
+        </p:txBody>
+      </p:sp>
+      <p:sp>
+        <p:nvSpPr>
+          <p:cNvPr id="13" name="Text 11"/>
+          <p:cNvSpPr/>
+          <p:nvPr/>
+        </p:nvSpPr>
+        <p:spPr>
+          <a:xfrm>
+            <a:off x="640080" y="3200400"/>
+            <a:ext cx="3337560" cy="274320"/>
+          </a:xfrm>
+          <a:prstGeom prst="rect">
+            <a:avLst/>
+          </a:prstGeom>
+          <a:noFill/>
+          <a:ln/>
+        </p:spPr>
+        <p:txBody>
+          <a:bodyPr wrap="square" lIns="0" tIns="0" rIns="0" bIns="0" rtlCol="0" anchor="ctr"/>
+          <a:lstStyle/>
+          <a:p>
+            <a:pPr marL="0" indent="0">
+              <a:buNone/>
+            </a:pPr>
+            <a:r>
+              <a:rPr lang="en-US" sz="1050" i="1" dirty="0">
+                <a:solidFill>
+                  <a:srgbClr val="333333"/>
+                </a:solidFill>
+                <a:latin typeface="Calibri" pitchFamily="34" charset="0"/>
+                <a:ea typeface="Calibri" pitchFamily="34" charset="-122"/>
+                <a:cs typeface="Calibri" pitchFamily="34" charset="-120"/>
+              </a:rPr>
+              <a:t>Prometheus / Grafana fires an alert</a:t>
+            </a:r>
+            <a:endParaRPr lang="en-US" sz="1050" dirty="0"/>
+          </a:p>
+        </p:txBody>
+      </p:sp>
+      <p:sp>
+        <p:nvSpPr>
+          <p:cNvPr id="14" name="Shape 12"/>
+          <p:cNvSpPr/>
+          <p:nvPr/>
+        </p:nvSpPr>
+        <p:spPr>
+          <a:xfrm>
+            <a:off x="4114800" y="3017520"/>
+            <a:ext cx="292608" cy="0"/>
+          </a:xfrm>
+          <a:prstGeom prst="line">
+            <a:avLst/>
+          </a:prstGeom>
+          <a:noFill/>
+          <a:ln w="12700">
+            <a:solidFill>
+              <a:srgbClr val="1A2238"/>
+            </a:solidFill>
+            <a:prstDash val="solid"/>
+            <a:tailEnd type="triangle"/>
+          </a:ln>
+        </p:spPr>
+        <p:txBody>
+          <a:bodyPr/>
+          <a:lstStyle/>
+          <a:p>
+            <a:endParaRPr lang="en-US"/>
+          </a:p>
+        </p:txBody>
+      </p:sp>
+      <p:sp>
+        <p:nvSpPr>
+          <p:cNvPr id="15" name="Shape 13"/>
+          <p:cNvSpPr/>
+          <p:nvPr/>
+        </p:nvSpPr>
+        <p:spPr>
+          <a:xfrm>
+            <a:off x="4407408" y="2606040"/>
+            <a:ext cx="3611880" cy="822960"/>
+          </a:xfrm>
+          <a:prstGeom prst="rect">
+            <a:avLst/>
+          </a:prstGeom>
+          <a:solidFill>
+            <a:srgbClr val="FFFFFF"/>
+          </a:solidFill>
+          <a:ln w="9525">
+            <a:solidFill>
+              <a:srgbClr val="D1D5DB"/>
+            </a:solidFill>
+            <a:prstDash val="solid"/>
+          </a:ln>
+        </p:spPr>
+        <p:txBody>
+          <a:bodyPr/>
+          <a:lstStyle/>
+          <a:p>
+            <a:endParaRPr lang="en-US"/>
+          </a:p>
+        </p:txBody>
+      </p:sp>
+      <p:sp>
+        <p:nvSpPr>
+          <p:cNvPr id="16" name="Text 14"/>
+          <p:cNvSpPr/>
+          <p:nvPr/>
+        </p:nvSpPr>
+        <p:spPr>
+          <a:xfrm>
+            <a:off x="4544568" y="2670048"/>
+            <a:ext cx="1371600" cy="274320"/>
+          </a:xfrm>
+          <a:prstGeom prst="rect">
+            <a:avLst/>
+          </a:prstGeom>
+          <a:noFill/>
+          <a:ln/>
+        </p:spPr>
+        <p:txBody>
+          <a:bodyPr wrap="square" lIns="0" tIns="0" rIns="0" bIns="0" rtlCol="0" anchor="ctr"/>
+          <a:lstStyle/>
+          <a:p>
+            <a:pPr marL="0" indent="0">
+              <a:buNone/>
+            </a:pPr>
+            <a:r>
+              <a:rPr lang="en-US" sz="1000" i="1" dirty="0">
+                <a:solidFill>
+                  <a:srgbClr val="7A2E3B"/>
+                </a:solidFill>
+                <a:latin typeface="Cambria" pitchFamily="34" charset="0"/>
+                <a:ea typeface="Cambria" pitchFamily="34" charset="-122"/>
+                <a:cs typeface="Cambria" pitchFamily="34" charset="-120"/>
+              </a:rPr>
+              <a:t>Step 2.</a:t>
+            </a:r>
+            <a:endParaRPr lang="en-US" sz="1000" dirty="0"/>
+          </a:p>
+        </p:txBody>
+      </p:sp>
+      <p:sp>
+        <p:nvSpPr>
+          <p:cNvPr id="17" name="Text 15"/>
+          <p:cNvSpPr/>
+          <p:nvPr/>
+        </p:nvSpPr>
+        <p:spPr>
+          <a:xfrm>
+            <a:off x="4544568" y="2907792"/>
+            <a:ext cx="3337560" cy="320040"/>
+          </a:xfrm>
+          <a:prstGeom prst="rect">
+            <a:avLst/>
+          </a:prstGeom>
+          <a:noFill/>
+          <a:ln/>
+        </p:spPr>
+        <p:txBody>
+          <a:bodyPr wrap="square" lIns="0" tIns="0" rIns="0" bIns="0" rtlCol="0" anchor="ctr"/>
+          <a:lstStyle/>
+          <a:p>
+            <a:pPr marL="0" indent="0">
+              <a:buNone/>
+            </a:pPr>
+            <a:r>
+              <a:rPr lang="en-US" sz="1500" dirty="0">
+                <a:solidFill>
+                  <a:srgbClr val="1A2238"/>
+                </a:solidFill>
+                <a:latin typeface="Cambria" pitchFamily="34" charset="0"/>
+                <a:ea typeface="Cambria" pitchFamily="34" charset="-122"/>
+                <a:cs typeface="Cambria" pitchFamily="34" charset="-120"/>
+              </a:rPr>
+              <a:t>Diagnose</a:t>
+            </a:r>
+            <a:endParaRPr lang="en-US" sz="1500" dirty="0"/>
+          </a:p>
+        </p:txBody>
+      </p:sp>
+      <p:sp>
+        <p:nvSpPr>
+          <p:cNvPr id="18" name="Text 16"/>
+          <p:cNvSpPr/>
+          <p:nvPr/>
+        </p:nvSpPr>
+        <p:spPr>
+          <a:xfrm>
+            <a:off x="4544568" y="3200400"/>
+            <a:ext cx="3337560" cy="274320"/>
+          </a:xfrm>
+          <a:prstGeom prst="rect">
+            <a:avLst/>
+          </a:prstGeom>
+          <a:noFill/>
+          <a:ln/>
+        </p:spPr>
+        <p:txBody>
+          <a:bodyPr wrap="square" lIns="0" tIns="0" rIns="0" bIns="0" rtlCol="0" anchor="ctr"/>
+          <a:lstStyle/>
+          <a:p>
+            <a:pPr marL="0" indent="0">
+              <a:buNone/>
+            </a:pPr>
+            <a:r>
+              <a:rPr lang="en-US" sz="1050" i="1" dirty="0">
+                <a:solidFill>
+                  <a:srgbClr val="333333"/>
+                </a:solidFill>
+                <a:latin typeface="Calibri" pitchFamily="34" charset="0"/>
+                <a:ea typeface="Calibri" pitchFamily="34" charset="-122"/>
+                <a:cs typeface="Calibri" pitchFamily="34" charset="-120"/>
+              </a:rPr>
+              <a:t>observability-mcp  (read-only, six tools)</a:t>
+            </a:r>
+            <a:endParaRPr lang="en-US" sz="1050" dirty="0"/>
+          </a:p>
+        </p:txBody>
+      </p:sp>
+      <p:sp>
+        <p:nvSpPr>
+          <p:cNvPr id="19" name="Shape 17"/>
+          <p:cNvSpPr/>
+          <p:nvPr/>
+        </p:nvSpPr>
+        <p:spPr>
+          <a:xfrm>
+            <a:off x="8019288" y="3017520"/>
+            <a:ext cx="292608" cy="0"/>
+          </a:xfrm>
+          <a:prstGeom prst="line">
+            <a:avLst/>
+          </a:prstGeom>
+          <a:noFill/>
+          <a:ln w="12700">
+            <a:solidFill>
+              <a:srgbClr val="1A2238"/>
+            </a:solidFill>
+            <a:prstDash val="solid"/>
+            <a:tailEnd type="triangle"/>
+          </a:ln>
+        </p:spPr>
+        <p:txBody>
+          <a:bodyPr/>
+          <a:lstStyle/>
+          <a:p>
+            <a:endParaRPr lang="en-US"/>
+          </a:p>
+        </p:txBody>
+      </p:sp>
+      <p:sp>
+        <p:nvSpPr>
+          <p:cNvPr id="20" name="Shape 18"/>
+          <p:cNvSpPr/>
+          <p:nvPr/>
+        </p:nvSpPr>
+        <p:spPr>
+          <a:xfrm>
+            <a:off x="8311896" y="2606040"/>
+            <a:ext cx="3611880" cy="822960"/>
+          </a:xfrm>
+          <a:prstGeom prst="rect">
+            <a:avLst/>
+          </a:prstGeom>
+          <a:solidFill>
+            <a:srgbClr val="FFFFFF"/>
+          </a:solidFill>
+          <a:ln w="9525">
+            <a:solidFill>
+              <a:srgbClr val="D1D5DB"/>
+            </a:solidFill>
+            <a:prstDash val="solid"/>
+          </a:ln>
+        </p:spPr>
+        <p:txBody>
+          <a:bodyPr/>
+          <a:lstStyle/>
+          <a:p>
+            <a:endParaRPr lang="en-US"/>
+          </a:p>
+        </p:txBody>
+      </p:sp>
+      <p:sp>
+        <p:nvSpPr>
+          <p:cNvPr id="21" name="Text 19"/>
+          <p:cNvSpPr/>
+          <p:nvPr/>
+        </p:nvSpPr>
+        <p:spPr>
+          <a:xfrm>
+            <a:off x="8449056" y="2670048"/>
+            <a:ext cx="1371600" cy="274320"/>
+          </a:xfrm>
+          <a:prstGeom prst="rect">
+            <a:avLst/>
+          </a:prstGeom>
+          <a:noFill/>
+          <a:ln/>
+        </p:spPr>
+        <p:txBody>
+          <a:bodyPr wrap="square" lIns="0" tIns="0" rIns="0" bIns="0" rtlCol="0" anchor="ctr"/>
+          <a:lstStyle/>
+          <a:p>
+            <a:pPr marL="0" indent="0">
+              <a:buNone/>
+            </a:pPr>
+            <a:r>
+              <a:rPr lang="en-US" sz="1000" i="1" dirty="0">
+                <a:solidFill>
+                  <a:srgbClr val="7A2E3B"/>
+                </a:solidFill>
+                <a:latin typeface="Cambria" pitchFamily="34" charset="0"/>
+                <a:ea typeface="Cambria" pitchFamily="34" charset="-122"/>
+                <a:cs typeface="Cambria" pitchFamily="34" charset="-120"/>
+              </a:rPr>
+              <a:t>Step 3.</a:t>
+            </a:r>
+            <a:endParaRPr lang="en-US" sz="1000" dirty="0"/>
+          </a:p>
+        </p:txBody>
+      </p:sp>
+      <p:sp>
+        <p:nvSpPr>
+          <p:cNvPr id="22" name="Text 20"/>
+          <p:cNvSpPr/>
+          <p:nvPr/>
+        </p:nvSpPr>
+        <p:spPr>
+          <a:xfrm>
+            <a:off x="8449056" y="2907792"/>
+            <a:ext cx="3337560" cy="320040"/>
+          </a:xfrm>
+          <a:prstGeom prst="rect">
+            <a:avLst/>
+          </a:prstGeom>
+          <a:noFill/>
+          <a:ln/>
+        </p:spPr>
+        <p:txBody>
+          <a:bodyPr wrap="square" lIns="0" tIns="0" rIns="0" bIns="0" rtlCol="0" anchor="ctr"/>
+          <a:lstStyle/>
+          <a:p>
+            <a:pPr marL="0" indent="0">
+              <a:buNone/>
+            </a:pPr>
+            <a:r>
+              <a:rPr lang="en-US" sz="1500" dirty="0">
+                <a:solidFill>
+                  <a:srgbClr val="1A2238"/>
+                </a:solidFill>
+                <a:latin typeface="Cambria" pitchFamily="34" charset="0"/>
+                <a:ea typeface="Cambria" pitchFamily="34" charset="-122"/>
+                <a:cs typeface="Cambria" pitchFamily="34" charset="-120"/>
+              </a:rPr>
+              <a:t>Remediate</a:t>
+            </a:r>
+            <a:endParaRPr lang="en-US" sz="1500" dirty="0"/>
+          </a:p>
+        </p:txBody>
+      </p:sp>
+      <p:sp>
+        <p:nvSpPr>
+          <p:cNvPr id="23" name="Text 21"/>
+          <p:cNvSpPr/>
+          <p:nvPr/>
+        </p:nvSpPr>
+        <p:spPr>
+          <a:xfrm>
+            <a:off x="8449056" y="3200400"/>
+            <a:ext cx="3337560" cy="274320"/>
+          </a:xfrm>
+          <a:prstGeom prst="rect">
+            <a:avLst/>
+          </a:prstGeom>
+          <a:noFill/>
+          <a:ln/>
+        </p:spPr>
+        <p:txBody>
+          <a:bodyPr wrap="square" lIns="0" tIns="0" rIns="0" bIns="0" rtlCol="0" anchor="ctr"/>
+          <a:lstStyle/>
+          <a:p>
+            <a:pPr marL="0" indent="0">
+              <a:buNone/>
+            </a:pPr>
+            <a:r>
+              <a:rPr lang="en-US" sz="1050" i="1" dirty="0">
+                <a:solidFill>
+                  <a:srgbClr val="333333"/>
+                </a:solidFill>
+                <a:latin typeface="Calibri" pitchFamily="34" charset="0"/>
+                <a:ea typeface="Calibri" pitchFamily="34" charset="-122"/>
+                <a:cs typeface="Calibri" pitchFamily="34" charset="-120"/>
+              </a:rPr>
+              <a:t>remediation-mcp  (guarded write, three tools)</a:t>
+            </a:r>
+            <a:endParaRPr lang="en-US" sz="1050" dirty="0"/>
+          </a:p>
+        </p:txBody>
+      </p:sp>
+      <p:sp>
+        <p:nvSpPr>
+          <p:cNvPr id="24" name="Shape 22"/>
+          <p:cNvSpPr/>
+          <p:nvPr/>
+        </p:nvSpPr>
+        <p:spPr>
+          <a:xfrm>
+            <a:off x="502920" y="3703320"/>
+            <a:ext cx="5577840" cy="0"/>
+          </a:xfrm>
+          <a:prstGeom prst="line">
+            <a:avLst/>
+          </a:prstGeom>
+          <a:noFill/>
+          <a:ln w="19050">
+            <a:solidFill>
+              <a:srgbClr val="1A2238"/>
+            </a:solidFill>
+            <a:prstDash val="solid"/>
+          </a:ln>
+        </p:spPr>
+        <p:txBody>
+          <a:bodyPr/>
+          <a:lstStyle/>
+          <a:p>
+            <a:endParaRPr lang="en-US"/>
+          </a:p>
+        </p:txBody>
+      </p:sp>
+      <p:sp>
+        <p:nvSpPr>
+          <p:cNvPr id="25" name="Text 23"/>
+          <p:cNvSpPr/>
+          <p:nvPr/>
+        </p:nvSpPr>
+        <p:spPr>
+          <a:xfrm>
+            <a:off x="502920" y="3794760"/>
+            <a:ext cx="5577840" cy="365760"/>
+          </a:xfrm>
+          <a:prstGeom prst="rect">
+            <a:avLst/>
+          </a:prstGeom>
+          <a:noFill/>
+          <a:ln/>
+        </p:spPr>
+        <p:txBody>
+          <a:bodyPr wrap="square" lIns="0" tIns="0" rIns="0" bIns="0" rtlCol="0" anchor="ctr"/>
+          <a:lstStyle/>
+          <a:p>
+            <a:pPr marL="0" indent="0">
+              <a:buNone/>
+            </a:pPr>
+            <a:r>
+              <a:rPr lang="en-US" sz="1400" b="1" dirty="0">
+                <a:solidFill>
+                  <a:srgbClr val="1A2238"/>
+                </a:solidFill>
+                <a:latin typeface="Consolas" pitchFamily="34" charset="0"/>
+                <a:ea typeface="Consolas" pitchFamily="34" charset="-122"/>
+                <a:cs typeface="Consolas" pitchFamily="34" charset="-120"/>
+              </a:rPr>
+              <a:t>observability-mcp</a:t>
+            </a:r>
+            <a:endParaRPr lang="en-US" sz="1400" dirty="0"/>
+          </a:p>
+        </p:txBody>
+      </p:sp>
+      <p:sp>
+        <p:nvSpPr>
+          <p:cNvPr id="26" name="Text 24"/>
+          <p:cNvSpPr/>
+          <p:nvPr/>
+        </p:nvSpPr>
+        <p:spPr>
+          <a:xfrm>
+            <a:off x="502920" y="4160520"/>
+            <a:ext cx="5577840" cy="274320"/>
+          </a:xfrm>
+          <a:prstGeom prst="rect">
+            <a:avLst/>
+          </a:prstGeom>
+          <a:noFill/>
+          <a:ln/>
+        </p:spPr>
+        <p:txBody>
+          <a:bodyPr wrap="square" lIns="0" tIns="0" rIns="0" bIns="0" rtlCol="0" anchor="ctr"/>
+          <a:lstStyle/>
+          <a:p>
+            <a:pPr marL="0" indent="0">
+              <a:buNone/>
+            </a:pPr>
+            <a:r>
+              <a:rPr lang="en-US" sz="1050" i="1" dirty="0">
+                <a:solidFill>
+                  <a:srgbClr val="7A2E3B"/>
+                </a:solidFill>
+                <a:latin typeface="Calibri" pitchFamily="34" charset="0"/>
+                <a:ea typeface="Calibri" pitchFamily="34" charset="-122"/>
+                <a:cs typeface="Calibri" pitchFamily="34" charset="-120"/>
+              </a:rPr>
+              <a:t>Read-only · no mutation · no auth needed</a:t>
+            </a:r>
+            <a:endParaRPr lang="en-US" sz="1050" dirty="0"/>
+          </a:p>
+        </p:txBody>
+      </p:sp>
+      <p:sp>
+        <p:nvSpPr>
+          <p:cNvPr id="27" name="Text 25"/>
+          <p:cNvSpPr/>
+          <p:nvPr/>
+        </p:nvSpPr>
+        <p:spPr>
+          <a:xfrm>
+            <a:off x="502920" y="4480560"/>
+            <a:ext cx="5577840" cy="1691640"/>
+          </a:xfrm>
+          <a:prstGeom prst="rect">
+            <a:avLst/>
+          </a:prstGeom>
+          <a:noFill/>
+          <a:ln/>
+        </p:spPr>
+        <p:txBody>
+          <a:bodyPr wrap="square" lIns="0" tIns="0" rIns="0" bIns="0" rtlCol="0" anchor="ctr"/>
+          <a:lstStyle/>
+          <a:p>
+            <a:pPr marL="0" indent="0">
+              <a:lnSpc>
+                <a:spcPct val="135000"/>
+              </a:lnSpc>
+              <a:spcAft>
+                <a:spcPts val="200"/>
+              </a:spcAft>
+              <a:buNone/>
+            </a:pPr>
+            <a:r>
+              <a:rPr lang="en-US" sz="1100" dirty="0">
+                <a:solidFill>
+                  <a:srgbClr val="333333"/>
+                </a:solidFill>
+                <a:latin typeface="Consolas" pitchFamily="34" charset="0"/>
+                <a:ea typeface="Consolas" pitchFamily="34" charset="-122"/>
+                <a:cs typeface="Consolas" pitchFamily="34" charset="-120"/>
+              </a:rPr>
+              <a:t>get_service_health</a:t>
+            </a:r>
+            <a:endParaRPr lang="en-US" sz="1100" dirty="0"/>
+          </a:p>
+          <a:p>
+            <a:pPr marL="0" indent="0">
+              <a:lnSpc>
+                <a:spcPct val="135000"/>
+              </a:lnSpc>
+              <a:spcAft>
+                <a:spcPts val="200"/>
+              </a:spcAft>
+              <a:buNone/>
+            </a:pPr>
+            <a:r>
+              <a:rPr lang="en-US" sz="1100" dirty="0">
+                <a:solidFill>
+                  <a:srgbClr val="333333"/>
+                </a:solidFill>
+                <a:latin typeface="Consolas" pitchFamily="34" charset="0"/>
+                <a:ea typeface="Consolas" pitchFamily="34" charset="-122"/>
+                <a:cs typeface="Consolas" pitchFamily="34" charset="-120"/>
+              </a:rPr>
+              <a:t>get_queue_metrics</a:t>
+            </a:r>
+            <a:endParaRPr lang="en-US" sz="1100" dirty="0"/>
+          </a:p>
+          <a:p>
+            <a:pPr marL="0" indent="0">
+              <a:lnSpc>
+                <a:spcPct val="135000"/>
+              </a:lnSpc>
+              <a:spcAft>
+                <a:spcPts val="200"/>
+              </a:spcAft>
+              <a:buNone/>
+            </a:pPr>
+            <a:r>
+              <a:rPr lang="en-US" sz="1100" dirty="0">
+                <a:solidFill>
+                  <a:srgbClr val="333333"/>
+                </a:solidFill>
+                <a:latin typeface="Consolas" pitchFamily="34" charset="0"/>
+                <a:ea typeface="Consolas" pitchFamily="34" charset="-122"/>
+                <a:cs typeface="Consolas" pitchFamily="34" charset="-120"/>
+              </a:rPr>
+              <a:t>get_circuit_breaker_state</a:t>
+            </a:r>
+            <a:endParaRPr lang="en-US" sz="1100" dirty="0"/>
+          </a:p>
+          <a:p>
+            <a:pPr marL="0" indent="0">
+              <a:lnSpc>
+                <a:spcPct val="135000"/>
+              </a:lnSpc>
+              <a:spcAft>
+                <a:spcPts val="200"/>
+              </a:spcAft>
+              <a:buNone/>
+            </a:pPr>
+            <a:r>
+              <a:rPr lang="en-US" sz="1100" dirty="0">
+                <a:solidFill>
+                  <a:srgbClr val="333333"/>
+                </a:solidFill>
+                <a:latin typeface="Consolas" pitchFamily="34" charset="0"/>
+                <a:ea typeface="Consolas" pitchFamily="34" charset="-122"/>
+                <a:cs typeface="Consolas" pitchFamily="34" charset="-120"/>
+              </a:rPr>
+              <a:t>get_active_sessions</a:t>
+            </a:r>
+            <a:endParaRPr lang="en-US" sz="1100" dirty="0"/>
+          </a:p>
+          <a:p>
+            <a:pPr marL="0" indent="0">
+              <a:lnSpc>
+                <a:spcPct val="135000"/>
+              </a:lnSpc>
+              <a:spcAft>
+                <a:spcPts val="200"/>
+              </a:spcAft>
+              <a:buNone/>
+            </a:pPr>
+            <a:r>
+              <a:rPr lang="en-US" sz="1100" dirty="0">
+                <a:solidFill>
+                  <a:srgbClr val="333333"/>
+                </a:solidFill>
+                <a:latin typeface="Consolas" pitchFamily="34" charset="0"/>
+                <a:ea typeface="Consolas" pitchFamily="34" charset="-122"/>
+                <a:cs typeface="Consolas" pitchFamily="34" charset="-120"/>
+              </a:rPr>
+              <a:t>get_groq_latency</a:t>
+            </a:r>
+            <a:endParaRPr lang="en-US" sz="1100" dirty="0"/>
+          </a:p>
+          <a:p>
+            <a:pPr marL="0" indent="0">
+              <a:lnSpc>
+                <a:spcPct val="135000"/>
+              </a:lnSpc>
+              <a:spcAft>
+                <a:spcPts val="200"/>
+              </a:spcAft>
+              <a:buNone/>
+            </a:pPr>
+            <a:r>
+              <a:rPr lang="en-US" sz="1100" dirty="0">
+                <a:solidFill>
+                  <a:srgbClr val="333333"/>
+                </a:solidFill>
+                <a:latin typeface="Consolas" pitchFamily="34" charset="0"/>
+                <a:ea typeface="Consolas" pitchFamily="34" charset="-122"/>
+                <a:cs typeface="Consolas" pitchFamily="34" charset="-120"/>
+              </a:rPr>
+              <a:t>get_safety_policy</a:t>
+            </a:r>
+            <a:endParaRPr lang="en-US" sz="1100" dirty="0"/>
+          </a:p>
+          <a:p>
+            <a:pPr marL="0" indent="0">
+              <a:lnSpc>
+                <a:spcPct val="135000"/>
+              </a:lnSpc>
+              <a:spcAft>
+                <a:spcPts val="200"/>
+              </a:spcAft>
+              <a:buNone/>
+            </a:pPr>
+            <a:r>
+              <a:rPr lang="en-US" sz="1000" i="1" dirty="0">
+                <a:solidFill>
+                  <a:srgbClr val="6B7280"/>
+                </a:solidFill>
+                <a:latin typeface="Calibri" pitchFamily="34" charset="0"/>
+                <a:ea typeface="Calibri" pitchFamily="34" charset="-122"/>
+                <a:cs typeface="Calibri" pitchFamily="34" charset="-120"/>
+              </a:rPr>
+              <a:t>    - agent self-binds at session start</a:t>
+            </a:r>
+            <a:endParaRPr lang="en-US" sz="1100" dirty="0"/>
+          </a:p>
+        </p:txBody>
+      </p:sp>
+      <p:sp>
+        <p:nvSpPr>
+          <p:cNvPr id="28" name="Shape 26"/>
+          <p:cNvSpPr/>
+          <p:nvPr/>
+        </p:nvSpPr>
+        <p:spPr>
+          <a:xfrm>
+            <a:off x="6080760" y="3703320"/>
+            <a:ext cx="5577840" cy="0"/>
+          </a:xfrm>
+          <a:prstGeom prst="line">
+            <a:avLst/>
+          </a:prstGeom>
+          <a:noFill/>
+          <a:ln w="19050">
+            <a:solidFill>
+              <a:srgbClr val="1A2238"/>
+            </a:solidFill>
+            <a:prstDash val="solid"/>
+          </a:ln>
+        </p:spPr>
+        <p:txBody>
+          <a:bodyPr/>
+          <a:lstStyle/>
+          <a:p>
+            <a:endParaRPr lang="en-US"/>
+          </a:p>
+        </p:txBody>
+      </p:sp>
+      <p:sp>
+        <p:nvSpPr>
+          <p:cNvPr id="29" name="Text 27"/>
+          <p:cNvSpPr/>
+          <p:nvPr/>
+        </p:nvSpPr>
+        <p:spPr>
+          <a:xfrm>
+            <a:off x="6080760" y="3794760"/>
+            <a:ext cx="5577840" cy="365760"/>
+          </a:xfrm>
+          <a:prstGeom prst="rect">
+            <a:avLst/>
+          </a:prstGeom>
+          <a:noFill/>
+          <a:ln/>
+        </p:spPr>
+        <p:txBody>
+          <a:bodyPr wrap="square" lIns="0" tIns="0" rIns="0" bIns="0" rtlCol="0" anchor="ctr"/>
+          <a:lstStyle/>
+          <a:p>
+            <a:pPr marL="0" indent="0">
+              <a:buNone/>
+            </a:pPr>
+            <a:r>
+              <a:rPr lang="en-US" sz="1400" b="1" dirty="0">
+                <a:solidFill>
+                  <a:srgbClr val="1A2238"/>
+                </a:solidFill>
+                <a:latin typeface="Consolas" pitchFamily="34" charset="0"/>
+                <a:ea typeface="Consolas" pitchFamily="34" charset="-122"/>
+                <a:cs typeface="Consolas" pitchFamily="34" charset="-120"/>
+              </a:rPr>
+              <a:t>remediation-mcp</a:t>
+            </a:r>
+            <a:endParaRPr lang="en-US" sz="1400" dirty="0"/>
+          </a:p>
+        </p:txBody>
+      </p:sp>
+      <p:sp>
+        <p:nvSpPr>
+          <p:cNvPr id="30" name="Text 28"/>
+          <p:cNvSpPr/>
+          <p:nvPr/>
+        </p:nvSpPr>
+        <p:spPr>
+          <a:xfrm>
+            <a:off x="6080760" y="4160520"/>
+            <a:ext cx="5577840" cy="274320"/>
+          </a:xfrm>
+          <a:prstGeom prst="rect">
+            <a:avLst/>
+          </a:prstGeom>
+          <a:noFill/>
+          <a:ln/>
+        </p:spPr>
+        <p:txBody>
+          <a:bodyPr wrap="square" lIns="0" tIns="0" rIns="0" bIns="0" rtlCol="0" anchor="ctr"/>
+          <a:lstStyle/>
+          <a:p>
+            <a:pPr marL="0" indent="0">
+              <a:buNone/>
+            </a:pPr>
+            <a:r>
+              <a:rPr lang="en-US" sz="1050" i="1" dirty="0">
+                <a:solidFill>
+                  <a:srgbClr val="7A2E3B"/>
+                </a:solidFill>
+                <a:latin typeface="Calibri" pitchFamily="34" charset="0"/>
+                <a:ea typeface="Calibri" pitchFamily="34" charset="-122"/>
+                <a:cs typeface="Calibri" pitchFamily="34" charset="-120"/>
+              </a:rPr>
+              <a:t>Guarded write · three layers of guard</a:t>
+            </a:r>
+            <a:endParaRPr lang="en-US" sz="1050" dirty="0"/>
+          </a:p>
+        </p:txBody>
+      </p:sp>
+      <p:sp>
+        <p:nvSpPr>
+          <p:cNvPr id="31" name="Text 29"/>
+          <p:cNvSpPr/>
+          <p:nvPr/>
+        </p:nvSpPr>
+        <p:spPr>
+          <a:xfrm>
+            <a:off x="6080760" y="4480560"/>
+            <a:ext cx="5577840" cy="1691640"/>
+          </a:xfrm>
+          <a:prstGeom prst="rect">
+            <a:avLst/>
+          </a:prstGeom>
+          <a:noFill/>
+          <a:ln/>
+        </p:spPr>
+        <p:txBody>
+          <a:bodyPr wrap="square" lIns="0" tIns="0" rIns="0" bIns="0" rtlCol="0" anchor="ctr"/>
+          <a:lstStyle/>
+          <a:p>
+            <a:pPr marL="0" indent="0">
+              <a:lnSpc>
+                <a:spcPct val="135000"/>
+              </a:lnSpc>
+              <a:spcAft>
+                <a:spcPts val="200"/>
+              </a:spcAft>
+              <a:buNone/>
+            </a:pPr>
+            <a:r>
+              <a:rPr lang="en-US" sz="1100" dirty="0">
+                <a:solidFill>
+                  <a:srgbClr val="333333"/>
+                </a:solidFill>
+                <a:latin typeface="Consolas" pitchFamily="34" charset="0"/>
+                <a:ea typeface="Consolas" pitchFamily="34" charset="-122"/>
+                <a:cs typeface="Consolas" pitchFamily="34" charset="-120"/>
+              </a:rPr>
+              <a:t>pause_queue  /  resume_queue</a:t>
+            </a:r>
+            <a:endParaRPr lang="en-US" sz="1100" dirty="0"/>
+          </a:p>
+          <a:p>
+            <a:pPr marL="0" indent="0">
+              <a:lnSpc>
+                <a:spcPct val="135000"/>
+              </a:lnSpc>
+              <a:spcAft>
+                <a:spcPts val="200"/>
+              </a:spcAft>
+              <a:buNone/>
+            </a:pPr>
+            <a:r>
+              <a:rPr lang="en-US" sz="1000" i="1" dirty="0">
+                <a:solidFill>
+                  <a:srgbClr val="6B7280"/>
+                </a:solidFill>
+                <a:latin typeface="Calibri" pitchFamily="34" charset="0"/>
+                <a:ea typeface="Calibri" pitchFamily="34" charset="-122"/>
+                <a:cs typeface="Calibri" pitchFamily="34" charset="-120"/>
+              </a:rPr>
+              <a:t>   - reversible · zod enum on queue name</a:t>
+            </a:r>
+            <a:endParaRPr lang="en-US" sz="1100" dirty="0"/>
+          </a:p>
+          <a:p>
+            <a:pPr marL="0" indent="0">
+              <a:lnSpc>
+                <a:spcPct val="135000"/>
+              </a:lnSpc>
+              <a:spcAft>
+                <a:spcPts val="200"/>
+              </a:spcAft>
+              <a:buNone/>
+            </a:pPr>
+            <a:r>
+              <a:rPr lang="en-US" sz="1100" dirty="0">
+                <a:solidFill>
+                  <a:srgbClr val="333333"/>
+                </a:solidFill>
+                <a:latin typeface="Consolas" pitchFamily="34" charset="0"/>
+                <a:ea typeface="Consolas" pitchFamily="34" charset="-122"/>
+                <a:cs typeface="Consolas" pitchFamily="34" charset="-120"/>
+              </a:rPr>
+              <a:t>reset_circuit_breaker</a:t>
+            </a:r>
+            <a:endParaRPr lang="en-US" sz="1100" dirty="0"/>
+          </a:p>
+          <a:p>
+            <a:pPr marL="0" indent="0">
+              <a:lnSpc>
+                <a:spcPct val="135000"/>
+              </a:lnSpc>
+              <a:spcAft>
+                <a:spcPts val="200"/>
+              </a:spcAft>
+              <a:buNone/>
+            </a:pPr>
+            <a:r>
+              <a:rPr lang="en-US" sz="1000" i="1" dirty="0">
+                <a:solidFill>
+                  <a:srgbClr val="6B7280"/>
+                </a:solidFill>
+                <a:latin typeface="Calibri" pitchFamily="34" charset="0"/>
+                <a:ea typeface="Calibri" pitchFamily="34" charset="-122"/>
+                <a:cs typeface="Calibri" pitchFamily="34" charset="-120"/>
+              </a:rPr>
+              <a:t>    - reversible · ADMIN_API_KEY header</a:t>
+            </a:r>
+            <a:endParaRPr lang="en-US" sz="1100" dirty="0"/>
+          </a:p>
+          <a:p>
+            <a:pPr marL="0" indent="0">
+              <a:lnSpc>
+                <a:spcPct val="135000"/>
+              </a:lnSpc>
+              <a:spcAft>
+                <a:spcPts val="200"/>
+              </a:spcAft>
+              <a:buNone/>
+            </a:pPr>
+            <a:r>
+              <a:rPr lang="en-US" sz="1100" dirty="0">
+                <a:solidFill>
+                  <a:srgbClr val="333333"/>
+                </a:solidFill>
+                <a:latin typeface="Consolas" pitchFamily="34" charset="0"/>
+                <a:ea typeface="Consolas" pitchFamily="34" charset="-122"/>
+                <a:cs typeface="Consolas" pitchFamily="34" charset="-120"/>
+              </a:rPr>
+              <a:t>flush_dead_letter_queue</a:t>
+            </a:r>
+            <a:endParaRPr lang="en-US" sz="1100" dirty="0"/>
+          </a:p>
+          <a:p>
+            <a:pPr marL="0" indent="0">
+              <a:lnSpc>
+                <a:spcPct val="135000"/>
+              </a:lnSpc>
+              <a:spcAft>
+                <a:spcPts val="200"/>
+              </a:spcAft>
+              <a:buNone/>
+            </a:pPr>
+            <a:r>
+              <a:rPr lang="en-US" sz="1000" i="1" dirty="0">
+                <a:solidFill>
+                  <a:srgbClr val="6B7280"/>
+                </a:solidFill>
+                <a:latin typeface="Calibri" pitchFamily="34" charset="0"/>
+                <a:ea typeface="Calibri" pitchFamily="34" charset="-122"/>
+                <a:cs typeface="Calibri" pitchFamily="34" charset="-120"/>
+              </a:rPr>
+              <a:t>    - irreversible · requires confirm: true</a:t>
+            </a:r>
+            <a:endParaRPr lang="en-US" sz="1100" dirty="0"/>
+          </a:p>
+        </p:txBody>
+      </p:sp>
+      <p:sp>
+        <p:nvSpPr>
+          <p:cNvPr id="32" name="Text 30"/>
+          <p:cNvSpPr/>
+          <p:nvPr/>
+        </p:nvSpPr>
+        <p:spPr>
+          <a:xfrm>
+            <a:off x="502920" y="6263640"/>
+            <a:ext cx="11155680" cy="320040"/>
+          </a:xfrm>
+          <a:prstGeom prst="rect">
+            <a:avLst/>
+          </a:prstGeom>
+          <a:noFill/>
+          <a:ln/>
+        </p:spPr>
+        <p:txBody>
+          <a:bodyPr wrap="square" lIns="0" tIns="0" rIns="0" bIns="0" rtlCol="0" anchor="ctr"/>
+          <a:lstStyle/>
+          <a:p>
+            <a:pPr marL="0" indent="0" algn="ctr">
+              <a:buNone/>
+            </a:pPr>
+            <a:r>
+              <a:rPr lang="en-US" sz="1000" i="1" dirty="0">
+                <a:solidFill>
+                  <a:srgbClr val="6B7280"/>
+                </a:solidFill>
+                <a:latin typeface="Calibri" pitchFamily="34" charset="0"/>
+                <a:ea typeface="Calibri" pitchFamily="34" charset="-122"/>
+                <a:cs typeface="Calibri" pitchFamily="34" charset="-120"/>
+              </a:rPr>
+              <a:t>Every remediation call writes a structured pino audit line to stderr; stdout is reserved for the MCP transport.</a:t>
+            </a:r>
+            <a:endParaRPr lang="en-US" sz="1000" dirty="0"/>
+          </a:p>
+        </p:txBody>
+      </p:sp>
+    </p:spTree>
+  </p:cSld>
+  <p:clrMapOvr>
+    <a:masterClrMapping/>
+  </p:clrMapOvr>
+</p:sld>
+</file>
+
+<file path=ppt/slides/slide11.xml><?xml version="1.0" encoding="utf-8"?>
+<p:sld xmlns:a="http://schemas.openxmlformats.org/drawingml/2006/main" xmlns:r="http://schemas.openxmlformats.org/officeDocument/2006/relationships" xmlns:p="http://schemas.openxmlformats.org/presentationml/2006/main">
   <p:cSld name="Slide 10">
     <p:bg>
       <p:bgPr>
@@ -2804,7 +4251,7 @@
                 <a:ea typeface="Cambria" pitchFamily="34" charset="-122"/>
                 <a:cs typeface="Cambria" pitchFamily="34" charset="-120"/>
               </a:rPr>
-              <a:t>IX.</a:t>
+              <a:t>X.</a:t>
             </a:r>
             <a:endParaRPr lang="en-US" sz="1400" dirty="0"/>
           </a:p>
@@ -2882,7 +4329,7 @@
                 <a:ea typeface="Calibri" pitchFamily="34" charset="-122"/>
                 <a:cs typeface="Calibri" pitchFamily="34" charset="-120"/>
               </a:rPr>
-              <a:t>10 / 15</a:t>
+              <a:t>11 / 16</a:t>
             </a:r>
             <a:endParaRPr lang="en-US" sz="1000" dirty="0"/>
           </a:p>
@@ -2990,7 +4437,7 @@
                 <a:ea typeface="Calibri" pitchFamily="34" charset="-122"/>
                 <a:cs typeface="Calibri" pitchFamily="34" charset="-120"/>
               </a:rPr>
-              <a:t>Ibrahim</a:t>
+              <a:t>Hassan</a:t>
             </a:r>
             <a:endParaRPr lang="en-US" sz="900" dirty="0"/>
           </a:p>
@@ -4998,7 +6445,7 @@
 </p:sld>
 </file>
 
-<file path=ppt/slides/slide11.xml><?xml version="1.0" encoding="utf-8"?>
+<file path=ppt/slides/slide12.xml><?xml version="1.0" encoding="utf-8"?>
 <p:sld xmlns:a="http://schemas.openxmlformats.org/drawingml/2006/main" xmlns:r="http://schemas.openxmlformats.org/officeDocument/2006/relationships" xmlns:p="http://schemas.openxmlformats.org/presentationml/2006/main">
   <p:cSld name="Slide 11">
     <p:bg>
@@ -5056,7 +6503,7 @@
                 <a:ea typeface="Cambria" pitchFamily="34" charset="-122"/>
                 <a:cs typeface="Cambria" pitchFamily="34" charset="-120"/>
               </a:rPr>
-              <a:t>X.</a:t>
+              <a:t>XI.</a:t>
             </a:r>
             <a:endParaRPr lang="en-US" sz="1400" dirty="0"/>
           </a:p>
@@ -5134,7 +6581,7 @@
                 <a:ea typeface="Calibri" pitchFamily="34" charset="-122"/>
                 <a:cs typeface="Calibri" pitchFamily="34" charset="-120"/>
               </a:rPr>
-              <a:t>11 / 15</a:t>
+              <a:t>12 / 16</a:t>
             </a:r>
             <a:endParaRPr lang="en-US" sz="1000" dirty="0"/>
           </a:p>
@@ -5242,7 +6689,7 @@
                 <a:ea typeface="Calibri" pitchFamily="34" charset="-122"/>
                 <a:cs typeface="Calibri" pitchFamily="34" charset="-120"/>
               </a:rPr>
-              <a:t>Hassan</a:t>
+              <a:t>Ibrahim</a:t>
             </a:r>
             <a:endParaRPr lang="en-US" sz="900" dirty="0"/>
           </a:p>
@@ -7421,7 +8868,7 @@
 </p:sld>
 </file>
 
-<file path=ppt/slides/slide12.xml><?xml version="1.0" encoding="utf-8"?>
+<file path=ppt/slides/slide13.xml><?xml version="1.0" encoding="utf-8"?>
 <p:sld xmlns:a="http://schemas.openxmlformats.org/drawingml/2006/main" xmlns:r="http://schemas.openxmlformats.org/officeDocument/2006/relationships" xmlns:p="http://schemas.openxmlformats.org/presentationml/2006/main">
   <p:cSld name="Slide 12">
     <p:bg>
@@ -7479,7 +8926,7 @@
                 <a:ea typeface="Cambria" pitchFamily="34" charset="-122"/>
                 <a:cs typeface="Cambria" pitchFamily="34" charset="-120"/>
               </a:rPr>
-              <a:t>XI.</a:t>
+              <a:t>XII.</a:t>
             </a:r>
             <a:endParaRPr lang="en-US" sz="1400" dirty="0"/>
           </a:p>
@@ -7557,7 +9004,7 @@
                 <a:ea typeface="Calibri" pitchFamily="34" charset="-122"/>
                 <a:cs typeface="Calibri" pitchFamily="34" charset="-120"/>
               </a:rPr>
-              <a:t>12 / 15</a:t>
+              <a:t>13 / 16</a:t>
             </a:r>
             <a:endParaRPr lang="en-US" sz="1000" dirty="0"/>
           </a:p>
@@ -7665,9 +9112,8 @@
                 <a:ea typeface="Calibri" pitchFamily="34" charset="-122"/>
                 <a:cs typeface="Calibri" pitchFamily="34" charset="-120"/>
               </a:rPr>
-              <a:t>Hassan</a:t>
-            </a:r>
-            <a:endParaRPr lang="en-US" sz="900" dirty="0"/>
+              <a:t>Ibrahim</a:t>
+            </a:r>
           </a:p>
         </p:txBody>
       </p:sp>
@@ -8223,7 +9669,7 @@
 </p:sld>
 </file>
 
-<file path=ppt/slides/slide13.xml><?xml version="1.0" encoding="utf-8"?>
+<file path=ppt/slides/slide14.xml><?xml version="1.0" encoding="utf-8"?>
 <p:sld xmlns:a="http://schemas.openxmlformats.org/drawingml/2006/main" xmlns:r="http://schemas.openxmlformats.org/officeDocument/2006/relationships" xmlns:p="http://schemas.openxmlformats.org/presentationml/2006/main">
   <p:cSld name="Slide 13">
     <p:bg>
@@ -8281,7 +9727,7 @@
                 <a:ea typeface="Cambria" pitchFamily="34" charset="-122"/>
                 <a:cs typeface="Cambria" pitchFamily="34" charset="-120"/>
               </a:rPr>
-              <a:t>XII.</a:t>
+              <a:t>XIII.</a:t>
             </a:r>
             <a:endParaRPr lang="en-US" sz="1400" dirty="0"/>
           </a:p>
@@ -8359,7 +9805,7 @@
                 <a:ea typeface="Calibri" pitchFamily="34" charset="-122"/>
                 <a:cs typeface="Calibri" pitchFamily="34" charset="-120"/>
               </a:rPr>
-              <a:t>13 / 15</a:t>
+              <a:t>14 / 16</a:t>
             </a:r>
             <a:endParaRPr lang="en-US" sz="1000" dirty="0"/>
           </a:p>
@@ -8467,7 +9913,7 @@
                 <a:ea typeface="Calibri" pitchFamily="34" charset="-122"/>
                 <a:cs typeface="Calibri" pitchFamily="34" charset="-120"/>
               </a:rPr>
-              <a:t>Hassan</a:t>
+              <a:t>Ibrahim</a:t>
             </a:r>
             <a:endParaRPr lang="en-US" sz="900" dirty="0"/>
           </a:p>
@@ -9327,8 +10773,8 @@
 </p:sld>
 </file>
 
-<file path=ppt/slides/slide14.xml><?xml version="1.0" encoding="utf-8"?>
-<p:sld xmlns:a="http://schemas.openxmlformats.org/drawingml/2006/main" xmlns:r="http://schemas.openxmlformats.org/officeDocument/2006/relationships" xmlns:p="http://schemas.openxmlformats.org/presentationml/2006/main">
+<file path=ppt/slides/slide15.xml><?xml version="1.0" encoding="utf-8"?>
+<p:sld xmlns:a="http://schemas.openxmlformats.org/drawingml/2006/main" xmlns:r="http://schemas.openxmlformats.org/officeDocument/2006/relationships" xmlns:p="http://schemas.openxmlformats.org/presentationml/2006/main" show="0">
   <p:cSld name="Slide 14">
     <p:bg>
       <p:bgPr>
@@ -9385,7 +10831,7 @@
                 <a:ea typeface="Cambria" pitchFamily="34" charset="-122"/>
                 <a:cs typeface="Cambria" pitchFamily="34" charset="-120"/>
               </a:rPr>
-              <a:t>XIII.</a:t>
+              <a:t>XIV.</a:t>
             </a:r>
             <a:endParaRPr lang="en-US" sz="1400" dirty="0"/>
           </a:p>
@@ -9463,7 +10909,7 @@
                 <a:ea typeface="Calibri" pitchFamily="34" charset="-122"/>
                 <a:cs typeface="Calibri" pitchFamily="34" charset="-120"/>
               </a:rPr>
-              <a:t>14 / 15</a:t>
+              <a:t>15 / 16</a:t>
             </a:r>
             <a:endParaRPr lang="en-US" sz="1000" dirty="0"/>
           </a:p>
@@ -10383,7 +11829,7 @@
 </p:sld>
 </file>
 
-<file path=ppt/slides/slide15.xml><?xml version="1.0" encoding="utf-8"?>
+<file path=ppt/slides/slide16.xml><?xml version="1.0" encoding="utf-8"?>
 <p:sld xmlns:a="http://schemas.openxmlformats.org/drawingml/2006/main" xmlns:r="http://schemas.openxmlformats.org/officeDocument/2006/relationships" xmlns:p="http://schemas.openxmlformats.org/presentationml/2006/main">
   <p:cSld name="Slide 15">
     <p:bg>
@@ -11080,7 +12526,7 @@
                 <a:ea typeface="Calibri" pitchFamily="34" charset="-122"/>
                 <a:cs typeface="Calibri" pitchFamily="34" charset="-120"/>
               </a:rPr>
-              <a:t>2 / 15</a:t>
+              <a:t>2 / 16</a:t>
             </a:r>
             <a:endParaRPr lang="en-US" sz="1000" dirty="0"/>
           </a:p>
@@ -11845,6 +13291,1657 @@
 </file>
 
 <file path=ppt/slides/slide3.xml><?xml version="1.0" encoding="utf-8"?>
+<p:sld xmlns:a="http://schemas.openxmlformats.org/drawingml/2006/main" xmlns:r="http://schemas.openxmlformats.org/officeDocument/2006/relationships" xmlns:p="http://schemas.openxmlformats.org/presentationml/2006/main">
+  <p:cSld name="Slide 16">
+    <p:bg>
+      <p:bgPr>
+        <a:solidFill>
+          <a:srgbClr val="FFFFFF"/>
+        </a:solidFill>
+        <a:effectLst/>
+      </p:bgPr>
+    </p:bg>
+    <p:spTree>
+      <p:nvGrpSpPr>
+        <p:cNvPr id="1" name=""/>
+        <p:cNvGrpSpPr/>
+        <p:nvPr/>
+      </p:nvGrpSpPr>
+      <p:grpSpPr>
+        <a:xfrm>
+          <a:off x="0" y="0"/>
+          <a:ext cx="0" cy="0"/>
+          <a:chOff x="0" y="0"/>
+          <a:chExt cx="0" cy="0"/>
+        </a:xfrm>
+      </p:grpSpPr>
+      <p:sp>
+        <p:nvSpPr>
+          <p:cNvPr id="2" name="Text 0"/>
+          <p:cNvSpPr/>
+          <p:nvPr/>
+        </p:nvSpPr>
+        <p:spPr>
+          <a:xfrm>
+            <a:off x="502920" y="411480"/>
+            <a:ext cx="640080" cy="365760"/>
+          </a:xfrm>
+          <a:prstGeom prst="rect">
+            <a:avLst/>
+          </a:prstGeom>
+          <a:noFill/>
+          <a:ln/>
+        </p:spPr>
+        <p:txBody>
+          <a:bodyPr wrap="square" lIns="0" tIns="0" rIns="0" bIns="0" rtlCol="0" anchor="ctr"/>
+          <a:lstStyle/>
+          <a:p>
+            <a:pPr marL="0" indent="0">
+              <a:buNone/>
+            </a:pPr>
+            <a:r>
+              <a:rPr lang="en-US" sz="1400" i="1" dirty="0">
+                <a:solidFill>
+                  <a:srgbClr val="7A2E3B"/>
+                </a:solidFill>
+                <a:latin typeface="Cambria" pitchFamily="34" charset="0"/>
+                <a:ea typeface="Cambria" pitchFamily="34" charset="-122"/>
+                <a:cs typeface="Cambria" pitchFamily="34" charset="-120"/>
+              </a:rPr>
+              <a:t>II.</a:t>
+            </a:r>
+            <a:endParaRPr lang="en-US" sz="1400" dirty="0"/>
+          </a:p>
+        </p:txBody>
+      </p:sp>
+      <p:sp>
+        <p:nvSpPr>
+          <p:cNvPr id="3" name="Text 1"/>
+          <p:cNvSpPr/>
+          <p:nvPr/>
+        </p:nvSpPr>
+        <p:spPr>
+          <a:xfrm>
+            <a:off x="1051560" y="411480"/>
+            <a:ext cx="5486400" cy="365760"/>
+          </a:xfrm>
+          <a:prstGeom prst="rect">
+            <a:avLst/>
+          </a:prstGeom>
+          <a:noFill/>
+          <a:ln/>
+        </p:spPr>
+        <p:txBody>
+          <a:bodyPr wrap="square" lIns="0" tIns="0" rIns="0" bIns="0" rtlCol="0" anchor="ctr"/>
+          <a:lstStyle/>
+          <a:p>
+            <a:pPr marL="0" indent="0">
+              <a:buNone/>
+            </a:pPr>
+            <a:r>
+              <a:rPr lang="en-US" sz="1000" kern="0" spc="400" dirty="0">
+                <a:solidFill>
+                  <a:srgbClr val="6B7280"/>
+                </a:solidFill>
+                <a:latin typeface="Calibri" pitchFamily="34" charset="0"/>
+                <a:ea typeface="Calibri" pitchFamily="34" charset="-122"/>
+                <a:cs typeface="Calibri" pitchFamily="34" charset="-120"/>
+              </a:rPr>
+              <a:t>THE PLATFORM</a:t>
+            </a:r>
+            <a:endParaRPr lang="en-US" sz="1000" dirty="0"/>
+          </a:p>
+        </p:txBody>
+      </p:sp>
+      <p:sp>
+        <p:nvSpPr>
+          <p:cNvPr id="4" name="Text 2"/>
+          <p:cNvSpPr/>
+          <p:nvPr/>
+        </p:nvSpPr>
+        <p:spPr>
+          <a:xfrm>
+            <a:off x="10789920" y="411480"/>
+            <a:ext cx="914400" cy="365760"/>
+          </a:xfrm>
+          <a:prstGeom prst="rect">
+            <a:avLst/>
+          </a:prstGeom>
+          <a:noFill/>
+          <a:ln/>
+        </p:spPr>
+        <p:txBody>
+          <a:bodyPr wrap="square" lIns="0" tIns="0" rIns="0" bIns="0" rtlCol="0" anchor="ctr"/>
+          <a:lstStyle/>
+          <a:p>
+            <a:pPr marL="0" indent="0" algn="r">
+              <a:buNone/>
+            </a:pPr>
+            <a:r>
+              <a:rPr lang="en-US" sz="1000" i="1" dirty="0">
+                <a:solidFill>
+                  <a:srgbClr val="9CA3AF"/>
+                </a:solidFill>
+                <a:latin typeface="Calibri" pitchFamily="34" charset="0"/>
+                <a:ea typeface="Calibri" pitchFamily="34" charset="-122"/>
+                <a:cs typeface="Calibri" pitchFamily="34" charset="-120"/>
+              </a:rPr>
+              <a:t>3 / 16</a:t>
+            </a:r>
+            <a:endParaRPr lang="en-US" sz="1000" dirty="0"/>
+          </a:p>
+        </p:txBody>
+      </p:sp>
+      <p:sp>
+        <p:nvSpPr>
+          <p:cNvPr id="5" name="Shape 3"/>
+          <p:cNvSpPr/>
+          <p:nvPr/>
+        </p:nvSpPr>
+        <p:spPr>
+          <a:xfrm>
+            <a:off x="502920" y="6355080"/>
+            <a:ext cx="11155680" cy="0"/>
+          </a:xfrm>
+          <a:prstGeom prst="line">
+            <a:avLst/>
+          </a:prstGeom>
+          <a:noFill/>
+          <a:ln w="6350">
+            <a:solidFill>
+              <a:srgbClr val="E5E7EB"/>
+            </a:solidFill>
+            <a:prstDash val="solid"/>
+          </a:ln>
+        </p:spPr>
+        <p:txBody>
+          <a:bodyPr/>
+          <a:lstStyle/>
+          <a:p>
+            <a:endParaRPr lang="en-US"/>
+          </a:p>
+        </p:txBody>
+      </p:sp>
+      <p:sp>
+        <p:nvSpPr>
+          <p:cNvPr id="6" name="Text 4"/>
+          <p:cNvSpPr/>
+          <p:nvPr/>
+        </p:nvSpPr>
+        <p:spPr>
+          <a:xfrm>
+            <a:off x="502920" y="6446520"/>
+            <a:ext cx="5486400" cy="256032"/>
+          </a:xfrm>
+          <a:prstGeom prst="rect">
+            <a:avLst/>
+          </a:prstGeom>
+          <a:noFill/>
+          <a:ln/>
+        </p:spPr>
+        <p:txBody>
+          <a:bodyPr wrap="square" lIns="0" tIns="0" rIns="0" bIns="0" rtlCol="0" anchor="ctr"/>
+          <a:lstStyle/>
+          <a:p>
+            <a:pPr marL="0" indent="0">
+              <a:buNone/>
+            </a:pPr>
+            <a:r>
+              <a:rPr lang="en-US" sz="900" i="1" dirty="0">
+                <a:solidFill>
+                  <a:srgbClr val="9CA3AF"/>
+                </a:solidFill>
+                <a:latin typeface="Calibri" pitchFamily="34" charset="0"/>
+                <a:ea typeface="Calibri" pitchFamily="34" charset="-122"/>
+                <a:cs typeface="Calibri" pitchFamily="34" charset="-120"/>
+              </a:rPr>
+              <a:t>Edge Language Coach  ·  Course Project  ·  2026</a:t>
+            </a:r>
+            <a:endParaRPr lang="en-US" sz="900" dirty="0"/>
+          </a:p>
+        </p:txBody>
+      </p:sp>
+      <p:sp>
+        <p:nvSpPr>
+          <p:cNvPr id="7" name="Text 5"/>
+          <p:cNvSpPr/>
+          <p:nvPr/>
+        </p:nvSpPr>
+        <p:spPr>
+          <a:xfrm>
+            <a:off x="7086600" y="6446520"/>
+            <a:ext cx="4572000" cy="256032"/>
+          </a:xfrm>
+          <a:prstGeom prst="rect">
+            <a:avLst/>
+          </a:prstGeom>
+          <a:noFill/>
+          <a:ln/>
+        </p:spPr>
+        <p:txBody>
+          <a:bodyPr wrap="square" lIns="0" tIns="0" rIns="0" bIns="0" rtlCol="0" anchor="ctr"/>
+          <a:lstStyle/>
+          <a:p>
+            <a:pPr marL="0" indent="0" algn="r">
+              <a:buNone/>
+            </a:pPr>
+            <a:r>
+              <a:rPr lang="en-US" sz="900" i="1" dirty="0">
+                <a:solidFill>
+                  <a:srgbClr val="9CA3AF"/>
+                </a:solidFill>
+                <a:latin typeface="Calibri" pitchFamily="34" charset="0"/>
+                <a:ea typeface="Calibri" pitchFamily="34" charset="-122"/>
+                <a:cs typeface="Calibri" pitchFamily="34" charset="-120"/>
+              </a:rPr>
+              <a:t>Ibrahim</a:t>
+            </a:r>
+            <a:endParaRPr lang="en-US" sz="900" dirty="0"/>
+          </a:p>
+        </p:txBody>
+      </p:sp>
+      <p:sp>
+        <p:nvSpPr>
+          <p:cNvPr id="8" name="Text 6"/>
+          <p:cNvSpPr/>
+          <p:nvPr/>
+        </p:nvSpPr>
+        <p:spPr>
+          <a:xfrm>
+            <a:off x="502920" y="914400"/>
+            <a:ext cx="11155680" cy="777240"/>
+          </a:xfrm>
+          <a:prstGeom prst="rect">
+            <a:avLst/>
+          </a:prstGeom>
+          <a:noFill/>
+          <a:ln/>
+        </p:spPr>
+        <p:txBody>
+          <a:bodyPr wrap="square" lIns="0" tIns="0" rIns="0" bIns="0" rtlCol="0" anchor="ctr"/>
+          <a:lstStyle/>
+          <a:p>
+            <a:pPr marL="0" indent="0">
+              <a:buNone/>
+            </a:pPr>
+            <a:r>
+              <a:rPr lang="en-US" sz="3000" dirty="0">
+                <a:solidFill>
+                  <a:srgbClr val="1A2238"/>
+                </a:solidFill>
+                <a:latin typeface="Cambria" pitchFamily="34" charset="0"/>
+                <a:ea typeface="Cambria" pitchFamily="34" charset="-122"/>
+                <a:cs typeface="Cambria" pitchFamily="34" charset="-120"/>
+              </a:rPr>
+              <a:t>What the platform does for the learner</a:t>
+            </a:r>
+            <a:endParaRPr lang="en-US" sz="3000" dirty="0"/>
+          </a:p>
+        </p:txBody>
+      </p:sp>
+      <p:graphicFrame>
+        <p:nvGraphicFramePr>
+          <p:cNvPr id="9" name="Table 0"/>
+          <p:cNvGraphicFramePr>
+            <a:graphicFrameLocks noGrp="1"/>
+          </p:cNvGraphicFramePr>
+          <p:nvPr>
+            <p:extLst>
+              <p:ext uri="{D42A27DB-BD31-4B8C-83A1-F6EECF244321}">
+                <p14:modId xmlns:p14="http://schemas.microsoft.com/office/powerpoint/2010/main" val="404477931"/>
+              </p:ext>
+            </p:extLst>
+          </p:nvPr>
+        </p:nvGraphicFramePr>
+        <p:xfrm>
+          <a:off x="502920" y="1874520"/>
+          <a:ext cx="11155680" cy="3840480"/>
+        </p:xfrm>
+        <a:graphic>
+          <a:graphicData uri="http://schemas.openxmlformats.org/drawingml/2006/table">
+            <a:tbl>
+              <a:tblPr/>
+              <a:tblGrid>
+                <a:gridCol w="2331720">
+                  <a:extLst>
+                    <a:ext uri="{9D8B030D-6E8A-4147-A177-3AD203B41FA5}">
+                      <a16:colId xmlns:a16="http://schemas.microsoft.com/office/drawing/2014/main" val="20000"/>
+                    </a:ext>
+                  </a:extLst>
+                </a:gridCol>
+                <a:gridCol w="2667000">
+                  <a:extLst>
+                    <a:ext uri="{9D8B030D-6E8A-4147-A177-3AD203B41FA5}">
+                      <a16:colId xmlns:a16="http://schemas.microsoft.com/office/drawing/2014/main" val="20001"/>
+                    </a:ext>
+                  </a:extLst>
+                </a:gridCol>
+                <a:gridCol w="6156960">
+                  <a:extLst>
+                    <a:ext uri="{9D8B030D-6E8A-4147-A177-3AD203B41FA5}">
+                      <a16:colId xmlns:a16="http://schemas.microsoft.com/office/drawing/2014/main" val="20002"/>
+                    </a:ext>
+                  </a:extLst>
+                </a:gridCol>
+              </a:tblGrid>
+              <a:tr h="640080">
+                <a:tc>
+                  <a:txBody>
+                    <a:bodyPr/>
+                    <a:lstStyle/>
+                    <a:p>
+                      <a:pPr marL="0" indent="0" algn="l">
+                        <a:buNone/>
+                      </a:pPr>
+                      <a:r>
+                        <a:rPr lang="en-US" sz="1100" b="1" dirty="0">
+                          <a:solidFill>
+                            <a:srgbClr val="FFFFFF"/>
+                          </a:solidFill>
+                          <a:latin typeface="Calibri" pitchFamily="34" charset="0"/>
+                          <a:ea typeface="Calibri" pitchFamily="34" charset="-122"/>
+                          <a:cs typeface="Calibri" pitchFamily="34" charset="-120"/>
+                        </a:rPr>
+                        <a:t>Capability</a:t>
+                      </a:r>
+                      <a:endParaRPr lang="en-US" sz="1100" dirty="0">
+                        <a:latin typeface="Calibri" charset="0"/>
+                        <a:ea typeface="Calibri" charset="0"/>
+                        <a:cs typeface="Calibri" charset="0"/>
+                      </a:endParaRPr>
+                    </a:p>
+                  </a:txBody>
+                  <a:tcPr marL="63500" marR="63500" marT="63500" marB="63500">
+                    <a:lnL w="6350" cap="flat" cmpd="sng" algn="ctr">
+                      <a:solidFill>
+                        <a:srgbClr val="D1D5DB"/>
+                      </a:solidFill>
+                      <a:prstDash val="solid"/>
+                      <a:round/>
+                      <a:headEnd type="none" w="med" len="med"/>
+                      <a:tailEnd type="none" w="med" len="med"/>
+                    </a:lnL>
+                    <a:lnR w="6350" cap="flat" cmpd="sng" algn="ctr">
+                      <a:solidFill>
+                        <a:srgbClr val="D1D5DB"/>
+                      </a:solidFill>
+                      <a:prstDash val="solid"/>
+                      <a:round/>
+                      <a:headEnd type="none" w="med" len="med"/>
+                      <a:tailEnd type="none" w="med" len="med"/>
+                    </a:lnR>
+                    <a:lnT w="6350" cap="flat" cmpd="sng" algn="ctr">
+                      <a:solidFill>
+                        <a:srgbClr val="D1D5DB"/>
+                      </a:solidFill>
+                      <a:prstDash val="solid"/>
+                      <a:round/>
+                      <a:headEnd type="none" w="med" len="med"/>
+                      <a:tailEnd type="none" w="med" len="med"/>
+                    </a:lnT>
+                    <a:lnB w="6350" cap="flat" cmpd="sng" algn="ctr">
+                      <a:solidFill>
+                        <a:srgbClr val="D1D5DB"/>
+                      </a:solidFill>
+                      <a:prstDash val="solid"/>
+                      <a:round/>
+                      <a:headEnd type="none" w="med" len="med"/>
+                      <a:tailEnd type="none" w="med" len="med"/>
+                    </a:lnB>
+                    <a:solidFill>
+                      <a:srgbClr val="1A2238"/>
+                    </a:solidFill>
+                  </a:tcPr>
+                </a:tc>
+                <a:tc>
+                  <a:txBody>
+                    <a:bodyPr/>
+                    <a:lstStyle/>
+                    <a:p>
+                      <a:pPr marL="0" indent="0" algn="l">
+                        <a:buNone/>
+                      </a:pPr>
+                      <a:r>
+                        <a:rPr lang="en-US" sz="1100" b="1" dirty="0">
+                          <a:solidFill>
+                            <a:srgbClr val="FFFFFF"/>
+                          </a:solidFill>
+                          <a:latin typeface="Calibri" pitchFamily="34" charset="0"/>
+                          <a:ea typeface="Calibri" pitchFamily="34" charset="-122"/>
+                          <a:cs typeface="Calibri" pitchFamily="34" charset="-120"/>
+                        </a:rPr>
+                        <a:t>Powered by</a:t>
+                      </a:r>
+                      <a:endParaRPr lang="en-US" sz="1100" dirty="0">
+                        <a:latin typeface="Calibri" charset="0"/>
+                        <a:ea typeface="Calibri" charset="0"/>
+                        <a:cs typeface="Calibri" charset="0"/>
+                      </a:endParaRPr>
+                    </a:p>
+                  </a:txBody>
+                  <a:tcPr marL="63500" marR="63500" marT="63500" marB="63500">
+                    <a:lnL w="6350" cap="flat" cmpd="sng" algn="ctr">
+                      <a:solidFill>
+                        <a:srgbClr val="D1D5DB"/>
+                      </a:solidFill>
+                      <a:prstDash val="solid"/>
+                      <a:round/>
+                      <a:headEnd type="none" w="med" len="med"/>
+                      <a:tailEnd type="none" w="med" len="med"/>
+                    </a:lnL>
+                    <a:lnR w="6350" cap="flat" cmpd="sng" algn="ctr">
+                      <a:solidFill>
+                        <a:srgbClr val="D1D5DB"/>
+                      </a:solidFill>
+                      <a:prstDash val="solid"/>
+                      <a:round/>
+                      <a:headEnd type="none" w="med" len="med"/>
+                      <a:tailEnd type="none" w="med" len="med"/>
+                    </a:lnR>
+                    <a:lnT w="6350" cap="flat" cmpd="sng" algn="ctr">
+                      <a:solidFill>
+                        <a:srgbClr val="D1D5DB"/>
+                      </a:solidFill>
+                      <a:prstDash val="solid"/>
+                      <a:round/>
+                      <a:headEnd type="none" w="med" len="med"/>
+                      <a:tailEnd type="none" w="med" len="med"/>
+                    </a:lnT>
+                    <a:lnB w="6350" cap="flat" cmpd="sng" algn="ctr">
+                      <a:solidFill>
+                        <a:srgbClr val="D1D5DB"/>
+                      </a:solidFill>
+                      <a:prstDash val="solid"/>
+                      <a:round/>
+                      <a:headEnd type="none" w="med" len="med"/>
+                      <a:tailEnd type="none" w="med" len="med"/>
+                    </a:lnB>
+                    <a:solidFill>
+                      <a:srgbClr val="1A2238"/>
+                    </a:solidFill>
+                  </a:tcPr>
+                </a:tc>
+                <a:tc>
+                  <a:txBody>
+                    <a:bodyPr/>
+                    <a:lstStyle/>
+                    <a:p>
+                      <a:pPr marL="0" indent="0" algn="l">
+                        <a:buNone/>
+                      </a:pPr>
+                      <a:r>
+                        <a:rPr lang="en-US" sz="1100" b="1" dirty="0">
+                          <a:solidFill>
+                            <a:srgbClr val="FFFFFF"/>
+                          </a:solidFill>
+                          <a:latin typeface="Calibri" pitchFamily="34" charset="0"/>
+                          <a:ea typeface="Calibri" pitchFamily="34" charset="-122"/>
+                          <a:cs typeface="Calibri" pitchFamily="34" charset="-120"/>
+                        </a:rPr>
+                        <a:t>What the learner does</a:t>
+                      </a:r>
+                      <a:endParaRPr lang="en-US" sz="1100" dirty="0">
+                        <a:latin typeface="Calibri" charset="0"/>
+                        <a:ea typeface="Calibri" charset="0"/>
+                        <a:cs typeface="Calibri" charset="0"/>
+                      </a:endParaRPr>
+                    </a:p>
+                  </a:txBody>
+                  <a:tcPr marL="63500" marR="63500" marT="63500" marB="63500">
+                    <a:lnL w="6350" cap="flat" cmpd="sng" algn="ctr">
+                      <a:solidFill>
+                        <a:srgbClr val="D1D5DB"/>
+                      </a:solidFill>
+                      <a:prstDash val="solid"/>
+                      <a:round/>
+                      <a:headEnd type="none" w="med" len="med"/>
+                      <a:tailEnd type="none" w="med" len="med"/>
+                    </a:lnL>
+                    <a:lnR w="6350" cap="flat" cmpd="sng" algn="ctr">
+                      <a:solidFill>
+                        <a:srgbClr val="D1D5DB"/>
+                      </a:solidFill>
+                      <a:prstDash val="solid"/>
+                      <a:round/>
+                      <a:headEnd type="none" w="med" len="med"/>
+                      <a:tailEnd type="none" w="med" len="med"/>
+                    </a:lnR>
+                    <a:lnT w="6350" cap="flat" cmpd="sng" algn="ctr">
+                      <a:solidFill>
+                        <a:srgbClr val="D1D5DB"/>
+                      </a:solidFill>
+                      <a:prstDash val="solid"/>
+                      <a:round/>
+                      <a:headEnd type="none" w="med" len="med"/>
+                      <a:tailEnd type="none" w="med" len="med"/>
+                    </a:lnT>
+                    <a:lnB w="6350" cap="flat" cmpd="sng" algn="ctr">
+                      <a:solidFill>
+                        <a:srgbClr val="D1D5DB"/>
+                      </a:solidFill>
+                      <a:prstDash val="solid"/>
+                      <a:round/>
+                      <a:headEnd type="none" w="med" len="med"/>
+                      <a:tailEnd type="none" w="med" len="med"/>
+                    </a:lnB>
+                    <a:solidFill>
+                      <a:srgbClr val="1A2238"/>
+                    </a:solidFill>
+                  </a:tcPr>
+                </a:tc>
+                <a:extLst>
+                  <a:ext uri="{0D108BD9-81ED-4DB2-BD59-A6C34878D82A}">
+                    <a16:rowId xmlns:a16="http://schemas.microsoft.com/office/drawing/2014/main" val="10000"/>
+                  </a:ext>
+                </a:extLst>
+              </a:tr>
+              <a:tr h="640080">
+                <a:tc>
+                  <a:txBody>
+                    <a:bodyPr/>
+                    <a:lstStyle/>
+                    <a:p>
+                      <a:pPr marL="0" indent="0" algn="l">
+                        <a:buNone/>
+                      </a:pPr>
+                      <a:r>
+                        <a:rPr lang="en-US" sz="1100" b="1" dirty="0">
+                          <a:solidFill>
+                            <a:srgbClr val="1A2238"/>
+                          </a:solidFill>
+                          <a:latin typeface="Calibri" pitchFamily="34" charset="0"/>
+                          <a:ea typeface="Calibri" pitchFamily="34" charset="-122"/>
+                          <a:cs typeface="Calibri" pitchFamily="34" charset="-120"/>
+                        </a:rPr>
+                        <a:t>Placement test</a:t>
+                      </a:r>
+                      <a:endParaRPr lang="en-US" sz="1100" dirty="0">
+                        <a:latin typeface="Calibri" charset="0"/>
+                        <a:ea typeface="Calibri" charset="0"/>
+                        <a:cs typeface="Calibri" charset="0"/>
+                      </a:endParaRPr>
+                    </a:p>
+                  </a:txBody>
+                  <a:tcPr marL="63500" marR="63500" marT="63500" marB="63500" anchor="ctr">
+                    <a:lnL w="6350" cap="flat" cmpd="sng" algn="ctr">
+                      <a:solidFill>
+                        <a:srgbClr val="D1D5DB"/>
+                      </a:solidFill>
+                      <a:prstDash val="solid"/>
+                      <a:round/>
+                      <a:headEnd type="none" w="med" len="med"/>
+                      <a:tailEnd type="none" w="med" len="med"/>
+                    </a:lnL>
+                    <a:lnR w="6350" cap="flat" cmpd="sng" algn="ctr">
+                      <a:solidFill>
+                        <a:srgbClr val="D1D5DB"/>
+                      </a:solidFill>
+                      <a:prstDash val="solid"/>
+                      <a:round/>
+                      <a:headEnd type="none" w="med" len="med"/>
+                      <a:tailEnd type="none" w="med" len="med"/>
+                    </a:lnR>
+                    <a:lnT w="6350" cap="flat" cmpd="sng" algn="ctr">
+                      <a:solidFill>
+                        <a:srgbClr val="D1D5DB"/>
+                      </a:solidFill>
+                      <a:prstDash val="solid"/>
+                      <a:round/>
+                      <a:headEnd type="none" w="med" len="med"/>
+                      <a:tailEnd type="none" w="med" len="med"/>
+                    </a:lnT>
+                    <a:lnB w="6350" cap="flat" cmpd="sng" algn="ctr">
+                      <a:solidFill>
+                        <a:srgbClr val="D1D5DB"/>
+                      </a:solidFill>
+                      <a:prstDash val="solid"/>
+                      <a:round/>
+                      <a:headEnd type="none" w="med" len="med"/>
+                      <a:tailEnd type="none" w="med" len="med"/>
+                    </a:lnB>
+                    <a:solidFill>
+                      <a:srgbClr val="FFFFFF"/>
+                    </a:solidFill>
+                  </a:tcPr>
+                </a:tc>
+                <a:tc>
+                  <a:txBody>
+                    <a:bodyPr/>
+                    <a:lstStyle/>
+                    <a:p>
+                      <a:pPr marL="0" indent="0" algn="l">
+                        <a:buNone/>
+                      </a:pPr>
+                      <a:r>
+                        <a:rPr lang="en-US" sz="1100" i="1" dirty="0">
+                          <a:solidFill>
+                            <a:srgbClr val="7A2E3B"/>
+                          </a:solidFill>
+                          <a:latin typeface="Calibri" pitchFamily="34" charset="0"/>
+                          <a:ea typeface="Calibri" pitchFamily="34" charset="-122"/>
+                          <a:cs typeface="Calibri" pitchFamily="34" charset="-120"/>
+                        </a:rPr>
+                        <a:t>CEFR question bank</a:t>
+                      </a:r>
+                      <a:endParaRPr lang="en-US" sz="1100" dirty="0">
+                        <a:latin typeface="Calibri" charset="0"/>
+                        <a:ea typeface="Calibri" charset="0"/>
+                        <a:cs typeface="Calibri" charset="0"/>
+                      </a:endParaRPr>
+                    </a:p>
+                  </a:txBody>
+                  <a:tcPr marL="63500" marR="63500" marT="63500" marB="63500" anchor="ctr">
+                    <a:lnL w="6350" cap="flat" cmpd="sng" algn="ctr">
+                      <a:solidFill>
+                        <a:srgbClr val="D1D5DB"/>
+                      </a:solidFill>
+                      <a:prstDash val="solid"/>
+                      <a:round/>
+                      <a:headEnd type="none" w="med" len="med"/>
+                      <a:tailEnd type="none" w="med" len="med"/>
+                    </a:lnL>
+                    <a:lnR w="6350" cap="flat" cmpd="sng" algn="ctr">
+                      <a:solidFill>
+                        <a:srgbClr val="D1D5DB"/>
+                      </a:solidFill>
+                      <a:prstDash val="solid"/>
+                      <a:round/>
+                      <a:headEnd type="none" w="med" len="med"/>
+                      <a:tailEnd type="none" w="med" len="med"/>
+                    </a:lnR>
+                    <a:lnT w="6350" cap="flat" cmpd="sng" algn="ctr">
+                      <a:solidFill>
+                        <a:srgbClr val="D1D5DB"/>
+                      </a:solidFill>
+                      <a:prstDash val="solid"/>
+                      <a:round/>
+                      <a:headEnd type="none" w="med" len="med"/>
+                      <a:tailEnd type="none" w="med" len="med"/>
+                    </a:lnT>
+                    <a:lnB w="6350" cap="flat" cmpd="sng" algn="ctr">
+                      <a:solidFill>
+                        <a:srgbClr val="D1D5DB"/>
+                      </a:solidFill>
+                      <a:prstDash val="solid"/>
+                      <a:round/>
+                      <a:headEnd type="none" w="med" len="med"/>
+                      <a:tailEnd type="none" w="med" len="med"/>
+                    </a:lnB>
+                    <a:solidFill>
+                      <a:srgbClr val="FFFFFF"/>
+                    </a:solidFill>
+                  </a:tcPr>
+                </a:tc>
+                <a:tc>
+                  <a:txBody>
+                    <a:bodyPr/>
+                    <a:lstStyle/>
+                    <a:p>
+                      <a:pPr marL="0" indent="0" algn="l">
+                        <a:buNone/>
+                      </a:pPr>
+                      <a:r>
+                        <a:rPr lang="en-US" sz="1100" dirty="0">
+                          <a:solidFill>
+                            <a:srgbClr val="333333"/>
+                          </a:solidFill>
+                          <a:latin typeface="Calibri" pitchFamily="34" charset="0"/>
+                          <a:ea typeface="Calibri" pitchFamily="34" charset="-122"/>
+                          <a:cs typeface="Calibri" pitchFamily="34" charset="-120"/>
+                        </a:rPr>
+                        <a:t>Answers a short quiz on first sign-in; the result sets a CEFR level from A1 to C2 and unlocks the playground.</a:t>
+                      </a:r>
+                      <a:endParaRPr lang="en-US" sz="1100" dirty="0">
+                        <a:latin typeface="Calibri" charset="0"/>
+                        <a:ea typeface="Calibri" charset="0"/>
+                        <a:cs typeface="Calibri" charset="0"/>
+                      </a:endParaRPr>
+                    </a:p>
+                  </a:txBody>
+                  <a:tcPr marL="63500" marR="63500" marT="63500" marB="63500" anchor="ctr">
+                    <a:lnL w="6350" cap="flat" cmpd="sng" algn="ctr">
+                      <a:solidFill>
+                        <a:srgbClr val="D1D5DB"/>
+                      </a:solidFill>
+                      <a:prstDash val="solid"/>
+                      <a:round/>
+                      <a:headEnd type="none" w="med" len="med"/>
+                      <a:tailEnd type="none" w="med" len="med"/>
+                    </a:lnL>
+                    <a:lnR w="6350" cap="flat" cmpd="sng" algn="ctr">
+                      <a:solidFill>
+                        <a:srgbClr val="D1D5DB"/>
+                      </a:solidFill>
+                      <a:prstDash val="solid"/>
+                      <a:round/>
+                      <a:headEnd type="none" w="med" len="med"/>
+                      <a:tailEnd type="none" w="med" len="med"/>
+                    </a:lnR>
+                    <a:lnT w="6350" cap="flat" cmpd="sng" algn="ctr">
+                      <a:solidFill>
+                        <a:srgbClr val="D1D5DB"/>
+                      </a:solidFill>
+                      <a:prstDash val="solid"/>
+                      <a:round/>
+                      <a:headEnd type="none" w="med" len="med"/>
+                      <a:tailEnd type="none" w="med" len="med"/>
+                    </a:lnT>
+                    <a:lnB w="6350" cap="flat" cmpd="sng" algn="ctr">
+                      <a:solidFill>
+                        <a:srgbClr val="D1D5DB"/>
+                      </a:solidFill>
+                      <a:prstDash val="solid"/>
+                      <a:round/>
+                      <a:headEnd type="none" w="med" len="med"/>
+                      <a:tailEnd type="none" w="med" len="med"/>
+                    </a:lnB>
+                    <a:solidFill>
+                      <a:srgbClr val="FFFFFF"/>
+                    </a:solidFill>
+                  </a:tcPr>
+                </a:tc>
+                <a:extLst>
+                  <a:ext uri="{0D108BD9-81ED-4DB2-BD59-A6C34878D82A}">
+                    <a16:rowId xmlns:a16="http://schemas.microsoft.com/office/drawing/2014/main" val="10001"/>
+                  </a:ext>
+                </a:extLst>
+              </a:tr>
+              <a:tr h="640080">
+                <a:tc>
+                  <a:txBody>
+                    <a:bodyPr/>
+                    <a:lstStyle/>
+                    <a:p>
+                      <a:pPr marL="0" indent="0" algn="l">
+                        <a:buNone/>
+                      </a:pPr>
+                      <a:r>
+                        <a:rPr lang="en-US" sz="1100" b="1" dirty="0">
+                          <a:solidFill>
+                            <a:srgbClr val="1A2238"/>
+                          </a:solidFill>
+                          <a:latin typeface="Calibri" pitchFamily="34" charset="0"/>
+                          <a:ea typeface="Calibri" pitchFamily="34" charset="-122"/>
+                          <a:cs typeface="Calibri" pitchFamily="34" charset="-120"/>
+                        </a:rPr>
+                        <a:t>Topic library</a:t>
+                      </a:r>
+                      <a:endParaRPr lang="en-US" sz="1100" dirty="0">
+                        <a:latin typeface="Calibri" charset="0"/>
+                        <a:ea typeface="Calibri" charset="0"/>
+                        <a:cs typeface="Calibri" charset="0"/>
+                      </a:endParaRPr>
+                    </a:p>
+                  </a:txBody>
+                  <a:tcPr marL="63500" marR="63500" marT="63500" marB="63500" anchor="ctr">
+                    <a:lnL w="6350" cap="flat" cmpd="sng" algn="ctr">
+                      <a:solidFill>
+                        <a:srgbClr val="D1D5DB"/>
+                      </a:solidFill>
+                      <a:prstDash val="solid"/>
+                      <a:round/>
+                      <a:headEnd type="none" w="med" len="med"/>
+                      <a:tailEnd type="none" w="med" len="med"/>
+                    </a:lnL>
+                    <a:lnR w="6350" cap="flat" cmpd="sng" algn="ctr">
+                      <a:solidFill>
+                        <a:srgbClr val="D1D5DB"/>
+                      </a:solidFill>
+                      <a:prstDash val="solid"/>
+                      <a:round/>
+                      <a:headEnd type="none" w="med" len="med"/>
+                      <a:tailEnd type="none" w="med" len="med"/>
+                    </a:lnR>
+                    <a:lnT w="6350" cap="flat" cmpd="sng" algn="ctr">
+                      <a:solidFill>
+                        <a:srgbClr val="D1D5DB"/>
+                      </a:solidFill>
+                      <a:prstDash val="solid"/>
+                      <a:round/>
+                      <a:headEnd type="none" w="med" len="med"/>
+                      <a:tailEnd type="none" w="med" len="med"/>
+                    </a:lnT>
+                    <a:lnB w="6350" cap="flat" cmpd="sng" algn="ctr">
+                      <a:solidFill>
+                        <a:srgbClr val="D1D5DB"/>
+                      </a:solidFill>
+                      <a:prstDash val="solid"/>
+                      <a:round/>
+                      <a:headEnd type="none" w="med" len="med"/>
+                      <a:tailEnd type="none" w="med" len="med"/>
+                    </a:lnB>
+                    <a:solidFill>
+                      <a:srgbClr val="F7F7F4"/>
+                    </a:solidFill>
+                  </a:tcPr>
+                </a:tc>
+                <a:tc>
+                  <a:txBody>
+                    <a:bodyPr/>
+                    <a:lstStyle/>
+                    <a:p>
+                      <a:pPr marL="0" indent="0" algn="l">
+                        <a:buNone/>
+                      </a:pPr>
+                      <a:r>
+                        <a:rPr lang="en-US" sz="1100" i="1" dirty="0">
+                          <a:solidFill>
+                            <a:srgbClr val="7A2E3B"/>
+                          </a:solidFill>
+                          <a:latin typeface="Calibri" pitchFamily="34" charset="0"/>
+                          <a:ea typeface="Calibri" pitchFamily="34" charset="-122"/>
+                          <a:cs typeface="Calibri" pitchFamily="34" charset="-120"/>
+                        </a:rPr>
+                        <a:t>Scraper worker</a:t>
+                      </a:r>
+                      <a:endParaRPr lang="en-US" sz="1100" dirty="0">
+                        <a:latin typeface="Calibri" charset="0"/>
+                        <a:ea typeface="Calibri" charset="0"/>
+                        <a:cs typeface="Calibri" charset="0"/>
+                      </a:endParaRPr>
+                    </a:p>
+                  </a:txBody>
+                  <a:tcPr marL="63500" marR="63500" marT="63500" marB="63500" anchor="ctr">
+                    <a:lnL w="6350" cap="flat" cmpd="sng" algn="ctr">
+                      <a:solidFill>
+                        <a:srgbClr val="D1D5DB"/>
+                      </a:solidFill>
+                      <a:prstDash val="solid"/>
+                      <a:round/>
+                      <a:headEnd type="none" w="med" len="med"/>
+                      <a:tailEnd type="none" w="med" len="med"/>
+                    </a:lnL>
+                    <a:lnR w="6350" cap="flat" cmpd="sng" algn="ctr">
+                      <a:solidFill>
+                        <a:srgbClr val="D1D5DB"/>
+                      </a:solidFill>
+                      <a:prstDash val="solid"/>
+                      <a:round/>
+                      <a:headEnd type="none" w="med" len="med"/>
+                      <a:tailEnd type="none" w="med" len="med"/>
+                    </a:lnR>
+                    <a:lnT w="6350" cap="flat" cmpd="sng" algn="ctr">
+                      <a:solidFill>
+                        <a:srgbClr val="D1D5DB"/>
+                      </a:solidFill>
+                      <a:prstDash val="solid"/>
+                      <a:round/>
+                      <a:headEnd type="none" w="med" len="med"/>
+                      <a:tailEnd type="none" w="med" len="med"/>
+                    </a:lnT>
+                    <a:lnB w="6350" cap="flat" cmpd="sng" algn="ctr">
+                      <a:solidFill>
+                        <a:srgbClr val="D1D5DB"/>
+                      </a:solidFill>
+                      <a:prstDash val="solid"/>
+                      <a:round/>
+                      <a:headEnd type="none" w="med" len="med"/>
+                      <a:tailEnd type="none" w="med" len="med"/>
+                    </a:lnB>
+                    <a:solidFill>
+                      <a:srgbClr val="F7F7F4"/>
+                    </a:solidFill>
+                  </a:tcPr>
+                </a:tc>
+                <a:tc>
+                  <a:txBody>
+                    <a:bodyPr/>
+                    <a:lstStyle/>
+                    <a:p>
+                      <a:pPr marL="0" indent="0" algn="l">
+                        <a:buNone/>
+                      </a:pPr>
+                      <a:r>
+                        <a:rPr lang="en-US" sz="1100" dirty="0">
+                          <a:solidFill>
+                            <a:srgbClr val="333333"/>
+                          </a:solidFill>
+                          <a:latin typeface="Calibri" pitchFamily="34" charset="0"/>
+                          <a:ea typeface="Calibri" pitchFamily="34" charset="-122"/>
+                          <a:cs typeface="Calibri" pitchFamily="34" charset="-120"/>
+                        </a:rPr>
+                        <a:t>Browses fresh Italian current-affairs topics, sorted by category and CEFR level and refreshed every six hours.</a:t>
+                      </a:r>
+                      <a:endParaRPr lang="en-US" sz="1100" dirty="0">
+                        <a:latin typeface="Calibri" charset="0"/>
+                        <a:ea typeface="Calibri" charset="0"/>
+                        <a:cs typeface="Calibri" charset="0"/>
+                      </a:endParaRPr>
+                    </a:p>
+                  </a:txBody>
+                  <a:tcPr marL="63500" marR="63500" marT="63500" marB="63500" anchor="ctr">
+                    <a:lnL w="6350" cap="flat" cmpd="sng" algn="ctr">
+                      <a:solidFill>
+                        <a:srgbClr val="D1D5DB"/>
+                      </a:solidFill>
+                      <a:prstDash val="solid"/>
+                      <a:round/>
+                      <a:headEnd type="none" w="med" len="med"/>
+                      <a:tailEnd type="none" w="med" len="med"/>
+                    </a:lnL>
+                    <a:lnR w="6350" cap="flat" cmpd="sng" algn="ctr">
+                      <a:solidFill>
+                        <a:srgbClr val="D1D5DB"/>
+                      </a:solidFill>
+                      <a:prstDash val="solid"/>
+                      <a:round/>
+                      <a:headEnd type="none" w="med" len="med"/>
+                      <a:tailEnd type="none" w="med" len="med"/>
+                    </a:lnR>
+                    <a:lnT w="6350" cap="flat" cmpd="sng" algn="ctr">
+                      <a:solidFill>
+                        <a:srgbClr val="D1D5DB"/>
+                      </a:solidFill>
+                      <a:prstDash val="solid"/>
+                      <a:round/>
+                      <a:headEnd type="none" w="med" len="med"/>
+                      <a:tailEnd type="none" w="med" len="med"/>
+                    </a:lnT>
+                    <a:lnB w="6350" cap="flat" cmpd="sng" algn="ctr">
+                      <a:solidFill>
+                        <a:srgbClr val="D1D5DB"/>
+                      </a:solidFill>
+                      <a:prstDash val="solid"/>
+                      <a:round/>
+                      <a:headEnd type="none" w="med" len="med"/>
+                      <a:tailEnd type="none" w="med" len="med"/>
+                    </a:lnB>
+                    <a:solidFill>
+                      <a:srgbClr val="F7F7F4"/>
+                    </a:solidFill>
+                  </a:tcPr>
+                </a:tc>
+                <a:extLst>
+                  <a:ext uri="{0D108BD9-81ED-4DB2-BD59-A6C34878D82A}">
+                    <a16:rowId xmlns:a16="http://schemas.microsoft.com/office/drawing/2014/main" val="10002"/>
+                  </a:ext>
+                </a:extLst>
+              </a:tr>
+              <a:tr h="640080">
+                <a:tc>
+                  <a:txBody>
+                    <a:bodyPr/>
+                    <a:lstStyle/>
+                    <a:p>
+                      <a:pPr marL="0" indent="0" algn="l">
+                        <a:buNone/>
+                      </a:pPr>
+                      <a:r>
+                        <a:rPr lang="en-US" sz="1100" b="1" dirty="0">
+                          <a:solidFill>
+                            <a:srgbClr val="1A2238"/>
+                          </a:solidFill>
+                          <a:latin typeface="Calibri" pitchFamily="34" charset="0"/>
+                          <a:ea typeface="Calibri" pitchFamily="34" charset="-122"/>
+                          <a:cs typeface="Calibri" pitchFamily="34" charset="-120"/>
+                        </a:rPr>
+                        <a:t>Coaching session</a:t>
+                      </a:r>
+                      <a:endParaRPr lang="en-US" sz="1100" dirty="0">
+                        <a:latin typeface="Calibri" charset="0"/>
+                        <a:ea typeface="Calibri" charset="0"/>
+                        <a:cs typeface="Calibri" charset="0"/>
+                      </a:endParaRPr>
+                    </a:p>
+                  </a:txBody>
+                  <a:tcPr marL="63500" marR="63500" marT="63500" marB="63500" anchor="ctr">
+                    <a:lnL w="6350" cap="flat" cmpd="sng" algn="ctr">
+                      <a:solidFill>
+                        <a:srgbClr val="D1D5DB"/>
+                      </a:solidFill>
+                      <a:prstDash val="solid"/>
+                      <a:round/>
+                      <a:headEnd type="none" w="med" len="med"/>
+                      <a:tailEnd type="none" w="med" len="med"/>
+                    </a:lnL>
+                    <a:lnR w="6350" cap="flat" cmpd="sng" algn="ctr">
+                      <a:solidFill>
+                        <a:srgbClr val="D1D5DB"/>
+                      </a:solidFill>
+                      <a:prstDash val="solid"/>
+                      <a:round/>
+                      <a:headEnd type="none" w="med" len="med"/>
+                      <a:tailEnd type="none" w="med" len="med"/>
+                    </a:lnR>
+                    <a:lnT w="6350" cap="flat" cmpd="sng" algn="ctr">
+                      <a:solidFill>
+                        <a:srgbClr val="D1D5DB"/>
+                      </a:solidFill>
+                      <a:prstDash val="solid"/>
+                      <a:round/>
+                      <a:headEnd type="none" w="med" len="med"/>
+                      <a:tailEnd type="none" w="med" len="med"/>
+                    </a:lnT>
+                    <a:lnB w="6350" cap="flat" cmpd="sng" algn="ctr">
+                      <a:solidFill>
+                        <a:srgbClr val="D1D5DB"/>
+                      </a:solidFill>
+                      <a:prstDash val="solid"/>
+                      <a:round/>
+                      <a:headEnd type="none" w="med" len="med"/>
+                      <a:tailEnd type="none" w="med" len="med"/>
+                    </a:lnB>
+                    <a:solidFill>
+                      <a:srgbClr val="FFFFFF"/>
+                    </a:solidFill>
+                  </a:tcPr>
+                </a:tc>
+                <a:tc>
+                  <a:txBody>
+                    <a:bodyPr/>
+                    <a:lstStyle/>
+                    <a:p>
+                      <a:pPr marL="0" indent="0" algn="l">
+                        <a:buNone/>
+                      </a:pPr>
+                      <a:r>
+                        <a:rPr lang="en-US" sz="1100" i="1" dirty="0">
+                          <a:solidFill>
+                            <a:srgbClr val="7A2E3B"/>
+                          </a:solidFill>
+                          <a:latin typeface="Calibri" pitchFamily="34" charset="0"/>
+                          <a:ea typeface="Calibri" pitchFamily="34" charset="-122"/>
+                          <a:cs typeface="Calibri" pitchFamily="34" charset="-120"/>
+                        </a:rPr>
+                        <a:t>Whisper + Groq LLM</a:t>
+                      </a:r>
+                      <a:endParaRPr lang="en-US" sz="1100" dirty="0">
+                        <a:latin typeface="Calibri" charset="0"/>
+                        <a:ea typeface="Calibri" charset="0"/>
+                        <a:cs typeface="Calibri" charset="0"/>
+                      </a:endParaRPr>
+                    </a:p>
+                  </a:txBody>
+                  <a:tcPr marL="63500" marR="63500" marT="63500" marB="63500" anchor="ctr">
+                    <a:lnL w="6350" cap="flat" cmpd="sng" algn="ctr">
+                      <a:solidFill>
+                        <a:srgbClr val="D1D5DB"/>
+                      </a:solidFill>
+                      <a:prstDash val="solid"/>
+                      <a:round/>
+                      <a:headEnd type="none" w="med" len="med"/>
+                      <a:tailEnd type="none" w="med" len="med"/>
+                    </a:lnL>
+                    <a:lnR w="6350" cap="flat" cmpd="sng" algn="ctr">
+                      <a:solidFill>
+                        <a:srgbClr val="D1D5DB"/>
+                      </a:solidFill>
+                      <a:prstDash val="solid"/>
+                      <a:round/>
+                      <a:headEnd type="none" w="med" len="med"/>
+                      <a:tailEnd type="none" w="med" len="med"/>
+                    </a:lnR>
+                    <a:lnT w="6350" cap="flat" cmpd="sng" algn="ctr">
+                      <a:solidFill>
+                        <a:srgbClr val="D1D5DB"/>
+                      </a:solidFill>
+                      <a:prstDash val="solid"/>
+                      <a:round/>
+                      <a:headEnd type="none" w="med" len="med"/>
+                      <a:tailEnd type="none" w="med" len="med"/>
+                    </a:lnT>
+                    <a:lnB w="6350" cap="flat" cmpd="sng" algn="ctr">
+                      <a:solidFill>
+                        <a:srgbClr val="D1D5DB"/>
+                      </a:solidFill>
+                      <a:prstDash val="solid"/>
+                      <a:round/>
+                      <a:headEnd type="none" w="med" len="med"/>
+                      <a:tailEnd type="none" w="med" len="med"/>
+                    </a:lnB>
+                    <a:solidFill>
+                      <a:srgbClr val="FFFFFF"/>
+                    </a:solidFill>
+                  </a:tcPr>
+                </a:tc>
+                <a:tc>
+                  <a:txBody>
+                    <a:bodyPr/>
+                    <a:lstStyle/>
+                    <a:p>
+                      <a:pPr marL="0" indent="0" algn="l">
+                        <a:buNone/>
+                      </a:pPr>
+                      <a:r>
+                        <a:rPr lang="en-US" sz="1100" dirty="0">
+                          <a:solidFill>
+                            <a:srgbClr val="333333"/>
+                          </a:solidFill>
+                          <a:latin typeface="Calibri" pitchFamily="34" charset="0"/>
+                          <a:ea typeface="Calibri" pitchFamily="34" charset="-122"/>
+                          <a:cs typeface="Calibri" pitchFamily="34" charset="-120"/>
+                        </a:rPr>
+                        <a:t>Speaks Italian about a chosen topic; the AI tutor transcribes each turn, replies and corrects in conversation.</a:t>
+                      </a:r>
+                      <a:endParaRPr lang="en-US" sz="1100" dirty="0">
+                        <a:latin typeface="Calibri" charset="0"/>
+                        <a:ea typeface="Calibri" charset="0"/>
+                        <a:cs typeface="Calibri" charset="0"/>
+                      </a:endParaRPr>
+                    </a:p>
+                  </a:txBody>
+                  <a:tcPr marL="63500" marR="63500" marT="63500" marB="63500" anchor="ctr">
+                    <a:lnL w="6350" cap="flat" cmpd="sng" algn="ctr">
+                      <a:solidFill>
+                        <a:srgbClr val="D1D5DB"/>
+                      </a:solidFill>
+                      <a:prstDash val="solid"/>
+                      <a:round/>
+                      <a:headEnd type="none" w="med" len="med"/>
+                      <a:tailEnd type="none" w="med" len="med"/>
+                    </a:lnL>
+                    <a:lnR w="6350" cap="flat" cmpd="sng" algn="ctr">
+                      <a:solidFill>
+                        <a:srgbClr val="D1D5DB"/>
+                      </a:solidFill>
+                      <a:prstDash val="solid"/>
+                      <a:round/>
+                      <a:headEnd type="none" w="med" len="med"/>
+                      <a:tailEnd type="none" w="med" len="med"/>
+                    </a:lnR>
+                    <a:lnT w="6350" cap="flat" cmpd="sng" algn="ctr">
+                      <a:solidFill>
+                        <a:srgbClr val="D1D5DB"/>
+                      </a:solidFill>
+                      <a:prstDash val="solid"/>
+                      <a:round/>
+                      <a:headEnd type="none" w="med" len="med"/>
+                      <a:tailEnd type="none" w="med" len="med"/>
+                    </a:lnT>
+                    <a:lnB w="6350" cap="flat" cmpd="sng" algn="ctr">
+                      <a:solidFill>
+                        <a:srgbClr val="D1D5DB"/>
+                      </a:solidFill>
+                      <a:prstDash val="solid"/>
+                      <a:round/>
+                      <a:headEnd type="none" w="med" len="med"/>
+                      <a:tailEnd type="none" w="med" len="med"/>
+                    </a:lnB>
+                    <a:solidFill>
+                      <a:srgbClr val="FFFFFF"/>
+                    </a:solidFill>
+                  </a:tcPr>
+                </a:tc>
+                <a:extLst>
+                  <a:ext uri="{0D108BD9-81ED-4DB2-BD59-A6C34878D82A}">
+                    <a16:rowId xmlns:a16="http://schemas.microsoft.com/office/drawing/2014/main" val="10003"/>
+                  </a:ext>
+                </a:extLst>
+              </a:tr>
+              <a:tr h="640080">
+                <a:tc>
+                  <a:txBody>
+                    <a:bodyPr/>
+                    <a:lstStyle/>
+                    <a:p>
+                      <a:pPr marL="0" indent="0" algn="l">
+                        <a:buNone/>
+                      </a:pPr>
+                      <a:r>
+                        <a:rPr lang="en-US" sz="1100" b="1" dirty="0">
+                          <a:solidFill>
+                            <a:srgbClr val="1A2238"/>
+                          </a:solidFill>
+                          <a:latin typeface="Calibri" pitchFamily="34" charset="0"/>
+                          <a:ea typeface="Calibri" pitchFamily="34" charset="-122"/>
+                          <a:cs typeface="Calibri" pitchFamily="34" charset="-120"/>
+                        </a:rPr>
+                        <a:t>Flashcard review</a:t>
+                      </a:r>
+                      <a:endParaRPr lang="en-US" sz="1100" dirty="0">
+                        <a:latin typeface="Calibri" charset="0"/>
+                        <a:ea typeface="Calibri" charset="0"/>
+                        <a:cs typeface="Calibri" charset="0"/>
+                      </a:endParaRPr>
+                    </a:p>
+                  </a:txBody>
+                  <a:tcPr marL="63500" marR="63500" marT="63500" marB="63500" anchor="ctr">
+                    <a:lnL w="6350" cap="flat" cmpd="sng" algn="ctr">
+                      <a:solidFill>
+                        <a:srgbClr val="D1D5DB"/>
+                      </a:solidFill>
+                      <a:prstDash val="solid"/>
+                      <a:round/>
+                      <a:headEnd type="none" w="med" len="med"/>
+                      <a:tailEnd type="none" w="med" len="med"/>
+                    </a:lnL>
+                    <a:lnR w="6350" cap="flat" cmpd="sng" algn="ctr">
+                      <a:solidFill>
+                        <a:srgbClr val="D1D5DB"/>
+                      </a:solidFill>
+                      <a:prstDash val="solid"/>
+                      <a:round/>
+                      <a:headEnd type="none" w="med" len="med"/>
+                      <a:tailEnd type="none" w="med" len="med"/>
+                    </a:lnR>
+                    <a:lnT w="6350" cap="flat" cmpd="sng" algn="ctr">
+                      <a:solidFill>
+                        <a:srgbClr val="D1D5DB"/>
+                      </a:solidFill>
+                      <a:prstDash val="solid"/>
+                      <a:round/>
+                      <a:headEnd type="none" w="med" len="med"/>
+                      <a:tailEnd type="none" w="med" len="med"/>
+                    </a:lnT>
+                    <a:lnB w="6350" cap="flat" cmpd="sng" algn="ctr">
+                      <a:solidFill>
+                        <a:srgbClr val="D1D5DB"/>
+                      </a:solidFill>
+                      <a:prstDash val="solid"/>
+                      <a:round/>
+                      <a:headEnd type="none" w="med" len="med"/>
+                      <a:tailEnd type="none" w="med" len="med"/>
+                    </a:lnB>
+                    <a:solidFill>
+                      <a:srgbClr val="F7F7F4"/>
+                    </a:solidFill>
+                  </a:tcPr>
+                </a:tc>
+                <a:tc>
+                  <a:txBody>
+                    <a:bodyPr/>
+                    <a:lstStyle/>
+                    <a:p>
+                      <a:pPr marL="0" indent="0" algn="l">
+                        <a:buNone/>
+                      </a:pPr>
+                      <a:r>
+                        <a:rPr lang="en-US" sz="1100" i="1" dirty="0">
+                          <a:solidFill>
+                            <a:srgbClr val="7A2E3B"/>
+                          </a:solidFill>
+                          <a:latin typeface="Calibri" pitchFamily="34" charset="0"/>
+                          <a:ea typeface="Calibri" pitchFamily="34" charset="-122"/>
+                          <a:cs typeface="Calibri" pitchFamily="34" charset="-120"/>
+                        </a:rPr>
+                        <a:t>SM-2 scheduler</a:t>
+                      </a:r>
+                      <a:endParaRPr lang="en-US" sz="1100" dirty="0">
+                        <a:latin typeface="Calibri" charset="0"/>
+                        <a:ea typeface="Calibri" charset="0"/>
+                        <a:cs typeface="Calibri" charset="0"/>
+                      </a:endParaRPr>
+                    </a:p>
+                  </a:txBody>
+                  <a:tcPr marL="63500" marR="63500" marT="63500" marB="63500" anchor="ctr">
+                    <a:lnL w="6350" cap="flat" cmpd="sng" algn="ctr">
+                      <a:solidFill>
+                        <a:srgbClr val="D1D5DB"/>
+                      </a:solidFill>
+                      <a:prstDash val="solid"/>
+                      <a:round/>
+                      <a:headEnd type="none" w="med" len="med"/>
+                      <a:tailEnd type="none" w="med" len="med"/>
+                    </a:lnL>
+                    <a:lnR w="6350" cap="flat" cmpd="sng" algn="ctr">
+                      <a:solidFill>
+                        <a:srgbClr val="D1D5DB"/>
+                      </a:solidFill>
+                      <a:prstDash val="solid"/>
+                      <a:round/>
+                      <a:headEnd type="none" w="med" len="med"/>
+                      <a:tailEnd type="none" w="med" len="med"/>
+                    </a:lnR>
+                    <a:lnT w="6350" cap="flat" cmpd="sng" algn="ctr">
+                      <a:solidFill>
+                        <a:srgbClr val="D1D5DB"/>
+                      </a:solidFill>
+                      <a:prstDash val="solid"/>
+                      <a:round/>
+                      <a:headEnd type="none" w="med" len="med"/>
+                      <a:tailEnd type="none" w="med" len="med"/>
+                    </a:lnT>
+                    <a:lnB w="6350" cap="flat" cmpd="sng" algn="ctr">
+                      <a:solidFill>
+                        <a:srgbClr val="D1D5DB"/>
+                      </a:solidFill>
+                      <a:prstDash val="solid"/>
+                      <a:round/>
+                      <a:headEnd type="none" w="med" len="med"/>
+                      <a:tailEnd type="none" w="med" len="med"/>
+                    </a:lnB>
+                    <a:solidFill>
+                      <a:srgbClr val="F7F7F4"/>
+                    </a:solidFill>
+                  </a:tcPr>
+                </a:tc>
+                <a:tc>
+                  <a:txBody>
+                    <a:bodyPr/>
+                    <a:lstStyle/>
+                    <a:p>
+                      <a:pPr marL="0" indent="0" algn="l">
+                        <a:buNone/>
+                      </a:pPr>
+                      <a:r>
+                        <a:rPr lang="en-US" sz="1100" dirty="0">
+                          <a:solidFill>
+                            <a:srgbClr val="333333"/>
+                          </a:solidFill>
+                          <a:latin typeface="Calibri" pitchFamily="34" charset="0"/>
+                          <a:ea typeface="Calibri" pitchFamily="34" charset="-122"/>
+                          <a:cs typeface="Calibri" pitchFamily="34" charset="-120"/>
+                        </a:rPr>
+                        <a:t>Reviews vocabulary, grammar and translation cards as they fall due; ease and interval adapt to recall.</a:t>
+                      </a:r>
+                      <a:endParaRPr lang="en-US" sz="1100" dirty="0">
+                        <a:latin typeface="Calibri" charset="0"/>
+                        <a:ea typeface="Calibri" charset="0"/>
+                        <a:cs typeface="Calibri" charset="0"/>
+                      </a:endParaRPr>
+                    </a:p>
+                  </a:txBody>
+                  <a:tcPr marL="63500" marR="63500" marT="63500" marB="63500" anchor="ctr">
+                    <a:lnL w="6350" cap="flat" cmpd="sng" algn="ctr">
+                      <a:solidFill>
+                        <a:srgbClr val="D1D5DB"/>
+                      </a:solidFill>
+                      <a:prstDash val="solid"/>
+                      <a:round/>
+                      <a:headEnd type="none" w="med" len="med"/>
+                      <a:tailEnd type="none" w="med" len="med"/>
+                    </a:lnL>
+                    <a:lnR w="6350" cap="flat" cmpd="sng" algn="ctr">
+                      <a:solidFill>
+                        <a:srgbClr val="D1D5DB"/>
+                      </a:solidFill>
+                      <a:prstDash val="solid"/>
+                      <a:round/>
+                      <a:headEnd type="none" w="med" len="med"/>
+                      <a:tailEnd type="none" w="med" len="med"/>
+                    </a:lnR>
+                    <a:lnT w="6350" cap="flat" cmpd="sng" algn="ctr">
+                      <a:solidFill>
+                        <a:srgbClr val="D1D5DB"/>
+                      </a:solidFill>
+                      <a:prstDash val="solid"/>
+                      <a:round/>
+                      <a:headEnd type="none" w="med" len="med"/>
+                      <a:tailEnd type="none" w="med" len="med"/>
+                    </a:lnT>
+                    <a:lnB w="6350" cap="flat" cmpd="sng" algn="ctr">
+                      <a:solidFill>
+                        <a:srgbClr val="D1D5DB"/>
+                      </a:solidFill>
+                      <a:prstDash val="solid"/>
+                      <a:round/>
+                      <a:headEnd type="none" w="med" len="med"/>
+                      <a:tailEnd type="none" w="med" len="med"/>
+                    </a:lnB>
+                    <a:solidFill>
+                      <a:srgbClr val="F7F7F4"/>
+                    </a:solidFill>
+                  </a:tcPr>
+                </a:tc>
+                <a:extLst>
+                  <a:ext uri="{0D108BD9-81ED-4DB2-BD59-A6C34878D82A}">
+                    <a16:rowId xmlns:a16="http://schemas.microsoft.com/office/drawing/2014/main" val="10004"/>
+                  </a:ext>
+                </a:extLst>
+              </a:tr>
+              <a:tr h="640080">
+                <a:tc>
+                  <a:txBody>
+                    <a:bodyPr/>
+                    <a:lstStyle/>
+                    <a:p>
+                      <a:pPr marL="0" indent="0" algn="l">
+                        <a:buNone/>
+                      </a:pPr>
+                      <a:r>
+                        <a:rPr lang="en-US" sz="1100" b="1" dirty="0">
+                          <a:solidFill>
+                            <a:srgbClr val="1A2238"/>
+                          </a:solidFill>
+                          <a:latin typeface="Calibri" pitchFamily="34" charset="0"/>
+                          <a:ea typeface="Calibri" pitchFamily="34" charset="-122"/>
+                          <a:cs typeface="Calibri" pitchFamily="34" charset="-120"/>
+                        </a:rPr>
+                        <a:t>Progress report</a:t>
+                      </a:r>
+                      <a:endParaRPr lang="en-US" sz="1100" dirty="0">
+                        <a:latin typeface="Calibri" charset="0"/>
+                        <a:ea typeface="Calibri" charset="0"/>
+                        <a:cs typeface="Calibri" charset="0"/>
+                      </a:endParaRPr>
+                    </a:p>
+                  </a:txBody>
+                  <a:tcPr marL="63500" marR="63500" marT="63500" marB="63500" anchor="ctr">
+                    <a:lnL w="6350" cap="flat" cmpd="sng" algn="ctr">
+                      <a:solidFill>
+                        <a:srgbClr val="D1D5DB"/>
+                      </a:solidFill>
+                      <a:prstDash val="solid"/>
+                      <a:round/>
+                      <a:headEnd type="none" w="med" len="med"/>
+                      <a:tailEnd type="none" w="med" len="med"/>
+                    </a:lnL>
+                    <a:lnR w="6350" cap="flat" cmpd="sng" algn="ctr">
+                      <a:solidFill>
+                        <a:srgbClr val="D1D5DB"/>
+                      </a:solidFill>
+                      <a:prstDash val="solid"/>
+                      <a:round/>
+                      <a:headEnd type="none" w="med" len="med"/>
+                      <a:tailEnd type="none" w="med" len="med"/>
+                    </a:lnR>
+                    <a:lnT w="6350" cap="flat" cmpd="sng" algn="ctr">
+                      <a:solidFill>
+                        <a:srgbClr val="D1D5DB"/>
+                      </a:solidFill>
+                      <a:prstDash val="solid"/>
+                      <a:round/>
+                      <a:headEnd type="none" w="med" len="med"/>
+                      <a:tailEnd type="none" w="med" len="med"/>
+                    </a:lnT>
+                    <a:lnB w="6350" cap="flat" cmpd="sng" algn="ctr">
+                      <a:solidFill>
+                        <a:srgbClr val="D1D5DB"/>
+                      </a:solidFill>
+                      <a:prstDash val="solid"/>
+                      <a:round/>
+                      <a:headEnd type="none" w="med" len="med"/>
+                      <a:tailEnd type="none" w="med" len="med"/>
+                    </a:lnB>
+                    <a:solidFill>
+                      <a:srgbClr val="FFFFFF"/>
+                    </a:solidFill>
+                  </a:tcPr>
+                </a:tc>
+                <a:tc>
+                  <a:txBody>
+                    <a:bodyPr/>
+                    <a:lstStyle/>
+                    <a:p>
+                      <a:pPr marL="0" indent="0" algn="l">
+                        <a:buNone/>
+                      </a:pPr>
+                      <a:r>
+                        <a:rPr lang="en-US" sz="1100" i="1" dirty="0">
+                          <a:solidFill>
+                            <a:srgbClr val="7A2E3B"/>
+                          </a:solidFill>
+                          <a:latin typeface="Calibri" pitchFamily="34" charset="0"/>
+                          <a:ea typeface="Calibri" pitchFamily="34" charset="-122"/>
+                          <a:cs typeface="Calibri" pitchFamily="34" charset="-120"/>
+                        </a:rPr>
+                        <a:t>Weekly aggregator</a:t>
+                      </a:r>
+                      <a:endParaRPr lang="en-US" sz="1100" dirty="0">
+                        <a:latin typeface="Calibri" charset="0"/>
+                        <a:ea typeface="Calibri" charset="0"/>
+                        <a:cs typeface="Calibri" charset="0"/>
+                      </a:endParaRPr>
+                    </a:p>
+                  </a:txBody>
+                  <a:tcPr marL="63500" marR="63500" marT="63500" marB="63500" anchor="ctr">
+                    <a:lnL w="6350" cap="flat" cmpd="sng" algn="ctr">
+                      <a:solidFill>
+                        <a:srgbClr val="D1D5DB"/>
+                      </a:solidFill>
+                      <a:prstDash val="solid"/>
+                      <a:round/>
+                      <a:headEnd type="none" w="med" len="med"/>
+                      <a:tailEnd type="none" w="med" len="med"/>
+                    </a:lnL>
+                    <a:lnR w="6350" cap="flat" cmpd="sng" algn="ctr">
+                      <a:solidFill>
+                        <a:srgbClr val="D1D5DB"/>
+                      </a:solidFill>
+                      <a:prstDash val="solid"/>
+                      <a:round/>
+                      <a:headEnd type="none" w="med" len="med"/>
+                      <a:tailEnd type="none" w="med" len="med"/>
+                    </a:lnR>
+                    <a:lnT w="6350" cap="flat" cmpd="sng" algn="ctr">
+                      <a:solidFill>
+                        <a:srgbClr val="D1D5DB"/>
+                      </a:solidFill>
+                      <a:prstDash val="solid"/>
+                      <a:round/>
+                      <a:headEnd type="none" w="med" len="med"/>
+                      <a:tailEnd type="none" w="med" len="med"/>
+                    </a:lnT>
+                    <a:lnB w="6350" cap="flat" cmpd="sng" algn="ctr">
+                      <a:solidFill>
+                        <a:srgbClr val="D1D5DB"/>
+                      </a:solidFill>
+                      <a:prstDash val="solid"/>
+                      <a:round/>
+                      <a:headEnd type="none" w="med" len="med"/>
+                      <a:tailEnd type="none" w="med" len="med"/>
+                    </a:lnB>
+                    <a:solidFill>
+                      <a:srgbClr val="FFFFFF"/>
+                    </a:solidFill>
+                  </a:tcPr>
+                </a:tc>
+                <a:tc>
+                  <a:txBody>
+                    <a:bodyPr/>
+                    <a:lstStyle/>
+                    <a:p>
+                      <a:pPr marL="0" indent="0" algn="l">
+                        <a:buNone/>
+                      </a:pPr>
+                      <a:r>
+                        <a:rPr lang="en-US" sz="1100" dirty="0">
+                          <a:solidFill>
+                            <a:srgbClr val="333333"/>
+                          </a:solidFill>
+                          <a:latin typeface="Calibri" pitchFamily="34" charset="0"/>
+                          <a:ea typeface="Calibri" pitchFamily="34" charset="-122"/>
+                          <a:cs typeface="Calibri" pitchFamily="34" charset="-120"/>
+                        </a:rPr>
+                        <a:t>Sees an ISO-week roll-up of sessions, recurring mistakes, most-practised topics and what to study next.</a:t>
+                      </a:r>
+                      <a:endParaRPr lang="en-US" sz="1100" dirty="0">
+                        <a:latin typeface="Calibri" charset="0"/>
+                        <a:ea typeface="Calibri" charset="0"/>
+                        <a:cs typeface="Calibri" charset="0"/>
+                      </a:endParaRPr>
+                    </a:p>
+                  </a:txBody>
+                  <a:tcPr marL="63500" marR="63500" marT="63500" marB="63500" anchor="ctr">
+                    <a:lnL w="6350" cap="flat" cmpd="sng" algn="ctr">
+                      <a:solidFill>
+                        <a:srgbClr val="D1D5DB"/>
+                      </a:solidFill>
+                      <a:prstDash val="solid"/>
+                      <a:round/>
+                      <a:headEnd type="none" w="med" len="med"/>
+                      <a:tailEnd type="none" w="med" len="med"/>
+                    </a:lnL>
+                    <a:lnR w="6350" cap="flat" cmpd="sng" algn="ctr">
+                      <a:solidFill>
+                        <a:srgbClr val="D1D5DB"/>
+                      </a:solidFill>
+                      <a:prstDash val="solid"/>
+                      <a:round/>
+                      <a:headEnd type="none" w="med" len="med"/>
+                      <a:tailEnd type="none" w="med" len="med"/>
+                    </a:lnR>
+                    <a:lnT w="6350" cap="flat" cmpd="sng" algn="ctr">
+                      <a:solidFill>
+                        <a:srgbClr val="D1D5DB"/>
+                      </a:solidFill>
+                      <a:prstDash val="solid"/>
+                      <a:round/>
+                      <a:headEnd type="none" w="med" len="med"/>
+                      <a:tailEnd type="none" w="med" len="med"/>
+                    </a:lnT>
+                    <a:lnB w="6350" cap="flat" cmpd="sng" algn="ctr">
+                      <a:solidFill>
+                        <a:srgbClr val="D1D5DB"/>
+                      </a:solidFill>
+                      <a:prstDash val="solid"/>
+                      <a:round/>
+                      <a:headEnd type="none" w="med" len="med"/>
+                      <a:tailEnd type="none" w="med" len="med"/>
+                    </a:lnB>
+                    <a:solidFill>
+                      <a:srgbClr val="FFFFFF"/>
+                    </a:solidFill>
+                  </a:tcPr>
+                </a:tc>
+                <a:extLst>
+                  <a:ext uri="{0D108BD9-81ED-4DB2-BD59-A6C34878D82A}">
+                    <a16:rowId xmlns:a16="http://schemas.microsoft.com/office/drawing/2014/main" val="10005"/>
+                  </a:ext>
+                </a:extLst>
+              </a:tr>
+            </a:tbl>
+          </a:graphicData>
+        </a:graphic>
+      </p:graphicFrame>
+      <p:sp>
+        <p:nvSpPr>
+          <p:cNvPr id="10" name="Text 7"/>
+          <p:cNvSpPr/>
+          <p:nvPr/>
+        </p:nvSpPr>
+        <p:spPr>
+          <a:xfrm>
+            <a:off x="502920" y="5943600"/>
+            <a:ext cx="11155680" cy="365760"/>
+          </a:xfrm>
+          <a:prstGeom prst="rect">
+            <a:avLst/>
+          </a:prstGeom>
+          <a:noFill/>
+          <a:ln/>
+        </p:spPr>
+        <p:txBody>
+          <a:bodyPr wrap="square" lIns="0" tIns="0" rIns="0" bIns="0" rtlCol="0" anchor="ctr"/>
+          <a:lstStyle/>
+          <a:p>
+            <a:pPr marL="0" indent="0" algn="ctr">
+              <a:buNone/>
+            </a:pPr>
+            <a:r>
+              <a:rPr lang="en-US" sz="1050" i="1" dirty="0">
+                <a:solidFill>
+                  <a:srgbClr val="6B7280"/>
+                </a:solidFill>
+                <a:latin typeface="Calibri" pitchFamily="34" charset="0"/>
+                <a:ea typeface="Calibri" pitchFamily="34" charset="-122"/>
+                <a:cs typeface="Calibri" pitchFamily="34" charset="-120"/>
+              </a:rPr>
+              <a:t>Topics and flashcards are produced ahead of demand by background workers; sessions, feedback and reports are generated live.</a:t>
+            </a:r>
+            <a:endParaRPr lang="en-US" sz="1050" dirty="0"/>
+          </a:p>
+        </p:txBody>
+      </p:sp>
+    </p:spTree>
+  </p:cSld>
+  <p:clrMapOvr>
+    <a:masterClrMapping/>
+  </p:clrMapOvr>
+</p:sld>
+</file>
+
+<file path=ppt/slides/slide4.xml><?xml version="1.0" encoding="utf-8"?>
 <p:sld xmlns:a="http://schemas.openxmlformats.org/drawingml/2006/main" xmlns:r="http://schemas.openxmlformats.org/officeDocument/2006/relationships" xmlns:p="http://schemas.openxmlformats.org/presentationml/2006/main">
   <p:cSld name="Slide 3">
     <p:bg>
@@ -11902,7 +14999,7 @@
                 <a:ea typeface="Cambria" pitchFamily="34" charset="-122"/>
                 <a:cs typeface="Cambria" pitchFamily="34" charset="-120"/>
               </a:rPr>
-              <a:t>II.</a:t>
+              <a:t>III.</a:t>
             </a:r>
             <a:endParaRPr lang="en-US" sz="1400" dirty="0"/>
           </a:p>
@@ -11980,7 +15077,7 @@
                 <a:ea typeface="Calibri" pitchFamily="34" charset="-122"/>
                 <a:cs typeface="Calibri" pitchFamily="34" charset="-120"/>
               </a:rPr>
-              <a:t>3 / 15</a:t>
+              <a:t>4 / 16</a:t>
             </a:r>
             <a:endParaRPr lang="en-US" sz="1000" dirty="0"/>
           </a:p>
@@ -13397,7 +16494,7 @@
 </p:sld>
 </file>
 
-<file path=ppt/slides/slide4.xml><?xml version="1.0" encoding="utf-8"?>
+<file path=ppt/slides/slide5.xml><?xml version="1.0" encoding="utf-8"?>
 <p:sld xmlns:a="http://schemas.openxmlformats.org/drawingml/2006/main" xmlns:r="http://schemas.openxmlformats.org/officeDocument/2006/relationships" xmlns:p="http://schemas.openxmlformats.org/presentationml/2006/main">
   <p:cSld name="Slide 4">
     <p:bg>
@@ -13455,7 +16552,7 @@
                 <a:ea typeface="Cambria" pitchFamily="34" charset="-122"/>
                 <a:cs typeface="Cambria" pitchFamily="34" charset="-120"/>
               </a:rPr>
-              <a:t>III.</a:t>
+              <a:t>IV.</a:t>
             </a:r>
             <a:endParaRPr lang="en-US" sz="1400" dirty="0"/>
           </a:p>
@@ -13533,7 +16630,7 @@
                 <a:ea typeface="Calibri" pitchFamily="34" charset="-122"/>
                 <a:cs typeface="Calibri" pitchFamily="34" charset="-120"/>
               </a:rPr>
-              <a:t>4 / 15</a:t>
+              <a:t>5 / 16</a:t>
             </a:r>
             <a:endParaRPr lang="en-US" sz="1000" dirty="0"/>
           </a:p>
@@ -15203,7 +18300,7 @@
 </p:sld>
 </file>
 
-<file path=ppt/slides/slide5.xml><?xml version="1.0" encoding="utf-8"?>
+<file path=ppt/slides/slide6.xml><?xml version="1.0" encoding="utf-8"?>
 <p:sld xmlns:a="http://schemas.openxmlformats.org/drawingml/2006/main" xmlns:r="http://schemas.openxmlformats.org/officeDocument/2006/relationships" xmlns:p="http://schemas.openxmlformats.org/presentationml/2006/main">
   <p:cSld name="Slide 5">
     <p:bg>
@@ -15261,7 +18358,7 @@
                 <a:ea typeface="Cambria" pitchFamily="34" charset="-122"/>
                 <a:cs typeface="Cambria" pitchFamily="34" charset="-120"/>
               </a:rPr>
-              <a:t>IV.</a:t>
+              <a:t>V.</a:t>
             </a:r>
             <a:endParaRPr lang="en-US" sz="1400" dirty="0"/>
           </a:p>
@@ -15339,7 +18436,7 @@
                 <a:ea typeface="Calibri" pitchFamily="34" charset="-122"/>
                 <a:cs typeface="Calibri" pitchFamily="34" charset="-120"/>
               </a:rPr>
-              <a:t>5 / 15</a:t>
+              <a:t>6 / 16</a:t>
             </a:r>
             <a:endParaRPr lang="en-US" sz="1000" dirty="0"/>
           </a:p>
@@ -16854,7 +19951,7 @@
 </p:sld>
 </file>
 
-<file path=ppt/slides/slide6.xml><?xml version="1.0" encoding="utf-8"?>
+<file path=ppt/slides/slide7.xml><?xml version="1.0" encoding="utf-8"?>
 <p:sld xmlns:a="http://schemas.openxmlformats.org/drawingml/2006/main" xmlns:r="http://schemas.openxmlformats.org/officeDocument/2006/relationships" xmlns:p="http://schemas.openxmlformats.org/presentationml/2006/main">
   <p:cSld name="Slide 6">
     <p:bg>
@@ -16912,7 +20009,7 @@
                 <a:ea typeface="Cambria" pitchFamily="34" charset="-122"/>
                 <a:cs typeface="Cambria" pitchFamily="34" charset="-120"/>
               </a:rPr>
-              <a:t>V.</a:t>
+              <a:t>VI.</a:t>
             </a:r>
             <a:endParaRPr lang="en-US" sz="1400" dirty="0"/>
           </a:p>
@@ -16990,7 +20087,7 @@
                 <a:ea typeface="Calibri" pitchFamily="34" charset="-122"/>
                 <a:cs typeface="Calibri" pitchFamily="34" charset="-120"/>
               </a:rPr>
-              <a:t>6 / 15</a:t>
+              <a:t>7 / 16</a:t>
             </a:r>
             <a:endParaRPr lang="en-US" sz="1000" dirty="0"/>
           </a:p>
@@ -18442,7 +21539,7 @@
 </p:sld>
 </file>
 
-<file path=ppt/slides/slide7.xml><?xml version="1.0" encoding="utf-8"?>
+<file path=ppt/slides/slide8.xml><?xml version="1.0" encoding="utf-8"?>
 <p:sld xmlns:a="http://schemas.openxmlformats.org/drawingml/2006/main" xmlns:r="http://schemas.openxmlformats.org/officeDocument/2006/relationships" xmlns:p="http://schemas.openxmlformats.org/presentationml/2006/main">
   <p:cSld name="Slide 7">
     <p:bg>
@@ -18500,7 +21597,7 @@
                 <a:ea typeface="Cambria" pitchFamily="34" charset="-122"/>
                 <a:cs typeface="Cambria" pitchFamily="34" charset="-120"/>
               </a:rPr>
-              <a:t>VI.</a:t>
+              <a:t>VII.</a:t>
             </a:r>
             <a:endParaRPr lang="en-US" sz="1400" dirty="0"/>
           </a:p>
@@ -18578,7 +21675,7 @@
                 <a:ea typeface="Calibri" pitchFamily="34" charset="-122"/>
                 <a:cs typeface="Calibri" pitchFamily="34" charset="-120"/>
               </a:rPr>
-              <a:t>7 / 15</a:t>
+              <a:t>8 / 16</a:t>
             </a:r>
             <a:endParaRPr lang="en-US" sz="1000" dirty="0"/>
           </a:p>
@@ -19034,7 +22131,7 @@
 </p:sld>
 </file>
 
-<file path=ppt/slides/slide8.xml><?xml version="1.0" encoding="utf-8"?>
+<file path=ppt/slides/slide9.xml><?xml version="1.0" encoding="utf-8"?>
 <p:sld xmlns:a="http://schemas.openxmlformats.org/drawingml/2006/main" xmlns:r="http://schemas.openxmlformats.org/officeDocument/2006/relationships" xmlns:p="http://schemas.openxmlformats.org/presentationml/2006/main">
   <p:cSld name="Slide 8">
     <p:bg>
@@ -19092,7 +22189,7 @@
                 <a:ea typeface="Cambria" pitchFamily="34" charset="-122"/>
                 <a:cs typeface="Cambria" pitchFamily="34" charset="-120"/>
               </a:rPr>
-              <a:t>VII.</a:t>
+              <a:t>VIII.</a:t>
             </a:r>
             <a:endParaRPr lang="en-US" sz="1400" dirty="0"/>
           </a:p>
@@ -19170,7 +22267,7 @@
                 <a:ea typeface="Calibri" pitchFamily="34" charset="-122"/>
                 <a:cs typeface="Calibri" pitchFamily="34" charset="-120"/>
               </a:rPr>
-              <a:t>8 / 15</a:t>
+              <a:t>9 / 16</a:t>
             </a:r>
             <a:endParaRPr lang="en-US" sz="1000" dirty="0"/>
           </a:p>
@@ -20452,1452 +23549,6 @@
                 <a:cs typeface="Calibri" pitchFamily="34" charset="-120"/>
               </a:rPr>
               <a:t>A Grafana dashboard provisioned from docker/grafana/dashboards/edge-coach.json is auto-loaded at startup. Bull Board exposes the DLQ at :3002/queues.</a:t>
-            </a:r>
-            <a:endParaRPr lang="en-US" sz="1000" dirty="0"/>
-          </a:p>
-        </p:txBody>
-      </p:sp>
-    </p:spTree>
-  </p:cSld>
-  <p:clrMapOvr>
-    <a:masterClrMapping/>
-  </p:clrMapOvr>
-</p:sld>
-</file>
-
-<file path=ppt/slides/slide9.xml><?xml version="1.0" encoding="utf-8"?>
-<p:sld xmlns:a="http://schemas.openxmlformats.org/drawingml/2006/main" xmlns:r="http://schemas.openxmlformats.org/officeDocument/2006/relationships" xmlns:p="http://schemas.openxmlformats.org/presentationml/2006/main">
-  <p:cSld name="Slide 9">
-    <p:bg>
-      <p:bgPr>
-        <a:solidFill>
-          <a:srgbClr val="FFFFFF"/>
-        </a:solidFill>
-        <a:effectLst/>
-      </p:bgPr>
-    </p:bg>
-    <p:spTree>
-      <p:nvGrpSpPr>
-        <p:cNvPr id="1" name=""/>
-        <p:cNvGrpSpPr/>
-        <p:nvPr/>
-      </p:nvGrpSpPr>
-      <p:grpSpPr>
-        <a:xfrm>
-          <a:off x="0" y="0"/>
-          <a:ext cx="0" cy="0"/>
-          <a:chOff x="0" y="0"/>
-          <a:chExt cx="0" cy="0"/>
-        </a:xfrm>
-      </p:grpSpPr>
-      <p:sp>
-        <p:nvSpPr>
-          <p:cNvPr id="2" name="Text 0"/>
-          <p:cNvSpPr/>
-          <p:nvPr/>
-        </p:nvSpPr>
-        <p:spPr>
-          <a:xfrm>
-            <a:off x="502920" y="411480"/>
-            <a:ext cx="640080" cy="365760"/>
-          </a:xfrm>
-          <a:prstGeom prst="rect">
-            <a:avLst/>
-          </a:prstGeom>
-          <a:noFill/>
-          <a:ln/>
-        </p:spPr>
-        <p:txBody>
-          <a:bodyPr wrap="square" lIns="0" tIns="0" rIns="0" bIns="0" rtlCol="0" anchor="ctr"/>
-          <a:lstStyle/>
-          <a:p>
-            <a:pPr marL="0" indent="0">
-              <a:buNone/>
-            </a:pPr>
-            <a:r>
-              <a:rPr lang="en-US" sz="1400" i="1" dirty="0">
-                <a:solidFill>
-                  <a:srgbClr val="7A2E3B"/>
-                </a:solidFill>
-                <a:latin typeface="Cambria" pitchFamily="34" charset="0"/>
-                <a:ea typeface="Cambria" pitchFamily="34" charset="-122"/>
-                <a:cs typeface="Cambria" pitchFamily="34" charset="-120"/>
-              </a:rPr>
-              <a:t>VIII.</a:t>
-            </a:r>
-            <a:endParaRPr lang="en-US" sz="1400" dirty="0"/>
-          </a:p>
-        </p:txBody>
-      </p:sp>
-      <p:sp>
-        <p:nvSpPr>
-          <p:cNvPr id="3" name="Text 1"/>
-          <p:cNvSpPr/>
-          <p:nvPr/>
-        </p:nvSpPr>
-        <p:spPr>
-          <a:xfrm>
-            <a:off x="1051560" y="411480"/>
-            <a:ext cx="5486400" cy="365760"/>
-          </a:xfrm>
-          <a:prstGeom prst="rect">
-            <a:avLst/>
-          </a:prstGeom>
-          <a:noFill/>
-          <a:ln/>
-        </p:spPr>
-        <p:txBody>
-          <a:bodyPr wrap="square" lIns="0" tIns="0" rIns="0" bIns="0" rtlCol="0" anchor="ctr"/>
-          <a:lstStyle/>
-          <a:p>
-            <a:pPr marL="0" indent="0">
-              <a:buNone/>
-            </a:pPr>
-            <a:r>
-              <a:rPr lang="en-US" sz="1000" kern="0" spc="400" dirty="0">
-                <a:solidFill>
-                  <a:srgbClr val="6B7280"/>
-                </a:solidFill>
-                <a:latin typeface="Calibri" pitchFamily="34" charset="0"/>
-                <a:ea typeface="Calibri" pitchFamily="34" charset="-122"/>
-                <a:cs typeface="Calibri" pitchFamily="34" charset="-120"/>
-              </a:rPr>
-              <a:t>OPERATOR SURFACE</a:t>
-            </a:r>
-            <a:endParaRPr lang="en-US" sz="1000" dirty="0"/>
-          </a:p>
-        </p:txBody>
-      </p:sp>
-      <p:sp>
-        <p:nvSpPr>
-          <p:cNvPr id="4" name="Text 2"/>
-          <p:cNvSpPr/>
-          <p:nvPr/>
-        </p:nvSpPr>
-        <p:spPr>
-          <a:xfrm>
-            <a:off x="10789920" y="411480"/>
-            <a:ext cx="914400" cy="365760"/>
-          </a:xfrm>
-          <a:prstGeom prst="rect">
-            <a:avLst/>
-          </a:prstGeom>
-          <a:noFill/>
-          <a:ln/>
-        </p:spPr>
-        <p:txBody>
-          <a:bodyPr wrap="square" lIns="0" tIns="0" rIns="0" bIns="0" rtlCol="0" anchor="ctr"/>
-          <a:lstStyle/>
-          <a:p>
-            <a:pPr marL="0" indent="0" algn="r">
-              <a:buNone/>
-            </a:pPr>
-            <a:r>
-              <a:rPr lang="en-US" sz="1000" i="1" dirty="0">
-                <a:solidFill>
-                  <a:srgbClr val="9CA3AF"/>
-                </a:solidFill>
-                <a:latin typeface="Calibri" pitchFamily="34" charset="0"/>
-                <a:ea typeface="Calibri" pitchFamily="34" charset="-122"/>
-                <a:cs typeface="Calibri" pitchFamily="34" charset="-120"/>
-              </a:rPr>
-              <a:t>9 / 15</a:t>
-            </a:r>
-            <a:endParaRPr lang="en-US" sz="1000" dirty="0"/>
-          </a:p>
-        </p:txBody>
-      </p:sp>
-      <p:sp>
-        <p:nvSpPr>
-          <p:cNvPr id="5" name="Shape 3"/>
-          <p:cNvSpPr/>
-          <p:nvPr/>
-        </p:nvSpPr>
-        <p:spPr>
-          <a:xfrm>
-            <a:off x="502920" y="6355080"/>
-            <a:ext cx="11155680" cy="0"/>
-          </a:xfrm>
-          <a:prstGeom prst="line">
-            <a:avLst/>
-          </a:prstGeom>
-          <a:noFill/>
-          <a:ln w="6350">
-            <a:solidFill>
-              <a:srgbClr val="E5E7EB"/>
-            </a:solidFill>
-            <a:prstDash val="solid"/>
-          </a:ln>
-        </p:spPr>
-        <p:txBody>
-          <a:bodyPr/>
-          <a:lstStyle/>
-          <a:p>
-            <a:endParaRPr lang="en-US"/>
-          </a:p>
-        </p:txBody>
-      </p:sp>
-      <p:sp>
-        <p:nvSpPr>
-          <p:cNvPr id="6" name="Text 4"/>
-          <p:cNvSpPr/>
-          <p:nvPr/>
-        </p:nvSpPr>
-        <p:spPr>
-          <a:xfrm>
-            <a:off x="502920" y="6446520"/>
-            <a:ext cx="5486400" cy="256032"/>
-          </a:xfrm>
-          <a:prstGeom prst="rect">
-            <a:avLst/>
-          </a:prstGeom>
-          <a:noFill/>
-          <a:ln/>
-        </p:spPr>
-        <p:txBody>
-          <a:bodyPr wrap="square" lIns="0" tIns="0" rIns="0" bIns="0" rtlCol="0" anchor="ctr"/>
-          <a:lstStyle/>
-          <a:p>
-            <a:pPr marL="0" indent="0">
-              <a:buNone/>
-            </a:pPr>
-            <a:r>
-              <a:rPr lang="en-US" sz="900" i="1" dirty="0">
-                <a:solidFill>
-                  <a:srgbClr val="9CA3AF"/>
-                </a:solidFill>
-                <a:latin typeface="Calibri" pitchFamily="34" charset="0"/>
-                <a:ea typeface="Calibri" pitchFamily="34" charset="-122"/>
-                <a:cs typeface="Calibri" pitchFamily="34" charset="-120"/>
-              </a:rPr>
-              <a:t>Edge Language Coach  ·  Course Project  ·  2026</a:t>
-            </a:r>
-            <a:endParaRPr lang="en-US" sz="900" dirty="0"/>
-          </a:p>
-        </p:txBody>
-      </p:sp>
-      <p:sp>
-        <p:nvSpPr>
-          <p:cNvPr id="7" name="Text 5"/>
-          <p:cNvSpPr/>
-          <p:nvPr/>
-        </p:nvSpPr>
-        <p:spPr>
-          <a:xfrm>
-            <a:off x="7086600" y="6446520"/>
-            <a:ext cx="4572000" cy="256032"/>
-          </a:xfrm>
-          <a:prstGeom prst="rect">
-            <a:avLst/>
-          </a:prstGeom>
-          <a:noFill/>
-          <a:ln/>
-        </p:spPr>
-        <p:txBody>
-          <a:bodyPr wrap="square" lIns="0" tIns="0" rIns="0" bIns="0" rtlCol="0" anchor="ctr"/>
-          <a:lstStyle/>
-          <a:p>
-            <a:pPr marL="0" indent="0" algn="r">
-              <a:buNone/>
-            </a:pPr>
-            <a:r>
-              <a:rPr lang="en-US" sz="900" i="1" dirty="0">
-                <a:solidFill>
-                  <a:srgbClr val="9CA3AF"/>
-                </a:solidFill>
-                <a:latin typeface="Calibri" pitchFamily="34" charset="0"/>
-                <a:ea typeface="Calibri" pitchFamily="34" charset="-122"/>
-                <a:cs typeface="Calibri" pitchFamily="34" charset="-120"/>
-              </a:rPr>
-              <a:t>Ibrahim</a:t>
-            </a:r>
-            <a:endParaRPr lang="en-US" sz="900" dirty="0"/>
-          </a:p>
-        </p:txBody>
-      </p:sp>
-      <p:sp>
-        <p:nvSpPr>
-          <p:cNvPr id="8" name="Text 6"/>
-          <p:cNvSpPr/>
-          <p:nvPr/>
-        </p:nvSpPr>
-        <p:spPr>
-          <a:xfrm>
-            <a:off x="502920" y="914400"/>
-            <a:ext cx="11155680" cy="777240"/>
-          </a:xfrm>
-          <a:prstGeom prst="rect">
-            <a:avLst/>
-          </a:prstGeom>
-          <a:noFill/>
-          <a:ln/>
-        </p:spPr>
-        <p:txBody>
-          <a:bodyPr wrap="square" lIns="0" tIns="0" rIns="0" bIns="0" rtlCol="0" anchor="ctr"/>
-          <a:lstStyle/>
-          <a:p>
-            <a:pPr marL="0" indent="0">
-              <a:buNone/>
-            </a:pPr>
-            <a:r>
-              <a:rPr lang="en-US" sz="3000" dirty="0">
-                <a:solidFill>
-                  <a:srgbClr val="1A2238"/>
-                </a:solidFill>
-                <a:latin typeface="Cambria" pitchFamily="34" charset="0"/>
-                <a:ea typeface="Cambria" pitchFamily="34" charset="-122"/>
-                <a:cs typeface="Cambria" pitchFamily="34" charset="-120"/>
-              </a:rPr>
-              <a:t>An agentic operator surface — two MCP servers</a:t>
-            </a:r>
-            <a:endParaRPr lang="en-US" sz="3000" dirty="0"/>
-          </a:p>
-        </p:txBody>
-      </p:sp>
-      <p:sp>
-        <p:nvSpPr>
-          <p:cNvPr id="9" name="Text 7"/>
-          <p:cNvSpPr/>
-          <p:nvPr/>
-        </p:nvSpPr>
-        <p:spPr>
-          <a:xfrm>
-            <a:off x="502920" y="1874520"/>
-            <a:ext cx="11155680" cy="594360"/>
-          </a:xfrm>
-          <a:prstGeom prst="rect">
-            <a:avLst/>
-          </a:prstGeom>
-          <a:noFill/>
-          <a:ln/>
-        </p:spPr>
-        <p:txBody>
-          <a:bodyPr wrap="square" lIns="0" tIns="0" rIns="0" bIns="0" rtlCol="0" anchor="ctr"/>
-          <a:lstStyle/>
-          <a:p>
-            <a:pPr marL="0" indent="0">
-              <a:lnSpc>
-                <a:spcPct val="130000"/>
-              </a:lnSpc>
-              <a:buNone/>
-            </a:pPr>
-            <a:r>
-              <a:rPr lang="en-US" sz="1200" i="1" dirty="0">
-                <a:solidFill>
-                  <a:srgbClr val="333333"/>
-                </a:solidFill>
-                <a:latin typeface="Calibri" pitchFamily="34" charset="0"/>
-                <a:ea typeface="Calibri" pitchFamily="34" charset="-122"/>
-                <a:cs typeface="Calibri" pitchFamily="34" charset="-120"/>
-              </a:rPr>
-              <a:t>Two Model Context Protocol servers expose the running system to agent-driven inspection and remediation, without SSH or redeploy. The servers are split by privilege.</a:t>
-            </a:r>
-            <a:endParaRPr lang="en-US" sz="1200" dirty="0"/>
-          </a:p>
-        </p:txBody>
-      </p:sp>
-      <p:sp>
-        <p:nvSpPr>
-          <p:cNvPr id="10" name="Shape 8"/>
-          <p:cNvSpPr/>
-          <p:nvPr/>
-        </p:nvSpPr>
-        <p:spPr>
-          <a:xfrm>
-            <a:off x="502920" y="2606040"/>
-            <a:ext cx="3611880" cy="822960"/>
-          </a:xfrm>
-          <a:prstGeom prst="rect">
-            <a:avLst/>
-          </a:prstGeom>
-          <a:solidFill>
-            <a:srgbClr val="FFFFFF"/>
-          </a:solidFill>
-          <a:ln w="9525">
-            <a:solidFill>
-              <a:srgbClr val="D1D5DB"/>
-            </a:solidFill>
-            <a:prstDash val="solid"/>
-          </a:ln>
-        </p:spPr>
-        <p:txBody>
-          <a:bodyPr/>
-          <a:lstStyle/>
-          <a:p>
-            <a:endParaRPr lang="en-US"/>
-          </a:p>
-        </p:txBody>
-      </p:sp>
-      <p:sp>
-        <p:nvSpPr>
-          <p:cNvPr id="11" name="Text 9"/>
-          <p:cNvSpPr/>
-          <p:nvPr/>
-        </p:nvSpPr>
-        <p:spPr>
-          <a:xfrm>
-            <a:off x="640080" y="2670048"/>
-            <a:ext cx="1371600" cy="274320"/>
-          </a:xfrm>
-          <a:prstGeom prst="rect">
-            <a:avLst/>
-          </a:prstGeom>
-          <a:noFill/>
-          <a:ln/>
-        </p:spPr>
-        <p:txBody>
-          <a:bodyPr wrap="square" lIns="0" tIns="0" rIns="0" bIns="0" rtlCol="0" anchor="ctr"/>
-          <a:lstStyle/>
-          <a:p>
-            <a:pPr marL="0" indent="0">
-              <a:buNone/>
-            </a:pPr>
-            <a:r>
-              <a:rPr lang="en-US" sz="1000" i="1" dirty="0">
-                <a:solidFill>
-                  <a:srgbClr val="7A2E3B"/>
-                </a:solidFill>
-                <a:latin typeface="Cambria" pitchFamily="34" charset="0"/>
-                <a:ea typeface="Cambria" pitchFamily="34" charset="-122"/>
-                <a:cs typeface="Cambria" pitchFamily="34" charset="-120"/>
-              </a:rPr>
-              <a:t>Step 1.</a:t>
-            </a:r>
-            <a:endParaRPr lang="en-US" sz="1000" dirty="0"/>
-          </a:p>
-        </p:txBody>
-      </p:sp>
-      <p:sp>
-        <p:nvSpPr>
-          <p:cNvPr id="12" name="Text 10"/>
-          <p:cNvSpPr/>
-          <p:nvPr/>
-        </p:nvSpPr>
-        <p:spPr>
-          <a:xfrm>
-            <a:off x="640080" y="2907792"/>
-            <a:ext cx="3337560" cy="320040"/>
-          </a:xfrm>
-          <a:prstGeom prst="rect">
-            <a:avLst/>
-          </a:prstGeom>
-          <a:noFill/>
-          <a:ln/>
-        </p:spPr>
-        <p:txBody>
-          <a:bodyPr wrap="square" lIns="0" tIns="0" rIns="0" bIns="0" rtlCol="0" anchor="ctr"/>
-          <a:lstStyle/>
-          <a:p>
-            <a:pPr marL="0" indent="0">
-              <a:buNone/>
-            </a:pPr>
-            <a:r>
-              <a:rPr lang="en-US" sz="1500" dirty="0">
-                <a:solidFill>
-                  <a:srgbClr val="1A2238"/>
-                </a:solidFill>
-                <a:latin typeface="Cambria" pitchFamily="34" charset="0"/>
-                <a:ea typeface="Cambria" pitchFamily="34" charset="-122"/>
-                <a:cs typeface="Cambria" pitchFamily="34" charset="-120"/>
-              </a:rPr>
-              <a:t>Detect</a:t>
-            </a:r>
-            <a:endParaRPr lang="en-US" sz="1500" dirty="0"/>
-          </a:p>
-        </p:txBody>
-      </p:sp>
-      <p:sp>
-        <p:nvSpPr>
-          <p:cNvPr id="13" name="Text 11"/>
-          <p:cNvSpPr/>
-          <p:nvPr/>
-        </p:nvSpPr>
-        <p:spPr>
-          <a:xfrm>
-            <a:off x="640080" y="3200400"/>
-            <a:ext cx="3337560" cy="274320"/>
-          </a:xfrm>
-          <a:prstGeom prst="rect">
-            <a:avLst/>
-          </a:prstGeom>
-          <a:noFill/>
-          <a:ln/>
-        </p:spPr>
-        <p:txBody>
-          <a:bodyPr wrap="square" lIns="0" tIns="0" rIns="0" bIns="0" rtlCol="0" anchor="ctr"/>
-          <a:lstStyle/>
-          <a:p>
-            <a:pPr marL="0" indent="0">
-              <a:buNone/>
-            </a:pPr>
-            <a:r>
-              <a:rPr lang="en-US" sz="1050" i="1" dirty="0">
-                <a:solidFill>
-                  <a:srgbClr val="333333"/>
-                </a:solidFill>
-                <a:latin typeface="Calibri" pitchFamily="34" charset="0"/>
-                <a:ea typeface="Calibri" pitchFamily="34" charset="-122"/>
-                <a:cs typeface="Calibri" pitchFamily="34" charset="-120"/>
-              </a:rPr>
-              <a:t>Prometheus / Grafana fires an alert</a:t>
-            </a:r>
-            <a:endParaRPr lang="en-US" sz="1050" dirty="0"/>
-          </a:p>
-        </p:txBody>
-      </p:sp>
-      <p:sp>
-        <p:nvSpPr>
-          <p:cNvPr id="14" name="Shape 12"/>
-          <p:cNvSpPr/>
-          <p:nvPr/>
-        </p:nvSpPr>
-        <p:spPr>
-          <a:xfrm>
-            <a:off x="4114800" y="3017520"/>
-            <a:ext cx="292608" cy="0"/>
-          </a:xfrm>
-          <a:prstGeom prst="line">
-            <a:avLst/>
-          </a:prstGeom>
-          <a:noFill/>
-          <a:ln w="12700">
-            <a:solidFill>
-              <a:srgbClr val="1A2238"/>
-            </a:solidFill>
-            <a:prstDash val="solid"/>
-            <a:tailEnd type="triangle"/>
-          </a:ln>
-        </p:spPr>
-        <p:txBody>
-          <a:bodyPr/>
-          <a:lstStyle/>
-          <a:p>
-            <a:endParaRPr lang="en-US"/>
-          </a:p>
-        </p:txBody>
-      </p:sp>
-      <p:sp>
-        <p:nvSpPr>
-          <p:cNvPr id="15" name="Shape 13"/>
-          <p:cNvSpPr/>
-          <p:nvPr/>
-        </p:nvSpPr>
-        <p:spPr>
-          <a:xfrm>
-            <a:off x="4407408" y="2606040"/>
-            <a:ext cx="3611880" cy="822960"/>
-          </a:xfrm>
-          <a:prstGeom prst="rect">
-            <a:avLst/>
-          </a:prstGeom>
-          <a:solidFill>
-            <a:srgbClr val="FFFFFF"/>
-          </a:solidFill>
-          <a:ln w="9525">
-            <a:solidFill>
-              <a:srgbClr val="D1D5DB"/>
-            </a:solidFill>
-            <a:prstDash val="solid"/>
-          </a:ln>
-        </p:spPr>
-        <p:txBody>
-          <a:bodyPr/>
-          <a:lstStyle/>
-          <a:p>
-            <a:endParaRPr lang="en-US"/>
-          </a:p>
-        </p:txBody>
-      </p:sp>
-      <p:sp>
-        <p:nvSpPr>
-          <p:cNvPr id="16" name="Text 14"/>
-          <p:cNvSpPr/>
-          <p:nvPr/>
-        </p:nvSpPr>
-        <p:spPr>
-          <a:xfrm>
-            <a:off x="4544568" y="2670048"/>
-            <a:ext cx="1371600" cy="274320"/>
-          </a:xfrm>
-          <a:prstGeom prst="rect">
-            <a:avLst/>
-          </a:prstGeom>
-          <a:noFill/>
-          <a:ln/>
-        </p:spPr>
-        <p:txBody>
-          <a:bodyPr wrap="square" lIns="0" tIns="0" rIns="0" bIns="0" rtlCol="0" anchor="ctr"/>
-          <a:lstStyle/>
-          <a:p>
-            <a:pPr marL="0" indent="0">
-              <a:buNone/>
-            </a:pPr>
-            <a:r>
-              <a:rPr lang="en-US" sz="1000" i="1" dirty="0">
-                <a:solidFill>
-                  <a:srgbClr val="7A2E3B"/>
-                </a:solidFill>
-                <a:latin typeface="Cambria" pitchFamily="34" charset="0"/>
-                <a:ea typeface="Cambria" pitchFamily="34" charset="-122"/>
-                <a:cs typeface="Cambria" pitchFamily="34" charset="-120"/>
-              </a:rPr>
-              <a:t>Step 2.</a:t>
-            </a:r>
-            <a:endParaRPr lang="en-US" sz="1000" dirty="0"/>
-          </a:p>
-        </p:txBody>
-      </p:sp>
-      <p:sp>
-        <p:nvSpPr>
-          <p:cNvPr id="17" name="Text 15"/>
-          <p:cNvSpPr/>
-          <p:nvPr/>
-        </p:nvSpPr>
-        <p:spPr>
-          <a:xfrm>
-            <a:off x="4544568" y="2907792"/>
-            <a:ext cx="3337560" cy="320040"/>
-          </a:xfrm>
-          <a:prstGeom prst="rect">
-            <a:avLst/>
-          </a:prstGeom>
-          <a:noFill/>
-          <a:ln/>
-        </p:spPr>
-        <p:txBody>
-          <a:bodyPr wrap="square" lIns="0" tIns="0" rIns="0" bIns="0" rtlCol="0" anchor="ctr"/>
-          <a:lstStyle/>
-          <a:p>
-            <a:pPr marL="0" indent="0">
-              <a:buNone/>
-            </a:pPr>
-            <a:r>
-              <a:rPr lang="en-US" sz="1500" dirty="0">
-                <a:solidFill>
-                  <a:srgbClr val="1A2238"/>
-                </a:solidFill>
-                <a:latin typeface="Cambria" pitchFamily="34" charset="0"/>
-                <a:ea typeface="Cambria" pitchFamily="34" charset="-122"/>
-                <a:cs typeface="Cambria" pitchFamily="34" charset="-120"/>
-              </a:rPr>
-              <a:t>Diagnose</a:t>
-            </a:r>
-            <a:endParaRPr lang="en-US" sz="1500" dirty="0"/>
-          </a:p>
-        </p:txBody>
-      </p:sp>
-      <p:sp>
-        <p:nvSpPr>
-          <p:cNvPr id="18" name="Text 16"/>
-          <p:cNvSpPr/>
-          <p:nvPr/>
-        </p:nvSpPr>
-        <p:spPr>
-          <a:xfrm>
-            <a:off x="4544568" y="3200400"/>
-            <a:ext cx="3337560" cy="274320"/>
-          </a:xfrm>
-          <a:prstGeom prst="rect">
-            <a:avLst/>
-          </a:prstGeom>
-          <a:noFill/>
-          <a:ln/>
-        </p:spPr>
-        <p:txBody>
-          <a:bodyPr wrap="square" lIns="0" tIns="0" rIns="0" bIns="0" rtlCol="0" anchor="ctr"/>
-          <a:lstStyle/>
-          <a:p>
-            <a:pPr marL="0" indent="0">
-              <a:buNone/>
-            </a:pPr>
-            <a:r>
-              <a:rPr lang="en-US" sz="1050" i="1" dirty="0">
-                <a:solidFill>
-                  <a:srgbClr val="333333"/>
-                </a:solidFill>
-                <a:latin typeface="Calibri" pitchFamily="34" charset="0"/>
-                <a:ea typeface="Calibri" pitchFamily="34" charset="-122"/>
-                <a:cs typeface="Calibri" pitchFamily="34" charset="-120"/>
-              </a:rPr>
-              <a:t>observability-mcp  (read-only, six tools)</a:t>
-            </a:r>
-            <a:endParaRPr lang="en-US" sz="1050" dirty="0"/>
-          </a:p>
-        </p:txBody>
-      </p:sp>
-      <p:sp>
-        <p:nvSpPr>
-          <p:cNvPr id="19" name="Shape 17"/>
-          <p:cNvSpPr/>
-          <p:nvPr/>
-        </p:nvSpPr>
-        <p:spPr>
-          <a:xfrm>
-            <a:off x="8019288" y="3017520"/>
-            <a:ext cx="292608" cy="0"/>
-          </a:xfrm>
-          <a:prstGeom prst="line">
-            <a:avLst/>
-          </a:prstGeom>
-          <a:noFill/>
-          <a:ln w="12700">
-            <a:solidFill>
-              <a:srgbClr val="1A2238"/>
-            </a:solidFill>
-            <a:prstDash val="solid"/>
-            <a:tailEnd type="triangle"/>
-          </a:ln>
-        </p:spPr>
-        <p:txBody>
-          <a:bodyPr/>
-          <a:lstStyle/>
-          <a:p>
-            <a:endParaRPr lang="en-US"/>
-          </a:p>
-        </p:txBody>
-      </p:sp>
-      <p:sp>
-        <p:nvSpPr>
-          <p:cNvPr id="20" name="Shape 18"/>
-          <p:cNvSpPr/>
-          <p:nvPr/>
-        </p:nvSpPr>
-        <p:spPr>
-          <a:xfrm>
-            <a:off x="8311896" y="2606040"/>
-            <a:ext cx="3611880" cy="822960"/>
-          </a:xfrm>
-          <a:prstGeom prst="rect">
-            <a:avLst/>
-          </a:prstGeom>
-          <a:solidFill>
-            <a:srgbClr val="FFFFFF"/>
-          </a:solidFill>
-          <a:ln w="9525">
-            <a:solidFill>
-              <a:srgbClr val="D1D5DB"/>
-            </a:solidFill>
-            <a:prstDash val="solid"/>
-          </a:ln>
-        </p:spPr>
-        <p:txBody>
-          <a:bodyPr/>
-          <a:lstStyle/>
-          <a:p>
-            <a:endParaRPr lang="en-US"/>
-          </a:p>
-        </p:txBody>
-      </p:sp>
-      <p:sp>
-        <p:nvSpPr>
-          <p:cNvPr id="21" name="Text 19"/>
-          <p:cNvSpPr/>
-          <p:nvPr/>
-        </p:nvSpPr>
-        <p:spPr>
-          <a:xfrm>
-            <a:off x="8449056" y="2670048"/>
-            <a:ext cx="1371600" cy="274320"/>
-          </a:xfrm>
-          <a:prstGeom prst="rect">
-            <a:avLst/>
-          </a:prstGeom>
-          <a:noFill/>
-          <a:ln/>
-        </p:spPr>
-        <p:txBody>
-          <a:bodyPr wrap="square" lIns="0" tIns="0" rIns="0" bIns="0" rtlCol="0" anchor="ctr"/>
-          <a:lstStyle/>
-          <a:p>
-            <a:pPr marL="0" indent="0">
-              <a:buNone/>
-            </a:pPr>
-            <a:r>
-              <a:rPr lang="en-US" sz="1000" i="1" dirty="0">
-                <a:solidFill>
-                  <a:srgbClr val="7A2E3B"/>
-                </a:solidFill>
-                <a:latin typeface="Cambria" pitchFamily="34" charset="0"/>
-                <a:ea typeface="Cambria" pitchFamily="34" charset="-122"/>
-                <a:cs typeface="Cambria" pitchFamily="34" charset="-120"/>
-              </a:rPr>
-              <a:t>Step 3.</a:t>
-            </a:r>
-            <a:endParaRPr lang="en-US" sz="1000" dirty="0"/>
-          </a:p>
-        </p:txBody>
-      </p:sp>
-      <p:sp>
-        <p:nvSpPr>
-          <p:cNvPr id="22" name="Text 20"/>
-          <p:cNvSpPr/>
-          <p:nvPr/>
-        </p:nvSpPr>
-        <p:spPr>
-          <a:xfrm>
-            <a:off x="8449056" y="2907792"/>
-            <a:ext cx="3337560" cy="320040"/>
-          </a:xfrm>
-          <a:prstGeom prst="rect">
-            <a:avLst/>
-          </a:prstGeom>
-          <a:noFill/>
-          <a:ln/>
-        </p:spPr>
-        <p:txBody>
-          <a:bodyPr wrap="square" lIns="0" tIns="0" rIns="0" bIns="0" rtlCol="0" anchor="ctr"/>
-          <a:lstStyle/>
-          <a:p>
-            <a:pPr marL="0" indent="0">
-              <a:buNone/>
-            </a:pPr>
-            <a:r>
-              <a:rPr lang="en-US" sz="1500" dirty="0">
-                <a:solidFill>
-                  <a:srgbClr val="1A2238"/>
-                </a:solidFill>
-                <a:latin typeface="Cambria" pitchFamily="34" charset="0"/>
-                <a:ea typeface="Cambria" pitchFamily="34" charset="-122"/>
-                <a:cs typeface="Cambria" pitchFamily="34" charset="-120"/>
-              </a:rPr>
-              <a:t>Remediate</a:t>
-            </a:r>
-            <a:endParaRPr lang="en-US" sz="1500" dirty="0"/>
-          </a:p>
-        </p:txBody>
-      </p:sp>
-      <p:sp>
-        <p:nvSpPr>
-          <p:cNvPr id="23" name="Text 21"/>
-          <p:cNvSpPr/>
-          <p:nvPr/>
-        </p:nvSpPr>
-        <p:spPr>
-          <a:xfrm>
-            <a:off x="8449056" y="3200400"/>
-            <a:ext cx="3337560" cy="274320"/>
-          </a:xfrm>
-          <a:prstGeom prst="rect">
-            <a:avLst/>
-          </a:prstGeom>
-          <a:noFill/>
-          <a:ln/>
-        </p:spPr>
-        <p:txBody>
-          <a:bodyPr wrap="square" lIns="0" tIns="0" rIns="0" bIns="0" rtlCol="0" anchor="ctr"/>
-          <a:lstStyle/>
-          <a:p>
-            <a:pPr marL="0" indent="0">
-              <a:buNone/>
-            </a:pPr>
-            <a:r>
-              <a:rPr lang="en-US" sz="1050" i="1" dirty="0">
-                <a:solidFill>
-                  <a:srgbClr val="333333"/>
-                </a:solidFill>
-                <a:latin typeface="Calibri" pitchFamily="34" charset="0"/>
-                <a:ea typeface="Calibri" pitchFamily="34" charset="-122"/>
-                <a:cs typeface="Calibri" pitchFamily="34" charset="-120"/>
-              </a:rPr>
-              <a:t>remediation-mcp  (guarded write, three tools)</a:t>
-            </a:r>
-            <a:endParaRPr lang="en-US" sz="1050" dirty="0"/>
-          </a:p>
-        </p:txBody>
-      </p:sp>
-      <p:sp>
-        <p:nvSpPr>
-          <p:cNvPr id="24" name="Shape 22"/>
-          <p:cNvSpPr/>
-          <p:nvPr/>
-        </p:nvSpPr>
-        <p:spPr>
-          <a:xfrm>
-            <a:off x="502920" y="3703320"/>
-            <a:ext cx="5577840" cy="0"/>
-          </a:xfrm>
-          <a:prstGeom prst="line">
-            <a:avLst/>
-          </a:prstGeom>
-          <a:noFill/>
-          <a:ln w="19050">
-            <a:solidFill>
-              <a:srgbClr val="1A2238"/>
-            </a:solidFill>
-            <a:prstDash val="solid"/>
-          </a:ln>
-        </p:spPr>
-        <p:txBody>
-          <a:bodyPr/>
-          <a:lstStyle/>
-          <a:p>
-            <a:endParaRPr lang="en-US"/>
-          </a:p>
-        </p:txBody>
-      </p:sp>
-      <p:sp>
-        <p:nvSpPr>
-          <p:cNvPr id="25" name="Text 23"/>
-          <p:cNvSpPr/>
-          <p:nvPr/>
-        </p:nvSpPr>
-        <p:spPr>
-          <a:xfrm>
-            <a:off x="502920" y="3794760"/>
-            <a:ext cx="5577840" cy="365760"/>
-          </a:xfrm>
-          <a:prstGeom prst="rect">
-            <a:avLst/>
-          </a:prstGeom>
-          <a:noFill/>
-          <a:ln/>
-        </p:spPr>
-        <p:txBody>
-          <a:bodyPr wrap="square" lIns="0" tIns="0" rIns="0" bIns="0" rtlCol="0" anchor="ctr"/>
-          <a:lstStyle/>
-          <a:p>
-            <a:pPr marL="0" indent="0">
-              <a:buNone/>
-            </a:pPr>
-            <a:r>
-              <a:rPr lang="en-US" sz="1400" b="1" dirty="0">
-                <a:solidFill>
-                  <a:srgbClr val="1A2238"/>
-                </a:solidFill>
-                <a:latin typeface="Consolas" pitchFamily="34" charset="0"/>
-                <a:ea typeface="Consolas" pitchFamily="34" charset="-122"/>
-                <a:cs typeface="Consolas" pitchFamily="34" charset="-120"/>
-              </a:rPr>
-              <a:t>observability-mcp</a:t>
-            </a:r>
-            <a:endParaRPr lang="en-US" sz="1400" dirty="0"/>
-          </a:p>
-        </p:txBody>
-      </p:sp>
-      <p:sp>
-        <p:nvSpPr>
-          <p:cNvPr id="26" name="Text 24"/>
-          <p:cNvSpPr/>
-          <p:nvPr/>
-        </p:nvSpPr>
-        <p:spPr>
-          <a:xfrm>
-            <a:off x="502920" y="4160520"/>
-            <a:ext cx="5577840" cy="274320"/>
-          </a:xfrm>
-          <a:prstGeom prst="rect">
-            <a:avLst/>
-          </a:prstGeom>
-          <a:noFill/>
-          <a:ln/>
-        </p:spPr>
-        <p:txBody>
-          <a:bodyPr wrap="square" lIns="0" tIns="0" rIns="0" bIns="0" rtlCol="0" anchor="ctr"/>
-          <a:lstStyle/>
-          <a:p>
-            <a:pPr marL="0" indent="0">
-              <a:buNone/>
-            </a:pPr>
-            <a:r>
-              <a:rPr lang="en-US" sz="1050" i="1" dirty="0">
-                <a:solidFill>
-                  <a:srgbClr val="7A2E3B"/>
-                </a:solidFill>
-                <a:latin typeface="Calibri" pitchFamily="34" charset="0"/>
-                <a:ea typeface="Calibri" pitchFamily="34" charset="-122"/>
-                <a:cs typeface="Calibri" pitchFamily="34" charset="-120"/>
-              </a:rPr>
-              <a:t>Read-only · no mutation · no auth needed</a:t>
-            </a:r>
-            <a:endParaRPr lang="en-US" sz="1050" dirty="0"/>
-          </a:p>
-        </p:txBody>
-      </p:sp>
-      <p:sp>
-        <p:nvSpPr>
-          <p:cNvPr id="27" name="Text 25"/>
-          <p:cNvSpPr/>
-          <p:nvPr/>
-        </p:nvSpPr>
-        <p:spPr>
-          <a:xfrm>
-            <a:off x="502920" y="4480560"/>
-            <a:ext cx="5577840" cy="1691640"/>
-          </a:xfrm>
-          <a:prstGeom prst="rect">
-            <a:avLst/>
-          </a:prstGeom>
-          <a:noFill/>
-          <a:ln/>
-        </p:spPr>
-        <p:txBody>
-          <a:bodyPr wrap="square" lIns="0" tIns="0" rIns="0" bIns="0" rtlCol="0" anchor="ctr"/>
-          <a:lstStyle/>
-          <a:p>
-            <a:pPr marL="0" indent="0">
-              <a:lnSpc>
-                <a:spcPct val="135000"/>
-              </a:lnSpc>
-              <a:spcAft>
-                <a:spcPts val="200"/>
-              </a:spcAft>
-              <a:buNone/>
-            </a:pPr>
-            <a:r>
-              <a:rPr lang="en-US" sz="1100" dirty="0">
-                <a:solidFill>
-                  <a:srgbClr val="333333"/>
-                </a:solidFill>
-                <a:latin typeface="Consolas" pitchFamily="34" charset="0"/>
-                <a:ea typeface="Consolas" pitchFamily="34" charset="-122"/>
-                <a:cs typeface="Consolas" pitchFamily="34" charset="-120"/>
-              </a:rPr>
-              <a:t>get_service_health</a:t>
-            </a:r>
-            <a:endParaRPr lang="en-US" sz="1100" dirty="0"/>
-          </a:p>
-          <a:p>
-            <a:pPr marL="0" indent="0">
-              <a:lnSpc>
-                <a:spcPct val="135000"/>
-              </a:lnSpc>
-              <a:spcAft>
-                <a:spcPts val="200"/>
-              </a:spcAft>
-              <a:buNone/>
-            </a:pPr>
-            <a:r>
-              <a:rPr lang="en-US" sz="1100" dirty="0">
-                <a:solidFill>
-                  <a:srgbClr val="333333"/>
-                </a:solidFill>
-                <a:latin typeface="Consolas" pitchFamily="34" charset="0"/>
-                <a:ea typeface="Consolas" pitchFamily="34" charset="-122"/>
-                <a:cs typeface="Consolas" pitchFamily="34" charset="-120"/>
-              </a:rPr>
-              <a:t>get_queue_metrics</a:t>
-            </a:r>
-            <a:endParaRPr lang="en-US" sz="1100" dirty="0"/>
-          </a:p>
-          <a:p>
-            <a:pPr marL="0" indent="0">
-              <a:lnSpc>
-                <a:spcPct val="135000"/>
-              </a:lnSpc>
-              <a:spcAft>
-                <a:spcPts val="200"/>
-              </a:spcAft>
-              <a:buNone/>
-            </a:pPr>
-            <a:r>
-              <a:rPr lang="en-US" sz="1100" dirty="0">
-                <a:solidFill>
-                  <a:srgbClr val="333333"/>
-                </a:solidFill>
-                <a:latin typeface="Consolas" pitchFamily="34" charset="0"/>
-                <a:ea typeface="Consolas" pitchFamily="34" charset="-122"/>
-                <a:cs typeface="Consolas" pitchFamily="34" charset="-120"/>
-              </a:rPr>
-              <a:t>get_circuit_breaker_state</a:t>
-            </a:r>
-            <a:endParaRPr lang="en-US" sz="1100" dirty="0"/>
-          </a:p>
-          <a:p>
-            <a:pPr marL="0" indent="0">
-              <a:lnSpc>
-                <a:spcPct val="135000"/>
-              </a:lnSpc>
-              <a:spcAft>
-                <a:spcPts val="200"/>
-              </a:spcAft>
-              <a:buNone/>
-            </a:pPr>
-            <a:r>
-              <a:rPr lang="en-US" sz="1100" dirty="0">
-                <a:solidFill>
-                  <a:srgbClr val="333333"/>
-                </a:solidFill>
-                <a:latin typeface="Consolas" pitchFamily="34" charset="0"/>
-                <a:ea typeface="Consolas" pitchFamily="34" charset="-122"/>
-                <a:cs typeface="Consolas" pitchFamily="34" charset="-120"/>
-              </a:rPr>
-              <a:t>get_active_sessions</a:t>
-            </a:r>
-            <a:endParaRPr lang="en-US" sz="1100" dirty="0"/>
-          </a:p>
-          <a:p>
-            <a:pPr marL="0" indent="0">
-              <a:lnSpc>
-                <a:spcPct val="135000"/>
-              </a:lnSpc>
-              <a:spcAft>
-                <a:spcPts val="200"/>
-              </a:spcAft>
-              <a:buNone/>
-            </a:pPr>
-            <a:r>
-              <a:rPr lang="en-US" sz="1100" dirty="0">
-                <a:solidFill>
-                  <a:srgbClr val="333333"/>
-                </a:solidFill>
-                <a:latin typeface="Consolas" pitchFamily="34" charset="0"/>
-                <a:ea typeface="Consolas" pitchFamily="34" charset="-122"/>
-                <a:cs typeface="Consolas" pitchFamily="34" charset="-120"/>
-              </a:rPr>
-              <a:t>get_groq_latency</a:t>
-            </a:r>
-            <a:endParaRPr lang="en-US" sz="1100" dirty="0"/>
-          </a:p>
-          <a:p>
-            <a:pPr marL="0" indent="0">
-              <a:lnSpc>
-                <a:spcPct val="135000"/>
-              </a:lnSpc>
-              <a:spcAft>
-                <a:spcPts val="200"/>
-              </a:spcAft>
-              <a:buNone/>
-            </a:pPr>
-            <a:r>
-              <a:rPr lang="en-US" sz="1100" dirty="0">
-                <a:solidFill>
-                  <a:srgbClr val="333333"/>
-                </a:solidFill>
-                <a:latin typeface="Consolas" pitchFamily="34" charset="0"/>
-                <a:ea typeface="Consolas" pitchFamily="34" charset="-122"/>
-                <a:cs typeface="Consolas" pitchFamily="34" charset="-120"/>
-              </a:rPr>
-              <a:t>get_safety_policy</a:t>
-            </a:r>
-            <a:endParaRPr lang="en-US" sz="1100" dirty="0"/>
-          </a:p>
-          <a:p>
-            <a:pPr marL="0" indent="0">
-              <a:lnSpc>
-                <a:spcPct val="135000"/>
-              </a:lnSpc>
-              <a:spcAft>
-                <a:spcPts val="200"/>
-              </a:spcAft>
-              <a:buNone/>
-            </a:pPr>
-            <a:r>
-              <a:rPr lang="en-US" sz="1000" i="1" dirty="0">
-                <a:solidFill>
-                  <a:srgbClr val="6B7280"/>
-                </a:solidFill>
-                <a:latin typeface="Calibri" pitchFamily="34" charset="0"/>
-                <a:ea typeface="Calibri" pitchFamily="34" charset="-122"/>
-                <a:cs typeface="Calibri" pitchFamily="34" charset="-120"/>
-              </a:rPr>
-              <a:t>    - agent self-binds at session start</a:t>
-            </a:r>
-            <a:endParaRPr lang="en-US" sz="1100" dirty="0"/>
-          </a:p>
-        </p:txBody>
-      </p:sp>
-      <p:sp>
-        <p:nvSpPr>
-          <p:cNvPr id="28" name="Shape 26"/>
-          <p:cNvSpPr/>
-          <p:nvPr/>
-        </p:nvSpPr>
-        <p:spPr>
-          <a:xfrm>
-            <a:off x="6080760" y="3703320"/>
-            <a:ext cx="5577840" cy="0"/>
-          </a:xfrm>
-          <a:prstGeom prst="line">
-            <a:avLst/>
-          </a:prstGeom>
-          <a:noFill/>
-          <a:ln w="19050">
-            <a:solidFill>
-              <a:srgbClr val="1A2238"/>
-            </a:solidFill>
-            <a:prstDash val="solid"/>
-          </a:ln>
-        </p:spPr>
-        <p:txBody>
-          <a:bodyPr/>
-          <a:lstStyle/>
-          <a:p>
-            <a:endParaRPr lang="en-US"/>
-          </a:p>
-        </p:txBody>
-      </p:sp>
-      <p:sp>
-        <p:nvSpPr>
-          <p:cNvPr id="29" name="Text 27"/>
-          <p:cNvSpPr/>
-          <p:nvPr/>
-        </p:nvSpPr>
-        <p:spPr>
-          <a:xfrm>
-            <a:off x="6080760" y="3794760"/>
-            <a:ext cx="5577840" cy="365760"/>
-          </a:xfrm>
-          <a:prstGeom prst="rect">
-            <a:avLst/>
-          </a:prstGeom>
-          <a:noFill/>
-          <a:ln/>
-        </p:spPr>
-        <p:txBody>
-          <a:bodyPr wrap="square" lIns="0" tIns="0" rIns="0" bIns="0" rtlCol="0" anchor="ctr"/>
-          <a:lstStyle/>
-          <a:p>
-            <a:pPr marL="0" indent="0">
-              <a:buNone/>
-            </a:pPr>
-            <a:r>
-              <a:rPr lang="en-US" sz="1400" b="1" dirty="0">
-                <a:solidFill>
-                  <a:srgbClr val="1A2238"/>
-                </a:solidFill>
-                <a:latin typeface="Consolas" pitchFamily="34" charset="0"/>
-                <a:ea typeface="Consolas" pitchFamily="34" charset="-122"/>
-                <a:cs typeface="Consolas" pitchFamily="34" charset="-120"/>
-              </a:rPr>
-              <a:t>remediation-mcp</a:t>
-            </a:r>
-            <a:endParaRPr lang="en-US" sz="1400" dirty="0"/>
-          </a:p>
-        </p:txBody>
-      </p:sp>
-      <p:sp>
-        <p:nvSpPr>
-          <p:cNvPr id="30" name="Text 28"/>
-          <p:cNvSpPr/>
-          <p:nvPr/>
-        </p:nvSpPr>
-        <p:spPr>
-          <a:xfrm>
-            <a:off x="6080760" y="4160520"/>
-            <a:ext cx="5577840" cy="274320"/>
-          </a:xfrm>
-          <a:prstGeom prst="rect">
-            <a:avLst/>
-          </a:prstGeom>
-          <a:noFill/>
-          <a:ln/>
-        </p:spPr>
-        <p:txBody>
-          <a:bodyPr wrap="square" lIns="0" tIns="0" rIns="0" bIns="0" rtlCol="0" anchor="ctr"/>
-          <a:lstStyle/>
-          <a:p>
-            <a:pPr marL="0" indent="0">
-              <a:buNone/>
-            </a:pPr>
-            <a:r>
-              <a:rPr lang="en-US" sz="1050" i="1" dirty="0">
-                <a:solidFill>
-                  <a:srgbClr val="7A2E3B"/>
-                </a:solidFill>
-                <a:latin typeface="Calibri" pitchFamily="34" charset="0"/>
-                <a:ea typeface="Calibri" pitchFamily="34" charset="-122"/>
-                <a:cs typeface="Calibri" pitchFamily="34" charset="-120"/>
-              </a:rPr>
-              <a:t>Guarded write · three layers of guard</a:t>
-            </a:r>
-            <a:endParaRPr lang="en-US" sz="1050" dirty="0"/>
-          </a:p>
-        </p:txBody>
-      </p:sp>
-      <p:sp>
-        <p:nvSpPr>
-          <p:cNvPr id="31" name="Text 29"/>
-          <p:cNvSpPr/>
-          <p:nvPr/>
-        </p:nvSpPr>
-        <p:spPr>
-          <a:xfrm>
-            <a:off x="6080760" y="4480560"/>
-            <a:ext cx="5577840" cy="1691640"/>
-          </a:xfrm>
-          <a:prstGeom prst="rect">
-            <a:avLst/>
-          </a:prstGeom>
-          <a:noFill/>
-          <a:ln/>
-        </p:spPr>
-        <p:txBody>
-          <a:bodyPr wrap="square" lIns="0" tIns="0" rIns="0" bIns="0" rtlCol="0" anchor="ctr"/>
-          <a:lstStyle/>
-          <a:p>
-            <a:pPr marL="0" indent="0">
-              <a:lnSpc>
-                <a:spcPct val="135000"/>
-              </a:lnSpc>
-              <a:spcAft>
-                <a:spcPts val="200"/>
-              </a:spcAft>
-              <a:buNone/>
-            </a:pPr>
-            <a:r>
-              <a:rPr lang="en-US" sz="1100" dirty="0">
-                <a:solidFill>
-                  <a:srgbClr val="333333"/>
-                </a:solidFill>
-                <a:latin typeface="Consolas" pitchFamily="34" charset="0"/>
-                <a:ea typeface="Consolas" pitchFamily="34" charset="-122"/>
-                <a:cs typeface="Consolas" pitchFamily="34" charset="-120"/>
-              </a:rPr>
-              <a:t>pause_queue  /  resume_queue</a:t>
-            </a:r>
-            <a:endParaRPr lang="en-US" sz="1100" dirty="0"/>
-          </a:p>
-          <a:p>
-            <a:pPr marL="0" indent="0">
-              <a:lnSpc>
-                <a:spcPct val="135000"/>
-              </a:lnSpc>
-              <a:spcAft>
-                <a:spcPts val="200"/>
-              </a:spcAft>
-              <a:buNone/>
-            </a:pPr>
-            <a:r>
-              <a:rPr lang="en-US" sz="1000" i="1" dirty="0">
-                <a:solidFill>
-                  <a:srgbClr val="6B7280"/>
-                </a:solidFill>
-                <a:latin typeface="Calibri" pitchFamily="34" charset="0"/>
-                <a:ea typeface="Calibri" pitchFamily="34" charset="-122"/>
-                <a:cs typeface="Calibri" pitchFamily="34" charset="-120"/>
-              </a:rPr>
-              <a:t>   - reversible · zod enum on queue name</a:t>
-            </a:r>
-            <a:endParaRPr lang="en-US" sz="1100" dirty="0"/>
-          </a:p>
-          <a:p>
-            <a:pPr marL="0" indent="0">
-              <a:lnSpc>
-                <a:spcPct val="135000"/>
-              </a:lnSpc>
-              <a:spcAft>
-                <a:spcPts val="200"/>
-              </a:spcAft>
-              <a:buNone/>
-            </a:pPr>
-            <a:r>
-              <a:rPr lang="en-US" sz="1100" dirty="0">
-                <a:solidFill>
-                  <a:srgbClr val="333333"/>
-                </a:solidFill>
-                <a:latin typeface="Consolas" pitchFamily="34" charset="0"/>
-                <a:ea typeface="Consolas" pitchFamily="34" charset="-122"/>
-                <a:cs typeface="Consolas" pitchFamily="34" charset="-120"/>
-              </a:rPr>
-              <a:t>reset_circuit_breaker</a:t>
-            </a:r>
-            <a:endParaRPr lang="en-US" sz="1100" dirty="0"/>
-          </a:p>
-          <a:p>
-            <a:pPr marL="0" indent="0">
-              <a:lnSpc>
-                <a:spcPct val="135000"/>
-              </a:lnSpc>
-              <a:spcAft>
-                <a:spcPts val="200"/>
-              </a:spcAft>
-              <a:buNone/>
-            </a:pPr>
-            <a:r>
-              <a:rPr lang="en-US" sz="1000" i="1" dirty="0">
-                <a:solidFill>
-                  <a:srgbClr val="6B7280"/>
-                </a:solidFill>
-                <a:latin typeface="Calibri" pitchFamily="34" charset="0"/>
-                <a:ea typeface="Calibri" pitchFamily="34" charset="-122"/>
-                <a:cs typeface="Calibri" pitchFamily="34" charset="-120"/>
-              </a:rPr>
-              <a:t>    - reversible · ADMIN_API_KEY header</a:t>
-            </a:r>
-            <a:endParaRPr lang="en-US" sz="1100" dirty="0"/>
-          </a:p>
-          <a:p>
-            <a:pPr marL="0" indent="0">
-              <a:lnSpc>
-                <a:spcPct val="135000"/>
-              </a:lnSpc>
-              <a:spcAft>
-                <a:spcPts val="200"/>
-              </a:spcAft>
-              <a:buNone/>
-            </a:pPr>
-            <a:r>
-              <a:rPr lang="en-US" sz="1100" dirty="0">
-                <a:solidFill>
-                  <a:srgbClr val="333333"/>
-                </a:solidFill>
-                <a:latin typeface="Consolas" pitchFamily="34" charset="0"/>
-                <a:ea typeface="Consolas" pitchFamily="34" charset="-122"/>
-                <a:cs typeface="Consolas" pitchFamily="34" charset="-120"/>
-              </a:rPr>
-              <a:t>flush_dead_letter_queue</a:t>
-            </a:r>
-            <a:endParaRPr lang="en-US" sz="1100" dirty="0"/>
-          </a:p>
-          <a:p>
-            <a:pPr marL="0" indent="0">
-              <a:lnSpc>
-                <a:spcPct val="135000"/>
-              </a:lnSpc>
-              <a:spcAft>
-                <a:spcPts val="200"/>
-              </a:spcAft>
-              <a:buNone/>
-            </a:pPr>
-            <a:r>
-              <a:rPr lang="en-US" sz="1000" i="1" dirty="0">
-                <a:solidFill>
-                  <a:srgbClr val="6B7280"/>
-                </a:solidFill>
-                <a:latin typeface="Calibri" pitchFamily="34" charset="0"/>
-                <a:ea typeface="Calibri" pitchFamily="34" charset="-122"/>
-                <a:cs typeface="Calibri" pitchFamily="34" charset="-120"/>
-              </a:rPr>
-              <a:t>    - irreversible · requires confirm: true</a:t>
-            </a:r>
-            <a:endParaRPr lang="en-US" sz="1100" dirty="0"/>
-          </a:p>
-        </p:txBody>
-      </p:sp>
-      <p:sp>
-        <p:nvSpPr>
-          <p:cNvPr id="32" name="Text 30"/>
-          <p:cNvSpPr/>
-          <p:nvPr/>
-        </p:nvSpPr>
-        <p:spPr>
-          <a:xfrm>
-            <a:off x="502920" y="6263640"/>
-            <a:ext cx="11155680" cy="320040"/>
-          </a:xfrm>
-          <a:prstGeom prst="rect">
-            <a:avLst/>
-          </a:prstGeom>
-          <a:noFill/>
-          <a:ln/>
-        </p:spPr>
-        <p:txBody>
-          <a:bodyPr wrap="square" lIns="0" tIns="0" rIns="0" bIns="0" rtlCol="0" anchor="ctr"/>
-          <a:lstStyle/>
-          <a:p>
-            <a:pPr marL="0" indent="0" algn="ctr">
-              <a:buNone/>
-            </a:pPr>
-            <a:r>
-              <a:rPr lang="en-US" sz="1000" i="1" dirty="0">
-                <a:solidFill>
-                  <a:srgbClr val="6B7280"/>
-                </a:solidFill>
-                <a:latin typeface="Calibri" pitchFamily="34" charset="0"/>
-                <a:ea typeface="Calibri" pitchFamily="34" charset="-122"/>
-                <a:cs typeface="Calibri" pitchFamily="34" charset="-120"/>
-              </a:rPr>
-              <a:t>Every remediation call writes a structured pino audit line to stderr; stdout is reserved for the MCP transport.</a:t>
             </a:r>
             <a:endParaRPr lang="en-US" sz="1000" dirty="0"/>
           </a:p>

--- a/docs/edge-language-coach.pptx
+++ b/docs/edge-language-coach.pptx
@@ -13,15 +13,15 @@
     <p:sldId id="271" r:id="rId4"/>
     <p:sldId id="258" r:id="rId5"/>
     <p:sldId id="259" r:id="rId6"/>
-    <p:sldId id="260" r:id="rId7"/>
-    <p:sldId id="261" r:id="rId8"/>
-    <p:sldId id="262" r:id="rId9"/>
-    <p:sldId id="263" r:id="rId10"/>
-    <p:sldId id="264" r:id="rId11"/>
-    <p:sldId id="265" r:id="rId12"/>
-    <p:sldId id="266" r:id="rId13"/>
-    <p:sldId id="267" r:id="rId14"/>
-    <p:sldId id="268" r:id="rId15"/>
+    <p:sldId id="268" r:id="rId7"/>
+    <p:sldId id="260" r:id="rId8"/>
+    <p:sldId id="261" r:id="rId9"/>
+    <p:sldId id="262" r:id="rId10"/>
+    <p:sldId id="263" r:id="rId11"/>
+    <p:sldId id="264" r:id="rId12"/>
+    <p:sldId id="265" r:id="rId13"/>
+    <p:sldId id="266" r:id="rId14"/>
+    <p:sldId id="267" r:id="rId15"/>
     <p:sldId id="269" r:id="rId16"/>
     <p:sldId id="270" r:id="rId17"/>
   </p:sldIdLst>
@@ -2749,6 +2749,1437 @@
 
 <file path=ppt/slides/slide10.xml><?xml version="1.0" encoding="utf-8"?>
 <p:sld xmlns:a="http://schemas.openxmlformats.org/drawingml/2006/main" xmlns:r="http://schemas.openxmlformats.org/officeDocument/2006/relationships" xmlns:p="http://schemas.openxmlformats.org/presentationml/2006/main">
+  <p:cSld name="Slide 8">
+    <p:bg>
+      <p:bgPr>
+        <a:solidFill>
+          <a:srgbClr val="FFFFFF"/>
+        </a:solidFill>
+        <a:effectLst/>
+      </p:bgPr>
+    </p:bg>
+    <p:spTree>
+      <p:nvGrpSpPr>
+        <p:cNvPr id="1" name=""/>
+        <p:cNvGrpSpPr/>
+        <p:nvPr/>
+      </p:nvGrpSpPr>
+      <p:grpSpPr>
+        <a:xfrm>
+          <a:off x="0" y="0"/>
+          <a:ext cx="0" cy="0"/>
+          <a:chOff x="0" y="0"/>
+          <a:chExt cx="0" cy="0"/>
+        </a:xfrm>
+      </p:grpSpPr>
+      <p:sp>
+        <p:nvSpPr>
+          <p:cNvPr id="2" name="Text 0"/>
+          <p:cNvSpPr/>
+          <p:nvPr/>
+        </p:nvSpPr>
+        <p:spPr>
+          <a:xfrm>
+            <a:off x="502920" y="411480"/>
+            <a:ext cx="640080" cy="365760"/>
+          </a:xfrm>
+          <a:prstGeom prst="rect">
+            <a:avLst/>
+          </a:prstGeom>
+          <a:noFill/>
+          <a:ln/>
+        </p:spPr>
+        <p:txBody>
+          <a:bodyPr wrap="square" lIns="0" tIns="0" rIns="0" bIns="0" rtlCol="0" anchor="ctr"/>
+          <a:lstStyle/>
+          <a:p>
+            <a:pPr marL="0" indent="0">
+              <a:buNone/>
+            </a:pPr>
+            <a:r>
+              <a:rPr lang="en-US" sz="1400" i="1" dirty="0">
+                <a:solidFill>
+                  <a:srgbClr val="7A2E3B"/>
+                </a:solidFill>
+                <a:latin typeface="Cambria" pitchFamily="34" charset="0"/>
+                <a:ea typeface="Cambria" pitchFamily="34" charset="-122"/>
+                <a:cs typeface="Cambria" pitchFamily="34" charset="-120"/>
+              </a:rPr>
+              <a:t>IX.</a:t>
+            </a:r>
+            <a:endParaRPr lang="en-US" sz="1400" dirty="0"/>
+          </a:p>
+        </p:txBody>
+      </p:sp>
+      <p:sp>
+        <p:nvSpPr>
+          <p:cNvPr id="3" name="Text 1"/>
+          <p:cNvSpPr/>
+          <p:nvPr/>
+        </p:nvSpPr>
+        <p:spPr>
+          <a:xfrm>
+            <a:off x="1051560" y="411480"/>
+            <a:ext cx="5486400" cy="365760"/>
+          </a:xfrm>
+          <a:prstGeom prst="rect">
+            <a:avLst/>
+          </a:prstGeom>
+          <a:noFill/>
+          <a:ln/>
+        </p:spPr>
+        <p:txBody>
+          <a:bodyPr wrap="square" lIns="0" tIns="0" rIns="0" bIns="0" rtlCol="0" anchor="ctr"/>
+          <a:lstStyle/>
+          <a:p>
+            <a:pPr marL="0" indent="0">
+              <a:buNone/>
+            </a:pPr>
+            <a:r>
+              <a:rPr lang="en-US" sz="1000" kern="0" spc="400" dirty="0">
+                <a:solidFill>
+                  <a:srgbClr val="6B7280"/>
+                </a:solidFill>
+                <a:latin typeface="Calibri" pitchFamily="34" charset="0"/>
+                <a:ea typeface="Calibri" pitchFamily="34" charset="-122"/>
+                <a:cs typeface="Calibri" pitchFamily="34" charset="-120"/>
+              </a:rPr>
+              <a:t>OBSERVABILITY</a:t>
+            </a:r>
+            <a:endParaRPr lang="en-US" sz="1000" dirty="0"/>
+          </a:p>
+        </p:txBody>
+      </p:sp>
+      <p:sp>
+        <p:nvSpPr>
+          <p:cNvPr id="4" name="Text 2"/>
+          <p:cNvSpPr/>
+          <p:nvPr/>
+        </p:nvSpPr>
+        <p:spPr>
+          <a:xfrm>
+            <a:off x="10789920" y="411480"/>
+            <a:ext cx="914400" cy="365760"/>
+          </a:xfrm>
+          <a:prstGeom prst="rect">
+            <a:avLst/>
+          </a:prstGeom>
+          <a:noFill/>
+          <a:ln/>
+        </p:spPr>
+        <p:txBody>
+          <a:bodyPr wrap="square" lIns="0" tIns="0" rIns="0" bIns="0" rtlCol="0" anchor="ctr"/>
+          <a:lstStyle/>
+          <a:p>
+            <a:pPr marL="0" indent="0" algn="r">
+              <a:buNone/>
+            </a:pPr>
+            <a:r>
+              <a:rPr lang="en-US" sz="1000" i="1" dirty="0">
+                <a:solidFill>
+                  <a:srgbClr val="9CA3AF"/>
+                </a:solidFill>
+                <a:latin typeface="Calibri" pitchFamily="34" charset="0"/>
+                <a:ea typeface="Calibri" pitchFamily="34" charset="-122"/>
+                <a:cs typeface="Calibri" pitchFamily="34" charset="-120"/>
+              </a:rPr>
+              <a:t>9 / 16</a:t>
+            </a:r>
+            <a:endParaRPr lang="en-US" sz="1000" dirty="0"/>
+          </a:p>
+        </p:txBody>
+      </p:sp>
+      <p:sp>
+        <p:nvSpPr>
+          <p:cNvPr id="5" name="Shape 3"/>
+          <p:cNvSpPr/>
+          <p:nvPr/>
+        </p:nvSpPr>
+        <p:spPr>
+          <a:xfrm>
+            <a:off x="502920" y="6355080"/>
+            <a:ext cx="11155680" cy="0"/>
+          </a:xfrm>
+          <a:prstGeom prst="line">
+            <a:avLst/>
+          </a:prstGeom>
+          <a:noFill/>
+          <a:ln w="6350">
+            <a:solidFill>
+              <a:srgbClr val="E5E7EB"/>
+            </a:solidFill>
+            <a:prstDash val="solid"/>
+          </a:ln>
+        </p:spPr>
+        <p:txBody>
+          <a:bodyPr/>
+          <a:lstStyle/>
+          <a:p>
+            <a:endParaRPr lang="en-US"/>
+          </a:p>
+        </p:txBody>
+      </p:sp>
+      <p:sp>
+        <p:nvSpPr>
+          <p:cNvPr id="6" name="Text 4"/>
+          <p:cNvSpPr/>
+          <p:nvPr/>
+        </p:nvSpPr>
+        <p:spPr>
+          <a:xfrm>
+            <a:off x="502920" y="6446520"/>
+            <a:ext cx="5486400" cy="256032"/>
+          </a:xfrm>
+          <a:prstGeom prst="rect">
+            <a:avLst/>
+          </a:prstGeom>
+          <a:noFill/>
+          <a:ln/>
+        </p:spPr>
+        <p:txBody>
+          <a:bodyPr wrap="square" lIns="0" tIns="0" rIns="0" bIns="0" rtlCol="0" anchor="ctr"/>
+          <a:lstStyle/>
+          <a:p>
+            <a:pPr marL="0" indent="0">
+              <a:buNone/>
+            </a:pPr>
+            <a:r>
+              <a:rPr lang="en-US" sz="900" i="1" dirty="0">
+                <a:solidFill>
+                  <a:srgbClr val="9CA3AF"/>
+                </a:solidFill>
+                <a:latin typeface="Calibri" pitchFamily="34" charset="0"/>
+                <a:ea typeface="Calibri" pitchFamily="34" charset="-122"/>
+                <a:cs typeface="Calibri" pitchFamily="34" charset="-120"/>
+              </a:rPr>
+              <a:t>Edge Language Coach  ·  Course Project  ·  2026</a:t>
+            </a:r>
+            <a:endParaRPr lang="en-US" sz="900" dirty="0"/>
+          </a:p>
+        </p:txBody>
+      </p:sp>
+      <p:sp>
+        <p:nvSpPr>
+          <p:cNvPr id="7" name="Text 5"/>
+          <p:cNvSpPr/>
+          <p:nvPr/>
+        </p:nvSpPr>
+        <p:spPr>
+          <a:xfrm>
+            <a:off x="7086600" y="6446520"/>
+            <a:ext cx="4572000" cy="256032"/>
+          </a:xfrm>
+          <a:prstGeom prst="rect">
+            <a:avLst/>
+          </a:prstGeom>
+          <a:noFill/>
+          <a:ln/>
+        </p:spPr>
+        <p:txBody>
+          <a:bodyPr wrap="square" lIns="0" tIns="0" rIns="0" bIns="0" rtlCol="0" anchor="ctr"/>
+          <a:lstStyle/>
+          <a:p>
+            <a:pPr marL="0" indent="0" algn="r">
+              <a:buNone/>
+            </a:pPr>
+            <a:r>
+              <a:rPr lang="en-US" sz="900" i="1" dirty="0">
+                <a:solidFill>
+                  <a:srgbClr val="9CA3AF"/>
+                </a:solidFill>
+                <a:latin typeface="Calibri" pitchFamily="34" charset="0"/>
+                <a:ea typeface="Calibri" pitchFamily="34" charset="-122"/>
+                <a:cs typeface="Calibri" pitchFamily="34" charset="-120"/>
+              </a:rPr>
+              <a:t>Hassan</a:t>
+            </a:r>
+            <a:endParaRPr lang="en-US" sz="900" dirty="0"/>
+          </a:p>
+        </p:txBody>
+      </p:sp>
+      <p:sp>
+        <p:nvSpPr>
+          <p:cNvPr id="8" name="Text 6"/>
+          <p:cNvSpPr/>
+          <p:nvPr/>
+        </p:nvSpPr>
+        <p:spPr>
+          <a:xfrm>
+            <a:off x="502920" y="914400"/>
+            <a:ext cx="11155680" cy="777240"/>
+          </a:xfrm>
+          <a:prstGeom prst="rect">
+            <a:avLst/>
+          </a:prstGeom>
+          <a:noFill/>
+          <a:ln/>
+        </p:spPr>
+        <p:txBody>
+          <a:bodyPr wrap="square" lIns="0" tIns="0" rIns="0" bIns="0" rtlCol="0" anchor="ctr"/>
+          <a:lstStyle/>
+          <a:p>
+            <a:pPr marL="0" indent="0">
+              <a:buNone/>
+            </a:pPr>
+            <a:r>
+              <a:rPr lang="en-US" sz="3000" dirty="0">
+                <a:solidFill>
+                  <a:srgbClr val="1A2238"/>
+                </a:solidFill>
+                <a:latin typeface="Cambria" pitchFamily="34" charset="0"/>
+                <a:ea typeface="Cambria" pitchFamily="34" charset="-122"/>
+                <a:cs typeface="Cambria" pitchFamily="34" charset="-120"/>
+              </a:rPr>
+              <a:t>Logs, metrics and health by design</a:t>
+            </a:r>
+            <a:endParaRPr lang="en-US" sz="3000" dirty="0"/>
+          </a:p>
+        </p:txBody>
+      </p:sp>
+      <p:sp>
+        <p:nvSpPr>
+          <p:cNvPr id="9" name="Text 7"/>
+          <p:cNvSpPr/>
+          <p:nvPr/>
+        </p:nvSpPr>
+        <p:spPr>
+          <a:xfrm>
+            <a:off x="502920" y="1874520"/>
+            <a:ext cx="11155680" cy="457200"/>
+          </a:xfrm>
+          <a:prstGeom prst="rect">
+            <a:avLst/>
+          </a:prstGeom>
+          <a:noFill/>
+          <a:ln/>
+        </p:spPr>
+        <p:txBody>
+          <a:bodyPr wrap="square" lIns="0" tIns="0" rIns="0" bIns="0" rtlCol="0" anchor="ctr"/>
+          <a:lstStyle/>
+          <a:p>
+            <a:pPr marL="0" indent="0">
+              <a:lnSpc>
+                <a:spcPct val="130000"/>
+              </a:lnSpc>
+              <a:buNone/>
+            </a:pPr>
+            <a:r>
+              <a:rPr lang="en-US" sz="1250" i="1" dirty="0">
+                <a:solidFill>
+                  <a:srgbClr val="333333"/>
+                </a:solidFill>
+                <a:latin typeface="Calibri" pitchFamily="34" charset="0"/>
+                <a:ea typeface="Calibri" pitchFamily="34" charset="-122"/>
+                <a:cs typeface="Calibri" pitchFamily="34" charset="-120"/>
+              </a:rPr>
+              <a:t>All services emit structured pino logs and expose Prometheus metrics. Two health probes back container orchestration.</a:t>
+            </a:r>
+            <a:endParaRPr lang="en-US" sz="1250" dirty="0"/>
+          </a:p>
+        </p:txBody>
+      </p:sp>
+      <p:sp>
+        <p:nvSpPr>
+          <p:cNvPr id="10" name="Shape 8"/>
+          <p:cNvSpPr/>
+          <p:nvPr/>
+        </p:nvSpPr>
+        <p:spPr>
+          <a:xfrm>
+            <a:off x="502920" y="2606040"/>
+            <a:ext cx="3703320" cy="0"/>
+          </a:xfrm>
+          <a:prstGeom prst="line">
+            <a:avLst/>
+          </a:prstGeom>
+          <a:noFill/>
+          <a:ln w="12700">
+            <a:solidFill>
+              <a:srgbClr val="1A2238"/>
+            </a:solidFill>
+            <a:prstDash val="solid"/>
+          </a:ln>
+        </p:spPr>
+        <p:txBody>
+          <a:bodyPr/>
+          <a:lstStyle/>
+          <a:p>
+            <a:endParaRPr lang="en-US"/>
+          </a:p>
+        </p:txBody>
+      </p:sp>
+      <p:sp>
+        <p:nvSpPr>
+          <p:cNvPr id="11" name="Text 9"/>
+          <p:cNvSpPr/>
+          <p:nvPr/>
+        </p:nvSpPr>
+        <p:spPr>
+          <a:xfrm>
+            <a:off x="502920" y="2697480"/>
+            <a:ext cx="3703320" cy="365760"/>
+          </a:xfrm>
+          <a:prstGeom prst="rect">
+            <a:avLst/>
+          </a:prstGeom>
+          <a:noFill/>
+          <a:ln/>
+        </p:spPr>
+        <p:txBody>
+          <a:bodyPr wrap="square" lIns="0" tIns="0" rIns="0" bIns="0" rtlCol="0" anchor="ctr"/>
+          <a:lstStyle/>
+          <a:p>
+            <a:pPr marL="0" indent="0">
+              <a:buNone/>
+            </a:pPr>
+            <a:r>
+              <a:rPr lang="en-US" sz="1600" dirty="0">
+                <a:solidFill>
+                  <a:srgbClr val="1A2238"/>
+                </a:solidFill>
+                <a:latin typeface="Cambria" pitchFamily="34" charset="0"/>
+                <a:ea typeface="Cambria" pitchFamily="34" charset="-122"/>
+                <a:cs typeface="Cambria" pitchFamily="34" charset="-120"/>
+              </a:rPr>
+              <a:t>(i)  Structured logs</a:t>
+            </a:r>
+            <a:endParaRPr lang="en-US" sz="1600" dirty="0"/>
+          </a:p>
+        </p:txBody>
+      </p:sp>
+      <p:sp>
+        <p:nvSpPr>
+          <p:cNvPr id="12" name="Text 10"/>
+          <p:cNvSpPr/>
+          <p:nvPr/>
+        </p:nvSpPr>
+        <p:spPr>
+          <a:xfrm>
+            <a:off x="502920" y="3108960"/>
+            <a:ext cx="3703320" cy="274320"/>
+          </a:xfrm>
+          <a:prstGeom prst="rect">
+            <a:avLst/>
+          </a:prstGeom>
+          <a:noFill/>
+          <a:ln/>
+        </p:spPr>
+        <p:txBody>
+          <a:bodyPr wrap="square" lIns="0" tIns="0" rIns="0" bIns="0" rtlCol="0" anchor="ctr"/>
+          <a:lstStyle/>
+          <a:p>
+            <a:pPr marL="0" indent="0">
+              <a:buNone/>
+            </a:pPr>
+            <a:r>
+              <a:rPr lang="en-US" sz="1100" i="1" dirty="0">
+                <a:solidFill>
+                  <a:srgbClr val="7A2E3B"/>
+                </a:solidFill>
+                <a:latin typeface="Calibri" pitchFamily="34" charset="0"/>
+                <a:ea typeface="Calibri" pitchFamily="34" charset="-122"/>
+                <a:cs typeface="Calibri" pitchFamily="34" charset="-120"/>
+              </a:rPr>
+              <a:t>pino · JSON · per-request</a:t>
+            </a:r>
+            <a:endParaRPr lang="en-US" sz="1100" dirty="0"/>
+          </a:p>
+        </p:txBody>
+      </p:sp>
+      <p:sp>
+        <p:nvSpPr>
+          <p:cNvPr id="13" name="Text 11"/>
+          <p:cNvSpPr/>
+          <p:nvPr/>
+        </p:nvSpPr>
+        <p:spPr>
+          <a:xfrm>
+            <a:off x="502920" y="3611880"/>
+            <a:ext cx="320040" cy="502920"/>
+          </a:xfrm>
+          <a:prstGeom prst="rect">
+            <a:avLst/>
+          </a:prstGeom>
+          <a:noFill/>
+          <a:ln/>
+        </p:spPr>
+        <p:txBody>
+          <a:bodyPr wrap="square" lIns="0" tIns="0" rIns="0" bIns="0" rtlCol="0" anchor="t"/>
+          <a:lstStyle/>
+          <a:p>
+            <a:pPr marL="0" indent="0">
+              <a:buNone/>
+            </a:pPr>
+            <a:r>
+              <a:rPr lang="en-US" sz="1100" i="1" dirty="0">
+                <a:solidFill>
+                  <a:srgbClr val="9CA3AF"/>
+                </a:solidFill>
+                <a:latin typeface="Calibri" pitchFamily="34" charset="0"/>
+                <a:ea typeface="Calibri" pitchFamily="34" charset="-122"/>
+                <a:cs typeface="Calibri" pitchFamily="34" charset="-120"/>
+              </a:rPr>
+              <a:t>1.</a:t>
+            </a:r>
+            <a:endParaRPr lang="en-US" sz="1100" dirty="0"/>
+          </a:p>
+        </p:txBody>
+      </p:sp>
+      <p:sp>
+        <p:nvSpPr>
+          <p:cNvPr id="14" name="Text 12"/>
+          <p:cNvSpPr/>
+          <p:nvPr/>
+        </p:nvSpPr>
+        <p:spPr>
+          <a:xfrm>
+            <a:off x="822960" y="3611880"/>
+            <a:ext cx="3337560" cy="502920"/>
+          </a:xfrm>
+          <a:prstGeom prst="rect">
+            <a:avLst/>
+          </a:prstGeom>
+          <a:noFill/>
+          <a:ln/>
+        </p:spPr>
+        <p:txBody>
+          <a:bodyPr wrap="square" lIns="0" tIns="0" rIns="0" bIns="0" rtlCol="0" anchor="t"/>
+          <a:lstStyle/>
+          <a:p>
+            <a:pPr marL="0" indent="0">
+              <a:lnSpc>
+                <a:spcPct val="130000"/>
+              </a:lnSpc>
+              <a:buNone/>
+            </a:pPr>
+            <a:r>
+              <a:rPr lang="en-US" sz="1100" dirty="0">
+                <a:solidFill>
+                  <a:srgbClr val="333333"/>
+                </a:solidFill>
+                <a:latin typeface="Calibri" pitchFamily="34" charset="0"/>
+                <a:ea typeface="Calibri" pitchFamily="34" charset="-122"/>
+                <a:cs typeface="Calibri" pitchFamily="34" charset="-120"/>
+              </a:rPr>
+              <a:t>service, requestId, sessionId, jobId, queue</a:t>
+            </a:r>
+            <a:endParaRPr lang="en-US" sz="1100" dirty="0"/>
+          </a:p>
+        </p:txBody>
+      </p:sp>
+      <p:sp>
+        <p:nvSpPr>
+          <p:cNvPr id="15" name="Text 13"/>
+          <p:cNvSpPr/>
+          <p:nvPr/>
+        </p:nvSpPr>
+        <p:spPr>
+          <a:xfrm>
+            <a:off x="502920" y="4206240"/>
+            <a:ext cx="320040" cy="502920"/>
+          </a:xfrm>
+          <a:prstGeom prst="rect">
+            <a:avLst/>
+          </a:prstGeom>
+          <a:noFill/>
+          <a:ln/>
+        </p:spPr>
+        <p:txBody>
+          <a:bodyPr wrap="square" lIns="0" tIns="0" rIns="0" bIns="0" rtlCol="0" anchor="t"/>
+          <a:lstStyle/>
+          <a:p>
+            <a:pPr marL="0" indent="0">
+              <a:buNone/>
+            </a:pPr>
+            <a:r>
+              <a:rPr lang="en-US" sz="1100" i="1" dirty="0">
+                <a:solidFill>
+                  <a:srgbClr val="9CA3AF"/>
+                </a:solidFill>
+                <a:latin typeface="Calibri" pitchFamily="34" charset="0"/>
+                <a:ea typeface="Calibri" pitchFamily="34" charset="-122"/>
+                <a:cs typeface="Calibri" pitchFamily="34" charset="-120"/>
+              </a:rPr>
+              <a:t>2.</a:t>
+            </a:r>
+            <a:endParaRPr lang="en-US" sz="1100" dirty="0"/>
+          </a:p>
+        </p:txBody>
+      </p:sp>
+      <p:sp>
+        <p:nvSpPr>
+          <p:cNvPr id="16" name="Text 14"/>
+          <p:cNvSpPr/>
+          <p:nvPr/>
+        </p:nvSpPr>
+        <p:spPr>
+          <a:xfrm>
+            <a:off x="822960" y="4206240"/>
+            <a:ext cx="3337560" cy="502920"/>
+          </a:xfrm>
+          <a:prstGeom prst="rect">
+            <a:avLst/>
+          </a:prstGeom>
+          <a:noFill/>
+          <a:ln/>
+        </p:spPr>
+        <p:txBody>
+          <a:bodyPr wrap="square" lIns="0" tIns="0" rIns="0" bIns="0" rtlCol="0" anchor="t"/>
+          <a:lstStyle/>
+          <a:p>
+            <a:pPr marL="0" indent="0">
+              <a:lnSpc>
+                <a:spcPct val="130000"/>
+              </a:lnSpc>
+              <a:buNone/>
+            </a:pPr>
+            <a:r>
+              <a:rPr lang="en-US" sz="1100" dirty="0">
+                <a:solidFill>
+                  <a:srgbClr val="333333"/>
+                </a:solidFill>
+                <a:latin typeface="Calibri" pitchFamily="34" charset="0"/>
+                <a:ea typeface="Calibri" pitchFamily="34" charset="-122"/>
+                <a:cs typeface="Calibri" pitchFamily="34" charset="-120"/>
+              </a:rPr>
+              <a:t>LOG_LEVEL configurable per environment</a:t>
+            </a:r>
+            <a:endParaRPr lang="en-US" sz="1100" dirty="0"/>
+          </a:p>
+        </p:txBody>
+      </p:sp>
+      <p:sp>
+        <p:nvSpPr>
+          <p:cNvPr id="17" name="Text 15"/>
+          <p:cNvSpPr/>
+          <p:nvPr/>
+        </p:nvSpPr>
+        <p:spPr>
+          <a:xfrm>
+            <a:off x="502920" y="4800600"/>
+            <a:ext cx="320040" cy="502920"/>
+          </a:xfrm>
+          <a:prstGeom prst="rect">
+            <a:avLst/>
+          </a:prstGeom>
+          <a:noFill/>
+          <a:ln/>
+        </p:spPr>
+        <p:txBody>
+          <a:bodyPr wrap="square" lIns="0" tIns="0" rIns="0" bIns="0" rtlCol="0" anchor="t"/>
+          <a:lstStyle/>
+          <a:p>
+            <a:pPr marL="0" indent="0">
+              <a:buNone/>
+            </a:pPr>
+            <a:r>
+              <a:rPr lang="en-US" sz="1100" i="1" dirty="0">
+                <a:solidFill>
+                  <a:srgbClr val="9CA3AF"/>
+                </a:solidFill>
+                <a:latin typeface="Calibri" pitchFamily="34" charset="0"/>
+                <a:ea typeface="Calibri" pitchFamily="34" charset="-122"/>
+                <a:cs typeface="Calibri" pitchFamily="34" charset="-120"/>
+              </a:rPr>
+              <a:t>3.</a:t>
+            </a:r>
+            <a:endParaRPr lang="en-US" sz="1100" dirty="0"/>
+          </a:p>
+        </p:txBody>
+      </p:sp>
+      <p:sp>
+        <p:nvSpPr>
+          <p:cNvPr id="18" name="Text 16"/>
+          <p:cNvSpPr/>
+          <p:nvPr/>
+        </p:nvSpPr>
+        <p:spPr>
+          <a:xfrm>
+            <a:off x="822960" y="4800600"/>
+            <a:ext cx="3337560" cy="502920"/>
+          </a:xfrm>
+          <a:prstGeom prst="rect">
+            <a:avLst/>
+          </a:prstGeom>
+          <a:noFill/>
+          <a:ln/>
+        </p:spPr>
+        <p:txBody>
+          <a:bodyPr wrap="square" lIns="0" tIns="0" rIns="0" bIns="0" rtlCol="0" anchor="t"/>
+          <a:lstStyle/>
+          <a:p>
+            <a:pPr marL="0" indent="0">
+              <a:lnSpc>
+                <a:spcPct val="130000"/>
+              </a:lnSpc>
+              <a:buNone/>
+            </a:pPr>
+            <a:r>
+              <a:rPr lang="en-US" sz="1100" dirty="0">
+                <a:solidFill>
+                  <a:srgbClr val="333333"/>
+                </a:solidFill>
+                <a:latin typeface="Calibri" pitchFamily="34" charset="0"/>
+                <a:ea typeface="Calibri" pitchFamily="34" charset="-122"/>
+                <a:cs typeface="Calibri" pitchFamily="34" charset="-120"/>
+              </a:rPr>
+              <a:t>Audit trail for every MCP remediation</a:t>
+            </a:r>
+            <a:endParaRPr lang="en-US" sz="1100" dirty="0"/>
+          </a:p>
+        </p:txBody>
+      </p:sp>
+      <p:sp>
+        <p:nvSpPr>
+          <p:cNvPr id="19" name="Shape 17"/>
+          <p:cNvSpPr/>
+          <p:nvPr/>
+        </p:nvSpPr>
+        <p:spPr>
+          <a:xfrm>
+            <a:off x="4407408" y="2606040"/>
+            <a:ext cx="3703320" cy="0"/>
+          </a:xfrm>
+          <a:prstGeom prst="line">
+            <a:avLst/>
+          </a:prstGeom>
+          <a:noFill/>
+          <a:ln w="12700">
+            <a:solidFill>
+              <a:srgbClr val="1A2238"/>
+            </a:solidFill>
+            <a:prstDash val="solid"/>
+          </a:ln>
+        </p:spPr>
+        <p:txBody>
+          <a:bodyPr/>
+          <a:lstStyle/>
+          <a:p>
+            <a:endParaRPr lang="en-US"/>
+          </a:p>
+        </p:txBody>
+      </p:sp>
+      <p:sp>
+        <p:nvSpPr>
+          <p:cNvPr id="20" name="Text 18"/>
+          <p:cNvSpPr/>
+          <p:nvPr/>
+        </p:nvSpPr>
+        <p:spPr>
+          <a:xfrm>
+            <a:off x="4407408" y="2697480"/>
+            <a:ext cx="3703320" cy="365760"/>
+          </a:xfrm>
+          <a:prstGeom prst="rect">
+            <a:avLst/>
+          </a:prstGeom>
+          <a:noFill/>
+          <a:ln/>
+        </p:spPr>
+        <p:txBody>
+          <a:bodyPr wrap="square" lIns="0" tIns="0" rIns="0" bIns="0" rtlCol="0" anchor="ctr"/>
+          <a:lstStyle/>
+          <a:p>
+            <a:pPr marL="0" indent="0">
+              <a:buNone/>
+            </a:pPr>
+            <a:r>
+              <a:rPr lang="en-US" sz="1600" dirty="0">
+                <a:solidFill>
+                  <a:srgbClr val="1A2238"/>
+                </a:solidFill>
+                <a:latin typeface="Cambria" pitchFamily="34" charset="0"/>
+                <a:ea typeface="Cambria" pitchFamily="34" charset="-122"/>
+                <a:cs typeface="Cambria" pitchFamily="34" charset="-120"/>
+              </a:rPr>
+              <a:t>(ii)  Metrics</a:t>
+            </a:r>
+            <a:endParaRPr lang="en-US" sz="1600" dirty="0"/>
+          </a:p>
+        </p:txBody>
+      </p:sp>
+      <p:sp>
+        <p:nvSpPr>
+          <p:cNvPr id="21" name="Text 19"/>
+          <p:cNvSpPr/>
+          <p:nvPr/>
+        </p:nvSpPr>
+        <p:spPr>
+          <a:xfrm>
+            <a:off x="4407408" y="3108960"/>
+            <a:ext cx="3703320" cy="274320"/>
+          </a:xfrm>
+          <a:prstGeom prst="rect">
+            <a:avLst/>
+          </a:prstGeom>
+          <a:noFill/>
+          <a:ln/>
+        </p:spPr>
+        <p:txBody>
+          <a:bodyPr wrap="square" lIns="0" tIns="0" rIns="0" bIns="0" rtlCol="0" anchor="ctr"/>
+          <a:lstStyle/>
+          <a:p>
+            <a:pPr marL="0" indent="0">
+              <a:buNone/>
+            </a:pPr>
+            <a:r>
+              <a:rPr lang="en-US" sz="1100" i="1" dirty="0">
+                <a:solidFill>
+                  <a:srgbClr val="7A2E3B"/>
+                </a:solidFill>
+                <a:latin typeface="Calibri" pitchFamily="34" charset="0"/>
+                <a:ea typeface="Calibri" pitchFamily="34" charset="-122"/>
+                <a:cs typeface="Calibri" pitchFamily="34" charset="-120"/>
+              </a:rPr>
+              <a:t>prom-client · 15 s scrape interval</a:t>
+            </a:r>
+            <a:endParaRPr lang="en-US" sz="1100" dirty="0"/>
+          </a:p>
+        </p:txBody>
+      </p:sp>
+      <p:sp>
+        <p:nvSpPr>
+          <p:cNvPr id="22" name="Text 20"/>
+          <p:cNvSpPr/>
+          <p:nvPr/>
+        </p:nvSpPr>
+        <p:spPr>
+          <a:xfrm>
+            <a:off x="4407408" y="3611880"/>
+            <a:ext cx="320040" cy="502920"/>
+          </a:xfrm>
+          <a:prstGeom prst="rect">
+            <a:avLst/>
+          </a:prstGeom>
+          <a:noFill/>
+          <a:ln/>
+        </p:spPr>
+        <p:txBody>
+          <a:bodyPr wrap="square" lIns="0" tIns="0" rIns="0" bIns="0" rtlCol="0" anchor="t"/>
+          <a:lstStyle/>
+          <a:p>
+            <a:pPr marL="0" indent="0">
+              <a:buNone/>
+            </a:pPr>
+            <a:r>
+              <a:rPr lang="en-US" sz="1100" i="1" dirty="0">
+                <a:solidFill>
+                  <a:srgbClr val="9CA3AF"/>
+                </a:solidFill>
+                <a:latin typeface="Calibri" pitchFamily="34" charset="0"/>
+                <a:ea typeface="Calibri" pitchFamily="34" charset="-122"/>
+                <a:cs typeface="Calibri" pitchFamily="34" charset="-120"/>
+              </a:rPr>
+              <a:t>1.</a:t>
+            </a:r>
+            <a:endParaRPr lang="en-US" sz="1100" dirty="0"/>
+          </a:p>
+        </p:txBody>
+      </p:sp>
+      <p:sp>
+        <p:nvSpPr>
+          <p:cNvPr id="23" name="Text 21"/>
+          <p:cNvSpPr/>
+          <p:nvPr/>
+        </p:nvSpPr>
+        <p:spPr>
+          <a:xfrm>
+            <a:off x="4727448" y="3611880"/>
+            <a:ext cx="3337560" cy="502920"/>
+          </a:xfrm>
+          <a:prstGeom prst="rect">
+            <a:avLst/>
+          </a:prstGeom>
+          <a:noFill/>
+          <a:ln/>
+        </p:spPr>
+        <p:txBody>
+          <a:bodyPr wrap="square" lIns="0" tIns="0" rIns="0" bIns="0" rtlCol="0" anchor="t"/>
+          <a:lstStyle/>
+          <a:p>
+            <a:pPr marL="0" indent="0">
+              <a:lnSpc>
+                <a:spcPct val="130000"/>
+              </a:lnSpc>
+              <a:buNone/>
+            </a:pPr>
+            <a:r>
+              <a:rPr lang="en-US" sz="1100" dirty="0">
+                <a:solidFill>
+                  <a:srgbClr val="333333"/>
+                </a:solidFill>
+                <a:latin typeface="Calibri" pitchFamily="34" charset="0"/>
+                <a:ea typeface="Calibri" pitchFamily="34" charset="-122"/>
+                <a:cs typeface="Calibri" pitchFamily="34" charset="-120"/>
+              </a:rPr>
+              <a:t>http_request_duration_seconds (histogram)</a:t>
+            </a:r>
+            <a:endParaRPr lang="en-US" sz="1100" dirty="0"/>
+          </a:p>
+        </p:txBody>
+      </p:sp>
+      <p:sp>
+        <p:nvSpPr>
+          <p:cNvPr id="24" name="Text 22"/>
+          <p:cNvSpPr/>
+          <p:nvPr/>
+        </p:nvSpPr>
+        <p:spPr>
+          <a:xfrm>
+            <a:off x="4407408" y="4206240"/>
+            <a:ext cx="320040" cy="502920"/>
+          </a:xfrm>
+          <a:prstGeom prst="rect">
+            <a:avLst/>
+          </a:prstGeom>
+          <a:noFill/>
+          <a:ln/>
+        </p:spPr>
+        <p:txBody>
+          <a:bodyPr wrap="square" lIns="0" tIns="0" rIns="0" bIns="0" rtlCol="0" anchor="t"/>
+          <a:lstStyle/>
+          <a:p>
+            <a:pPr marL="0" indent="0">
+              <a:buNone/>
+            </a:pPr>
+            <a:r>
+              <a:rPr lang="en-US" sz="1100" i="1" dirty="0">
+                <a:solidFill>
+                  <a:srgbClr val="9CA3AF"/>
+                </a:solidFill>
+                <a:latin typeface="Calibri" pitchFamily="34" charset="0"/>
+                <a:ea typeface="Calibri" pitchFamily="34" charset="-122"/>
+                <a:cs typeface="Calibri" pitchFamily="34" charset="-120"/>
+              </a:rPr>
+              <a:t>2.</a:t>
+            </a:r>
+            <a:endParaRPr lang="en-US" sz="1100" dirty="0"/>
+          </a:p>
+        </p:txBody>
+      </p:sp>
+      <p:sp>
+        <p:nvSpPr>
+          <p:cNvPr id="25" name="Text 23"/>
+          <p:cNvSpPr/>
+          <p:nvPr/>
+        </p:nvSpPr>
+        <p:spPr>
+          <a:xfrm>
+            <a:off x="4727448" y="4206240"/>
+            <a:ext cx="3337560" cy="502920"/>
+          </a:xfrm>
+          <a:prstGeom prst="rect">
+            <a:avLst/>
+          </a:prstGeom>
+          <a:noFill/>
+          <a:ln/>
+        </p:spPr>
+        <p:txBody>
+          <a:bodyPr wrap="square" lIns="0" tIns="0" rIns="0" bIns="0" rtlCol="0" anchor="t"/>
+          <a:lstStyle/>
+          <a:p>
+            <a:pPr marL="0" indent="0">
+              <a:lnSpc>
+                <a:spcPct val="130000"/>
+              </a:lnSpc>
+              <a:buNone/>
+            </a:pPr>
+            <a:r>
+              <a:rPr lang="en-US" sz="1100" dirty="0">
+                <a:solidFill>
+                  <a:srgbClr val="333333"/>
+                </a:solidFill>
+                <a:latin typeface="Calibri" pitchFamily="34" charset="0"/>
+                <a:ea typeface="Calibri" pitchFamily="34" charset="-122"/>
+                <a:cs typeface="Calibri" pitchFamily="34" charset="-120"/>
+              </a:rPr>
+              <a:t>groq_circuit_breaker_state (gauge)</a:t>
+            </a:r>
+            <a:endParaRPr lang="en-US" sz="1100" dirty="0"/>
+          </a:p>
+        </p:txBody>
+      </p:sp>
+      <p:sp>
+        <p:nvSpPr>
+          <p:cNvPr id="26" name="Text 24"/>
+          <p:cNvSpPr/>
+          <p:nvPr/>
+        </p:nvSpPr>
+        <p:spPr>
+          <a:xfrm>
+            <a:off x="4407408" y="4800600"/>
+            <a:ext cx="320040" cy="502920"/>
+          </a:xfrm>
+          <a:prstGeom prst="rect">
+            <a:avLst/>
+          </a:prstGeom>
+          <a:noFill/>
+          <a:ln/>
+        </p:spPr>
+        <p:txBody>
+          <a:bodyPr wrap="square" lIns="0" tIns="0" rIns="0" bIns="0" rtlCol="0" anchor="t"/>
+          <a:lstStyle/>
+          <a:p>
+            <a:pPr marL="0" indent="0">
+              <a:buNone/>
+            </a:pPr>
+            <a:r>
+              <a:rPr lang="en-US" sz="1100" i="1" dirty="0">
+                <a:solidFill>
+                  <a:srgbClr val="9CA3AF"/>
+                </a:solidFill>
+                <a:latin typeface="Calibri" pitchFamily="34" charset="0"/>
+                <a:ea typeface="Calibri" pitchFamily="34" charset="-122"/>
+                <a:cs typeface="Calibri" pitchFamily="34" charset="-120"/>
+              </a:rPr>
+              <a:t>3.</a:t>
+            </a:r>
+            <a:endParaRPr lang="en-US" sz="1100" dirty="0"/>
+          </a:p>
+        </p:txBody>
+      </p:sp>
+      <p:sp>
+        <p:nvSpPr>
+          <p:cNvPr id="27" name="Text 25"/>
+          <p:cNvSpPr/>
+          <p:nvPr/>
+        </p:nvSpPr>
+        <p:spPr>
+          <a:xfrm>
+            <a:off x="4727448" y="4800600"/>
+            <a:ext cx="3337560" cy="502920"/>
+          </a:xfrm>
+          <a:prstGeom prst="rect">
+            <a:avLst/>
+          </a:prstGeom>
+          <a:noFill/>
+          <a:ln/>
+        </p:spPr>
+        <p:txBody>
+          <a:bodyPr wrap="square" lIns="0" tIns="0" rIns="0" bIns="0" rtlCol="0" anchor="t"/>
+          <a:lstStyle/>
+          <a:p>
+            <a:pPr marL="0" indent="0">
+              <a:lnSpc>
+                <a:spcPct val="130000"/>
+              </a:lnSpc>
+              <a:buNone/>
+            </a:pPr>
+            <a:r>
+              <a:rPr lang="en-US" sz="1100" dirty="0">
+                <a:solidFill>
+                  <a:srgbClr val="333333"/>
+                </a:solidFill>
+                <a:latin typeface="Calibri" pitchFamily="34" charset="0"/>
+                <a:ea typeface="Calibri" pitchFamily="34" charset="-122"/>
+                <a:cs typeface="Calibri" pitchFamily="34" charset="-120"/>
+              </a:rPr>
+              <a:t>queue_depth_total, jobs_dead_letter_total</a:t>
+            </a:r>
+            <a:endParaRPr lang="en-US" sz="1100" dirty="0"/>
+          </a:p>
+        </p:txBody>
+      </p:sp>
+      <p:sp>
+        <p:nvSpPr>
+          <p:cNvPr id="28" name="Shape 26"/>
+          <p:cNvSpPr/>
+          <p:nvPr/>
+        </p:nvSpPr>
+        <p:spPr>
+          <a:xfrm>
+            <a:off x="8311896" y="2606040"/>
+            <a:ext cx="3703320" cy="0"/>
+          </a:xfrm>
+          <a:prstGeom prst="line">
+            <a:avLst/>
+          </a:prstGeom>
+          <a:noFill/>
+          <a:ln w="12700">
+            <a:solidFill>
+              <a:srgbClr val="1A2238"/>
+            </a:solidFill>
+            <a:prstDash val="solid"/>
+          </a:ln>
+        </p:spPr>
+        <p:txBody>
+          <a:bodyPr/>
+          <a:lstStyle/>
+          <a:p>
+            <a:endParaRPr lang="en-US"/>
+          </a:p>
+        </p:txBody>
+      </p:sp>
+      <p:sp>
+        <p:nvSpPr>
+          <p:cNvPr id="29" name="Text 27"/>
+          <p:cNvSpPr/>
+          <p:nvPr/>
+        </p:nvSpPr>
+        <p:spPr>
+          <a:xfrm>
+            <a:off x="8311896" y="2697480"/>
+            <a:ext cx="3703320" cy="365760"/>
+          </a:xfrm>
+          <a:prstGeom prst="rect">
+            <a:avLst/>
+          </a:prstGeom>
+          <a:noFill/>
+          <a:ln/>
+        </p:spPr>
+        <p:txBody>
+          <a:bodyPr wrap="square" lIns="0" tIns="0" rIns="0" bIns="0" rtlCol="0" anchor="ctr"/>
+          <a:lstStyle/>
+          <a:p>
+            <a:pPr marL="0" indent="0">
+              <a:buNone/>
+            </a:pPr>
+            <a:r>
+              <a:rPr lang="en-US" sz="1600" dirty="0">
+                <a:solidFill>
+                  <a:srgbClr val="1A2238"/>
+                </a:solidFill>
+                <a:latin typeface="Cambria" pitchFamily="34" charset="0"/>
+                <a:ea typeface="Cambria" pitchFamily="34" charset="-122"/>
+                <a:cs typeface="Cambria" pitchFamily="34" charset="-120"/>
+              </a:rPr>
+              <a:t>(iii)  Health probes</a:t>
+            </a:r>
+            <a:endParaRPr lang="en-US" sz="1600" dirty="0"/>
+          </a:p>
+        </p:txBody>
+      </p:sp>
+      <p:sp>
+        <p:nvSpPr>
+          <p:cNvPr id="30" name="Text 28"/>
+          <p:cNvSpPr/>
+          <p:nvPr/>
+        </p:nvSpPr>
+        <p:spPr>
+          <a:xfrm>
+            <a:off x="8311896" y="3108960"/>
+            <a:ext cx="3703320" cy="274320"/>
+          </a:xfrm>
+          <a:prstGeom prst="rect">
+            <a:avLst/>
+          </a:prstGeom>
+          <a:noFill/>
+          <a:ln/>
+        </p:spPr>
+        <p:txBody>
+          <a:bodyPr wrap="square" lIns="0" tIns="0" rIns="0" bIns="0" rtlCol="0" anchor="ctr"/>
+          <a:lstStyle/>
+          <a:p>
+            <a:pPr marL="0" indent="0">
+              <a:buNone/>
+            </a:pPr>
+            <a:r>
+              <a:rPr lang="en-US" sz="1100" i="1" dirty="0">
+                <a:solidFill>
+                  <a:srgbClr val="7A2E3B"/>
+                </a:solidFill>
+                <a:latin typeface="Calibri" pitchFamily="34" charset="0"/>
+                <a:ea typeface="Calibri" pitchFamily="34" charset="-122"/>
+                <a:cs typeface="Calibri" pitchFamily="34" charset="-120"/>
+              </a:rPr>
+              <a:t>/livez · /readyz</a:t>
+            </a:r>
+            <a:endParaRPr lang="en-US" sz="1100" dirty="0"/>
+          </a:p>
+        </p:txBody>
+      </p:sp>
+      <p:sp>
+        <p:nvSpPr>
+          <p:cNvPr id="31" name="Text 29"/>
+          <p:cNvSpPr/>
+          <p:nvPr/>
+        </p:nvSpPr>
+        <p:spPr>
+          <a:xfrm>
+            <a:off x="8311896" y="3611880"/>
+            <a:ext cx="320040" cy="502920"/>
+          </a:xfrm>
+          <a:prstGeom prst="rect">
+            <a:avLst/>
+          </a:prstGeom>
+          <a:noFill/>
+          <a:ln/>
+        </p:spPr>
+        <p:txBody>
+          <a:bodyPr wrap="square" lIns="0" tIns="0" rIns="0" bIns="0" rtlCol="0" anchor="t"/>
+          <a:lstStyle/>
+          <a:p>
+            <a:pPr marL="0" indent="0">
+              <a:buNone/>
+            </a:pPr>
+            <a:r>
+              <a:rPr lang="en-US" sz="1100" i="1" dirty="0">
+                <a:solidFill>
+                  <a:srgbClr val="9CA3AF"/>
+                </a:solidFill>
+                <a:latin typeface="Calibri" pitchFamily="34" charset="0"/>
+                <a:ea typeface="Calibri" pitchFamily="34" charset="-122"/>
+                <a:cs typeface="Calibri" pitchFamily="34" charset="-120"/>
+              </a:rPr>
+              <a:t>1.</a:t>
+            </a:r>
+            <a:endParaRPr lang="en-US" sz="1100" dirty="0"/>
+          </a:p>
+        </p:txBody>
+      </p:sp>
+      <p:sp>
+        <p:nvSpPr>
+          <p:cNvPr id="32" name="Text 30"/>
+          <p:cNvSpPr/>
+          <p:nvPr/>
+        </p:nvSpPr>
+        <p:spPr>
+          <a:xfrm>
+            <a:off x="8631936" y="3611880"/>
+            <a:ext cx="3337560" cy="502920"/>
+          </a:xfrm>
+          <a:prstGeom prst="rect">
+            <a:avLst/>
+          </a:prstGeom>
+          <a:noFill/>
+          <a:ln/>
+        </p:spPr>
+        <p:txBody>
+          <a:bodyPr wrap="square" lIns="0" tIns="0" rIns="0" bIns="0" rtlCol="0" anchor="t"/>
+          <a:lstStyle/>
+          <a:p>
+            <a:pPr marL="0" indent="0">
+              <a:lnSpc>
+                <a:spcPct val="130000"/>
+              </a:lnSpc>
+              <a:buNone/>
+            </a:pPr>
+            <a:r>
+              <a:rPr lang="en-US" sz="1100" dirty="0">
+                <a:solidFill>
+                  <a:srgbClr val="333333"/>
+                </a:solidFill>
+                <a:latin typeface="Calibri" pitchFamily="34" charset="0"/>
+                <a:ea typeface="Calibri" pitchFamily="34" charset="-122"/>
+                <a:cs typeface="Calibri" pitchFamily="34" charset="-120"/>
+              </a:rPr>
+              <a:t>/livez returns 200 for orchestrator liveness</a:t>
+            </a:r>
+            <a:endParaRPr lang="en-US" sz="1100" dirty="0"/>
+          </a:p>
+        </p:txBody>
+      </p:sp>
+      <p:sp>
+        <p:nvSpPr>
+          <p:cNvPr id="33" name="Text 31"/>
+          <p:cNvSpPr/>
+          <p:nvPr/>
+        </p:nvSpPr>
+        <p:spPr>
+          <a:xfrm>
+            <a:off x="8311896" y="4206240"/>
+            <a:ext cx="320040" cy="502920"/>
+          </a:xfrm>
+          <a:prstGeom prst="rect">
+            <a:avLst/>
+          </a:prstGeom>
+          <a:noFill/>
+          <a:ln/>
+        </p:spPr>
+        <p:txBody>
+          <a:bodyPr wrap="square" lIns="0" tIns="0" rIns="0" bIns="0" rtlCol="0" anchor="t"/>
+          <a:lstStyle/>
+          <a:p>
+            <a:pPr marL="0" indent="0">
+              <a:buNone/>
+            </a:pPr>
+            <a:r>
+              <a:rPr lang="en-US" sz="1100" i="1" dirty="0">
+                <a:solidFill>
+                  <a:srgbClr val="9CA3AF"/>
+                </a:solidFill>
+                <a:latin typeface="Calibri" pitchFamily="34" charset="0"/>
+                <a:ea typeface="Calibri" pitchFamily="34" charset="-122"/>
+                <a:cs typeface="Calibri" pitchFamily="34" charset="-120"/>
+              </a:rPr>
+              <a:t>2.</a:t>
+            </a:r>
+            <a:endParaRPr lang="en-US" sz="1100" dirty="0"/>
+          </a:p>
+        </p:txBody>
+      </p:sp>
+      <p:sp>
+        <p:nvSpPr>
+          <p:cNvPr id="34" name="Text 32"/>
+          <p:cNvSpPr/>
+          <p:nvPr/>
+        </p:nvSpPr>
+        <p:spPr>
+          <a:xfrm>
+            <a:off x="8631936" y="4206240"/>
+            <a:ext cx="3337560" cy="502920"/>
+          </a:xfrm>
+          <a:prstGeom prst="rect">
+            <a:avLst/>
+          </a:prstGeom>
+          <a:noFill/>
+          <a:ln/>
+        </p:spPr>
+        <p:txBody>
+          <a:bodyPr wrap="square" lIns="0" tIns="0" rIns="0" bIns="0" rtlCol="0" anchor="t"/>
+          <a:lstStyle/>
+          <a:p>
+            <a:pPr marL="0" indent="0">
+              <a:lnSpc>
+                <a:spcPct val="130000"/>
+              </a:lnSpc>
+              <a:buNone/>
+            </a:pPr>
+            <a:r>
+              <a:rPr lang="en-US" sz="1100" dirty="0">
+                <a:solidFill>
+                  <a:srgbClr val="333333"/>
+                </a:solidFill>
+                <a:latin typeface="Calibri" pitchFamily="34" charset="0"/>
+                <a:ea typeface="Calibri" pitchFamily="34" charset="-122"/>
+                <a:cs typeface="Calibri" pitchFamily="34" charset="-120"/>
+              </a:rPr>
+              <a:t>/readyz pings Redis, Supabase and Groq (2 s)</a:t>
+            </a:r>
+            <a:endParaRPr lang="en-US" sz="1100" dirty="0"/>
+          </a:p>
+        </p:txBody>
+      </p:sp>
+      <p:sp>
+        <p:nvSpPr>
+          <p:cNvPr id="35" name="Text 33"/>
+          <p:cNvSpPr/>
+          <p:nvPr/>
+        </p:nvSpPr>
+        <p:spPr>
+          <a:xfrm>
+            <a:off x="8311896" y="4800600"/>
+            <a:ext cx="320040" cy="502920"/>
+          </a:xfrm>
+          <a:prstGeom prst="rect">
+            <a:avLst/>
+          </a:prstGeom>
+          <a:noFill/>
+          <a:ln/>
+        </p:spPr>
+        <p:txBody>
+          <a:bodyPr wrap="square" lIns="0" tIns="0" rIns="0" bIns="0" rtlCol="0" anchor="t"/>
+          <a:lstStyle/>
+          <a:p>
+            <a:pPr marL="0" indent="0">
+              <a:buNone/>
+            </a:pPr>
+            <a:r>
+              <a:rPr lang="en-US" sz="1100" i="1" dirty="0">
+                <a:solidFill>
+                  <a:srgbClr val="9CA3AF"/>
+                </a:solidFill>
+                <a:latin typeface="Calibri" pitchFamily="34" charset="0"/>
+                <a:ea typeface="Calibri" pitchFamily="34" charset="-122"/>
+                <a:cs typeface="Calibri" pitchFamily="34" charset="-120"/>
+              </a:rPr>
+              <a:t>3.</a:t>
+            </a:r>
+            <a:endParaRPr lang="en-US" sz="1100" dirty="0"/>
+          </a:p>
+        </p:txBody>
+      </p:sp>
+      <p:sp>
+        <p:nvSpPr>
+          <p:cNvPr id="36" name="Text 34"/>
+          <p:cNvSpPr/>
+          <p:nvPr/>
+        </p:nvSpPr>
+        <p:spPr>
+          <a:xfrm>
+            <a:off x="8631936" y="4800600"/>
+            <a:ext cx="3337560" cy="502920"/>
+          </a:xfrm>
+          <a:prstGeom prst="rect">
+            <a:avLst/>
+          </a:prstGeom>
+          <a:noFill/>
+          <a:ln/>
+        </p:spPr>
+        <p:txBody>
+          <a:bodyPr wrap="square" lIns="0" tIns="0" rIns="0" bIns="0" rtlCol="0" anchor="t"/>
+          <a:lstStyle/>
+          <a:p>
+            <a:pPr marL="0" indent="0">
+              <a:lnSpc>
+                <a:spcPct val="130000"/>
+              </a:lnSpc>
+              <a:buNone/>
+            </a:pPr>
+            <a:r>
+              <a:rPr lang="en-US" sz="1100" dirty="0">
+                <a:solidFill>
+                  <a:srgbClr val="333333"/>
+                </a:solidFill>
+                <a:latin typeface="Calibri" pitchFamily="34" charset="0"/>
+                <a:ea typeface="Calibri" pitchFamily="34" charset="-122"/>
+                <a:cs typeface="Calibri" pitchFamily="34" charset="-120"/>
+              </a:rPr>
+              <a:t>503 names the failing dependency in the body</a:t>
+            </a:r>
+            <a:endParaRPr lang="en-US" sz="1100" dirty="0"/>
+          </a:p>
+        </p:txBody>
+      </p:sp>
+      <p:sp>
+        <p:nvSpPr>
+          <p:cNvPr id="37" name="Text 35"/>
+          <p:cNvSpPr/>
+          <p:nvPr/>
+        </p:nvSpPr>
+        <p:spPr>
+          <a:xfrm>
+            <a:off x="502920" y="5989320"/>
+            <a:ext cx="11155680" cy="365760"/>
+          </a:xfrm>
+          <a:prstGeom prst="rect">
+            <a:avLst/>
+          </a:prstGeom>
+          <a:noFill/>
+          <a:ln/>
+        </p:spPr>
+        <p:txBody>
+          <a:bodyPr wrap="square" lIns="0" tIns="0" rIns="0" bIns="0" rtlCol="0" anchor="ctr"/>
+          <a:lstStyle/>
+          <a:p>
+            <a:pPr marL="0" indent="0" algn="ctr">
+              <a:buNone/>
+            </a:pPr>
+            <a:r>
+              <a:rPr lang="en-US" sz="1000" i="1" dirty="0">
+                <a:solidFill>
+                  <a:srgbClr val="6B7280"/>
+                </a:solidFill>
+                <a:latin typeface="Calibri" pitchFamily="34" charset="0"/>
+                <a:ea typeface="Calibri" pitchFamily="34" charset="-122"/>
+                <a:cs typeface="Calibri" pitchFamily="34" charset="-120"/>
+              </a:rPr>
+              <a:t>A Grafana dashboard provisioned from docker/grafana/dashboards/edge-coach.json is auto-loaded at startup. Bull Board exposes the DLQ at :3002/queues.</a:t>
+            </a:r>
+            <a:endParaRPr lang="en-US" sz="1000" dirty="0"/>
+          </a:p>
+        </p:txBody>
+      </p:sp>
+    </p:spTree>
+  </p:cSld>
+  <p:clrMapOvr>
+    <a:masterClrMapping/>
+  </p:clrMapOvr>
+</p:sld>
+</file>
+
+<file path=ppt/slides/slide11.xml><?xml version="1.0" encoding="utf-8"?>
+<p:sld xmlns:a="http://schemas.openxmlformats.org/drawingml/2006/main" xmlns:r="http://schemas.openxmlformats.org/officeDocument/2006/relationships" xmlns:p="http://schemas.openxmlformats.org/presentationml/2006/main">
   <p:cSld name="Slide 9">
     <p:bg>
       <p:bgPr>
@@ -2805,7 +4236,7 @@
                 <a:ea typeface="Cambria" pitchFamily="34" charset="-122"/>
                 <a:cs typeface="Cambria" pitchFamily="34" charset="-120"/>
               </a:rPr>
-              <a:t>IX.</a:t>
+              <a:t>X.</a:t>
             </a:r>
             <a:endParaRPr lang="en-US" sz="1400" dirty="0"/>
           </a:p>
@@ -4193,7 +5624,7 @@
 </p:sld>
 </file>
 
-<file path=ppt/slides/slide11.xml><?xml version="1.0" encoding="utf-8"?>
+<file path=ppt/slides/slide12.xml><?xml version="1.0" encoding="utf-8"?>
 <p:sld xmlns:a="http://schemas.openxmlformats.org/drawingml/2006/main" xmlns:r="http://schemas.openxmlformats.org/officeDocument/2006/relationships" xmlns:p="http://schemas.openxmlformats.org/presentationml/2006/main">
   <p:cSld name="Slide 10">
     <p:bg>
@@ -4251,7 +5682,7 @@
                 <a:ea typeface="Cambria" pitchFamily="34" charset="-122"/>
                 <a:cs typeface="Cambria" pitchFamily="34" charset="-120"/>
               </a:rPr>
-              <a:t>X.</a:t>
+              <a:t>XI.</a:t>
             </a:r>
             <a:endParaRPr lang="en-US" sz="1400" dirty="0"/>
           </a:p>
@@ -6445,7 +7876,7 @@
 </p:sld>
 </file>
 
-<file path=ppt/slides/slide12.xml><?xml version="1.0" encoding="utf-8"?>
+<file path=ppt/slides/slide13.xml><?xml version="1.0" encoding="utf-8"?>
 <p:sld xmlns:a="http://schemas.openxmlformats.org/drawingml/2006/main" xmlns:r="http://schemas.openxmlformats.org/officeDocument/2006/relationships" xmlns:p="http://schemas.openxmlformats.org/presentationml/2006/main">
   <p:cSld name="Slide 11">
     <p:bg>
@@ -6503,7 +7934,7 @@
                 <a:ea typeface="Cambria" pitchFamily="34" charset="-122"/>
                 <a:cs typeface="Cambria" pitchFamily="34" charset="-120"/>
               </a:rPr>
-              <a:t>XI.</a:t>
+              <a:t>XII.</a:t>
             </a:r>
             <a:endParaRPr lang="en-US" sz="1400" dirty="0"/>
           </a:p>
@@ -6689,7 +8120,7 @@
                 <a:ea typeface="Calibri" pitchFamily="34" charset="-122"/>
                 <a:cs typeface="Calibri" pitchFamily="34" charset="-120"/>
               </a:rPr>
-              <a:t>Ibrahim</a:t>
+              <a:t>Hassan</a:t>
             </a:r>
             <a:endParaRPr lang="en-US" sz="900" dirty="0"/>
           </a:p>
@@ -8868,7 +10299,7 @@
 </p:sld>
 </file>
 
-<file path=ppt/slides/slide13.xml><?xml version="1.0" encoding="utf-8"?>
+<file path=ppt/slides/slide14.xml><?xml version="1.0" encoding="utf-8"?>
 <p:sld xmlns:a="http://schemas.openxmlformats.org/drawingml/2006/main" xmlns:r="http://schemas.openxmlformats.org/officeDocument/2006/relationships" xmlns:p="http://schemas.openxmlformats.org/presentationml/2006/main">
   <p:cSld name="Slide 12">
     <p:bg>
@@ -8926,7 +10357,7 @@
                 <a:ea typeface="Cambria" pitchFamily="34" charset="-122"/>
                 <a:cs typeface="Cambria" pitchFamily="34" charset="-120"/>
               </a:rPr>
-              <a:t>XII.</a:t>
+              <a:t>XIII.</a:t>
             </a:r>
             <a:endParaRPr lang="en-US" sz="1400" dirty="0"/>
           </a:p>
@@ -9112,7 +10543,7 @@
                 <a:ea typeface="Calibri" pitchFamily="34" charset="-122"/>
                 <a:cs typeface="Calibri" pitchFamily="34" charset="-120"/>
               </a:rPr>
-              <a:t>Ibrahim</a:t>
+              <a:t>Hassan</a:t>
             </a:r>
           </a:p>
         </p:txBody>
@@ -9669,1112 +11100,8 @@
 </p:sld>
 </file>
 
-<file path=ppt/slides/slide14.xml><?xml version="1.0" encoding="utf-8"?>
+<file path=ppt/slides/slide15.xml><?xml version="1.0" encoding="utf-8"?>
 <p:sld xmlns:a="http://schemas.openxmlformats.org/drawingml/2006/main" xmlns:r="http://schemas.openxmlformats.org/officeDocument/2006/relationships" xmlns:p="http://schemas.openxmlformats.org/presentationml/2006/main">
-  <p:cSld name="Slide 13">
-    <p:bg>
-      <p:bgPr>
-        <a:solidFill>
-          <a:srgbClr val="FFFFFF"/>
-        </a:solidFill>
-        <a:effectLst/>
-      </p:bgPr>
-    </p:bg>
-    <p:spTree>
-      <p:nvGrpSpPr>
-        <p:cNvPr id="1" name=""/>
-        <p:cNvGrpSpPr/>
-        <p:nvPr/>
-      </p:nvGrpSpPr>
-      <p:grpSpPr>
-        <a:xfrm>
-          <a:off x="0" y="0"/>
-          <a:ext cx="0" cy="0"/>
-          <a:chOff x="0" y="0"/>
-          <a:chExt cx="0" cy="0"/>
-        </a:xfrm>
-      </p:grpSpPr>
-      <p:sp>
-        <p:nvSpPr>
-          <p:cNvPr id="2" name="Text 0"/>
-          <p:cNvSpPr/>
-          <p:nvPr/>
-        </p:nvSpPr>
-        <p:spPr>
-          <a:xfrm>
-            <a:off x="502920" y="411480"/>
-            <a:ext cx="640080" cy="365760"/>
-          </a:xfrm>
-          <a:prstGeom prst="rect">
-            <a:avLst/>
-          </a:prstGeom>
-          <a:noFill/>
-          <a:ln/>
-        </p:spPr>
-        <p:txBody>
-          <a:bodyPr wrap="square" lIns="0" tIns="0" rIns="0" bIns="0" rtlCol="0" anchor="ctr"/>
-          <a:lstStyle/>
-          <a:p>
-            <a:pPr marL="0" indent="0">
-              <a:buNone/>
-            </a:pPr>
-            <a:r>
-              <a:rPr lang="en-US" sz="1400" i="1" dirty="0">
-                <a:solidFill>
-                  <a:srgbClr val="7A2E3B"/>
-                </a:solidFill>
-                <a:latin typeface="Cambria" pitchFamily="34" charset="0"/>
-                <a:ea typeface="Cambria" pitchFamily="34" charset="-122"/>
-                <a:cs typeface="Cambria" pitchFamily="34" charset="-120"/>
-              </a:rPr>
-              <a:t>XIII.</a:t>
-            </a:r>
-            <a:endParaRPr lang="en-US" sz="1400" dirty="0"/>
-          </a:p>
-        </p:txBody>
-      </p:sp>
-      <p:sp>
-        <p:nvSpPr>
-          <p:cNvPr id="3" name="Text 1"/>
-          <p:cNvSpPr/>
-          <p:nvPr/>
-        </p:nvSpPr>
-        <p:spPr>
-          <a:xfrm>
-            <a:off x="1051560" y="411480"/>
-            <a:ext cx="5486400" cy="365760"/>
-          </a:xfrm>
-          <a:prstGeom prst="rect">
-            <a:avLst/>
-          </a:prstGeom>
-          <a:noFill/>
-          <a:ln/>
-        </p:spPr>
-        <p:txBody>
-          <a:bodyPr wrap="square" lIns="0" tIns="0" rIns="0" bIns="0" rtlCol="0" anchor="ctr"/>
-          <a:lstStyle/>
-          <a:p>
-            <a:pPr marL="0" indent="0">
-              <a:buNone/>
-            </a:pPr>
-            <a:r>
-              <a:rPr lang="en-US" sz="1000" kern="0" spc="400" dirty="0">
-                <a:solidFill>
-                  <a:srgbClr val="6B7280"/>
-                </a:solidFill>
-                <a:latin typeface="Calibri" pitchFamily="34" charset="0"/>
-                <a:ea typeface="Calibri" pitchFamily="34" charset="-122"/>
-                <a:cs typeface="Calibri" pitchFamily="34" charset="-120"/>
-              </a:rPr>
-              <a:t>ARCHITECTURE DECISIONS</a:t>
-            </a:r>
-            <a:endParaRPr lang="en-US" sz="1000" dirty="0"/>
-          </a:p>
-        </p:txBody>
-      </p:sp>
-      <p:sp>
-        <p:nvSpPr>
-          <p:cNvPr id="4" name="Text 2"/>
-          <p:cNvSpPr/>
-          <p:nvPr/>
-        </p:nvSpPr>
-        <p:spPr>
-          <a:xfrm>
-            <a:off x="10789920" y="411480"/>
-            <a:ext cx="914400" cy="365760"/>
-          </a:xfrm>
-          <a:prstGeom prst="rect">
-            <a:avLst/>
-          </a:prstGeom>
-          <a:noFill/>
-          <a:ln/>
-        </p:spPr>
-        <p:txBody>
-          <a:bodyPr wrap="square" lIns="0" tIns="0" rIns="0" bIns="0" rtlCol="0" anchor="ctr"/>
-          <a:lstStyle/>
-          <a:p>
-            <a:pPr marL="0" indent="0" algn="r">
-              <a:buNone/>
-            </a:pPr>
-            <a:r>
-              <a:rPr lang="en-US" sz="1000" i="1" dirty="0">
-                <a:solidFill>
-                  <a:srgbClr val="9CA3AF"/>
-                </a:solidFill>
-                <a:latin typeface="Calibri" pitchFamily="34" charset="0"/>
-                <a:ea typeface="Calibri" pitchFamily="34" charset="-122"/>
-                <a:cs typeface="Calibri" pitchFamily="34" charset="-120"/>
-              </a:rPr>
-              <a:t>14 / 16</a:t>
-            </a:r>
-            <a:endParaRPr lang="en-US" sz="1000" dirty="0"/>
-          </a:p>
-        </p:txBody>
-      </p:sp>
-      <p:sp>
-        <p:nvSpPr>
-          <p:cNvPr id="5" name="Shape 3"/>
-          <p:cNvSpPr/>
-          <p:nvPr/>
-        </p:nvSpPr>
-        <p:spPr>
-          <a:xfrm>
-            <a:off x="502920" y="6355080"/>
-            <a:ext cx="11155680" cy="0"/>
-          </a:xfrm>
-          <a:prstGeom prst="line">
-            <a:avLst/>
-          </a:prstGeom>
-          <a:noFill/>
-          <a:ln w="6350">
-            <a:solidFill>
-              <a:srgbClr val="E5E7EB"/>
-            </a:solidFill>
-            <a:prstDash val="solid"/>
-          </a:ln>
-        </p:spPr>
-        <p:txBody>
-          <a:bodyPr/>
-          <a:lstStyle/>
-          <a:p>
-            <a:endParaRPr lang="en-US"/>
-          </a:p>
-        </p:txBody>
-      </p:sp>
-      <p:sp>
-        <p:nvSpPr>
-          <p:cNvPr id="6" name="Text 4"/>
-          <p:cNvSpPr/>
-          <p:nvPr/>
-        </p:nvSpPr>
-        <p:spPr>
-          <a:xfrm>
-            <a:off x="502920" y="6446520"/>
-            <a:ext cx="5486400" cy="256032"/>
-          </a:xfrm>
-          <a:prstGeom prst="rect">
-            <a:avLst/>
-          </a:prstGeom>
-          <a:noFill/>
-          <a:ln/>
-        </p:spPr>
-        <p:txBody>
-          <a:bodyPr wrap="square" lIns="0" tIns="0" rIns="0" bIns="0" rtlCol="0" anchor="ctr"/>
-          <a:lstStyle/>
-          <a:p>
-            <a:pPr marL="0" indent="0">
-              <a:buNone/>
-            </a:pPr>
-            <a:r>
-              <a:rPr lang="en-US" sz="900" i="1" dirty="0">
-                <a:solidFill>
-                  <a:srgbClr val="9CA3AF"/>
-                </a:solidFill>
-                <a:latin typeface="Calibri" pitchFamily="34" charset="0"/>
-                <a:ea typeface="Calibri" pitchFamily="34" charset="-122"/>
-                <a:cs typeface="Calibri" pitchFamily="34" charset="-120"/>
-              </a:rPr>
-              <a:t>Edge Language Coach  ·  Course Project  ·  2026</a:t>
-            </a:r>
-            <a:endParaRPr lang="en-US" sz="900" dirty="0"/>
-          </a:p>
-        </p:txBody>
-      </p:sp>
-      <p:sp>
-        <p:nvSpPr>
-          <p:cNvPr id="7" name="Text 5"/>
-          <p:cNvSpPr/>
-          <p:nvPr/>
-        </p:nvSpPr>
-        <p:spPr>
-          <a:xfrm>
-            <a:off x="7086600" y="6446520"/>
-            <a:ext cx="4572000" cy="256032"/>
-          </a:xfrm>
-          <a:prstGeom prst="rect">
-            <a:avLst/>
-          </a:prstGeom>
-          <a:noFill/>
-          <a:ln/>
-        </p:spPr>
-        <p:txBody>
-          <a:bodyPr wrap="square" lIns="0" tIns="0" rIns="0" bIns="0" rtlCol="0" anchor="ctr"/>
-          <a:lstStyle/>
-          <a:p>
-            <a:pPr marL="0" indent="0" algn="r">
-              <a:buNone/>
-            </a:pPr>
-            <a:r>
-              <a:rPr lang="en-US" sz="900" i="1" dirty="0">
-                <a:solidFill>
-                  <a:srgbClr val="9CA3AF"/>
-                </a:solidFill>
-                <a:latin typeface="Calibri" pitchFamily="34" charset="0"/>
-                <a:ea typeface="Calibri" pitchFamily="34" charset="-122"/>
-                <a:cs typeface="Calibri" pitchFamily="34" charset="-120"/>
-              </a:rPr>
-              <a:t>Ibrahim</a:t>
-            </a:r>
-            <a:endParaRPr lang="en-US" sz="900" dirty="0"/>
-          </a:p>
-        </p:txBody>
-      </p:sp>
-      <p:sp>
-        <p:nvSpPr>
-          <p:cNvPr id="8" name="Text 6"/>
-          <p:cNvSpPr/>
-          <p:nvPr/>
-        </p:nvSpPr>
-        <p:spPr>
-          <a:xfrm>
-            <a:off x="502920" y="914400"/>
-            <a:ext cx="11155680" cy="777240"/>
-          </a:xfrm>
-          <a:prstGeom prst="rect">
-            <a:avLst/>
-          </a:prstGeom>
-          <a:noFill/>
-          <a:ln/>
-        </p:spPr>
-        <p:txBody>
-          <a:bodyPr wrap="square" lIns="0" tIns="0" rIns="0" bIns="0" rtlCol="0" anchor="ctr"/>
-          <a:lstStyle/>
-          <a:p>
-            <a:pPr marL="0" indent="0">
-              <a:buNone/>
-            </a:pPr>
-            <a:r>
-              <a:rPr lang="en-US" sz="3000" dirty="0">
-                <a:solidFill>
-                  <a:srgbClr val="1A2238"/>
-                </a:solidFill>
-                <a:latin typeface="Cambria" pitchFamily="34" charset="0"/>
-                <a:ea typeface="Cambria" pitchFamily="34" charset="-122"/>
-                <a:cs typeface="Cambria" pitchFamily="34" charset="-120"/>
-              </a:rPr>
-              <a:t>Four architectural decisions, each with a cost</a:t>
-            </a:r>
-            <a:endParaRPr lang="en-US" sz="3000" dirty="0"/>
-          </a:p>
-        </p:txBody>
-      </p:sp>
-      <p:sp>
-        <p:nvSpPr>
-          <p:cNvPr id="9" name="Text 7"/>
-          <p:cNvSpPr/>
-          <p:nvPr/>
-        </p:nvSpPr>
-        <p:spPr>
-          <a:xfrm>
-            <a:off x="502920" y="1874520"/>
-            <a:ext cx="11155680" cy="457200"/>
-          </a:xfrm>
-          <a:prstGeom prst="rect">
-            <a:avLst/>
-          </a:prstGeom>
-          <a:noFill/>
-          <a:ln/>
-        </p:spPr>
-        <p:txBody>
-          <a:bodyPr wrap="square" lIns="0" tIns="0" rIns="0" bIns="0" rtlCol="0" anchor="ctr"/>
-          <a:lstStyle/>
-          <a:p>
-            <a:pPr marL="0" indent="0">
-              <a:buNone/>
-            </a:pPr>
-            <a:r>
-              <a:rPr lang="en-US" sz="1200" i="1" dirty="0">
-                <a:solidFill>
-                  <a:srgbClr val="333333"/>
-                </a:solidFill>
-                <a:latin typeface="Calibri" pitchFamily="34" charset="0"/>
-                <a:ea typeface="Calibri" pitchFamily="34" charset="-122"/>
-                <a:cs typeface="Calibri" pitchFamily="34" charset="-120"/>
-              </a:rPr>
-              <a:t>Trade-offs are recorded as architecture decision records (ADRs) under docs/adr/. The four most consequential decisions follow.</a:t>
-            </a:r>
-            <a:endParaRPr lang="en-US" sz="1200" dirty="0"/>
-          </a:p>
-        </p:txBody>
-      </p:sp>
-      <p:sp>
-        <p:nvSpPr>
-          <p:cNvPr id="10" name="Shape 8"/>
-          <p:cNvSpPr/>
-          <p:nvPr/>
-        </p:nvSpPr>
-        <p:spPr>
-          <a:xfrm>
-            <a:off x="502920" y="2514600"/>
-            <a:ext cx="5349240" cy="0"/>
-          </a:xfrm>
-          <a:prstGeom prst="line">
-            <a:avLst/>
-          </a:prstGeom>
-          <a:noFill/>
-          <a:ln w="12700">
-            <a:solidFill>
-              <a:srgbClr val="1A2238"/>
-            </a:solidFill>
-            <a:prstDash val="solid"/>
-          </a:ln>
-        </p:spPr>
-        <p:txBody>
-          <a:bodyPr/>
-          <a:lstStyle/>
-          <a:p>
-            <a:endParaRPr lang="en-US"/>
-          </a:p>
-        </p:txBody>
-      </p:sp>
-      <p:sp>
-        <p:nvSpPr>
-          <p:cNvPr id="11" name="Text 9"/>
-          <p:cNvSpPr/>
-          <p:nvPr/>
-        </p:nvSpPr>
-        <p:spPr>
-          <a:xfrm>
-            <a:off x="502920" y="2606040"/>
-            <a:ext cx="1463040" cy="274320"/>
-          </a:xfrm>
-          <a:prstGeom prst="rect">
-            <a:avLst/>
-          </a:prstGeom>
-          <a:noFill/>
-          <a:ln/>
-        </p:spPr>
-        <p:txBody>
-          <a:bodyPr wrap="square" lIns="0" tIns="0" rIns="0" bIns="0" rtlCol="0" anchor="ctr"/>
-          <a:lstStyle/>
-          <a:p>
-            <a:pPr marL="0" indent="0">
-              <a:buNone/>
-            </a:pPr>
-            <a:r>
-              <a:rPr lang="en-US" sz="1000" kern="0" spc="300" dirty="0">
-                <a:solidFill>
-                  <a:srgbClr val="7A2E3B"/>
-                </a:solidFill>
-                <a:latin typeface="Calibri" pitchFamily="34" charset="0"/>
-                <a:ea typeface="Calibri" pitchFamily="34" charset="-122"/>
-                <a:cs typeface="Calibri" pitchFamily="34" charset="-120"/>
-              </a:rPr>
-              <a:t>ADR-001</a:t>
-            </a:r>
-            <a:endParaRPr lang="en-US" sz="1000" dirty="0"/>
-          </a:p>
-        </p:txBody>
-      </p:sp>
-      <p:sp>
-        <p:nvSpPr>
-          <p:cNvPr id="12" name="Text 10"/>
-          <p:cNvSpPr/>
-          <p:nvPr/>
-        </p:nvSpPr>
-        <p:spPr>
-          <a:xfrm>
-            <a:off x="502920" y="2880360"/>
-            <a:ext cx="5349240" cy="411480"/>
-          </a:xfrm>
-          <a:prstGeom prst="rect">
-            <a:avLst/>
-          </a:prstGeom>
-          <a:noFill/>
-          <a:ln/>
-        </p:spPr>
-        <p:txBody>
-          <a:bodyPr wrap="square" lIns="0" tIns="0" rIns="0" bIns="0" rtlCol="0" anchor="ctr"/>
-          <a:lstStyle/>
-          <a:p>
-            <a:pPr marL="0" indent="0">
-              <a:buNone/>
-            </a:pPr>
-            <a:r>
-              <a:rPr lang="en-US" sz="1500" dirty="0">
-                <a:solidFill>
-                  <a:srgbClr val="1A2238"/>
-                </a:solidFill>
-                <a:latin typeface="Cambria" pitchFamily="34" charset="0"/>
-                <a:ea typeface="Cambria" pitchFamily="34" charset="-122"/>
-                <a:cs typeface="Cambria" pitchFamily="34" charset="-120"/>
-              </a:rPr>
-              <a:t>Node.js workers, not Go microservices</a:t>
-            </a:r>
-            <a:endParaRPr lang="en-US" sz="1500" dirty="0"/>
-          </a:p>
-        </p:txBody>
-      </p:sp>
-      <p:sp>
-        <p:nvSpPr>
-          <p:cNvPr id="13" name="Text 11"/>
-          <p:cNvSpPr/>
-          <p:nvPr/>
-        </p:nvSpPr>
-        <p:spPr>
-          <a:xfrm>
-            <a:off x="502920" y="3383280"/>
-            <a:ext cx="5349240" cy="868680"/>
-          </a:xfrm>
-          <a:prstGeom prst="rect">
-            <a:avLst/>
-          </a:prstGeom>
-          <a:noFill/>
-          <a:ln/>
-        </p:spPr>
-        <p:txBody>
-          <a:bodyPr wrap="square" lIns="0" tIns="0" rIns="0" bIns="0" rtlCol="0" anchor="ctr"/>
-          <a:lstStyle/>
-          <a:p>
-            <a:pPr marL="0" indent="0">
-              <a:lnSpc>
-                <a:spcPct val="140000"/>
-              </a:lnSpc>
-              <a:buNone/>
-            </a:pPr>
-            <a:r>
-              <a:rPr lang="en-US" sz="1100" b="1" i="1" dirty="0">
-                <a:solidFill>
-                  <a:srgbClr val="333333"/>
-                </a:solidFill>
-                <a:latin typeface="Calibri" pitchFamily="34" charset="0"/>
-                <a:ea typeface="Calibri" pitchFamily="34" charset="-122"/>
-                <a:cs typeface="Calibri" pitchFamily="34" charset="-120"/>
-              </a:rPr>
-              <a:t>Positive  </a:t>
-            </a:r>
-            <a:r>
-              <a:rPr lang="en-US" sz="1100" dirty="0">
-                <a:solidFill>
-                  <a:srgbClr val="333333"/>
-                </a:solidFill>
-                <a:latin typeface="Calibri" pitchFamily="34" charset="0"/>
-                <a:ea typeface="Calibri" pitchFamily="34" charset="-122"/>
-                <a:cs typeface="Calibri" pitchFamily="34" charset="-120"/>
-              </a:rPr>
-              <a:t>Shared TypeScript types · single toolchain · faster iteration.</a:t>
-            </a:r>
-            <a:endParaRPr lang="en-US" sz="1100" dirty="0"/>
-          </a:p>
-          <a:p>
-            <a:pPr marL="0" indent="0">
-              <a:lnSpc>
-                <a:spcPct val="140000"/>
-              </a:lnSpc>
-              <a:buNone/>
-            </a:pPr>
-            <a:r>
-              <a:rPr lang="en-US" sz="1100" b="1" i="1" dirty="0">
-                <a:solidFill>
-                  <a:srgbClr val="7A2E3B"/>
-                </a:solidFill>
-                <a:latin typeface="Calibri" pitchFamily="34" charset="0"/>
-                <a:ea typeface="Calibri" pitchFamily="34" charset="-122"/>
-                <a:cs typeface="Calibri" pitchFamily="34" charset="-120"/>
-              </a:rPr>
-              <a:t>Negative  </a:t>
-            </a:r>
-            <a:r>
-              <a:rPr lang="en-US" sz="1100" dirty="0">
-                <a:solidFill>
-                  <a:srgbClr val="333333"/>
-                </a:solidFill>
-                <a:latin typeface="Calibri" pitchFamily="34" charset="0"/>
-                <a:ea typeface="Calibri" pitchFamily="34" charset="-122"/>
-                <a:cs typeface="Calibri" pitchFamily="34" charset="-120"/>
-              </a:rPr>
-              <a:t>Workers cannot scale independently — one service scales all three.</a:t>
-            </a:r>
-            <a:endParaRPr lang="en-US" sz="1100" dirty="0"/>
-          </a:p>
-        </p:txBody>
-      </p:sp>
-      <p:sp>
-        <p:nvSpPr>
-          <p:cNvPr id="14" name="Shape 12"/>
-          <p:cNvSpPr/>
-          <p:nvPr/>
-        </p:nvSpPr>
-        <p:spPr>
-          <a:xfrm>
-            <a:off x="6355080" y="2514600"/>
-            <a:ext cx="5349240" cy="0"/>
-          </a:xfrm>
-          <a:prstGeom prst="line">
-            <a:avLst/>
-          </a:prstGeom>
-          <a:noFill/>
-          <a:ln w="12700">
-            <a:solidFill>
-              <a:srgbClr val="1A2238"/>
-            </a:solidFill>
-            <a:prstDash val="solid"/>
-          </a:ln>
-        </p:spPr>
-        <p:txBody>
-          <a:bodyPr/>
-          <a:lstStyle/>
-          <a:p>
-            <a:endParaRPr lang="en-US"/>
-          </a:p>
-        </p:txBody>
-      </p:sp>
-      <p:sp>
-        <p:nvSpPr>
-          <p:cNvPr id="15" name="Text 13"/>
-          <p:cNvSpPr/>
-          <p:nvPr/>
-        </p:nvSpPr>
-        <p:spPr>
-          <a:xfrm>
-            <a:off x="6355080" y="2606040"/>
-            <a:ext cx="1463040" cy="274320"/>
-          </a:xfrm>
-          <a:prstGeom prst="rect">
-            <a:avLst/>
-          </a:prstGeom>
-          <a:noFill/>
-          <a:ln/>
-        </p:spPr>
-        <p:txBody>
-          <a:bodyPr wrap="square" lIns="0" tIns="0" rIns="0" bIns="0" rtlCol="0" anchor="ctr"/>
-          <a:lstStyle/>
-          <a:p>
-            <a:pPr marL="0" indent="0">
-              <a:buNone/>
-            </a:pPr>
-            <a:r>
-              <a:rPr lang="en-US" sz="1000" kern="0" spc="300" dirty="0">
-                <a:solidFill>
-                  <a:srgbClr val="7A2E3B"/>
-                </a:solidFill>
-                <a:latin typeface="Calibri" pitchFamily="34" charset="0"/>
-                <a:ea typeface="Calibri" pitchFamily="34" charset="-122"/>
-                <a:cs typeface="Calibri" pitchFamily="34" charset="-120"/>
-              </a:rPr>
-              <a:t>ADR-002</a:t>
-            </a:r>
-            <a:endParaRPr lang="en-US" sz="1000" dirty="0"/>
-          </a:p>
-        </p:txBody>
-      </p:sp>
-      <p:sp>
-        <p:nvSpPr>
-          <p:cNvPr id="16" name="Text 14"/>
-          <p:cNvSpPr/>
-          <p:nvPr/>
-        </p:nvSpPr>
-        <p:spPr>
-          <a:xfrm>
-            <a:off x="6355080" y="2880360"/>
-            <a:ext cx="5349240" cy="411480"/>
-          </a:xfrm>
-          <a:prstGeom prst="rect">
-            <a:avLst/>
-          </a:prstGeom>
-          <a:noFill/>
-          <a:ln/>
-        </p:spPr>
-        <p:txBody>
-          <a:bodyPr wrap="square" lIns="0" tIns="0" rIns="0" bIns="0" rtlCol="0" anchor="ctr"/>
-          <a:lstStyle/>
-          <a:p>
-            <a:pPr marL="0" indent="0">
-              <a:buNone/>
-            </a:pPr>
-            <a:r>
-              <a:rPr lang="en-US" sz="1500" dirty="0">
-                <a:solidFill>
-                  <a:srgbClr val="1A2238"/>
-                </a:solidFill>
-                <a:latin typeface="Cambria" pitchFamily="34" charset="0"/>
-                <a:ea typeface="Cambria" pitchFamily="34" charset="-122"/>
-                <a:cs typeface="Cambria" pitchFamily="34" charset="-120"/>
-              </a:rPr>
-              <a:t>BullMQ on Redis, not RabbitMQ</a:t>
-            </a:r>
-            <a:endParaRPr lang="en-US" sz="1500" dirty="0"/>
-          </a:p>
-        </p:txBody>
-      </p:sp>
-      <p:sp>
-        <p:nvSpPr>
-          <p:cNvPr id="17" name="Text 15"/>
-          <p:cNvSpPr/>
-          <p:nvPr/>
-        </p:nvSpPr>
-        <p:spPr>
-          <a:xfrm>
-            <a:off x="6355080" y="3383280"/>
-            <a:ext cx="5349240" cy="868680"/>
-          </a:xfrm>
-          <a:prstGeom prst="rect">
-            <a:avLst/>
-          </a:prstGeom>
-          <a:noFill/>
-          <a:ln/>
-        </p:spPr>
-        <p:txBody>
-          <a:bodyPr wrap="square" lIns="0" tIns="0" rIns="0" bIns="0" rtlCol="0" anchor="ctr"/>
-          <a:lstStyle/>
-          <a:p>
-            <a:pPr marL="0" indent="0">
-              <a:lnSpc>
-                <a:spcPct val="140000"/>
-              </a:lnSpc>
-              <a:buNone/>
-            </a:pPr>
-            <a:r>
-              <a:rPr lang="en-US" sz="1100" b="1" i="1" dirty="0">
-                <a:solidFill>
-                  <a:srgbClr val="333333"/>
-                </a:solidFill>
-                <a:latin typeface="Calibri" pitchFamily="34" charset="0"/>
-                <a:ea typeface="Calibri" pitchFamily="34" charset="-122"/>
-                <a:cs typeface="Calibri" pitchFamily="34" charset="-120"/>
-              </a:rPr>
-              <a:t>Positive  </a:t>
-            </a:r>
-            <a:r>
-              <a:rPr lang="en-US" sz="1100" dirty="0">
-                <a:solidFill>
-                  <a:srgbClr val="333333"/>
-                </a:solidFill>
-                <a:latin typeface="Calibri" pitchFamily="34" charset="0"/>
-                <a:ea typeface="Calibri" pitchFamily="34" charset="-122"/>
-                <a:cs typeface="Calibri" pitchFamily="34" charset="-120"/>
-              </a:rPr>
-              <a:t>One dependency · rate-limit + queue share Redis · TypeScript-native.</a:t>
-            </a:r>
-            <a:endParaRPr lang="en-US" sz="1100" dirty="0"/>
-          </a:p>
-          <a:p>
-            <a:pPr marL="0" indent="0">
-              <a:lnSpc>
-                <a:spcPct val="140000"/>
-              </a:lnSpc>
-              <a:buNone/>
-            </a:pPr>
-            <a:r>
-              <a:rPr lang="en-US" sz="1100" b="1" i="1" dirty="0">
-                <a:solidFill>
-                  <a:srgbClr val="7A2E3B"/>
-                </a:solidFill>
-                <a:latin typeface="Calibri" pitchFamily="34" charset="0"/>
-                <a:ea typeface="Calibri" pitchFamily="34" charset="-122"/>
-                <a:cs typeface="Calibri" pitchFamily="34" charset="-120"/>
-              </a:rPr>
-              <a:t>Negative  </a:t>
-            </a:r>
-            <a:r>
-              <a:rPr lang="en-US" sz="1100" dirty="0">
-                <a:solidFill>
-                  <a:srgbClr val="333333"/>
-                </a:solidFill>
-                <a:latin typeface="Calibri" pitchFamily="34" charset="0"/>
-                <a:ea typeface="Calibri" pitchFamily="34" charset="-122"/>
-                <a:cs typeface="Calibri" pitchFamily="34" charset="-120"/>
-              </a:rPr>
-              <a:t>Redis is not a purpose-built broker; AOF persistence required in production.</a:t>
-            </a:r>
-            <a:endParaRPr lang="en-US" sz="1100" dirty="0"/>
-          </a:p>
-        </p:txBody>
-      </p:sp>
-      <p:sp>
-        <p:nvSpPr>
-          <p:cNvPr id="18" name="Shape 16"/>
-          <p:cNvSpPr/>
-          <p:nvPr/>
-        </p:nvSpPr>
-        <p:spPr>
-          <a:xfrm>
-            <a:off x="502920" y="4343400"/>
-            <a:ext cx="5349240" cy="0"/>
-          </a:xfrm>
-          <a:prstGeom prst="line">
-            <a:avLst/>
-          </a:prstGeom>
-          <a:noFill/>
-          <a:ln w="12700">
-            <a:solidFill>
-              <a:srgbClr val="1A2238"/>
-            </a:solidFill>
-            <a:prstDash val="solid"/>
-          </a:ln>
-        </p:spPr>
-        <p:txBody>
-          <a:bodyPr/>
-          <a:lstStyle/>
-          <a:p>
-            <a:endParaRPr lang="en-US"/>
-          </a:p>
-        </p:txBody>
-      </p:sp>
-      <p:sp>
-        <p:nvSpPr>
-          <p:cNvPr id="19" name="Text 17"/>
-          <p:cNvSpPr/>
-          <p:nvPr/>
-        </p:nvSpPr>
-        <p:spPr>
-          <a:xfrm>
-            <a:off x="502920" y="4434840"/>
-            <a:ext cx="1463040" cy="274320"/>
-          </a:xfrm>
-          <a:prstGeom prst="rect">
-            <a:avLst/>
-          </a:prstGeom>
-          <a:noFill/>
-          <a:ln/>
-        </p:spPr>
-        <p:txBody>
-          <a:bodyPr wrap="square" lIns="0" tIns="0" rIns="0" bIns="0" rtlCol="0" anchor="ctr"/>
-          <a:lstStyle/>
-          <a:p>
-            <a:pPr marL="0" indent="0">
-              <a:buNone/>
-            </a:pPr>
-            <a:r>
-              <a:rPr lang="en-US" sz="1000" kern="0" spc="300" dirty="0">
-                <a:solidFill>
-                  <a:srgbClr val="7A2E3B"/>
-                </a:solidFill>
-                <a:latin typeface="Calibri" pitchFamily="34" charset="0"/>
-                <a:ea typeface="Calibri" pitchFamily="34" charset="-122"/>
-                <a:cs typeface="Calibri" pitchFamily="34" charset="-120"/>
-              </a:rPr>
-              <a:t>ADR-003</a:t>
-            </a:r>
-            <a:endParaRPr lang="en-US" sz="1000" dirty="0"/>
-          </a:p>
-        </p:txBody>
-      </p:sp>
-      <p:sp>
-        <p:nvSpPr>
-          <p:cNvPr id="20" name="Text 18"/>
-          <p:cNvSpPr/>
-          <p:nvPr/>
-        </p:nvSpPr>
-        <p:spPr>
-          <a:xfrm>
-            <a:off x="502920" y="4709160"/>
-            <a:ext cx="5349240" cy="411480"/>
-          </a:xfrm>
-          <a:prstGeom prst="rect">
-            <a:avLst/>
-          </a:prstGeom>
-          <a:noFill/>
-          <a:ln/>
-        </p:spPr>
-        <p:txBody>
-          <a:bodyPr wrap="square" lIns="0" tIns="0" rIns="0" bIns="0" rtlCol="0" anchor="ctr"/>
-          <a:lstStyle/>
-          <a:p>
-            <a:pPr marL="0" indent="0">
-              <a:buNone/>
-            </a:pPr>
-            <a:r>
-              <a:rPr lang="en-US" sz="1500" dirty="0">
-                <a:solidFill>
-                  <a:srgbClr val="1A2238"/>
-                </a:solidFill>
-                <a:latin typeface="Cambria" pitchFamily="34" charset="0"/>
-                <a:ea typeface="Cambria" pitchFamily="34" charset="-122"/>
-                <a:cs typeface="Cambria" pitchFamily="34" charset="-120"/>
-              </a:rPr>
-              <a:t>Supabase, not self-hosted Postgres</a:t>
-            </a:r>
-            <a:endParaRPr lang="en-US" sz="1500" dirty="0"/>
-          </a:p>
-        </p:txBody>
-      </p:sp>
-      <p:sp>
-        <p:nvSpPr>
-          <p:cNvPr id="21" name="Text 19"/>
-          <p:cNvSpPr/>
-          <p:nvPr/>
-        </p:nvSpPr>
-        <p:spPr>
-          <a:xfrm>
-            <a:off x="502920" y="5212080"/>
-            <a:ext cx="5349240" cy="868680"/>
-          </a:xfrm>
-          <a:prstGeom prst="rect">
-            <a:avLst/>
-          </a:prstGeom>
-          <a:noFill/>
-          <a:ln/>
-        </p:spPr>
-        <p:txBody>
-          <a:bodyPr wrap="square" lIns="0" tIns="0" rIns="0" bIns="0" rtlCol="0" anchor="ctr"/>
-          <a:lstStyle/>
-          <a:p>
-            <a:pPr marL="0" indent="0">
-              <a:lnSpc>
-                <a:spcPct val="140000"/>
-              </a:lnSpc>
-              <a:buNone/>
-            </a:pPr>
-            <a:r>
-              <a:rPr lang="en-US" sz="1100" b="1" i="1" dirty="0">
-                <a:solidFill>
-                  <a:srgbClr val="333333"/>
-                </a:solidFill>
-                <a:latin typeface="Calibri" pitchFamily="34" charset="0"/>
-                <a:ea typeface="Calibri" pitchFamily="34" charset="-122"/>
-                <a:cs typeface="Calibri" pitchFamily="34" charset="-120"/>
-              </a:rPr>
-              <a:t>Positive  </a:t>
-            </a:r>
-            <a:r>
-              <a:rPr lang="en-US" sz="1100" dirty="0">
-                <a:solidFill>
-                  <a:srgbClr val="333333"/>
-                </a:solidFill>
-                <a:latin typeface="Calibri" pitchFamily="34" charset="0"/>
-                <a:ea typeface="Calibri" pitchFamily="34" charset="-122"/>
-                <a:cs typeface="Calibri" pitchFamily="34" charset="-120"/>
-              </a:rPr>
-              <a:t>Authentication and row-level security out of the box · no DB ops.</a:t>
-            </a:r>
-            <a:endParaRPr lang="en-US" sz="1100" dirty="0"/>
-          </a:p>
-          <a:p>
-            <a:pPr marL="0" indent="0">
-              <a:lnSpc>
-                <a:spcPct val="140000"/>
-              </a:lnSpc>
-              <a:buNone/>
-            </a:pPr>
-            <a:r>
-              <a:rPr lang="en-US" sz="1100" b="1" i="1" dirty="0">
-                <a:solidFill>
-                  <a:srgbClr val="7A2E3B"/>
-                </a:solidFill>
-                <a:latin typeface="Calibri" pitchFamily="34" charset="0"/>
-                <a:ea typeface="Calibri" pitchFamily="34" charset="-122"/>
-                <a:cs typeface="Calibri" pitchFamily="34" charset="-120"/>
-              </a:rPr>
-              <a:t>Negative  </a:t>
-            </a:r>
-            <a:r>
-              <a:rPr lang="en-US" sz="1100" dirty="0">
-                <a:solidFill>
-                  <a:srgbClr val="333333"/>
-                </a:solidFill>
-                <a:latin typeface="Calibri" pitchFamily="34" charset="0"/>
-                <a:ea typeface="Calibri" pitchFamily="34" charset="-122"/>
-                <a:cs typeface="Calibri" pitchFamily="34" charset="-120"/>
-              </a:rPr>
-              <a:t>External dependency · cannot run fully offline · partial vendor lock-in.</a:t>
-            </a:r>
-            <a:endParaRPr lang="en-US" sz="1100" dirty="0"/>
-          </a:p>
-        </p:txBody>
-      </p:sp>
-      <p:sp>
-        <p:nvSpPr>
-          <p:cNvPr id="22" name="Shape 20"/>
-          <p:cNvSpPr/>
-          <p:nvPr/>
-        </p:nvSpPr>
-        <p:spPr>
-          <a:xfrm>
-            <a:off x="6355080" y="4343400"/>
-            <a:ext cx="5349240" cy="0"/>
-          </a:xfrm>
-          <a:prstGeom prst="line">
-            <a:avLst/>
-          </a:prstGeom>
-          <a:noFill/>
-          <a:ln w="12700">
-            <a:solidFill>
-              <a:srgbClr val="1A2238"/>
-            </a:solidFill>
-            <a:prstDash val="solid"/>
-          </a:ln>
-        </p:spPr>
-        <p:txBody>
-          <a:bodyPr/>
-          <a:lstStyle/>
-          <a:p>
-            <a:endParaRPr lang="en-US"/>
-          </a:p>
-        </p:txBody>
-      </p:sp>
-      <p:sp>
-        <p:nvSpPr>
-          <p:cNvPr id="23" name="Text 21"/>
-          <p:cNvSpPr/>
-          <p:nvPr/>
-        </p:nvSpPr>
-        <p:spPr>
-          <a:xfrm>
-            <a:off x="6355080" y="4434840"/>
-            <a:ext cx="1463040" cy="274320"/>
-          </a:xfrm>
-          <a:prstGeom prst="rect">
-            <a:avLst/>
-          </a:prstGeom>
-          <a:noFill/>
-          <a:ln/>
-        </p:spPr>
-        <p:txBody>
-          <a:bodyPr wrap="square" lIns="0" tIns="0" rIns="0" bIns="0" rtlCol="0" anchor="ctr"/>
-          <a:lstStyle/>
-          <a:p>
-            <a:pPr marL="0" indent="0">
-              <a:buNone/>
-            </a:pPr>
-            <a:r>
-              <a:rPr lang="en-US" sz="1000" kern="0" spc="300" dirty="0">
-                <a:solidFill>
-                  <a:srgbClr val="7A2E3B"/>
-                </a:solidFill>
-                <a:latin typeface="Calibri" pitchFamily="34" charset="0"/>
-                <a:ea typeface="Calibri" pitchFamily="34" charset="-122"/>
-                <a:cs typeface="Calibri" pitchFamily="34" charset="-120"/>
-              </a:rPr>
-              <a:t>ADR-004</a:t>
-            </a:r>
-            <a:endParaRPr lang="en-US" sz="1000" dirty="0"/>
-          </a:p>
-        </p:txBody>
-      </p:sp>
-      <p:sp>
-        <p:nvSpPr>
-          <p:cNvPr id="24" name="Text 22"/>
-          <p:cNvSpPr/>
-          <p:nvPr/>
-        </p:nvSpPr>
-        <p:spPr>
-          <a:xfrm>
-            <a:off x="6355080" y="4709160"/>
-            <a:ext cx="5349240" cy="411480"/>
-          </a:xfrm>
-          <a:prstGeom prst="rect">
-            <a:avLst/>
-          </a:prstGeom>
-          <a:noFill/>
-          <a:ln/>
-        </p:spPr>
-        <p:txBody>
-          <a:bodyPr wrap="square" lIns="0" tIns="0" rIns="0" bIns="0" rtlCol="0" anchor="ctr"/>
-          <a:lstStyle/>
-          <a:p>
-            <a:pPr marL="0" indent="0">
-              <a:buNone/>
-            </a:pPr>
-            <a:r>
-              <a:rPr lang="en-US" sz="1500" dirty="0">
-                <a:solidFill>
-                  <a:srgbClr val="1A2238"/>
-                </a:solidFill>
-                <a:latin typeface="Cambria" pitchFamily="34" charset="0"/>
-                <a:ea typeface="Cambria" pitchFamily="34" charset="-122"/>
-                <a:cs typeface="Cambria" pitchFamily="34" charset="-120"/>
-              </a:rPr>
-              <a:t>prom-client only, not full OpenTelemetry</a:t>
-            </a:r>
-            <a:endParaRPr lang="en-US" sz="1500" dirty="0"/>
-          </a:p>
-        </p:txBody>
-      </p:sp>
-      <p:sp>
-        <p:nvSpPr>
-          <p:cNvPr id="25" name="Text 23"/>
-          <p:cNvSpPr/>
-          <p:nvPr/>
-        </p:nvSpPr>
-        <p:spPr>
-          <a:xfrm>
-            <a:off x="6355080" y="5212080"/>
-            <a:ext cx="5349240" cy="868680"/>
-          </a:xfrm>
-          <a:prstGeom prst="rect">
-            <a:avLst/>
-          </a:prstGeom>
-          <a:noFill/>
-          <a:ln/>
-        </p:spPr>
-        <p:txBody>
-          <a:bodyPr wrap="square" lIns="0" tIns="0" rIns="0" bIns="0" rtlCol="0" anchor="ctr"/>
-          <a:lstStyle/>
-          <a:p>
-            <a:pPr marL="0" indent="0">
-              <a:lnSpc>
-                <a:spcPct val="140000"/>
-              </a:lnSpc>
-              <a:buNone/>
-            </a:pPr>
-            <a:r>
-              <a:rPr lang="en-US" sz="1100" b="1" i="1" dirty="0">
-                <a:solidFill>
-                  <a:srgbClr val="333333"/>
-                </a:solidFill>
-                <a:latin typeface="Calibri" pitchFamily="34" charset="0"/>
-                <a:ea typeface="Calibri" pitchFamily="34" charset="-122"/>
-                <a:cs typeface="Calibri" pitchFamily="34" charset="-120"/>
-              </a:rPr>
-              <a:t>Positive  </a:t>
-            </a:r>
-            <a:r>
-              <a:rPr lang="en-US" sz="1100" dirty="0">
-                <a:solidFill>
-                  <a:srgbClr val="333333"/>
-                </a:solidFill>
-                <a:latin typeface="Calibri" pitchFamily="34" charset="0"/>
-                <a:ea typeface="Calibri" pitchFamily="34" charset="-122"/>
-                <a:cs typeface="Calibri" pitchFamily="34" charset="-120"/>
-              </a:rPr>
-              <a:t>Minimal dependency footprint · ten-line Fastify instrumentation.</a:t>
-            </a:r>
-            <a:endParaRPr lang="en-US" sz="1100" dirty="0"/>
-          </a:p>
-          <a:p>
-            <a:pPr marL="0" indent="0">
-              <a:lnSpc>
-                <a:spcPct val="140000"/>
-              </a:lnSpc>
-              <a:buNone/>
-            </a:pPr>
-            <a:r>
-              <a:rPr lang="en-US" sz="1100" b="1" i="1" dirty="0">
-                <a:solidFill>
-                  <a:srgbClr val="7A2E3B"/>
-                </a:solidFill>
-                <a:latin typeface="Calibri" pitchFamily="34" charset="0"/>
-                <a:ea typeface="Calibri" pitchFamily="34" charset="-122"/>
-                <a:cs typeface="Calibri" pitchFamily="34" charset="-120"/>
-              </a:rPr>
-              <a:t>Negative  </a:t>
-            </a:r>
-            <a:r>
-              <a:rPr lang="en-US" sz="1100" dirty="0">
-                <a:solidFill>
-                  <a:srgbClr val="333333"/>
-                </a:solidFill>
-                <a:latin typeface="Calibri" pitchFamily="34" charset="0"/>
-                <a:ea typeface="Calibri" pitchFamily="34" charset="-122"/>
-                <a:cs typeface="Calibri" pitchFamily="34" charset="-120"/>
-              </a:rPr>
-              <a:t>No cross-service tracing; partly compensated by the MCP read tools.</a:t>
-            </a:r>
-            <a:endParaRPr lang="en-US" sz="1100" dirty="0"/>
-          </a:p>
-        </p:txBody>
-      </p:sp>
-    </p:spTree>
-  </p:cSld>
-  <p:clrMapOvr>
-    <a:masterClrMapping/>
-  </p:clrMapOvr>
-</p:sld>
-</file>
-
-<file path=ppt/slides/slide15.xml><?xml version="1.0" encoding="utf-8"?>
-<p:sld xmlns:a="http://schemas.openxmlformats.org/drawingml/2006/main" xmlns:r="http://schemas.openxmlformats.org/officeDocument/2006/relationships" xmlns:p="http://schemas.openxmlformats.org/presentationml/2006/main" show="0">
   <p:cSld name="Slide 14">
     <p:bg>
       <p:bgPr>
@@ -18302,6 +18629,1110 @@
 
 <file path=ppt/slides/slide6.xml><?xml version="1.0" encoding="utf-8"?>
 <p:sld xmlns:a="http://schemas.openxmlformats.org/drawingml/2006/main" xmlns:r="http://schemas.openxmlformats.org/officeDocument/2006/relationships" xmlns:p="http://schemas.openxmlformats.org/presentationml/2006/main">
+  <p:cSld name="Slide 13">
+    <p:bg>
+      <p:bgPr>
+        <a:solidFill>
+          <a:srgbClr val="FFFFFF"/>
+        </a:solidFill>
+        <a:effectLst/>
+      </p:bgPr>
+    </p:bg>
+    <p:spTree>
+      <p:nvGrpSpPr>
+        <p:cNvPr id="1" name=""/>
+        <p:cNvGrpSpPr/>
+        <p:nvPr/>
+      </p:nvGrpSpPr>
+      <p:grpSpPr>
+        <a:xfrm>
+          <a:off x="0" y="0"/>
+          <a:ext cx="0" cy="0"/>
+          <a:chOff x="0" y="0"/>
+          <a:chExt cx="0" cy="0"/>
+        </a:xfrm>
+      </p:grpSpPr>
+      <p:sp>
+        <p:nvSpPr>
+          <p:cNvPr id="2" name="Text 0"/>
+          <p:cNvSpPr/>
+          <p:nvPr/>
+        </p:nvSpPr>
+        <p:spPr>
+          <a:xfrm>
+            <a:off x="502920" y="411480"/>
+            <a:ext cx="640080" cy="365760"/>
+          </a:xfrm>
+          <a:prstGeom prst="rect">
+            <a:avLst/>
+          </a:prstGeom>
+          <a:noFill/>
+          <a:ln/>
+        </p:spPr>
+        <p:txBody>
+          <a:bodyPr wrap="square" lIns="0" tIns="0" rIns="0" bIns="0" rtlCol="0" anchor="ctr"/>
+          <a:lstStyle/>
+          <a:p>
+            <a:pPr marL="0" indent="0">
+              <a:buNone/>
+            </a:pPr>
+            <a:r>
+              <a:rPr lang="en-US" sz="1400" i="1" dirty="0">
+                <a:solidFill>
+                  <a:srgbClr val="7A2E3B"/>
+                </a:solidFill>
+                <a:latin typeface="Cambria" pitchFamily="34" charset="0"/>
+                <a:ea typeface="Cambria" pitchFamily="34" charset="-122"/>
+                <a:cs typeface="Cambria" pitchFamily="34" charset="-120"/>
+              </a:rPr>
+              <a:t>V.</a:t>
+            </a:r>
+            <a:endParaRPr lang="en-US" sz="1400" dirty="0"/>
+          </a:p>
+        </p:txBody>
+      </p:sp>
+      <p:sp>
+        <p:nvSpPr>
+          <p:cNvPr id="3" name="Text 1"/>
+          <p:cNvSpPr/>
+          <p:nvPr/>
+        </p:nvSpPr>
+        <p:spPr>
+          <a:xfrm>
+            <a:off x="1051560" y="411480"/>
+            <a:ext cx="5486400" cy="365760"/>
+          </a:xfrm>
+          <a:prstGeom prst="rect">
+            <a:avLst/>
+          </a:prstGeom>
+          <a:noFill/>
+          <a:ln/>
+        </p:spPr>
+        <p:txBody>
+          <a:bodyPr wrap="square" lIns="0" tIns="0" rIns="0" bIns="0" rtlCol="0" anchor="ctr"/>
+          <a:lstStyle/>
+          <a:p>
+            <a:pPr marL="0" indent="0">
+              <a:buNone/>
+            </a:pPr>
+            <a:r>
+              <a:rPr lang="en-US" sz="1000" kern="0" spc="400" dirty="0">
+                <a:solidFill>
+                  <a:srgbClr val="6B7280"/>
+                </a:solidFill>
+                <a:latin typeface="Calibri" pitchFamily="34" charset="0"/>
+                <a:ea typeface="Calibri" pitchFamily="34" charset="-122"/>
+                <a:cs typeface="Calibri" pitchFamily="34" charset="-120"/>
+              </a:rPr>
+              <a:t>ARCHITECTURE DECISIONS</a:t>
+            </a:r>
+            <a:endParaRPr lang="en-US" sz="1000" dirty="0"/>
+          </a:p>
+        </p:txBody>
+      </p:sp>
+      <p:sp>
+        <p:nvSpPr>
+          <p:cNvPr id="4" name="Text 2"/>
+          <p:cNvSpPr/>
+          <p:nvPr/>
+        </p:nvSpPr>
+        <p:spPr>
+          <a:xfrm>
+            <a:off x="10789920" y="411480"/>
+            <a:ext cx="914400" cy="365760"/>
+          </a:xfrm>
+          <a:prstGeom prst="rect">
+            <a:avLst/>
+          </a:prstGeom>
+          <a:noFill/>
+          <a:ln/>
+        </p:spPr>
+        <p:txBody>
+          <a:bodyPr wrap="square" lIns="0" tIns="0" rIns="0" bIns="0" rtlCol="0" anchor="ctr"/>
+          <a:lstStyle/>
+          <a:p>
+            <a:pPr marL="0" indent="0" algn="r">
+              <a:buNone/>
+            </a:pPr>
+            <a:r>
+              <a:rPr lang="en-US" sz="1000" i="1" dirty="0">
+                <a:solidFill>
+                  <a:srgbClr val="9CA3AF"/>
+                </a:solidFill>
+                <a:latin typeface="Calibri" pitchFamily="34" charset="0"/>
+                <a:ea typeface="Calibri" pitchFamily="34" charset="-122"/>
+                <a:cs typeface="Calibri" pitchFamily="34" charset="-120"/>
+              </a:rPr>
+              <a:t>14 / 16</a:t>
+            </a:r>
+            <a:endParaRPr lang="en-US" sz="1000" dirty="0"/>
+          </a:p>
+        </p:txBody>
+      </p:sp>
+      <p:sp>
+        <p:nvSpPr>
+          <p:cNvPr id="5" name="Shape 3"/>
+          <p:cNvSpPr/>
+          <p:nvPr/>
+        </p:nvSpPr>
+        <p:spPr>
+          <a:xfrm>
+            <a:off x="502920" y="6355080"/>
+            <a:ext cx="11155680" cy="0"/>
+          </a:xfrm>
+          <a:prstGeom prst="line">
+            <a:avLst/>
+          </a:prstGeom>
+          <a:noFill/>
+          <a:ln w="6350">
+            <a:solidFill>
+              <a:srgbClr val="E5E7EB"/>
+            </a:solidFill>
+            <a:prstDash val="solid"/>
+          </a:ln>
+        </p:spPr>
+        <p:txBody>
+          <a:bodyPr/>
+          <a:lstStyle/>
+          <a:p>
+            <a:endParaRPr lang="en-US"/>
+          </a:p>
+        </p:txBody>
+      </p:sp>
+      <p:sp>
+        <p:nvSpPr>
+          <p:cNvPr id="6" name="Text 4"/>
+          <p:cNvSpPr/>
+          <p:nvPr/>
+        </p:nvSpPr>
+        <p:spPr>
+          <a:xfrm>
+            <a:off x="502920" y="6446520"/>
+            <a:ext cx="5486400" cy="256032"/>
+          </a:xfrm>
+          <a:prstGeom prst="rect">
+            <a:avLst/>
+          </a:prstGeom>
+          <a:noFill/>
+          <a:ln/>
+        </p:spPr>
+        <p:txBody>
+          <a:bodyPr wrap="square" lIns="0" tIns="0" rIns="0" bIns="0" rtlCol="0" anchor="ctr"/>
+          <a:lstStyle/>
+          <a:p>
+            <a:pPr marL="0" indent="0">
+              <a:buNone/>
+            </a:pPr>
+            <a:r>
+              <a:rPr lang="en-US" sz="900" i="1" dirty="0">
+                <a:solidFill>
+                  <a:srgbClr val="9CA3AF"/>
+                </a:solidFill>
+                <a:latin typeface="Calibri" pitchFamily="34" charset="0"/>
+                <a:ea typeface="Calibri" pitchFamily="34" charset="-122"/>
+                <a:cs typeface="Calibri" pitchFamily="34" charset="-120"/>
+              </a:rPr>
+              <a:t>Edge Language Coach  ·  Course Project  ·  2026</a:t>
+            </a:r>
+            <a:endParaRPr lang="en-US" sz="900" dirty="0"/>
+          </a:p>
+        </p:txBody>
+      </p:sp>
+      <p:sp>
+        <p:nvSpPr>
+          <p:cNvPr id="7" name="Text 5"/>
+          <p:cNvSpPr/>
+          <p:nvPr/>
+        </p:nvSpPr>
+        <p:spPr>
+          <a:xfrm>
+            <a:off x="7086600" y="6446520"/>
+            <a:ext cx="4572000" cy="256032"/>
+          </a:xfrm>
+          <a:prstGeom prst="rect">
+            <a:avLst/>
+          </a:prstGeom>
+          <a:noFill/>
+          <a:ln/>
+        </p:spPr>
+        <p:txBody>
+          <a:bodyPr wrap="square" lIns="0" tIns="0" rIns="0" bIns="0" rtlCol="0" anchor="ctr"/>
+          <a:lstStyle/>
+          <a:p>
+            <a:pPr marL="0" indent="0" algn="r">
+              <a:buNone/>
+            </a:pPr>
+            <a:r>
+              <a:rPr lang="en-US" sz="900" i="1" dirty="0">
+                <a:solidFill>
+                  <a:srgbClr val="9CA3AF"/>
+                </a:solidFill>
+                <a:latin typeface="Calibri" pitchFamily="34" charset="0"/>
+                <a:ea typeface="Calibri" pitchFamily="34" charset="-122"/>
+                <a:cs typeface="Calibri" pitchFamily="34" charset="-120"/>
+              </a:rPr>
+              <a:t>Ibrahim</a:t>
+            </a:r>
+            <a:endParaRPr lang="en-US" sz="900" dirty="0"/>
+          </a:p>
+        </p:txBody>
+      </p:sp>
+      <p:sp>
+        <p:nvSpPr>
+          <p:cNvPr id="8" name="Text 6"/>
+          <p:cNvSpPr/>
+          <p:nvPr/>
+        </p:nvSpPr>
+        <p:spPr>
+          <a:xfrm>
+            <a:off x="502920" y="914400"/>
+            <a:ext cx="11155680" cy="777240"/>
+          </a:xfrm>
+          <a:prstGeom prst="rect">
+            <a:avLst/>
+          </a:prstGeom>
+          <a:noFill/>
+          <a:ln/>
+        </p:spPr>
+        <p:txBody>
+          <a:bodyPr wrap="square" lIns="0" tIns="0" rIns="0" bIns="0" rtlCol="0" anchor="ctr"/>
+          <a:lstStyle/>
+          <a:p>
+            <a:pPr marL="0" indent="0">
+              <a:buNone/>
+            </a:pPr>
+            <a:r>
+              <a:rPr lang="en-US" sz="3000" dirty="0">
+                <a:solidFill>
+                  <a:srgbClr val="1A2238"/>
+                </a:solidFill>
+                <a:latin typeface="Cambria" pitchFamily="34" charset="0"/>
+                <a:ea typeface="Cambria" pitchFamily="34" charset="-122"/>
+                <a:cs typeface="Cambria" pitchFamily="34" charset="-120"/>
+              </a:rPr>
+              <a:t>Four architectural decisions, each with a cost</a:t>
+            </a:r>
+            <a:endParaRPr lang="en-US" sz="3000" dirty="0"/>
+          </a:p>
+        </p:txBody>
+      </p:sp>
+      <p:sp>
+        <p:nvSpPr>
+          <p:cNvPr id="9" name="Text 7"/>
+          <p:cNvSpPr/>
+          <p:nvPr/>
+        </p:nvSpPr>
+        <p:spPr>
+          <a:xfrm>
+            <a:off x="502920" y="1874520"/>
+            <a:ext cx="11155680" cy="457200"/>
+          </a:xfrm>
+          <a:prstGeom prst="rect">
+            <a:avLst/>
+          </a:prstGeom>
+          <a:noFill/>
+          <a:ln/>
+        </p:spPr>
+        <p:txBody>
+          <a:bodyPr wrap="square" lIns="0" tIns="0" rIns="0" bIns="0" rtlCol="0" anchor="ctr"/>
+          <a:lstStyle/>
+          <a:p>
+            <a:pPr marL="0" indent="0">
+              <a:buNone/>
+            </a:pPr>
+            <a:r>
+              <a:rPr lang="en-US" sz="1200" i="1" dirty="0">
+                <a:solidFill>
+                  <a:srgbClr val="333333"/>
+                </a:solidFill>
+                <a:latin typeface="Calibri" pitchFamily="34" charset="0"/>
+                <a:ea typeface="Calibri" pitchFamily="34" charset="-122"/>
+                <a:cs typeface="Calibri" pitchFamily="34" charset="-120"/>
+              </a:rPr>
+              <a:t>Trade-offs are recorded as architecture decision records (ADRs) under docs/adr/. The four most consequential decisions follow.</a:t>
+            </a:r>
+            <a:endParaRPr lang="en-US" sz="1200" dirty="0"/>
+          </a:p>
+        </p:txBody>
+      </p:sp>
+      <p:sp>
+        <p:nvSpPr>
+          <p:cNvPr id="10" name="Shape 8"/>
+          <p:cNvSpPr/>
+          <p:nvPr/>
+        </p:nvSpPr>
+        <p:spPr>
+          <a:xfrm>
+            <a:off x="502920" y="2514600"/>
+            <a:ext cx="5349240" cy="0"/>
+          </a:xfrm>
+          <a:prstGeom prst="line">
+            <a:avLst/>
+          </a:prstGeom>
+          <a:noFill/>
+          <a:ln w="12700">
+            <a:solidFill>
+              <a:srgbClr val="1A2238"/>
+            </a:solidFill>
+            <a:prstDash val="solid"/>
+          </a:ln>
+        </p:spPr>
+        <p:txBody>
+          <a:bodyPr/>
+          <a:lstStyle/>
+          <a:p>
+            <a:endParaRPr lang="en-US"/>
+          </a:p>
+        </p:txBody>
+      </p:sp>
+      <p:sp>
+        <p:nvSpPr>
+          <p:cNvPr id="11" name="Text 9"/>
+          <p:cNvSpPr/>
+          <p:nvPr/>
+        </p:nvSpPr>
+        <p:spPr>
+          <a:xfrm>
+            <a:off x="502920" y="2606040"/>
+            <a:ext cx="1463040" cy="274320"/>
+          </a:xfrm>
+          <a:prstGeom prst="rect">
+            <a:avLst/>
+          </a:prstGeom>
+          <a:noFill/>
+          <a:ln/>
+        </p:spPr>
+        <p:txBody>
+          <a:bodyPr wrap="square" lIns="0" tIns="0" rIns="0" bIns="0" rtlCol="0" anchor="ctr"/>
+          <a:lstStyle/>
+          <a:p>
+            <a:pPr marL="0" indent="0">
+              <a:buNone/>
+            </a:pPr>
+            <a:r>
+              <a:rPr lang="en-US" sz="1000" kern="0" spc="300" dirty="0">
+                <a:solidFill>
+                  <a:srgbClr val="7A2E3B"/>
+                </a:solidFill>
+                <a:latin typeface="Calibri" pitchFamily="34" charset="0"/>
+                <a:ea typeface="Calibri" pitchFamily="34" charset="-122"/>
+                <a:cs typeface="Calibri" pitchFamily="34" charset="-120"/>
+              </a:rPr>
+              <a:t>ADR-001</a:t>
+            </a:r>
+            <a:endParaRPr lang="en-US" sz="1000" dirty="0"/>
+          </a:p>
+        </p:txBody>
+      </p:sp>
+      <p:sp>
+        <p:nvSpPr>
+          <p:cNvPr id="12" name="Text 10"/>
+          <p:cNvSpPr/>
+          <p:nvPr/>
+        </p:nvSpPr>
+        <p:spPr>
+          <a:xfrm>
+            <a:off x="502920" y="2880360"/>
+            <a:ext cx="5349240" cy="411480"/>
+          </a:xfrm>
+          <a:prstGeom prst="rect">
+            <a:avLst/>
+          </a:prstGeom>
+          <a:noFill/>
+          <a:ln/>
+        </p:spPr>
+        <p:txBody>
+          <a:bodyPr wrap="square" lIns="0" tIns="0" rIns="0" bIns="0" rtlCol="0" anchor="ctr"/>
+          <a:lstStyle/>
+          <a:p>
+            <a:pPr marL="0" indent="0">
+              <a:buNone/>
+            </a:pPr>
+            <a:r>
+              <a:rPr lang="en-US" sz="1500" dirty="0">
+                <a:solidFill>
+                  <a:srgbClr val="1A2238"/>
+                </a:solidFill>
+                <a:latin typeface="Cambria" pitchFamily="34" charset="0"/>
+                <a:ea typeface="Cambria" pitchFamily="34" charset="-122"/>
+                <a:cs typeface="Cambria" pitchFamily="34" charset="-120"/>
+              </a:rPr>
+              <a:t>Node.js workers, not Go microservices</a:t>
+            </a:r>
+            <a:endParaRPr lang="en-US" sz="1500" dirty="0"/>
+          </a:p>
+        </p:txBody>
+      </p:sp>
+      <p:sp>
+        <p:nvSpPr>
+          <p:cNvPr id="13" name="Text 11"/>
+          <p:cNvSpPr/>
+          <p:nvPr/>
+        </p:nvSpPr>
+        <p:spPr>
+          <a:xfrm>
+            <a:off x="502920" y="3383280"/>
+            <a:ext cx="5349240" cy="868680"/>
+          </a:xfrm>
+          <a:prstGeom prst="rect">
+            <a:avLst/>
+          </a:prstGeom>
+          <a:noFill/>
+          <a:ln/>
+        </p:spPr>
+        <p:txBody>
+          <a:bodyPr wrap="square" lIns="0" tIns="0" rIns="0" bIns="0" rtlCol="0" anchor="ctr"/>
+          <a:lstStyle/>
+          <a:p>
+            <a:pPr marL="0" indent="0">
+              <a:lnSpc>
+                <a:spcPct val="140000"/>
+              </a:lnSpc>
+              <a:buNone/>
+            </a:pPr>
+            <a:r>
+              <a:rPr lang="en-US" sz="1100" b="1" i="1" dirty="0">
+                <a:solidFill>
+                  <a:srgbClr val="333333"/>
+                </a:solidFill>
+                <a:latin typeface="Calibri" pitchFamily="34" charset="0"/>
+                <a:ea typeface="Calibri" pitchFamily="34" charset="-122"/>
+                <a:cs typeface="Calibri" pitchFamily="34" charset="-120"/>
+              </a:rPr>
+              <a:t>Positive  </a:t>
+            </a:r>
+            <a:r>
+              <a:rPr lang="en-US" sz="1100" dirty="0">
+                <a:solidFill>
+                  <a:srgbClr val="333333"/>
+                </a:solidFill>
+                <a:latin typeface="Calibri" pitchFamily="34" charset="0"/>
+                <a:ea typeface="Calibri" pitchFamily="34" charset="-122"/>
+                <a:cs typeface="Calibri" pitchFamily="34" charset="-120"/>
+              </a:rPr>
+              <a:t>Shared TypeScript types · single toolchain · faster iteration.</a:t>
+            </a:r>
+            <a:endParaRPr lang="en-US" sz="1100" dirty="0"/>
+          </a:p>
+          <a:p>
+            <a:pPr marL="0" indent="0">
+              <a:lnSpc>
+                <a:spcPct val="140000"/>
+              </a:lnSpc>
+              <a:buNone/>
+            </a:pPr>
+            <a:r>
+              <a:rPr lang="en-US" sz="1100" b="1" i="1" dirty="0">
+                <a:solidFill>
+                  <a:srgbClr val="7A2E3B"/>
+                </a:solidFill>
+                <a:latin typeface="Calibri" pitchFamily="34" charset="0"/>
+                <a:ea typeface="Calibri" pitchFamily="34" charset="-122"/>
+                <a:cs typeface="Calibri" pitchFamily="34" charset="-120"/>
+              </a:rPr>
+              <a:t>Negative  </a:t>
+            </a:r>
+            <a:r>
+              <a:rPr lang="en-US" sz="1100" dirty="0">
+                <a:solidFill>
+                  <a:srgbClr val="333333"/>
+                </a:solidFill>
+                <a:latin typeface="Calibri" pitchFamily="34" charset="0"/>
+                <a:ea typeface="Calibri" pitchFamily="34" charset="-122"/>
+                <a:cs typeface="Calibri" pitchFamily="34" charset="-120"/>
+              </a:rPr>
+              <a:t>Workers cannot scale independently — one service scales all three.</a:t>
+            </a:r>
+            <a:endParaRPr lang="en-US" sz="1100" dirty="0"/>
+          </a:p>
+        </p:txBody>
+      </p:sp>
+      <p:sp>
+        <p:nvSpPr>
+          <p:cNvPr id="14" name="Shape 12"/>
+          <p:cNvSpPr/>
+          <p:nvPr/>
+        </p:nvSpPr>
+        <p:spPr>
+          <a:xfrm>
+            <a:off x="6355080" y="2514600"/>
+            <a:ext cx="5349240" cy="0"/>
+          </a:xfrm>
+          <a:prstGeom prst="line">
+            <a:avLst/>
+          </a:prstGeom>
+          <a:noFill/>
+          <a:ln w="12700">
+            <a:solidFill>
+              <a:srgbClr val="1A2238"/>
+            </a:solidFill>
+            <a:prstDash val="solid"/>
+          </a:ln>
+        </p:spPr>
+        <p:txBody>
+          <a:bodyPr/>
+          <a:lstStyle/>
+          <a:p>
+            <a:endParaRPr lang="en-US"/>
+          </a:p>
+        </p:txBody>
+      </p:sp>
+      <p:sp>
+        <p:nvSpPr>
+          <p:cNvPr id="15" name="Text 13"/>
+          <p:cNvSpPr/>
+          <p:nvPr/>
+        </p:nvSpPr>
+        <p:spPr>
+          <a:xfrm>
+            <a:off x="6355080" y="2606040"/>
+            <a:ext cx="1463040" cy="274320"/>
+          </a:xfrm>
+          <a:prstGeom prst="rect">
+            <a:avLst/>
+          </a:prstGeom>
+          <a:noFill/>
+          <a:ln/>
+        </p:spPr>
+        <p:txBody>
+          <a:bodyPr wrap="square" lIns="0" tIns="0" rIns="0" bIns="0" rtlCol="0" anchor="ctr"/>
+          <a:lstStyle/>
+          <a:p>
+            <a:pPr marL="0" indent="0">
+              <a:buNone/>
+            </a:pPr>
+            <a:r>
+              <a:rPr lang="en-US" sz="1000" kern="0" spc="300" dirty="0">
+                <a:solidFill>
+                  <a:srgbClr val="7A2E3B"/>
+                </a:solidFill>
+                <a:latin typeface="Calibri" pitchFamily="34" charset="0"/>
+                <a:ea typeface="Calibri" pitchFamily="34" charset="-122"/>
+                <a:cs typeface="Calibri" pitchFamily="34" charset="-120"/>
+              </a:rPr>
+              <a:t>ADR-002</a:t>
+            </a:r>
+            <a:endParaRPr lang="en-US" sz="1000" dirty="0"/>
+          </a:p>
+        </p:txBody>
+      </p:sp>
+      <p:sp>
+        <p:nvSpPr>
+          <p:cNvPr id="16" name="Text 14"/>
+          <p:cNvSpPr/>
+          <p:nvPr/>
+        </p:nvSpPr>
+        <p:spPr>
+          <a:xfrm>
+            <a:off x="6355080" y="2880360"/>
+            <a:ext cx="5349240" cy="411480"/>
+          </a:xfrm>
+          <a:prstGeom prst="rect">
+            <a:avLst/>
+          </a:prstGeom>
+          <a:noFill/>
+          <a:ln/>
+        </p:spPr>
+        <p:txBody>
+          <a:bodyPr wrap="square" lIns="0" tIns="0" rIns="0" bIns="0" rtlCol="0" anchor="ctr"/>
+          <a:lstStyle/>
+          <a:p>
+            <a:pPr marL="0" indent="0">
+              <a:buNone/>
+            </a:pPr>
+            <a:r>
+              <a:rPr lang="en-US" sz="1500" dirty="0">
+                <a:solidFill>
+                  <a:srgbClr val="1A2238"/>
+                </a:solidFill>
+                <a:latin typeface="Cambria" pitchFamily="34" charset="0"/>
+                <a:ea typeface="Cambria" pitchFamily="34" charset="-122"/>
+                <a:cs typeface="Cambria" pitchFamily="34" charset="-120"/>
+              </a:rPr>
+              <a:t>BullMQ on Redis, not RabbitMQ</a:t>
+            </a:r>
+            <a:endParaRPr lang="en-US" sz="1500" dirty="0"/>
+          </a:p>
+        </p:txBody>
+      </p:sp>
+      <p:sp>
+        <p:nvSpPr>
+          <p:cNvPr id="17" name="Text 15"/>
+          <p:cNvSpPr/>
+          <p:nvPr/>
+        </p:nvSpPr>
+        <p:spPr>
+          <a:xfrm>
+            <a:off x="6355080" y="3383280"/>
+            <a:ext cx="5349240" cy="868680"/>
+          </a:xfrm>
+          <a:prstGeom prst="rect">
+            <a:avLst/>
+          </a:prstGeom>
+          <a:noFill/>
+          <a:ln/>
+        </p:spPr>
+        <p:txBody>
+          <a:bodyPr wrap="square" lIns="0" tIns="0" rIns="0" bIns="0" rtlCol="0" anchor="ctr"/>
+          <a:lstStyle/>
+          <a:p>
+            <a:pPr marL="0" indent="0">
+              <a:lnSpc>
+                <a:spcPct val="140000"/>
+              </a:lnSpc>
+              <a:buNone/>
+            </a:pPr>
+            <a:r>
+              <a:rPr lang="en-US" sz="1100" b="1" i="1" dirty="0">
+                <a:solidFill>
+                  <a:srgbClr val="333333"/>
+                </a:solidFill>
+                <a:latin typeface="Calibri" pitchFamily="34" charset="0"/>
+                <a:ea typeface="Calibri" pitchFamily="34" charset="-122"/>
+                <a:cs typeface="Calibri" pitchFamily="34" charset="-120"/>
+              </a:rPr>
+              <a:t>Positive  </a:t>
+            </a:r>
+            <a:r>
+              <a:rPr lang="en-US" sz="1100" dirty="0">
+                <a:solidFill>
+                  <a:srgbClr val="333333"/>
+                </a:solidFill>
+                <a:latin typeface="Calibri" pitchFamily="34" charset="0"/>
+                <a:ea typeface="Calibri" pitchFamily="34" charset="-122"/>
+                <a:cs typeface="Calibri" pitchFamily="34" charset="-120"/>
+              </a:rPr>
+              <a:t>One dependency · rate-limit + queue share Redis · TypeScript-native.</a:t>
+            </a:r>
+            <a:endParaRPr lang="en-US" sz="1100" dirty="0"/>
+          </a:p>
+          <a:p>
+            <a:pPr marL="0" indent="0">
+              <a:lnSpc>
+                <a:spcPct val="140000"/>
+              </a:lnSpc>
+              <a:buNone/>
+            </a:pPr>
+            <a:r>
+              <a:rPr lang="en-US" sz="1100" b="1" i="1" dirty="0">
+                <a:solidFill>
+                  <a:srgbClr val="7A2E3B"/>
+                </a:solidFill>
+                <a:latin typeface="Calibri" pitchFamily="34" charset="0"/>
+                <a:ea typeface="Calibri" pitchFamily="34" charset="-122"/>
+                <a:cs typeface="Calibri" pitchFamily="34" charset="-120"/>
+              </a:rPr>
+              <a:t>Negative  </a:t>
+            </a:r>
+            <a:r>
+              <a:rPr lang="en-US" sz="1100" dirty="0">
+                <a:solidFill>
+                  <a:srgbClr val="333333"/>
+                </a:solidFill>
+                <a:latin typeface="Calibri" pitchFamily="34" charset="0"/>
+                <a:ea typeface="Calibri" pitchFamily="34" charset="-122"/>
+                <a:cs typeface="Calibri" pitchFamily="34" charset="-120"/>
+              </a:rPr>
+              <a:t>Redis is not a purpose-built broker; AOF persistence required in production.</a:t>
+            </a:r>
+            <a:endParaRPr lang="en-US" sz="1100" dirty="0"/>
+          </a:p>
+        </p:txBody>
+      </p:sp>
+      <p:sp>
+        <p:nvSpPr>
+          <p:cNvPr id="18" name="Shape 16"/>
+          <p:cNvSpPr/>
+          <p:nvPr/>
+        </p:nvSpPr>
+        <p:spPr>
+          <a:xfrm>
+            <a:off x="502920" y="4343400"/>
+            <a:ext cx="5349240" cy="0"/>
+          </a:xfrm>
+          <a:prstGeom prst="line">
+            <a:avLst/>
+          </a:prstGeom>
+          <a:noFill/>
+          <a:ln w="12700">
+            <a:solidFill>
+              <a:srgbClr val="1A2238"/>
+            </a:solidFill>
+            <a:prstDash val="solid"/>
+          </a:ln>
+        </p:spPr>
+        <p:txBody>
+          <a:bodyPr/>
+          <a:lstStyle/>
+          <a:p>
+            <a:endParaRPr lang="en-US"/>
+          </a:p>
+        </p:txBody>
+      </p:sp>
+      <p:sp>
+        <p:nvSpPr>
+          <p:cNvPr id="19" name="Text 17"/>
+          <p:cNvSpPr/>
+          <p:nvPr/>
+        </p:nvSpPr>
+        <p:spPr>
+          <a:xfrm>
+            <a:off x="502920" y="4434840"/>
+            <a:ext cx="1463040" cy="274320"/>
+          </a:xfrm>
+          <a:prstGeom prst="rect">
+            <a:avLst/>
+          </a:prstGeom>
+          <a:noFill/>
+          <a:ln/>
+        </p:spPr>
+        <p:txBody>
+          <a:bodyPr wrap="square" lIns="0" tIns="0" rIns="0" bIns="0" rtlCol="0" anchor="ctr"/>
+          <a:lstStyle/>
+          <a:p>
+            <a:pPr marL="0" indent="0">
+              <a:buNone/>
+            </a:pPr>
+            <a:r>
+              <a:rPr lang="en-US" sz="1000" kern="0" spc="300" dirty="0">
+                <a:solidFill>
+                  <a:srgbClr val="7A2E3B"/>
+                </a:solidFill>
+                <a:latin typeface="Calibri" pitchFamily="34" charset="0"/>
+                <a:ea typeface="Calibri" pitchFamily="34" charset="-122"/>
+                <a:cs typeface="Calibri" pitchFamily="34" charset="-120"/>
+              </a:rPr>
+              <a:t>ADR-003</a:t>
+            </a:r>
+            <a:endParaRPr lang="en-US" sz="1000" dirty="0"/>
+          </a:p>
+        </p:txBody>
+      </p:sp>
+      <p:sp>
+        <p:nvSpPr>
+          <p:cNvPr id="20" name="Text 18"/>
+          <p:cNvSpPr/>
+          <p:nvPr/>
+        </p:nvSpPr>
+        <p:spPr>
+          <a:xfrm>
+            <a:off x="502920" y="4709160"/>
+            <a:ext cx="5349240" cy="411480"/>
+          </a:xfrm>
+          <a:prstGeom prst="rect">
+            <a:avLst/>
+          </a:prstGeom>
+          <a:noFill/>
+          <a:ln/>
+        </p:spPr>
+        <p:txBody>
+          <a:bodyPr wrap="square" lIns="0" tIns="0" rIns="0" bIns="0" rtlCol="0" anchor="ctr"/>
+          <a:lstStyle/>
+          <a:p>
+            <a:pPr marL="0" indent="0">
+              <a:buNone/>
+            </a:pPr>
+            <a:r>
+              <a:rPr lang="en-US" sz="1500" dirty="0">
+                <a:solidFill>
+                  <a:srgbClr val="1A2238"/>
+                </a:solidFill>
+                <a:latin typeface="Cambria" pitchFamily="34" charset="0"/>
+                <a:ea typeface="Cambria" pitchFamily="34" charset="-122"/>
+                <a:cs typeface="Cambria" pitchFamily="34" charset="-120"/>
+              </a:rPr>
+              <a:t>Supabase, not self-hosted Postgres</a:t>
+            </a:r>
+            <a:endParaRPr lang="en-US" sz="1500" dirty="0"/>
+          </a:p>
+        </p:txBody>
+      </p:sp>
+      <p:sp>
+        <p:nvSpPr>
+          <p:cNvPr id="21" name="Text 19"/>
+          <p:cNvSpPr/>
+          <p:nvPr/>
+        </p:nvSpPr>
+        <p:spPr>
+          <a:xfrm>
+            <a:off x="502920" y="5212080"/>
+            <a:ext cx="5349240" cy="868680"/>
+          </a:xfrm>
+          <a:prstGeom prst="rect">
+            <a:avLst/>
+          </a:prstGeom>
+          <a:noFill/>
+          <a:ln/>
+        </p:spPr>
+        <p:txBody>
+          <a:bodyPr wrap="square" lIns="0" tIns="0" rIns="0" bIns="0" rtlCol="0" anchor="ctr"/>
+          <a:lstStyle/>
+          <a:p>
+            <a:pPr marL="0" indent="0">
+              <a:lnSpc>
+                <a:spcPct val="140000"/>
+              </a:lnSpc>
+              <a:buNone/>
+            </a:pPr>
+            <a:r>
+              <a:rPr lang="en-US" sz="1100" b="1" i="1" dirty="0">
+                <a:solidFill>
+                  <a:srgbClr val="333333"/>
+                </a:solidFill>
+                <a:latin typeface="Calibri" pitchFamily="34" charset="0"/>
+                <a:ea typeface="Calibri" pitchFamily="34" charset="-122"/>
+                <a:cs typeface="Calibri" pitchFamily="34" charset="-120"/>
+              </a:rPr>
+              <a:t>Positive  </a:t>
+            </a:r>
+            <a:r>
+              <a:rPr lang="en-US" sz="1100" dirty="0">
+                <a:solidFill>
+                  <a:srgbClr val="333333"/>
+                </a:solidFill>
+                <a:latin typeface="Calibri" pitchFamily="34" charset="0"/>
+                <a:ea typeface="Calibri" pitchFamily="34" charset="-122"/>
+                <a:cs typeface="Calibri" pitchFamily="34" charset="-120"/>
+              </a:rPr>
+              <a:t>Authentication and row-level security out of the box · no DB ops.</a:t>
+            </a:r>
+            <a:endParaRPr lang="en-US" sz="1100" dirty="0"/>
+          </a:p>
+          <a:p>
+            <a:pPr marL="0" indent="0">
+              <a:lnSpc>
+                <a:spcPct val="140000"/>
+              </a:lnSpc>
+              <a:buNone/>
+            </a:pPr>
+            <a:r>
+              <a:rPr lang="en-US" sz="1100" b="1" i="1" dirty="0">
+                <a:solidFill>
+                  <a:srgbClr val="7A2E3B"/>
+                </a:solidFill>
+                <a:latin typeface="Calibri" pitchFamily="34" charset="0"/>
+                <a:ea typeface="Calibri" pitchFamily="34" charset="-122"/>
+                <a:cs typeface="Calibri" pitchFamily="34" charset="-120"/>
+              </a:rPr>
+              <a:t>Negative  </a:t>
+            </a:r>
+            <a:r>
+              <a:rPr lang="en-US" sz="1100" dirty="0">
+                <a:solidFill>
+                  <a:srgbClr val="333333"/>
+                </a:solidFill>
+                <a:latin typeface="Calibri" pitchFamily="34" charset="0"/>
+                <a:ea typeface="Calibri" pitchFamily="34" charset="-122"/>
+                <a:cs typeface="Calibri" pitchFamily="34" charset="-120"/>
+              </a:rPr>
+              <a:t>External dependency · cannot run fully offline · partial vendor lock-in.</a:t>
+            </a:r>
+            <a:endParaRPr lang="en-US" sz="1100" dirty="0"/>
+          </a:p>
+        </p:txBody>
+      </p:sp>
+      <p:sp>
+        <p:nvSpPr>
+          <p:cNvPr id="22" name="Shape 20"/>
+          <p:cNvSpPr/>
+          <p:nvPr/>
+        </p:nvSpPr>
+        <p:spPr>
+          <a:xfrm>
+            <a:off x="6355080" y="4343400"/>
+            <a:ext cx="5349240" cy="0"/>
+          </a:xfrm>
+          <a:prstGeom prst="line">
+            <a:avLst/>
+          </a:prstGeom>
+          <a:noFill/>
+          <a:ln w="12700">
+            <a:solidFill>
+              <a:srgbClr val="1A2238"/>
+            </a:solidFill>
+            <a:prstDash val="solid"/>
+          </a:ln>
+        </p:spPr>
+        <p:txBody>
+          <a:bodyPr/>
+          <a:lstStyle/>
+          <a:p>
+            <a:endParaRPr lang="en-US"/>
+          </a:p>
+        </p:txBody>
+      </p:sp>
+      <p:sp>
+        <p:nvSpPr>
+          <p:cNvPr id="23" name="Text 21"/>
+          <p:cNvSpPr/>
+          <p:nvPr/>
+        </p:nvSpPr>
+        <p:spPr>
+          <a:xfrm>
+            <a:off x="6355080" y="4434840"/>
+            <a:ext cx="1463040" cy="274320"/>
+          </a:xfrm>
+          <a:prstGeom prst="rect">
+            <a:avLst/>
+          </a:prstGeom>
+          <a:noFill/>
+          <a:ln/>
+        </p:spPr>
+        <p:txBody>
+          <a:bodyPr wrap="square" lIns="0" tIns="0" rIns="0" bIns="0" rtlCol="0" anchor="ctr"/>
+          <a:lstStyle/>
+          <a:p>
+            <a:pPr marL="0" indent="0">
+              <a:buNone/>
+            </a:pPr>
+            <a:r>
+              <a:rPr lang="en-US" sz="1000" kern="0" spc="300" dirty="0">
+                <a:solidFill>
+                  <a:srgbClr val="7A2E3B"/>
+                </a:solidFill>
+                <a:latin typeface="Calibri" pitchFamily="34" charset="0"/>
+                <a:ea typeface="Calibri" pitchFamily="34" charset="-122"/>
+                <a:cs typeface="Calibri" pitchFamily="34" charset="-120"/>
+              </a:rPr>
+              <a:t>ADR-004</a:t>
+            </a:r>
+            <a:endParaRPr lang="en-US" sz="1000" dirty="0"/>
+          </a:p>
+        </p:txBody>
+      </p:sp>
+      <p:sp>
+        <p:nvSpPr>
+          <p:cNvPr id="24" name="Text 22"/>
+          <p:cNvSpPr/>
+          <p:nvPr/>
+        </p:nvSpPr>
+        <p:spPr>
+          <a:xfrm>
+            <a:off x="6355080" y="4709160"/>
+            <a:ext cx="5349240" cy="411480"/>
+          </a:xfrm>
+          <a:prstGeom prst="rect">
+            <a:avLst/>
+          </a:prstGeom>
+          <a:noFill/>
+          <a:ln/>
+        </p:spPr>
+        <p:txBody>
+          <a:bodyPr wrap="square" lIns="0" tIns="0" rIns="0" bIns="0" rtlCol="0" anchor="ctr"/>
+          <a:lstStyle/>
+          <a:p>
+            <a:pPr marL="0" indent="0">
+              <a:buNone/>
+            </a:pPr>
+            <a:r>
+              <a:rPr lang="en-US" sz="1500" dirty="0">
+                <a:solidFill>
+                  <a:srgbClr val="1A2238"/>
+                </a:solidFill>
+                <a:latin typeface="Cambria" pitchFamily="34" charset="0"/>
+                <a:ea typeface="Cambria" pitchFamily="34" charset="-122"/>
+                <a:cs typeface="Cambria" pitchFamily="34" charset="-120"/>
+              </a:rPr>
+              <a:t>prom-client only, not full OpenTelemetry</a:t>
+            </a:r>
+            <a:endParaRPr lang="en-US" sz="1500" dirty="0"/>
+          </a:p>
+        </p:txBody>
+      </p:sp>
+      <p:sp>
+        <p:nvSpPr>
+          <p:cNvPr id="25" name="Text 23"/>
+          <p:cNvSpPr/>
+          <p:nvPr/>
+        </p:nvSpPr>
+        <p:spPr>
+          <a:xfrm>
+            <a:off x="6355080" y="5212080"/>
+            <a:ext cx="5349240" cy="868680"/>
+          </a:xfrm>
+          <a:prstGeom prst="rect">
+            <a:avLst/>
+          </a:prstGeom>
+          <a:noFill/>
+          <a:ln/>
+        </p:spPr>
+        <p:txBody>
+          <a:bodyPr wrap="square" lIns="0" tIns="0" rIns="0" bIns="0" rtlCol="0" anchor="ctr"/>
+          <a:lstStyle/>
+          <a:p>
+            <a:pPr marL="0" indent="0">
+              <a:lnSpc>
+                <a:spcPct val="140000"/>
+              </a:lnSpc>
+              <a:buNone/>
+            </a:pPr>
+            <a:r>
+              <a:rPr lang="en-US" sz="1100" b="1" i="1" dirty="0">
+                <a:solidFill>
+                  <a:srgbClr val="333333"/>
+                </a:solidFill>
+                <a:latin typeface="Calibri" pitchFamily="34" charset="0"/>
+                <a:ea typeface="Calibri" pitchFamily="34" charset="-122"/>
+                <a:cs typeface="Calibri" pitchFamily="34" charset="-120"/>
+              </a:rPr>
+              <a:t>Positive  </a:t>
+            </a:r>
+            <a:r>
+              <a:rPr lang="en-US" sz="1100" dirty="0">
+                <a:solidFill>
+                  <a:srgbClr val="333333"/>
+                </a:solidFill>
+                <a:latin typeface="Calibri" pitchFamily="34" charset="0"/>
+                <a:ea typeface="Calibri" pitchFamily="34" charset="-122"/>
+                <a:cs typeface="Calibri" pitchFamily="34" charset="-120"/>
+              </a:rPr>
+              <a:t>Minimal dependency footprint · ten-line Fastify instrumentation.</a:t>
+            </a:r>
+            <a:endParaRPr lang="en-US" sz="1100" dirty="0"/>
+          </a:p>
+          <a:p>
+            <a:pPr marL="0" indent="0">
+              <a:lnSpc>
+                <a:spcPct val="140000"/>
+              </a:lnSpc>
+              <a:buNone/>
+            </a:pPr>
+            <a:r>
+              <a:rPr lang="en-US" sz="1100" b="1" i="1" dirty="0">
+                <a:solidFill>
+                  <a:srgbClr val="7A2E3B"/>
+                </a:solidFill>
+                <a:latin typeface="Calibri" pitchFamily="34" charset="0"/>
+                <a:ea typeface="Calibri" pitchFamily="34" charset="-122"/>
+                <a:cs typeface="Calibri" pitchFamily="34" charset="-120"/>
+              </a:rPr>
+              <a:t>Negative  </a:t>
+            </a:r>
+            <a:r>
+              <a:rPr lang="en-US" sz="1100" dirty="0">
+                <a:solidFill>
+                  <a:srgbClr val="333333"/>
+                </a:solidFill>
+                <a:latin typeface="Calibri" pitchFamily="34" charset="0"/>
+                <a:ea typeface="Calibri" pitchFamily="34" charset="-122"/>
+                <a:cs typeface="Calibri" pitchFamily="34" charset="-120"/>
+              </a:rPr>
+              <a:t>No cross-service tracing; partly compensated by the MCP read tools.</a:t>
+            </a:r>
+            <a:endParaRPr lang="en-US" sz="1100" dirty="0"/>
+          </a:p>
+        </p:txBody>
+      </p:sp>
+    </p:spTree>
+  </p:cSld>
+  <p:clrMapOvr>
+    <a:masterClrMapping/>
+  </p:clrMapOvr>
+</p:sld>
+</file>
+
+<file path=ppt/slides/slide7.xml><?xml version="1.0" encoding="utf-8"?>
+<p:sld xmlns:a="http://schemas.openxmlformats.org/drawingml/2006/main" xmlns:r="http://schemas.openxmlformats.org/officeDocument/2006/relationships" xmlns:p="http://schemas.openxmlformats.org/presentationml/2006/main">
   <p:cSld name="Slide 5">
     <p:bg>
       <p:bgPr>
@@ -18358,7 +19789,7 @@
                 <a:ea typeface="Cambria" pitchFamily="34" charset="-122"/>
                 <a:cs typeface="Cambria" pitchFamily="34" charset="-120"/>
               </a:rPr>
-              <a:t>V.</a:t>
+              <a:t>VI.</a:t>
             </a:r>
             <a:endParaRPr lang="en-US" sz="1400" dirty="0"/>
           </a:p>
@@ -18544,7 +19975,7 @@
                 <a:ea typeface="Calibri" pitchFamily="34" charset="-122"/>
                 <a:cs typeface="Calibri" pitchFamily="34" charset="-120"/>
               </a:rPr>
-              <a:t>Hassan</a:t>
+              <a:t>Ibrahim</a:t>
             </a:r>
             <a:endParaRPr lang="en-US" sz="900" dirty="0"/>
           </a:p>
@@ -19951,7 +21382,7 @@
 </p:sld>
 </file>
 
-<file path=ppt/slides/slide7.xml><?xml version="1.0" encoding="utf-8"?>
+<file path=ppt/slides/slide8.xml><?xml version="1.0" encoding="utf-8"?>
 <p:sld xmlns:a="http://schemas.openxmlformats.org/drawingml/2006/main" xmlns:r="http://schemas.openxmlformats.org/officeDocument/2006/relationships" xmlns:p="http://schemas.openxmlformats.org/presentationml/2006/main">
   <p:cSld name="Slide 6">
     <p:bg>
@@ -20009,7 +21440,7 @@
                 <a:ea typeface="Cambria" pitchFamily="34" charset="-122"/>
                 <a:cs typeface="Cambria" pitchFamily="34" charset="-120"/>
               </a:rPr>
-              <a:t>VI.</a:t>
+              <a:t>VII.</a:t>
             </a:r>
             <a:endParaRPr lang="en-US" sz="1400" dirty="0"/>
           </a:p>
@@ -20195,7 +21626,7 @@
                 <a:ea typeface="Calibri" pitchFamily="34" charset="-122"/>
                 <a:cs typeface="Calibri" pitchFamily="34" charset="-120"/>
               </a:rPr>
-              <a:t>Hassan</a:t>
+              <a:t>Ibrahim</a:t>
             </a:r>
             <a:endParaRPr lang="en-US" sz="900" dirty="0"/>
           </a:p>
@@ -21539,7 +22970,7 @@
 </p:sld>
 </file>
 
-<file path=ppt/slides/slide8.xml><?xml version="1.0" encoding="utf-8"?>
+<file path=ppt/slides/slide9.xml><?xml version="1.0" encoding="utf-8"?>
 <p:sld xmlns:a="http://schemas.openxmlformats.org/drawingml/2006/main" xmlns:r="http://schemas.openxmlformats.org/officeDocument/2006/relationships" xmlns:p="http://schemas.openxmlformats.org/presentationml/2006/main">
   <p:cSld name="Slide 7">
     <p:bg>
@@ -21597,7 +23028,7 @@
                 <a:ea typeface="Cambria" pitchFamily="34" charset="-122"/>
                 <a:cs typeface="Cambria" pitchFamily="34" charset="-120"/>
               </a:rPr>
-              <a:t>VII.</a:t>
+              <a:t>VIII.</a:t>
             </a:r>
             <a:endParaRPr lang="en-US" sz="1400" dirty="0"/>
           </a:p>
@@ -21783,7 +23214,7 @@
                 <a:ea typeface="Calibri" pitchFamily="34" charset="-122"/>
                 <a:cs typeface="Calibri" pitchFamily="34" charset="-120"/>
               </a:rPr>
-              <a:t>Hassan</a:t>
+              <a:t>Ibrahim</a:t>
             </a:r>
             <a:endParaRPr lang="en-US" sz="900" dirty="0"/>
           </a:p>
@@ -22120,1437 +23551,6 @@
               <a:t>k6 was co-located with Docker Desktop (CPU contention); Groq was mocked at sub-millisecond latency; single iteration per configuration.</a:t>
             </a:r>
             <a:endParaRPr lang="en-US" sz="950" dirty="0"/>
-          </a:p>
-        </p:txBody>
-      </p:sp>
-    </p:spTree>
-  </p:cSld>
-  <p:clrMapOvr>
-    <a:masterClrMapping/>
-  </p:clrMapOvr>
-</p:sld>
-</file>
-
-<file path=ppt/slides/slide9.xml><?xml version="1.0" encoding="utf-8"?>
-<p:sld xmlns:a="http://schemas.openxmlformats.org/drawingml/2006/main" xmlns:r="http://schemas.openxmlformats.org/officeDocument/2006/relationships" xmlns:p="http://schemas.openxmlformats.org/presentationml/2006/main">
-  <p:cSld name="Slide 8">
-    <p:bg>
-      <p:bgPr>
-        <a:solidFill>
-          <a:srgbClr val="FFFFFF"/>
-        </a:solidFill>
-        <a:effectLst/>
-      </p:bgPr>
-    </p:bg>
-    <p:spTree>
-      <p:nvGrpSpPr>
-        <p:cNvPr id="1" name=""/>
-        <p:cNvGrpSpPr/>
-        <p:nvPr/>
-      </p:nvGrpSpPr>
-      <p:grpSpPr>
-        <a:xfrm>
-          <a:off x="0" y="0"/>
-          <a:ext cx="0" cy="0"/>
-          <a:chOff x="0" y="0"/>
-          <a:chExt cx="0" cy="0"/>
-        </a:xfrm>
-      </p:grpSpPr>
-      <p:sp>
-        <p:nvSpPr>
-          <p:cNvPr id="2" name="Text 0"/>
-          <p:cNvSpPr/>
-          <p:nvPr/>
-        </p:nvSpPr>
-        <p:spPr>
-          <a:xfrm>
-            <a:off x="502920" y="411480"/>
-            <a:ext cx="640080" cy="365760"/>
-          </a:xfrm>
-          <a:prstGeom prst="rect">
-            <a:avLst/>
-          </a:prstGeom>
-          <a:noFill/>
-          <a:ln/>
-        </p:spPr>
-        <p:txBody>
-          <a:bodyPr wrap="square" lIns="0" tIns="0" rIns="0" bIns="0" rtlCol="0" anchor="ctr"/>
-          <a:lstStyle/>
-          <a:p>
-            <a:pPr marL="0" indent="0">
-              <a:buNone/>
-            </a:pPr>
-            <a:r>
-              <a:rPr lang="en-US" sz="1400" i="1" dirty="0">
-                <a:solidFill>
-                  <a:srgbClr val="7A2E3B"/>
-                </a:solidFill>
-                <a:latin typeface="Cambria" pitchFamily="34" charset="0"/>
-                <a:ea typeface="Cambria" pitchFamily="34" charset="-122"/>
-                <a:cs typeface="Cambria" pitchFamily="34" charset="-120"/>
-              </a:rPr>
-              <a:t>VIII.</a:t>
-            </a:r>
-            <a:endParaRPr lang="en-US" sz="1400" dirty="0"/>
-          </a:p>
-        </p:txBody>
-      </p:sp>
-      <p:sp>
-        <p:nvSpPr>
-          <p:cNvPr id="3" name="Text 1"/>
-          <p:cNvSpPr/>
-          <p:nvPr/>
-        </p:nvSpPr>
-        <p:spPr>
-          <a:xfrm>
-            <a:off x="1051560" y="411480"/>
-            <a:ext cx="5486400" cy="365760"/>
-          </a:xfrm>
-          <a:prstGeom prst="rect">
-            <a:avLst/>
-          </a:prstGeom>
-          <a:noFill/>
-          <a:ln/>
-        </p:spPr>
-        <p:txBody>
-          <a:bodyPr wrap="square" lIns="0" tIns="0" rIns="0" bIns="0" rtlCol="0" anchor="ctr"/>
-          <a:lstStyle/>
-          <a:p>
-            <a:pPr marL="0" indent="0">
-              <a:buNone/>
-            </a:pPr>
-            <a:r>
-              <a:rPr lang="en-US" sz="1000" kern="0" spc="400" dirty="0">
-                <a:solidFill>
-                  <a:srgbClr val="6B7280"/>
-                </a:solidFill>
-                <a:latin typeface="Calibri" pitchFamily="34" charset="0"/>
-                <a:ea typeface="Calibri" pitchFamily="34" charset="-122"/>
-                <a:cs typeface="Calibri" pitchFamily="34" charset="-120"/>
-              </a:rPr>
-              <a:t>OBSERVABILITY</a:t>
-            </a:r>
-            <a:endParaRPr lang="en-US" sz="1000" dirty="0"/>
-          </a:p>
-        </p:txBody>
-      </p:sp>
-      <p:sp>
-        <p:nvSpPr>
-          <p:cNvPr id="4" name="Text 2"/>
-          <p:cNvSpPr/>
-          <p:nvPr/>
-        </p:nvSpPr>
-        <p:spPr>
-          <a:xfrm>
-            <a:off x="10789920" y="411480"/>
-            <a:ext cx="914400" cy="365760"/>
-          </a:xfrm>
-          <a:prstGeom prst="rect">
-            <a:avLst/>
-          </a:prstGeom>
-          <a:noFill/>
-          <a:ln/>
-        </p:spPr>
-        <p:txBody>
-          <a:bodyPr wrap="square" lIns="0" tIns="0" rIns="0" bIns="0" rtlCol="0" anchor="ctr"/>
-          <a:lstStyle/>
-          <a:p>
-            <a:pPr marL="0" indent="0" algn="r">
-              <a:buNone/>
-            </a:pPr>
-            <a:r>
-              <a:rPr lang="en-US" sz="1000" i="1" dirty="0">
-                <a:solidFill>
-                  <a:srgbClr val="9CA3AF"/>
-                </a:solidFill>
-                <a:latin typeface="Calibri" pitchFamily="34" charset="0"/>
-                <a:ea typeface="Calibri" pitchFamily="34" charset="-122"/>
-                <a:cs typeface="Calibri" pitchFamily="34" charset="-120"/>
-              </a:rPr>
-              <a:t>9 / 16</a:t>
-            </a:r>
-            <a:endParaRPr lang="en-US" sz="1000" dirty="0"/>
-          </a:p>
-        </p:txBody>
-      </p:sp>
-      <p:sp>
-        <p:nvSpPr>
-          <p:cNvPr id="5" name="Shape 3"/>
-          <p:cNvSpPr/>
-          <p:nvPr/>
-        </p:nvSpPr>
-        <p:spPr>
-          <a:xfrm>
-            <a:off x="502920" y="6355080"/>
-            <a:ext cx="11155680" cy="0"/>
-          </a:xfrm>
-          <a:prstGeom prst="line">
-            <a:avLst/>
-          </a:prstGeom>
-          <a:noFill/>
-          <a:ln w="6350">
-            <a:solidFill>
-              <a:srgbClr val="E5E7EB"/>
-            </a:solidFill>
-            <a:prstDash val="solid"/>
-          </a:ln>
-        </p:spPr>
-        <p:txBody>
-          <a:bodyPr/>
-          <a:lstStyle/>
-          <a:p>
-            <a:endParaRPr lang="en-US"/>
-          </a:p>
-        </p:txBody>
-      </p:sp>
-      <p:sp>
-        <p:nvSpPr>
-          <p:cNvPr id="6" name="Text 4"/>
-          <p:cNvSpPr/>
-          <p:nvPr/>
-        </p:nvSpPr>
-        <p:spPr>
-          <a:xfrm>
-            <a:off x="502920" y="6446520"/>
-            <a:ext cx="5486400" cy="256032"/>
-          </a:xfrm>
-          <a:prstGeom prst="rect">
-            <a:avLst/>
-          </a:prstGeom>
-          <a:noFill/>
-          <a:ln/>
-        </p:spPr>
-        <p:txBody>
-          <a:bodyPr wrap="square" lIns="0" tIns="0" rIns="0" bIns="0" rtlCol="0" anchor="ctr"/>
-          <a:lstStyle/>
-          <a:p>
-            <a:pPr marL="0" indent="0">
-              <a:buNone/>
-            </a:pPr>
-            <a:r>
-              <a:rPr lang="en-US" sz="900" i="1" dirty="0">
-                <a:solidFill>
-                  <a:srgbClr val="9CA3AF"/>
-                </a:solidFill>
-                <a:latin typeface="Calibri" pitchFamily="34" charset="0"/>
-                <a:ea typeface="Calibri" pitchFamily="34" charset="-122"/>
-                <a:cs typeface="Calibri" pitchFamily="34" charset="-120"/>
-              </a:rPr>
-              <a:t>Edge Language Coach  ·  Course Project  ·  2026</a:t>
-            </a:r>
-            <a:endParaRPr lang="en-US" sz="900" dirty="0"/>
-          </a:p>
-        </p:txBody>
-      </p:sp>
-      <p:sp>
-        <p:nvSpPr>
-          <p:cNvPr id="7" name="Text 5"/>
-          <p:cNvSpPr/>
-          <p:nvPr/>
-        </p:nvSpPr>
-        <p:spPr>
-          <a:xfrm>
-            <a:off x="7086600" y="6446520"/>
-            <a:ext cx="4572000" cy="256032"/>
-          </a:xfrm>
-          <a:prstGeom prst="rect">
-            <a:avLst/>
-          </a:prstGeom>
-          <a:noFill/>
-          <a:ln/>
-        </p:spPr>
-        <p:txBody>
-          <a:bodyPr wrap="square" lIns="0" tIns="0" rIns="0" bIns="0" rtlCol="0" anchor="ctr"/>
-          <a:lstStyle/>
-          <a:p>
-            <a:pPr marL="0" indent="0" algn="r">
-              <a:buNone/>
-            </a:pPr>
-            <a:r>
-              <a:rPr lang="en-US" sz="900" i="1" dirty="0">
-                <a:solidFill>
-                  <a:srgbClr val="9CA3AF"/>
-                </a:solidFill>
-                <a:latin typeface="Calibri" pitchFamily="34" charset="0"/>
-                <a:ea typeface="Calibri" pitchFamily="34" charset="-122"/>
-                <a:cs typeface="Calibri" pitchFamily="34" charset="-120"/>
-              </a:rPr>
-              <a:t>Hassan</a:t>
-            </a:r>
-            <a:endParaRPr lang="en-US" sz="900" dirty="0"/>
-          </a:p>
-        </p:txBody>
-      </p:sp>
-      <p:sp>
-        <p:nvSpPr>
-          <p:cNvPr id="8" name="Text 6"/>
-          <p:cNvSpPr/>
-          <p:nvPr/>
-        </p:nvSpPr>
-        <p:spPr>
-          <a:xfrm>
-            <a:off x="502920" y="914400"/>
-            <a:ext cx="11155680" cy="777240"/>
-          </a:xfrm>
-          <a:prstGeom prst="rect">
-            <a:avLst/>
-          </a:prstGeom>
-          <a:noFill/>
-          <a:ln/>
-        </p:spPr>
-        <p:txBody>
-          <a:bodyPr wrap="square" lIns="0" tIns="0" rIns="0" bIns="0" rtlCol="0" anchor="ctr"/>
-          <a:lstStyle/>
-          <a:p>
-            <a:pPr marL="0" indent="0">
-              <a:buNone/>
-            </a:pPr>
-            <a:r>
-              <a:rPr lang="en-US" sz="3000" dirty="0">
-                <a:solidFill>
-                  <a:srgbClr val="1A2238"/>
-                </a:solidFill>
-                <a:latin typeface="Cambria" pitchFamily="34" charset="0"/>
-                <a:ea typeface="Cambria" pitchFamily="34" charset="-122"/>
-                <a:cs typeface="Cambria" pitchFamily="34" charset="-120"/>
-              </a:rPr>
-              <a:t>Logs, metrics and health by design</a:t>
-            </a:r>
-            <a:endParaRPr lang="en-US" sz="3000" dirty="0"/>
-          </a:p>
-        </p:txBody>
-      </p:sp>
-      <p:sp>
-        <p:nvSpPr>
-          <p:cNvPr id="9" name="Text 7"/>
-          <p:cNvSpPr/>
-          <p:nvPr/>
-        </p:nvSpPr>
-        <p:spPr>
-          <a:xfrm>
-            <a:off x="502920" y="1874520"/>
-            <a:ext cx="11155680" cy="457200"/>
-          </a:xfrm>
-          <a:prstGeom prst="rect">
-            <a:avLst/>
-          </a:prstGeom>
-          <a:noFill/>
-          <a:ln/>
-        </p:spPr>
-        <p:txBody>
-          <a:bodyPr wrap="square" lIns="0" tIns="0" rIns="0" bIns="0" rtlCol="0" anchor="ctr"/>
-          <a:lstStyle/>
-          <a:p>
-            <a:pPr marL="0" indent="0">
-              <a:lnSpc>
-                <a:spcPct val="130000"/>
-              </a:lnSpc>
-              <a:buNone/>
-            </a:pPr>
-            <a:r>
-              <a:rPr lang="en-US" sz="1250" i="1" dirty="0">
-                <a:solidFill>
-                  <a:srgbClr val="333333"/>
-                </a:solidFill>
-                <a:latin typeface="Calibri" pitchFamily="34" charset="0"/>
-                <a:ea typeface="Calibri" pitchFamily="34" charset="-122"/>
-                <a:cs typeface="Calibri" pitchFamily="34" charset="-120"/>
-              </a:rPr>
-              <a:t>All services emit structured pino logs and expose Prometheus metrics. Two health probes back container orchestration.</a:t>
-            </a:r>
-            <a:endParaRPr lang="en-US" sz="1250" dirty="0"/>
-          </a:p>
-        </p:txBody>
-      </p:sp>
-      <p:sp>
-        <p:nvSpPr>
-          <p:cNvPr id="10" name="Shape 8"/>
-          <p:cNvSpPr/>
-          <p:nvPr/>
-        </p:nvSpPr>
-        <p:spPr>
-          <a:xfrm>
-            <a:off x="502920" y="2606040"/>
-            <a:ext cx="3703320" cy="0"/>
-          </a:xfrm>
-          <a:prstGeom prst="line">
-            <a:avLst/>
-          </a:prstGeom>
-          <a:noFill/>
-          <a:ln w="12700">
-            <a:solidFill>
-              <a:srgbClr val="1A2238"/>
-            </a:solidFill>
-            <a:prstDash val="solid"/>
-          </a:ln>
-        </p:spPr>
-        <p:txBody>
-          <a:bodyPr/>
-          <a:lstStyle/>
-          <a:p>
-            <a:endParaRPr lang="en-US"/>
-          </a:p>
-        </p:txBody>
-      </p:sp>
-      <p:sp>
-        <p:nvSpPr>
-          <p:cNvPr id="11" name="Text 9"/>
-          <p:cNvSpPr/>
-          <p:nvPr/>
-        </p:nvSpPr>
-        <p:spPr>
-          <a:xfrm>
-            <a:off x="502920" y="2697480"/>
-            <a:ext cx="3703320" cy="365760"/>
-          </a:xfrm>
-          <a:prstGeom prst="rect">
-            <a:avLst/>
-          </a:prstGeom>
-          <a:noFill/>
-          <a:ln/>
-        </p:spPr>
-        <p:txBody>
-          <a:bodyPr wrap="square" lIns="0" tIns="0" rIns="0" bIns="0" rtlCol="0" anchor="ctr"/>
-          <a:lstStyle/>
-          <a:p>
-            <a:pPr marL="0" indent="0">
-              <a:buNone/>
-            </a:pPr>
-            <a:r>
-              <a:rPr lang="en-US" sz="1600" dirty="0">
-                <a:solidFill>
-                  <a:srgbClr val="1A2238"/>
-                </a:solidFill>
-                <a:latin typeface="Cambria" pitchFamily="34" charset="0"/>
-                <a:ea typeface="Cambria" pitchFamily="34" charset="-122"/>
-                <a:cs typeface="Cambria" pitchFamily="34" charset="-120"/>
-              </a:rPr>
-              <a:t>(i)  Structured logs</a:t>
-            </a:r>
-            <a:endParaRPr lang="en-US" sz="1600" dirty="0"/>
-          </a:p>
-        </p:txBody>
-      </p:sp>
-      <p:sp>
-        <p:nvSpPr>
-          <p:cNvPr id="12" name="Text 10"/>
-          <p:cNvSpPr/>
-          <p:nvPr/>
-        </p:nvSpPr>
-        <p:spPr>
-          <a:xfrm>
-            <a:off x="502920" y="3108960"/>
-            <a:ext cx="3703320" cy="274320"/>
-          </a:xfrm>
-          <a:prstGeom prst="rect">
-            <a:avLst/>
-          </a:prstGeom>
-          <a:noFill/>
-          <a:ln/>
-        </p:spPr>
-        <p:txBody>
-          <a:bodyPr wrap="square" lIns="0" tIns="0" rIns="0" bIns="0" rtlCol="0" anchor="ctr"/>
-          <a:lstStyle/>
-          <a:p>
-            <a:pPr marL="0" indent="0">
-              <a:buNone/>
-            </a:pPr>
-            <a:r>
-              <a:rPr lang="en-US" sz="1100" i="1" dirty="0">
-                <a:solidFill>
-                  <a:srgbClr val="7A2E3B"/>
-                </a:solidFill>
-                <a:latin typeface="Calibri" pitchFamily="34" charset="0"/>
-                <a:ea typeface="Calibri" pitchFamily="34" charset="-122"/>
-                <a:cs typeface="Calibri" pitchFamily="34" charset="-120"/>
-              </a:rPr>
-              <a:t>pino · JSON · per-request</a:t>
-            </a:r>
-            <a:endParaRPr lang="en-US" sz="1100" dirty="0"/>
-          </a:p>
-        </p:txBody>
-      </p:sp>
-      <p:sp>
-        <p:nvSpPr>
-          <p:cNvPr id="13" name="Text 11"/>
-          <p:cNvSpPr/>
-          <p:nvPr/>
-        </p:nvSpPr>
-        <p:spPr>
-          <a:xfrm>
-            <a:off x="502920" y="3611880"/>
-            <a:ext cx="320040" cy="502920"/>
-          </a:xfrm>
-          <a:prstGeom prst="rect">
-            <a:avLst/>
-          </a:prstGeom>
-          <a:noFill/>
-          <a:ln/>
-        </p:spPr>
-        <p:txBody>
-          <a:bodyPr wrap="square" lIns="0" tIns="0" rIns="0" bIns="0" rtlCol="0" anchor="t"/>
-          <a:lstStyle/>
-          <a:p>
-            <a:pPr marL="0" indent="0">
-              <a:buNone/>
-            </a:pPr>
-            <a:r>
-              <a:rPr lang="en-US" sz="1100" i="1" dirty="0">
-                <a:solidFill>
-                  <a:srgbClr val="9CA3AF"/>
-                </a:solidFill>
-                <a:latin typeface="Calibri" pitchFamily="34" charset="0"/>
-                <a:ea typeface="Calibri" pitchFamily="34" charset="-122"/>
-                <a:cs typeface="Calibri" pitchFamily="34" charset="-120"/>
-              </a:rPr>
-              <a:t>1.</a:t>
-            </a:r>
-            <a:endParaRPr lang="en-US" sz="1100" dirty="0"/>
-          </a:p>
-        </p:txBody>
-      </p:sp>
-      <p:sp>
-        <p:nvSpPr>
-          <p:cNvPr id="14" name="Text 12"/>
-          <p:cNvSpPr/>
-          <p:nvPr/>
-        </p:nvSpPr>
-        <p:spPr>
-          <a:xfrm>
-            <a:off x="822960" y="3611880"/>
-            <a:ext cx="3337560" cy="502920"/>
-          </a:xfrm>
-          <a:prstGeom prst="rect">
-            <a:avLst/>
-          </a:prstGeom>
-          <a:noFill/>
-          <a:ln/>
-        </p:spPr>
-        <p:txBody>
-          <a:bodyPr wrap="square" lIns="0" tIns="0" rIns="0" bIns="0" rtlCol="0" anchor="t"/>
-          <a:lstStyle/>
-          <a:p>
-            <a:pPr marL="0" indent="0">
-              <a:lnSpc>
-                <a:spcPct val="130000"/>
-              </a:lnSpc>
-              <a:buNone/>
-            </a:pPr>
-            <a:r>
-              <a:rPr lang="en-US" sz="1100" dirty="0">
-                <a:solidFill>
-                  <a:srgbClr val="333333"/>
-                </a:solidFill>
-                <a:latin typeface="Calibri" pitchFamily="34" charset="0"/>
-                <a:ea typeface="Calibri" pitchFamily="34" charset="-122"/>
-                <a:cs typeface="Calibri" pitchFamily="34" charset="-120"/>
-              </a:rPr>
-              <a:t>service, requestId, sessionId, jobId, queue</a:t>
-            </a:r>
-            <a:endParaRPr lang="en-US" sz="1100" dirty="0"/>
-          </a:p>
-        </p:txBody>
-      </p:sp>
-      <p:sp>
-        <p:nvSpPr>
-          <p:cNvPr id="15" name="Text 13"/>
-          <p:cNvSpPr/>
-          <p:nvPr/>
-        </p:nvSpPr>
-        <p:spPr>
-          <a:xfrm>
-            <a:off x="502920" y="4206240"/>
-            <a:ext cx="320040" cy="502920"/>
-          </a:xfrm>
-          <a:prstGeom prst="rect">
-            <a:avLst/>
-          </a:prstGeom>
-          <a:noFill/>
-          <a:ln/>
-        </p:spPr>
-        <p:txBody>
-          <a:bodyPr wrap="square" lIns="0" tIns="0" rIns="0" bIns="0" rtlCol="0" anchor="t"/>
-          <a:lstStyle/>
-          <a:p>
-            <a:pPr marL="0" indent="0">
-              <a:buNone/>
-            </a:pPr>
-            <a:r>
-              <a:rPr lang="en-US" sz="1100" i="1" dirty="0">
-                <a:solidFill>
-                  <a:srgbClr val="9CA3AF"/>
-                </a:solidFill>
-                <a:latin typeface="Calibri" pitchFamily="34" charset="0"/>
-                <a:ea typeface="Calibri" pitchFamily="34" charset="-122"/>
-                <a:cs typeface="Calibri" pitchFamily="34" charset="-120"/>
-              </a:rPr>
-              <a:t>2.</a:t>
-            </a:r>
-            <a:endParaRPr lang="en-US" sz="1100" dirty="0"/>
-          </a:p>
-        </p:txBody>
-      </p:sp>
-      <p:sp>
-        <p:nvSpPr>
-          <p:cNvPr id="16" name="Text 14"/>
-          <p:cNvSpPr/>
-          <p:nvPr/>
-        </p:nvSpPr>
-        <p:spPr>
-          <a:xfrm>
-            <a:off x="822960" y="4206240"/>
-            <a:ext cx="3337560" cy="502920"/>
-          </a:xfrm>
-          <a:prstGeom prst="rect">
-            <a:avLst/>
-          </a:prstGeom>
-          <a:noFill/>
-          <a:ln/>
-        </p:spPr>
-        <p:txBody>
-          <a:bodyPr wrap="square" lIns="0" tIns="0" rIns="0" bIns="0" rtlCol="0" anchor="t"/>
-          <a:lstStyle/>
-          <a:p>
-            <a:pPr marL="0" indent="0">
-              <a:lnSpc>
-                <a:spcPct val="130000"/>
-              </a:lnSpc>
-              <a:buNone/>
-            </a:pPr>
-            <a:r>
-              <a:rPr lang="en-US" sz="1100" dirty="0">
-                <a:solidFill>
-                  <a:srgbClr val="333333"/>
-                </a:solidFill>
-                <a:latin typeface="Calibri" pitchFamily="34" charset="0"/>
-                <a:ea typeface="Calibri" pitchFamily="34" charset="-122"/>
-                <a:cs typeface="Calibri" pitchFamily="34" charset="-120"/>
-              </a:rPr>
-              <a:t>LOG_LEVEL configurable per environment</a:t>
-            </a:r>
-            <a:endParaRPr lang="en-US" sz="1100" dirty="0"/>
-          </a:p>
-        </p:txBody>
-      </p:sp>
-      <p:sp>
-        <p:nvSpPr>
-          <p:cNvPr id="17" name="Text 15"/>
-          <p:cNvSpPr/>
-          <p:nvPr/>
-        </p:nvSpPr>
-        <p:spPr>
-          <a:xfrm>
-            <a:off x="502920" y="4800600"/>
-            <a:ext cx="320040" cy="502920"/>
-          </a:xfrm>
-          <a:prstGeom prst="rect">
-            <a:avLst/>
-          </a:prstGeom>
-          <a:noFill/>
-          <a:ln/>
-        </p:spPr>
-        <p:txBody>
-          <a:bodyPr wrap="square" lIns="0" tIns="0" rIns="0" bIns="0" rtlCol="0" anchor="t"/>
-          <a:lstStyle/>
-          <a:p>
-            <a:pPr marL="0" indent="0">
-              <a:buNone/>
-            </a:pPr>
-            <a:r>
-              <a:rPr lang="en-US" sz="1100" i="1" dirty="0">
-                <a:solidFill>
-                  <a:srgbClr val="9CA3AF"/>
-                </a:solidFill>
-                <a:latin typeface="Calibri" pitchFamily="34" charset="0"/>
-                <a:ea typeface="Calibri" pitchFamily="34" charset="-122"/>
-                <a:cs typeface="Calibri" pitchFamily="34" charset="-120"/>
-              </a:rPr>
-              <a:t>3.</a:t>
-            </a:r>
-            <a:endParaRPr lang="en-US" sz="1100" dirty="0"/>
-          </a:p>
-        </p:txBody>
-      </p:sp>
-      <p:sp>
-        <p:nvSpPr>
-          <p:cNvPr id="18" name="Text 16"/>
-          <p:cNvSpPr/>
-          <p:nvPr/>
-        </p:nvSpPr>
-        <p:spPr>
-          <a:xfrm>
-            <a:off x="822960" y="4800600"/>
-            <a:ext cx="3337560" cy="502920"/>
-          </a:xfrm>
-          <a:prstGeom prst="rect">
-            <a:avLst/>
-          </a:prstGeom>
-          <a:noFill/>
-          <a:ln/>
-        </p:spPr>
-        <p:txBody>
-          <a:bodyPr wrap="square" lIns="0" tIns="0" rIns="0" bIns="0" rtlCol="0" anchor="t"/>
-          <a:lstStyle/>
-          <a:p>
-            <a:pPr marL="0" indent="0">
-              <a:lnSpc>
-                <a:spcPct val="130000"/>
-              </a:lnSpc>
-              <a:buNone/>
-            </a:pPr>
-            <a:r>
-              <a:rPr lang="en-US" sz="1100" dirty="0">
-                <a:solidFill>
-                  <a:srgbClr val="333333"/>
-                </a:solidFill>
-                <a:latin typeface="Calibri" pitchFamily="34" charset="0"/>
-                <a:ea typeface="Calibri" pitchFamily="34" charset="-122"/>
-                <a:cs typeface="Calibri" pitchFamily="34" charset="-120"/>
-              </a:rPr>
-              <a:t>Audit trail for every MCP remediation</a:t>
-            </a:r>
-            <a:endParaRPr lang="en-US" sz="1100" dirty="0"/>
-          </a:p>
-        </p:txBody>
-      </p:sp>
-      <p:sp>
-        <p:nvSpPr>
-          <p:cNvPr id="19" name="Shape 17"/>
-          <p:cNvSpPr/>
-          <p:nvPr/>
-        </p:nvSpPr>
-        <p:spPr>
-          <a:xfrm>
-            <a:off x="4407408" y="2606040"/>
-            <a:ext cx="3703320" cy="0"/>
-          </a:xfrm>
-          <a:prstGeom prst="line">
-            <a:avLst/>
-          </a:prstGeom>
-          <a:noFill/>
-          <a:ln w="12700">
-            <a:solidFill>
-              <a:srgbClr val="1A2238"/>
-            </a:solidFill>
-            <a:prstDash val="solid"/>
-          </a:ln>
-        </p:spPr>
-        <p:txBody>
-          <a:bodyPr/>
-          <a:lstStyle/>
-          <a:p>
-            <a:endParaRPr lang="en-US"/>
-          </a:p>
-        </p:txBody>
-      </p:sp>
-      <p:sp>
-        <p:nvSpPr>
-          <p:cNvPr id="20" name="Text 18"/>
-          <p:cNvSpPr/>
-          <p:nvPr/>
-        </p:nvSpPr>
-        <p:spPr>
-          <a:xfrm>
-            <a:off x="4407408" y="2697480"/>
-            <a:ext cx="3703320" cy="365760"/>
-          </a:xfrm>
-          <a:prstGeom prst="rect">
-            <a:avLst/>
-          </a:prstGeom>
-          <a:noFill/>
-          <a:ln/>
-        </p:spPr>
-        <p:txBody>
-          <a:bodyPr wrap="square" lIns="0" tIns="0" rIns="0" bIns="0" rtlCol="0" anchor="ctr"/>
-          <a:lstStyle/>
-          <a:p>
-            <a:pPr marL="0" indent="0">
-              <a:buNone/>
-            </a:pPr>
-            <a:r>
-              <a:rPr lang="en-US" sz="1600" dirty="0">
-                <a:solidFill>
-                  <a:srgbClr val="1A2238"/>
-                </a:solidFill>
-                <a:latin typeface="Cambria" pitchFamily="34" charset="0"/>
-                <a:ea typeface="Cambria" pitchFamily="34" charset="-122"/>
-                <a:cs typeface="Cambria" pitchFamily="34" charset="-120"/>
-              </a:rPr>
-              <a:t>(ii)  Metrics</a:t>
-            </a:r>
-            <a:endParaRPr lang="en-US" sz="1600" dirty="0"/>
-          </a:p>
-        </p:txBody>
-      </p:sp>
-      <p:sp>
-        <p:nvSpPr>
-          <p:cNvPr id="21" name="Text 19"/>
-          <p:cNvSpPr/>
-          <p:nvPr/>
-        </p:nvSpPr>
-        <p:spPr>
-          <a:xfrm>
-            <a:off x="4407408" y="3108960"/>
-            <a:ext cx="3703320" cy="274320"/>
-          </a:xfrm>
-          <a:prstGeom prst="rect">
-            <a:avLst/>
-          </a:prstGeom>
-          <a:noFill/>
-          <a:ln/>
-        </p:spPr>
-        <p:txBody>
-          <a:bodyPr wrap="square" lIns="0" tIns="0" rIns="0" bIns="0" rtlCol="0" anchor="ctr"/>
-          <a:lstStyle/>
-          <a:p>
-            <a:pPr marL="0" indent="0">
-              <a:buNone/>
-            </a:pPr>
-            <a:r>
-              <a:rPr lang="en-US" sz="1100" i="1" dirty="0">
-                <a:solidFill>
-                  <a:srgbClr val="7A2E3B"/>
-                </a:solidFill>
-                <a:latin typeface="Calibri" pitchFamily="34" charset="0"/>
-                <a:ea typeface="Calibri" pitchFamily="34" charset="-122"/>
-                <a:cs typeface="Calibri" pitchFamily="34" charset="-120"/>
-              </a:rPr>
-              <a:t>prom-client · 15 s scrape interval</a:t>
-            </a:r>
-            <a:endParaRPr lang="en-US" sz="1100" dirty="0"/>
-          </a:p>
-        </p:txBody>
-      </p:sp>
-      <p:sp>
-        <p:nvSpPr>
-          <p:cNvPr id="22" name="Text 20"/>
-          <p:cNvSpPr/>
-          <p:nvPr/>
-        </p:nvSpPr>
-        <p:spPr>
-          <a:xfrm>
-            <a:off x="4407408" y="3611880"/>
-            <a:ext cx="320040" cy="502920"/>
-          </a:xfrm>
-          <a:prstGeom prst="rect">
-            <a:avLst/>
-          </a:prstGeom>
-          <a:noFill/>
-          <a:ln/>
-        </p:spPr>
-        <p:txBody>
-          <a:bodyPr wrap="square" lIns="0" tIns="0" rIns="0" bIns="0" rtlCol="0" anchor="t"/>
-          <a:lstStyle/>
-          <a:p>
-            <a:pPr marL="0" indent="0">
-              <a:buNone/>
-            </a:pPr>
-            <a:r>
-              <a:rPr lang="en-US" sz="1100" i="1" dirty="0">
-                <a:solidFill>
-                  <a:srgbClr val="9CA3AF"/>
-                </a:solidFill>
-                <a:latin typeface="Calibri" pitchFamily="34" charset="0"/>
-                <a:ea typeface="Calibri" pitchFamily="34" charset="-122"/>
-                <a:cs typeface="Calibri" pitchFamily="34" charset="-120"/>
-              </a:rPr>
-              <a:t>1.</a:t>
-            </a:r>
-            <a:endParaRPr lang="en-US" sz="1100" dirty="0"/>
-          </a:p>
-        </p:txBody>
-      </p:sp>
-      <p:sp>
-        <p:nvSpPr>
-          <p:cNvPr id="23" name="Text 21"/>
-          <p:cNvSpPr/>
-          <p:nvPr/>
-        </p:nvSpPr>
-        <p:spPr>
-          <a:xfrm>
-            <a:off x="4727448" y="3611880"/>
-            <a:ext cx="3337560" cy="502920"/>
-          </a:xfrm>
-          <a:prstGeom prst="rect">
-            <a:avLst/>
-          </a:prstGeom>
-          <a:noFill/>
-          <a:ln/>
-        </p:spPr>
-        <p:txBody>
-          <a:bodyPr wrap="square" lIns="0" tIns="0" rIns="0" bIns="0" rtlCol="0" anchor="t"/>
-          <a:lstStyle/>
-          <a:p>
-            <a:pPr marL="0" indent="0">
-              <a:lnSpc>
-                <a:spcPct val="130000"/>
-              </a:lnSpc>
-              <a:buNone/>
-            </a:pPr>
-            <a:r>
-              <a:rPr lang="en-US" sz="1100" dirty="0">
-                <a:solidFill>
-                  <a:srgbClr val="333333"/>
-                </a:solidFill>
-                <a:latin typeface="Calibri" pitchFamily="34" charset="0"/>
-                <a:ea typeface="Calibri" pitchFamily="34" charset="-122"/>
-                <a:cs typeface="Calibri" pitchFamily="34" charset="-120"/>
-              </a:rPr>
-              <a:t>http_request_duration_seconds (histogram)</a:t>
-            </a:r>
-            <a:endParaRPr lang="en-US" sz="1100" dirty="0"/>
-          </a:p>
-        </p:txBody>
-      </p:sp>
-      <p:sp>
-        <p:nvSpPr>
-          <p:cNvPr id="24" name="Text 22"/>
-          <p:cNvSpPr/>
-          <p:nvPr/>
-        </p:nvSpPr>
-        <p:spPr>
-          <a:xfrm>
-            <a:off x="4407408" y="4206240"/>
-            <a:ext cx="320040" cy="502920"/>
-          </a:xfrm>
-          <a:prstGeom prst="rect">
-            <a:avLst/>
-          </a:prstGeom>
-          <a:noFill/>
-          <a:ln/>
-        </p:spPr>
-        <p:txBody>
-          <a:bodyPr wrap="square" lIns="0" tIns="0" rIns="0" bIns="0" rtlCol="0" anchor="t"/>
-          <a:lstStyle/>
-          <a:p>
-            <a:pPr marL="0" indent="0">
-              <a:buNone/>
-            </a:pPr>
-            <a:r>
-              <a:rPr lang="en-US" sz="1100" i="1" dirty="0">
-                <a:solidFill>
-                  <a:srgbClr val="9CA3AF"/>
-                </a:solidFill>
-                <a:latin typeface="Calibri" pitchFamily="34" charset="0"/>
-                <a:ea typeface="Calibri" pitchFamily="34" charset="-122"/>
-                <a:cs typeface="Calibri" pitchFamily="34" charset="-120"/>
-              </a:rPr>
-              <a:t>2.</a:t>
-            </a:r>
-            <a:endParaRPr lang="en-US" sz="1100" dirty="0"/>
-          </a:p>
-        </p:txBody>
-      </p:sp>
-      <p:sp>
-        <p:nvSpPr>
-          <p:cNvPr id="25" name="Text 23"/>
-          <p:cNvSpPr/>
-          <p:nvPr/>
-        </p:nvSpPr>
-        <p:spPr>
-          <a:xfrm>
-            <a:off x="4727448" y="4206240"/>
-            <a:ext cx="3337560" cy="502920"/>
-          </a:xfrm>
-          <a:prstGeom prst="rect">
-            <a:avLst/>
-          </a:prstGeom>
-          <a:noFill/>
-          <a:ln/>
-        </p:spPr>
-        <p:txBody>
-          <a:bodyPr wrap="square" lIns="0" tIns="0" rIns="0" bIns="0" rtlCol="0" anchor="t"/>
-          <a:lstStyle/>
-          <a:p>
-            <a:pPr marL="0" indent="0">
-              <a:lnSpc>
-                <a:spcPct val="130000"/>
-              </a:lnSpc>
-              <a:buNone/>
-            </a:pPr>
-            <a:r>
-              <a:rPr lang="en-US" sz="1100" dirty="0">
-                <a:solidFill>
-                  <a:srgbClr val="333333"/>
-                </a:solidFill>
-                <a:latin typeface="Calibri" pitchFamily="34" charset="0"/>
-                <a:ea typeface="Calibri" pitchFamily="34" charset="-122"/>
-                <a:cs typeface="Calibri" pitchFamily="34" charset="-120"/>
-              </a:rPr>
-              <a:t>groq_circuit_breaker_state (gauge)</a:t>
-            </a:r>
-            <a:endParaRPr lang="en-US" sz="1100" dirty="0"/>
-          </a:p>
-        </p:txBody>
-      </p:sp>
-      <p:sp>
-        <p:nvSpPr>
-          <p:cNvPr id="26" name="Text 24"/>
-          <p:cNvSpPr/>
-          <p:nvPr/>
-        </p:nvSpPr>
-        <p:spPr>
-          <a:xfrm>
-            <a:off x="4407408" y="4800600"/>
-            <a:ext cx="320040" cy="502920"/>
-          </a:xfrm>
-          <a:prstGeom prst="rect">
-            <a:avLst/>
-          </a:prstGeom>
-          <a:noFill/>
-          <a:ln/>
-        </p:spPr>
-        <p:txBody>
-          <a:bodyPr wrap="square" lIns="0" tIns="0" rIns="0" bIns="0" rtlCol="0" anchor="t"/>
-          <a:lstStyle/>
-          <a:p>
-            <a:pPr marL="0" indent="0">
-              <a:buNone/>
-            </a:pPr>
-            <a:r>
-              <a:rPr lang="en-US" sz="1100" i="1" dirty="0">
-                <a:solidFill>
-                  <a:srgbClr val="9CA3AF"/>
-                </a:solidFill>
-                <a:latin typeface="Calibri" pitchFamily="34" charset="0"/>
-                <a:ea typeface="Calibri" pitchFamily="34" charset="-122"/>
-                <a:cs typeface="Calibri" pitchFamily="34" charset="-120"/>
-              </a:rPr>
-              <a:t>3.</a:t>
-            </a:r>
-            <a:endParaRPr lang="en-US" sz="1100" dirty="0"/>
-          </a:p>
-        </p:txBody>
-      </p:sp>
-      <p:sp>
-        <p:nvSpPr>
-          <p:cNvPr id="27" name="Text 25"/>
-          <p:cNvSpPr/>
-          <p:nvPr/>
-        </p:nvSpPr>
-        <p:spPr>
-          <a:xfrm>
-            <a:off x="4727448" y="4800600"/>
-            <a:ext cx="3337560" cy="502920"/>
-          </a:xfrm>
-          <a:prstGeom prst="rect">
-            <a:avLst/>
-          </a:prstGeom>
-          <a:noFill/>
-          <a:ln/>
-        </p:spPr>
-        <p:txBody>
-          <a:bodyPr wrap="square" lIns="0" tIns="0" rIns="0" bIns="0" rtlCol="0" anchor="t"/>
-          <a:lstStyle/>
-          <a:p>
-            <a:pPr marL="0" indent="0">
-              <a:lnSpc>
-                <a:spcPct val="130000"/>
-              </a:lnSpc>
-              <a:buNone/>
-            </a:pPr>
-            <a:r>
-              <a:rPr lang="en-US" sz="1100" dirty="0">
-                <a:solidFill>
-                  <a:srgbClr val="333333"/>
-                </a:solidFill>
-                <a:latin typeface="Calibri" pitchFamily="34" charset="0"/>
-                <a:ea typeface="Calibri" pitchFamily="34" charset="-122"/>
-                <a:cs typeface="Calibri" pitchFamily="34" charset="-120"/>
-              </a:rPr>
-              <a:t>queue_depth_total, jobs_dead_letter_total</a:t>
-            </a:r>
-            <a:endParaRPr lang="en-US" sz="1100" dirty="0"/>
-          </a:p>
-        </p:txBody>
-      </p:sp>
-      <p:sp>
-        <p:nvSpPr>
-          <p:cNvPr id="28" name="Shape 26"/>
-          <p:cNvSpPr/>
-          <p:nvPr/>
-        </p:nvSpPr>
-        <p:spPr>
-          <a:xfrm>
-            <a:off x="8311896" y="2606040"/>
-            <a:ext cx="3703320" cy="0"/>
-          </a:xfrm>
-          <a:prstGeom prst="line">
-            <a:avLst/>
-          </a:prstGeom>
-          <a:noFill/>
-          <a:ln w="12700">
-            <a:solidFill>
-              <a:srgbClr val="1A2238"/>
-            </a:solidFill>
-            <a:prstDash val="solid"/>
-          </a:ln>
-        </p:spPr>
-        <p:txBody>
-          <a:bodyPr/>
-          <a:lstStyle/>
-          <a:p>
-            <a:endParaRPr lang="en-US"/>
-          </a:p>
-        </p:txBody>
-      </p:sp>
-      <p:sp>
-        <p:nvSpPr>
-          <p:cNvPr id="29" name="Text 27"/>
-          <p:cNvSpPr/>
-          <p:nvPr/>
-        </p:nvSpPr>
-        <p:spPr>
-          <a:xfrm>
-            <a:off x="8311896" y="2697480"/>
-            <a:ext cx="3703320" cy="365760"/>
-          </a:xfrm>
-          <a:prstGeom prst="rect">
-            <a:avLst/>
-          </a:prstGeom>
-          <a:noFill/>
-          <a:ln/>
-        </p:spPr>
-        <p:txBody>
-          <a:bodyPr wrap="square" lIns="0" tIns="0" rIns="0" bIns="0" rtlCol="0" anchor="ctr"/>
-          <a:lstStyle/>
-          <a:p>
-            <a:pPr marL="0" indent="0">
-              <a:buNone/>
-            </a:pPr>
-            <a:r>
-              <a:rPr lang="en-US" sz="1600" dirty="0">
-                <a:solidFill>
-                  <a:srgbClr val="1A2238"/>
-                </a:solidFill>
-                <a:latin typeface="Cambria" pitchFamily="34" charset="0"/>
-                <a:ea typeface="Cambria" pitchFamily="34" charset="-122"/>
-                <a:cs typeface="Cambria" pitchFamily="34" charset="-120"/>
-              </a:rPr>
-              <a:t>(iii)  Health probes</a:t>
-            </a:r>
-            <a:endParaRPr lang="en-US" sz="1600" dirty="0"/>
-          </a:p>
-        </p:txBody>
-      </p:sp>
-      <p:sp>
-        <p:nvSpPr>
-          <p:cNvPr id="30" name="Text 28"/>
-          <p:cNvSpPr/>
-          <p:nvPr/>
-        </p:nvSpPr>
-        <p:spPr>
-          <a:xfrm>
-            <a:off x="8311896" y="3108960"/>
-            <a:ext cx="3703320" cy="274320"/>
-          </a:xfrm>
-          <a:prstGeom prst="rect">
-            <a:avLst/>
-          </a:prstGeom>
-          <a:noFill/>
-          <a:ln/>
-        </p:spPr>
-        <p:txBody>
-          <a:bodyPr wrap="square" lIns="0" tIns="0" rIns="0" bIns="0" rtlCol="0" anchor="ctr"/>
-          <a:lstStyle/>
-          <a:p>
-            <a:pPr marL="0" indent="0">
-              <a:buNone/>
-            </a:pPr>
-            <a:r>
-              <a:rPr lang="en-US" sz="1100" i="1" dirty="0">
-                <a:solidFill>
-                  <a:srgbClr val="7A2E3B"/>
-                </a:solidFill>
-                <a:latin typeface="Calibri" pitchFamily="34" charset="0"/>
-                <a:ea typeface="Calibri" pitchFamily="34" charset="-122"/>
-                <a:cs typeface="Calibri" pitchFamily="34" charset="-120"/>
-              </a:rPr>
-              <a:t>/livez · /readyz</a:t>
-            </a:r>
-            <a:endParaRPr lang="en-US" sz="1100" dirty="0"/>
-          </a:p>
-        </p:txBody>
-      </p:sp>
-      <p:sp>
-        <p:nvSpPr>
-          <p:cNvPr id="31" name="Text 29"/>
-          <p:cNvSpPr/>
-          <p:nvPr/>
-        </p:nvSpPr>
-        <p:spPr>
-          <a:xfrm>
-            <a:off x="8311896" y="3611880"/>
-            <a:ext cx="320040" cy="502920"/>
-          </a:xfrm>
-          <a:prstGeom prst="rect">
-            <a:avLst/>
-          </a:prstGeom>
-          <a:noFill/>
-          <a:ln/>
-        </p:spPr>
-        <p:txBody>
-          <a:bodyPr wrap="square" lIns="0" tIns="0" rIns="0" bIns="0" rtlCol="0" anchor="t"/>
-          <a:lstStyle/>
-          <a:p>
-            <a:pPr marL="0" indent="0">
-              <a:buNone/>
-            </a:pPr>
-            <a:r>
-              <a:rPr lang="en-US" sz="1100" i="1" dirty="0">
-                <a:solidFill>
-                  <a:srgbClr val="9CA3AF"/>
-                </a:solidFill>
-                <a:latin typeface="Calibri" pitchFamily="34" charset="0"/>
-                <a:ea typeface="Calibri" pitchFamily="34" charset="-122"/>
-                <a:cs typeface="Calibri" pitchFamily="34" charset="-120"/>
-              </a:rPr>
-              <a:t>1.</a:t>
-            </a:r>
-            <a:endParaRPr lang="en-US" sz="1100" dirty="0"/>
-          </a:p>
-        </p:txBody>
-      </p:sp>
-      <p:sp>
-        <p:nvSpPr>
-          <p:cNvPr id="32" name="Text 30"/>
-          <p:cNvSpPr/>
-          <p:nvPr/>
-        </p:nvSpPr>
-        <p:spPr>
-          <a:xfrm>
-            <a:off x="8631936" y="3611880"/>
-            <a:ext cx="3337560" cy="502920"/>
-          </a:xfrm>
-          <a:prstGeom prst="rect">
-            <a:avLst/>
-          </a:prstGeom>
-          <a:noFill/>
-          <a:ln/>
-        </p:spPr>
-        <p:txBody>
-          <a:bodyPr wrap="square" lIns="0" tIns="0" rIns="0" bIns="0" rtlCol="0" anchor="t"/>
-          <a:lstStyle/>
-          <a:p>
-            <a:pPr marL="0" indent="0">
-              <a:lnSpc>
-                <a:spcPct val="130000"/>
-              </a:lnSpc>
-              <a:buNone/>
-            </a:pPr>
-            <a:r>
-              <a:rPr lang="en-US" sz="1100" dirty="0">
-                <a:solidFill>
-                  <a:srgbClr val="333333"/>
-                </a:solidFill>
-                <a:latin typeface="Calibri" pitchFamily="34" charset="0"/>
-                <a:ea typeface="Calibri" pitchFamily="34" charset="-122"/>
-                <a:cs typeface="Calibri" pitchFamily="34" charset="-120"/>
-              </a:rPr>
-              <a:t>/livez returns 200 for orchestrator liveness</a:t>
-            </a:r>
-            <a:endParaRPr lang="en-US" sz="1100" dirty="0"/>
-          </a:p>
-        </p:txBody>
-      </p:sp>
-      <p:sp>
-        <p:nvSpPr>
-          <p:cNvPr id="33" name="Text 31"/>
-          <p:cNvSpPr/>
-          <p:nvPr/>
-        </p:nvSpPr>
-        <p:spPr>
-          <a:xfrm>
-            <a:off x="8311896" y="4206240"/>
-            <a:ext cx="320040" cy="502920"/>
-          </a:xfrm>
-          <a:prstGeom prst="rect">
-            <a:avLst/>
-          </a:prstGeom>
-          <a:noFill/>
-          <a:ln/>
-        </p:spPr>
-        <p:txBody>
-          <a:bodyPr wrap="square" lIns="0" tIns="0" rIns="0" bIns="0" rtlCol="0" anchor="t"/>
-          <a:lstStyle/>
-          <a:p>
-            <a:pPr marL="0" indent="0">
-              <a:buNone/>
-            </a:pPr>
-            <a:r>
-              <a:rPr lang="en-US" sz="1100" i="1" dirty="0">
-                <a:solidFill>
-                  <a:srgbClr val="9CA3AF"/>
-                </a:solidFill>
-                <a:latin typeface="Calibri" pitchFamily="34" charset="0"/>
-                <a:ea typeface="Calibri" pitchFamily="34" charset="-122"/>
-                <a:cs typeface="Calibri" pitchFamily="34" charset="-120"/>
-              </a:rPr>
-              <a:t>2.</a:t>
-            </a:r>
-            <a:endParaRPr lang="en-US" sz="1100" dirty="0"/>
-          </a:p>
-        </p:txBody>
-      </p:sp>
-      <p:sp>
-        <p:nvSpPr>
-          <p:cNvPr id="34" name="Text 32"/>
-          <p:cNvSpPr/>
-          <p:nvPr/>
-        </p:nvSpPr>
-        <p:spPr>
-          <a:xfrm>
-            <a:off x="8631936" y="4206240"/>
-            <a:ext cx="3337560" cy="502920"/>
-          </a:xfrm>
-          <a:prstGeom prst="rect">
-            <a:avLst/>
-          </a:prstGeom>
-          <a:noFill/>
-          <a:ln/>
-        </p:spPr>
-        <p:txBody>
-          <a:bodyPr wrap="square" lIns="0" tIns="0" rIns="0" bIns="0" rtlCol="0" anchor="t"/>
-          <a:lstStyle/>
-          <a:p>
-            <a:pPr marL="0" indent="0">
-              <a:lnSpc>
-                <a:spcPct val="130000"/>
-              </a:lnSpc>
-              <a:buNone/>
-            </a:pPr>
-            <a:r>
-              <a:rPr lang="en-US" sz="1100" dirty="0">
-                <a:solidFill>
-                  <a:srgbClr val="333333"/>
-                </a:solidFill>
-                <a:latin typeface="Calibri" pitchFamily="34" charset="0"/>
-                <a:ea typeface="Calibri" pitchFamily="34" charset="-122"/>
-                <a:cs typeface="Calibri" pitchFamily="34" charset="-120"/>
-              </a:rPr>
-              <a:t>/readyz pings Redis, Supabase and Groq (2 s)</a:t>
-            </a:r>
-            <a:endParaRPr lang="en-US" sz="1100" dirty="0"/>
-          </a:p>
-        </p:txBody>
-      </p:sp>
-      <p:sp>
-        <p:nvSpPr>
-          <p:cNvPr id="35" name="Text 33"/>
-          <p:cNvSpPr/>
-          <p:nvPr/>
-        </p:nvSpPr>
-        <p:spPr>
-          <a:xfrm>
-            <a:off x="8311896" y="4800600"/>
-            <a:ext cx="320040" cy="502920"/>
-          </a:xfrm>
-          <a:prstGeom prst="rect">
-            <a:avLst/>
-          </a:prstGeom>
-          <a:noFill/>
-          <a:ln/>
-        </p:spPr>
-        <p:txBody>
-          <a:bodyPr wrap="square" lIns="0" tIns="0" rIns="0" bIns="0" rtlCol="0" anchor="t"/>
-          <a:lstStyle/>
-          <a:p>
-            <a:pPr marL="0" indent="0">
-              <a:buNone/>
-            </a:pPr>
-            <a:r>
-              <a:rPr lang="en-US" sz="1100" i="1" dirty="0">
-                <a:solidFill>
-                  <a:srgbClr val="9CA3AF"/>
-                </a:solidFill>
-                <a:latin typeface="Calibri" pitchFamily="34" charset="0"/>
-                <a:ea typeface="Calibri" pitchFamily="34" charset="-122"/>
-                <a:cs typeface="Calibri" pitchFamily="34" charset="-120"/>
-              </a:rPr>
-              <a:t>3.</a:t>
-            </a:r>
-            <a:endParaRPr lang="en-US" sz="1100" dirty="0"/>
-          </a:p>
-        </p:txBody>
-      </p:sp>
-      <p:sp>
-        <p:nvSpPr>
-          <p:cNvPr id="36" name="Text 34"/>
-          <p:cNvSpPr/>
-          <p:nvPr/>
-        </p:nvSpPr>
-        <p:spPr>
-          <a:xfrm>
-            <a:off x="8631936" y="4800600"/>
-            <a:ext cx="3337560" cy="502920"/>
-          </a:xfrm>
-          <a:prstGeom prst="rect">
-            <a:avLst/>
-          </a:prstGeom>
-          <a:noFill/>
-          <a:ln/>
-        </p:spPr>
-        <p:txBody>
-          <a:bodyPr wrap="square" lIns="0" tIns="0" rIns="0" bIns="0" rtlCol="0" anchor="t"/>
-          <a:lstStyle/>
-          <a:p>
-            <a:pPr marL="0" indent="0">
-              <a:lnSpc>
-                <a:spcPct val="130000"/>
-              </a:lnSpc>
-              <a:buNone/>
-            </a:pPr>
-            <a:r>
-              <a:rPr lang="en-US" sz="1100" dirty="0">
-                <a:solidFill>
-                  <a:srgbClr val="333333"/>
-                </a:solidFill>
-                <a:latin typeface="Calibri" pitchFamily="34" charset="0"/>
-                <a:ea typeface="Calibri" pitchFamily="34" charset="-122"/>
-                <a:cs typeface="Calibri" pitchFamily="34" charset="-120"/>
-              </a:rPr>
-              <a:t>503 names the failing dependency in the body</a:t>
-            </a:r>
-            <a:endParaRPr lang="en-US" sz="1100" dirty="0"/>
-          </a:p>
-        </p:txBody>
-      </p:sp>
-      <p:sp>
-        <p:nvSpPr>
-          <p:cNvPr id="37" name="Text 35"/>
-          <p:cNvSpPr/>
-          <p:nvPr/>
-        </p:nvSpPr>
-        <p:spPr>
-          <a:xfrm>
-            <a:off x="502920" y="5989320"/>
-            <a:ext cx="11155680" cy="365760"/>
-          </a:xfrm>
-          <a:prstGeom prst="rect">
-            <a:avLst/>
-          </a:prstGeom>
-          <a:noFill/>
-          <a:ln/>
-        </p:spPr>
-        <p:txBody>
-          <a:bodyPr wrap="square" lIns="0" tIns="0" rIns="0" bIns="0" rtlCol="0" anchor="ctr"/>
-          <a:lstStyle/>
-          <a:p>
-            <a:pPr marL="0" indent="0" algn="ctr">
-              <a:buNone/>
-            </a:pPr>
-            <a:r>
-              <a:rPr lang="en-US" sz="1000" i="1" dirty="0">
-                <a:solidFill>
-                  <a:srgbClr val="6B7280"/>
-                </a:solidFill>
-                <a:latin typeface="Calibri" pitchFamily="34" charset="0"/>
-                <a:ea typeface="Calibri" pitchFamily="34" charset="-122"/>
-                <a:cs typeface="Calibri" pitchFamily="34" charset="-120"/>
-              </a:rPr>
-              <a:t>A Grafana dashboard provisioned from docker/grafana/dashboards/edge-coach.json is auto-loaded at startup. Bull Board exposes the DLQ at :3002/queues.</a:t>
-            </a:r>
-            <a:endParaRPr lang="en-US" sz="1000" dirty="0"/>
           </a:p>
         </p:txBody>
       </p:sp>
